--- a/docs/pptx/auc3/jx-auc3-linsubhr-ratio-hosp-immune-other.pptx
+++ b/docs/pptx/auc3/jx-auc3-linsubhr-ratio-hosp-immune-other.pptx
@@ -2271,7 +2271,7 @@
           </p:nvSpPr>
           <p:spPr>
             <a:xfrm>
-              <a:off x="817517" y="5114368"/>
+              <a:off x="817517" y="5142518"/>
               <a:ext cx="7799693" cy="0"/>
             </a:xfrm>
             <a:custGeom>
@@ -2314,7 +2314,7 @@
           </p:nvSpPr>
           <p:spPr>
             <a:xfrm>
-              <a:off x="817517" y="4244691"/>
+              <a:off x="817517" y="4313054"/>
               <a:ext cx="7799693" cy="0"/>
             </a:xfrm>
             <a:custGeom>
@@ -2357,7 +2357,7 @@
           </p:nvSpPr>
           <p:spPr>
             <a:xfrm>
-              <a:off x="817517" y="3375014"/>
+              <a:off x="817517" y="3483591"/>
               <a:ext cx="7799693" cy="0"/>
             </a:xfrm>
             <a:custGeom>
@@ -2400,7 +2400,7 @@
           </p:nvSpPr>
           <p:spPr>
             <a:xfrm>
-              <a:off x="817517" y="2505337"/>
+              <a:off x="817517" y="2654127"/>
               <a:ext cx="7799693" cy="0"/>
             </a:xfrm>
             <a:custGeom>
@@ -2443,15 +2443,15 @@
           </p:nvSpPr>
           <p:spPr>
             <a:xfrm>
-              <a:off x="1615213" y="1896563"/>
-              <a:ext cx="0" cy="3826579"/>
+              <a:off x="1615213" y="2073503"/>
+              <a:ext cx="0" cy="3649639"/>
             </a:xfrm>
             <a:custGeom>
               <a:avLst/>
               <a:pathLst>
-                <a:path w="0" h="3826579">
+                <a:path w="0" h="3649639">
                   <a:moveTo>
-                    <a:pt x="0" y="3826579"/>
+                    <a:pt x="0" y="3649639"/>
                   </a:moveTo>
                   <a:lnTo>
                     <a:pt x="0" y="0"/>
@@ -2486,15 +2486,15 @@
           </p:nvSpPr>
           <p:spPr>
             <a:xfrm>
-              <a:off x="3387871" y="1896563"/>
-              <a:ext cx="0" cy="3826579"/>
+              <a:off x="3387871" y="2073503"/>
+              <a:ext cx="0" cy="3649639"/>
             </a:xfrm>
             <a:custGeom>
               <a:avLst/>
               <a:pathLst>
-                <a:path w="0" h="3826579">
+                <a:path w="0" h="3649639">
                   <a:moveTo>
-                    <a:pt x="0" y="3826579"/>
+                    <a:pt x="0" y="3649639"/>
                   </a:moveTo>
                   <a:lnTo>
                     <a:pt x="0" y="0"/>
@@ -2529,15 +2529,15 @@
           </p:nvSpPr>
           <p:spPr>
             <a:xfrm>
-              <a:off x="5160528" y="1896563"/>
-              <a:ext cx="0" cy="3826579"/>
+              <a:off x="5160528" y="2073503"/>
+              <a:ext cx="0" cy="3649639"/>
             </a:xfrm>
             <a:custGeom>
               <a:avLst/>
               <a:pathLst>
-                <a:path w="0" h="3826579">
+                <a:path w="0" h="3649639">
                   <a:moveTo>
-                    <a:pt x="0" y="3826579"/>
+                    <a:pt x="0" y="3649639"/>
                   </a:moveTo>
                   <a:lnTo>
                     <a:pt x="0" y="0"/>
@@ -2572,15 +2572,15 @@
           </p:nvSpPr>
           <p:spPr>
             <a:xfrm>
-              <a:off x="6933186" y="1896563"/>
-              <a:ext cx="0" cy="3826579"/>
+              <a:off x="6933186" y="2073503"/>
+              <a:ext cx="0" cy="3649639"/>
             </a:xfrm>
             <a:custGeom>
               <a:avLst/>
               <a:pathLst>
-                <a:path w="0" h="3826579">
+                <a:path w="0" h="3649639">
                   <a:moveTo>
-                    <a:pt x="0" y="3826579"/>
+                    <a:pt x="0" y="3649639"/>
                   </a:moveTo>
                   <a:lnTo>
                     <a:pt x="0" y="0"/>
@@ -2615,7 +2615,7 @@
           </p:nvSpPr>
           <p:spPr>
             <a:xfrm>
-              <a:off x="817517" y="5549207"/>
+              <a:off x="817517" y="5557249"/>
               <a:ext cx="7799693" cy="0"/>
             </a:xfrm>
             <a:custGeom>
@@ -2658,7 +2658,7 @@
           </p:nvSpPr>
           <p:spPr>
             <a:xfrm>
-              <a:off x="817517" y="4679530"/>
+              <a:off x="817517" y="4727786"/>
               <a:ext cx="7799693" cy="0"/>
             </a:xfrm>
             <a:custGeom>
@@ -2701,7 +2701,7 @@
           </p:nvSpPr>
           <p:spPr>
             <a:xfrm>
-              <a:off x="817517" y="3809853"/>
+              <a:off x="817517" y="3898322"/>
               <a:ext cx="7799693" cy="0"/>
             </a:xfrm>
             <a:custGeom>
@@ -2744,7 +2744,7 @@
           </p:nvSpPr>
           <p:spPr>
             <a:xfrm>
-              <a:off x="817517" y="2940175"/>
+              <a:off x="817517" y="3068859"/>
               <a:ext cx="7799693" cy="0"/>
             </a:xfrm>
             <a:custGeom>
@@ -2787,7 +2787,7 @@
           </p:nvSpPr>
           <p:spPr>
             <a:xfrm>
-              <a:off x="817517" y="2070498"/>
+              <a:off x="817517" y="2239395"/>
               <a:ext cx="7799693" cy="0"/>
             </a:xfrm>
             <a:custGeom>
@@ -2830,15 +2830,15 @@
           </p:nvSpPr>
           <p:spPr>
             <a:xfrm>
-              <a:off x="2501542" y="1896563"/>
-              <a:ext cx="0" cy="3826579"/>
+              <a:off x="2501542" y="2073503"/>
+              <a:ext cx="0" cy="3649639"/>
             </a:xfrm>
             <a:custGeom>
               <a:avLst/>
               <a:pathLst>
-                <a:path w="0" h="3826579">
+                <a:path w="0" h="3649639">
                   <a:moveTo>
-                    <a:pt x="0" y="3826579"/>
+                    <a:pt x="0" y="3649639"/>
                   </a:moveTo>
                   <a:lnTo>
                     <a:pt x="0" y="0"/>
@@ -2873,15 +2873,15 @@
           </p:nvSpPr>
           <p:spPr>
             <a:xfrm>
-              <a:off x="4274200" y="1896563"/>
-              <a:ext cx="0" cy="3826579"/>
+              <a:off x="4274200" y="2073503"/>
+              <a:ext cx="0" cy="3649639"/>
             </a:xfrm>
             <a:custGeom>
               <a:avLst/>
               <a:pathLst>
-                <a:path w="0" h="3826579">
+                <a:path w="0" h="3649639">
                   <a:moveTo>
-                    <a:pt x="0" y="3826579"/>
+                    <a:pt x="0" y="3649639"/>
                   </a:moveTo>
                   <a:lnTo>
                     <a:pt x="0" y="0"/>
@@ -2916,15 +2916,15 @@
           </p:nvSpPr>
           <p:spPr>
             <a:xfrm>
-              <a:off x="6046857" y="1896563"/>
-              <a:ext cx="0" cy="3826579"/>
+              <a:off x="6046857" y="2073503"/>
+              <a:ext cx="0" cy="3649639"/>
             </a:xfrm>
             <a:custGeom>
               <a:avLst/>
               <a:pathLst>
-                <a:path w="0" h="3826579">
+                <a:path w="0" h="3649639">
                   <a:moveTo>
-                    <a:pt x="0" y="3826579"/>
+                    <a:pt x="0" y="3649639"/>
                   </a:moveTo>
                   <a:lnTo>
                     <a:pt x="0" y="0"/>
@@ -2959,15 +2959,15 @@
           </p:nvSpPr>
           <p:spPr>
             <a:xfrm>
-              <a:off x="7819515" y="1896563"/>
-              <a:ext cx="0" cy="3826579"/>
+              <a:off x="7819515" y="2073503"/>
+              <a:ext cx="0" cy="3649639"/>
             </a:xfrm>
             <a:custGeom>
               <a:avLst/>
               <a:pathLst>
-                <a:path w="0" h="3826579">
+                <a:path w="0" h="3649639">
                   <a:moveTo>
-                    <a:pt x="0" y="3826579"/>
+                    <a:pt x="0" y="3649639"/>
                   </a:moveTo>
                   <a:lnTo>
                     <a:pt x="0" y="0"/>
@@ -3002,594 +3002,594 @@
           </p:nvSpPr>
           <p:spPr>
             <a:xfrm>
-              <a:off x="817517" y="2177810"/>
-              <a:ext cx="7392041" cy="3209323"/>
+              <a:off x="817517" y="2341744"/>
+              <a:ext cx="7392041" cy="3060925"/>
             </a:xfrm>
             <a:custGeom>
               <a:avLst/>
               <a:pathLst>
-                <a:path w="7392041" h="3209323">
+                <a:path w="7392041" h="3060925">
                   <a:moveTo>
                     <a:pt x="0" y="0"/>
                   </a:moveTo>
                   <a:lnTo>
-                    <a:pt x="53901" y="74138"/>
-                  </a:lnTo>
-                  <a:lnTo>
-                    <a:pt x="131145" y="177065"/>
-                  </a:lnTo>
-                  <a:lnTo>
-                    <a:pt x="208389" y="276780"/>
-                  </a:lnTo>
-                  <a:lnTo>
-                    <a:pt x="285632" y="373381"/>
-                  </a:lnTo>
-                  <a:lnTo>
-                    <a:pt x="362876" y="466967"/>
-                  </a:lnTo>
-                  <a:lnTo>
-                    <a:pt x="440119" y="557632"/>
-                  </a:lnTo>
-                  <a:lnTo>
-                    <a:pt x="517363" y="645467"/>
-                  </a:lnTo>
-                  <a:lnTo>
-                    <a:pt x="594606" y="730559"/>
-                  </a:lnTo>
-                  <a:lnTo>
-                    <a:pt x="671850" y="812996"/>
-                  </a:lnTo>
-                  <a:lnTo>
-                    <a:pt x="749094" y="892859"/>
-                  </a:lnTo>
-                  <a:lnTo>
-                    <a:pt x="826337" y="970229"/>
-                  </a:lnTo>
-                  <a:lnTo>
-                    <a:pt x="903581" y="1045184"/>
-                  </a:lnTo>
-                  <a:lnTo>
-                    <a:pt x="980824" y="1117799"/>
-                  </a:lnTo>
-                  <a:lnTo>
-                    <a:pt x="1058068" y="1188147"/>
-                  </a:lnTo>
-                  <a:lnTo>
-                    <a:pt x="1135311" y="1256299"/>
-                  </a:lnTo>
-                  <a:lnTo>
-                    <a:pt x="1212555" y="1322324"/>
-                  </a:lnTo>
-                  <a:lnTo>
-                    <a:pt x="1289799" y="1386288"/>
-                  </a:lnTo>
-                  <a:lnTo>
-                    <a:pt x="1367042" y="1448255"/>
-                  </a:lnTo>
-                  <a:lnTo>
-                    <a:pt x="1444286" y="1508288"/>
-                  </a:lnTo>
-                  <a:lnTo>
-                    <a:pt x="1521529" y="1566447"/>
-                  </a:lnTo>
-                  <a:lnTo>
-                    <a:pt x="1598773" y="1622790"/>
-                  </a:lnTo>
-                  <a:lnTo>
-                    <a:pt x="1676016" y="1677375"/>
-                  </a:lnTo>
-                  <a:lnTo>
-                    <a:pt x="1753260" y="1730255"/>
-                  </a:lnTo>
-                  <a:lnTo>
-                    <a:pt x="1830504" y="1781485"/>
-                  </a:lnTo>
-                  <a:lnTo>
-                    <a:pt x="1907747" y="1831116"/>
-                  </a:lnTo>
-                  <a:lnTo>
-                    <a:pt x="1984991" y="1879197"/>
-                  </a:lnTo>
-                  <a:lnTo>
-                    <a:pt x="2062234" y="1925778"/>
-                  </a:lnTo>
-                  <a:lnTo>
-                    <a:pt x="2139478" y="1970904"/>
-                  </a:lnTo>
-                  <a:lnTo>
-                    <a:pt x="2216721" y="2014622"/>
-                  </a:lnTo>
-                  <a:lnTo>
-                    <a:pt x="2293965" y="2056975"/>
-                  </a:lnTo>
-                  <a:lnTo>
-                    <a:pt x="2371209" y="2098006"/>
-                  </a:lnTo>
-                  <a:lnTo>
-                    <a:pt x="2448452" y="2137756"/>
-                  </a:lnTo>
-                  <a:lnTo>
-                    <a:pt x="2525696" y="2176265"/>
-                  </a:lnTo>
-                  <a:lnTo>
-                    <a:pt x="2602939" y="2213573"/>
-                  </a:lnTo>
-                  <a:lnTo>
-                    <a:pt x="2680183" y="2249715"/>
-                  </a:lnTo>
-                  <a:lnTo>
-                    <a:pt x="2757426" y="2284730"/>
-                  </a:lnTo>
-                  <a:lnTo>
-                    <a:pt x="2834670" y="2318651"/>
-                  </a:lnTo>
-                  <a:lnTo>
-                    <a:pt x="2911914" y="2351514"/>
-                  </a:lnTo>
-                  <a:lnTo>
-                    <a:pt x="2989157" y="2383350"/>
-                  </a:lnTo>
-                  <a:lnTo>
-                    <a:pt x="3066401" y="2414193"/>
-                  </a:lnTo>
-                  <a:lnTo>
-                    <a:pt x="3143644" y="2444073"/>
-                  </a:lnTo>
-                  <a:lnTo>
-                    <a:pt x="3220888" y="2473021"/>
-                  </a:lnTo>
-                  <a:lnTo>
-                    <a:pt x="3298131" y="2501064"/>
-                  </a:lnTo>
-                  <a:lnTo>
-                    <a:pt x="3375375" y="2493291"/>
-                  </a:lnTo>
-                  <a:lnTo>
-                    <a:pt x="3452619" y="2484573"/>
-                  </a:lnTo>
-                  <a:lnTo>
-                    <a:pt x="3529862" y="2475768"/>
-                  </a:lnTo>
-                  <a:lnTo>
-                    <a:pt x="3607106" y="2466876"/>
-                  </a:lnTo>
-                  <a:lnTo>
-                    <a:pt x="3684349" y="2457896"/>
-                  </a:lnTo>
-                  <a:lnTo>
-                    <a:pt x="3761593" y="2448826"/>
-                  </a:lnTo>
-                  <a:lnTo>
-                    <a:pt x="3838836" y="2439666"/>
-                  </a:lnTo>
-                  <a:lnTo>
-                    <a:pt x="3916080" y="2430416"/>
-                  </a:lnTo>
-                  <a:lnTo>
-                    <a:pt x="3993324" y="2421073"/>
-                  </a:lnTo>
-                  <a:lnTo>
-                    <a:pt x="4070567" y="2411638"/>
-                  </a:lnTo>
-                  <a:lnTo>
-                    <a:pt x="4147811" y="2402109"/>
-                  </a:lnTo>
-                  <a:lnTo>
-                    <a:pt x="4225054" y="2392486"/>
-                  </a:lnTo>
-                  <a:lnTo>
-                    <a:pt x="4302298" y="2382767"/>
-                  </a:lnTo>
-                  <a:lnTo>
-                    <a:pt x="4379541" y="2372951"/>
-                  </a:lnTo>
-                  <a:lnTo>
-                    <a:pt x="4456785" y="2363038"/>
-                  </a:lnTo>
-                  <a:lnTo>
-                    <a:pt x="4534029" y="2353027"/>
-                  </a:lnTo>
-                  <a:lnTo>
-                    <a:pt x="4611272" y="2342916"/>
-                  </a:lnTo>
-                  <a:lnTo>
-                    <a:pt x="4688516" y="2332705"/>
-                  </a:lnTo>
-                  <a:lnTo>
-                    <a:pt x="4765759" y="2322392"/>
-                  </a:lnTo>
-                  <a:lnTo>
-                    <a:pt x="4843003" y="2311977"/>
-                  </a:lnTo>
-                  <a:lnTo>
-                    <a:pt x="4920246" y="2301459"/>
-                  </a:lnTo>
-                  <a:lnTo>
-                    <a:pt x="4997490" y="2290836"/>
-                  </a:lnTo>
-                  <a:lnTo>
-                    <a:pt x="5074734" y="2280108"/>
-                  </a:lnTo>
-                  <a:lnTo>
-                    <a:pt x="5151977" y="2269273"/>
-                  </a:lnTo>
-                  <a:lnTo>
-                    <a:pt x="5229221" y="2258331"/>
-                  </a:lnTo>
-                  <a:lnTo>
-                    <a:pt x="5306464" y="2247280"/>
-                  </a:lnTo>
-                  <a:lnTo>
-                    <a:pt x="5383708" y="2236119"/>
-                  </a:lnTo>
-                  <a:lnTo>
-                    <a:pt x="5460951" y="2224848"/>
-                  </a:lnTo>
-                  <a:lnTo>
-                    <a:pt x="5538195" y="2213464"/>
-                  </a:lnTo>
-                  <a:lnTo>
-                    <a:pt x="5615439" y="2201968"/>
-                  </a:lnTo>
-                  <a:lnTo>
-                    <a:pt x="5692682" y="2190357"/>
-                  </a:lnTo>
-                  <a:lnTo>
-                    <a:pt x="5769926" y="2178632"/>
-                  </a:lnTo>
-                  <a:lnTo>
-                    <a:pt x="5847169" y="2166789"/>
-                  </a:lnTo>
-                  <a:lnTo>
-                    <a:pt x="5924413" y="2154829"/>
-                  </a:lnTo>
-                  <a:lnTo>
-                    <a:pt x="6001656" y="2142751"/>
-                  </a:lnTo>
-                  <a:lnTo>
-                    <a:pt x="6078900" y="2130552"/>
-                  </a:lnTo>
-                  <a:lnTo>
-                    <a:pt x="6156144" y="2118233"/>
-                  </a:lnTo>
-                  <a:lnTo>
-                    <a:pt x="6233387" y="2105791"/>
-                  </a:lnTo>
-                  <a:lnTo>
-                    <a:pt x="6310631" y="2093225"/>
-                  </a:lnTo>
-                  <a:lnTo>
-                    <a:pt x="6387874" y="2080535"/>
-                  </a:lnTo>
-                  <a:lnTo>
-                    <a:pt x="6465118" y="2067719"/>
-                  </a:lnTo>
-                  <a:lnTo>
-                    <a:pt x="6542361" y="2054776"/>
-                  </a:lnTo>
-                  <a:lnTo>
-                    <a:pt x="6619605" y="2041704"/>
-                  </a:lnTo>
-                  <a:lnTo>
-                    <a:pt x="6696849" y="2028502"/>
-                  </a:lnTo>
-                  <a:lnTo>
-                    <a:pt x="6774092" y="2015169"/>
-                  </a:lnTo>
-                  <a:lnTo>
-                    <a:pt x="6851336" y="2001704"/>
-                  </a:lnTo>
-                  <a:lnTo>
-                    <a:pt x="6928579" y="1988105"/>
-                  </a:lnTo>
-                  <a:lnTo>
-                    <a:pt x="7005823" y="1974371"/>
-                  </a:lnTo>
-                  <a:lnTo>
-                    <a:pt x="7083066" y="1960501"/>
-                  </a:lnTo>
-                  <a:lnTo>
-                    <a:pt x="7160310" y="1946493"/>
-                  </a:lnTo>
-                  <a:lnTo>
-                    <a:pt x="7237554" y="1932346"/>
-                  </a:lnTo>
-                  <a:lnTo>
-                    <a:pt x="7314797" y="1918058"/>
-                  </a:lnTo>
-                  <a:lnTo>
-                    <a:pt x="7392041" y="1903629"/>
-                  </a:lnTo>
-                  <a:lnTo>
-                    <a:pt x="7392041" y="3209323"/>
-                  </a:lnTo>
-                  <a:lnTo>
-                    <a:pt x="7314797" y="3204100"/>
-                  </a:lnTo>
-                  <a:lnTo>
-                    <a:pt x="7237554" y="3198710"/>
-                  </a:lnTo>
-                  <a:lnTo>
-                    <a:pt x="7160310" y="3193145"/>
-                  </a:lnTo>
-                  <a:lnTo>
-                    <a:pt x="7083066" y="3187402"/>
-                  </a:lnTo>
-                  <a:lnTo>
-                    <a:pt x="7005823" y="3181473"/>
-                  </a:lnTo>
-                  <a:lnTo>
-                    <a:pt x="6928579" y="3175353"/>
-                  </a:lnTo>
-                  <a:lnTo>
-                    <a:pt x="6851336" y="3169036"/>
-                  </a:lnTo>
-                  <a:lnTo>
-                    <a:pt x="6774092" y="3162516"/>
-                  </a:lnTo>
-                  <a:lnTo>
-                    <a:pt x="6696849" y="3155786"/>
-                  </a:lnTo>
-                  <a:lnTo>
-                    <a:pt x="6619605" y="3148838"/>
-                  </a:lnTo>
-                  <a:lnTo>
-                    <a:pt x="6542361" y="3141667"/>
-                  </a:lnTo>
-                  <a:lnTo>
-                    <a:pt x="6465118" y="3134265"/>
-                  </a:lnTo>
-                  <a:lnTo>
-                    <a:pt x="6387874" y="3126624"/>
-                  </a:lnTo>
-                  <a:lnTo>
-                    <a:pt x="6310631" y="3118737"/>
-                  </a:lnTo>
-                  <a:lnTo>
-                    <a:pt x="6233387" y="3110596"/>
-                  </a:lnTo>
-                  <a:lnTo>
-                    <a:pt x="6156144" y="3102192"/>
-                  </a:lnTo>
-                  <a:lnTo>
-                    <a:pt x="6078900" y="3093518"/>
-                  </a:lnTo>
-                  <a:lnTo>
-                    <a:pt x="6001656" y="3084564"/>
-                  </a:lnTo>
-                  <a:lnTo>
-                    <a:pt x="5924413" y="3075322"/>
-                  </a:lnTo>
-                  <a:lnTo>
-                    <a:pt x="5847169" y="3065782"/>
-                  </a:lnTo>
-                  <a:lnTo>
-                    <a:pt x="5769926" y="3055934"/>
-                  </a:lnTo>
-                  <a:lnTo>
-                    <a:pt x="5692682" y="3045769"/>
-                  </a:lnTo>
-                  <a:lnTo>
-                    <a:pt x="5615439" y="3035277"/>
-                  </a:lnTo>
-                  <a:lnTo>
-                    <a:pt x="5538195" y="3024447"/>
-                  </a:lnTo>
-                  <a:lnTo>
-                    <a:pt x="5460951" y="3013267"/>
-                  </a:lnTo>
-                  <a:lnTo>
-                    <a:pt x="5383708" y="3001728"/>
-                  </a:lnTo>
-                  <a:lnTo>
-                    <a:pt x="5306464" y="2989816"/>
-                  </a:lnTo>
-                  <a:lnTo>
-                    <a:pt x="5229221" y="2977521"/>
-                  </a:lnTo>
-                  <a:lnTo>
-                    <a:pt x="5151977" y="2964830"/>
-                  </a:lnTo>
-                  <a:lnTo>
-                    <a:pt x="5074734" y="2951729"/>
-                  </a:lnTo>
-                  <a:lnTo>
-                    <a:pt x="4997490" y="2938207"/>
-                  </a:lnTo>
-                  <a:lnTo>
-                    <a:pt x="4920246" y="2924249"/>
-                  </a:lnTo>
-                  <a:lnTo>
-                    <a:pt x="4843003" y="2909841"/>
-                  </a:lnTo>
-                  <a:lnTo>
-                    <a:pt x="4765759" y="2894969"/>
-                  </a:lnTo>
-                  <a:lnTo>
-                    <a:pt x="4688516" y="2879617"/>
-                  </a:lnTo>
-                  <a:lnTo>
-                    <a:pt x="4611272" y="2863771"/>
-                  </a:lnTo>
-                  <a:lnTo>
-                    <a:pt x="4534029" y="2847415"/>
-                  </a:lnTo>
-                  <a:lnTo>
-                    <a:pt x="4456785" y="2830531"/>
-                  </a:lnTo>
-                  <a:lnTo>
-                    <a:pt x="4379541" y="2813103"/>
-                  </a:lnTo>
-                  <a:lnTo>
-                    <a:pt x="4302298" y="2795114"/>
-                  </a:lnTo>
-                  <a:lnTo>
-                    <a:pt x="4225054" y="2776545"/>
-                  </a:lnTo>
-                  <a:lnTo>
-                    <a:pt x="4147811" y="2757378"/>
-                  </a:lnTo>
-                  <a:lnTo>
-                    <a:pt x="4070567" y="2737593"/>
-                  </a:lnTo>
-                  <a:lnTo>
-                    <a:pt x="3993324" y="2717171"/>
-                  </a:lnTo>
-                  <a:lnTo>
-                    <a:pt x="3916080" y="2696090"/>
-                  </a:lnTo>
-                  <a:lnTo>
-                    <a:pt x="3838836" y="2674331"/>
-                  </a:lnTo>
-                  <a:lnTo>
-                    <a:pt x="3761593" y="2651870"/>
-                  </a:lnTo>
-                  <a:lnTo>
-                    <a:pt x="3684349" y="2628686"/>
-                  </a:lnTo>
-                  <a:lnTo>
-                    <a:pt x="3607106" y="2604754"/>
-                  </a:lnTo>
-                  <a:lnTo>
-                    <a:pt x="3529862" y="2580051"/>
-                  </a:lnTo>
-                  <a:lnTo>
-                    <a:pt x="3452619" y="2554553"/>
-                  </a:lnTo>
-                  <a:lnTo>
-                    <a:pt x="3375375" y="2528233"/>
-                  </a:lnTo>
-                  <a:lnTo>
-                    <a:pt x="3298131" y="2501924"/>
-                  </a:lnTo>
-                  <a:lnTo>
-                    <a:pt x="3220888" y="2510471"/>
-                  </a:lnTo>
-                  <a:lnTo>
-                    <a:pt x="3143644" y="2518935"/>
-                  </a:lnTo>
-                  <a:lnTo>
-                    <a:pt x="3066401" y="2527315"/>
-                  </a:lnTo>
-                  <a:lnTo>
-                    <a:pt x="2989157" y="2535613"/>
-                  </a:lnTo>
-                  <a:lnTo>
-                    <a:pt x="2911914" y="2543830"/>
-                  </a:lnTo>
-                  <a:lnTo>
-                    <a:pt x="2834670" y="2551965"/>
-                  </a:lnTo>
-                  <a:lnTo>
-                    <a:pt x="2757426" y="2560021"/>
-                  </a:lnTo>
-                  <a:lnTo>
-                    <a:pt x="2680183" y="2567997"/>
-                  </a:lnTo>
-                  <a:lnTo>
-                    <a:pt x="2602939" y="2575896"/>
-                  </a:lnTo>
-                  <a:lnTo>
-                    <a:pt x="2525696" y="2583716"/>
-                  </a:lnTo>
-                  <a:lnTo>
-                    <a:pt x="2448452" y="2591459"/>
-                  </a:lnTo>
-                  <a:lnTo>
-                    <a:pt x="2371209" y="2599127"/>
-                  </a:lnTo>
-                  <a:lnTo>
-                    <a:pt x="2293965" y="2606719"/>
-                  </a:lnTo>
-                  <a:lnTo>
-                    <a:pt x="2216721" y="2614236"/>
-                  </a:lnTo>
-                  <a:lnTo>
-                    <a:pt x="2139478" y="2621680"/>
-                  </a:lnTo>
-                  <a:lnTo>
-                    <a:pt x="2062234" y="2629050"/>
-                  </a:lnTo>
-                  <a:lnTo>
-                    <a:pt x="1984991" y="2636348"/>
-                  </a:lnTo>
-                  <a:lnTo>
-                    <a:pt x="1907747" y="2643574"/>
-                  </a:lnTo>
-                  <a:lnTo>
-                    <a:pt x="1830504" y="2650729"/>
-                  </a:lnTo>
-                  <a:lnTo>
-                    <a:pt x="1753260" y="2657814"/>
-                  </a:lnTo>
-                  <a:lnTo>
-                    <a:pt x="1676016" y="2664829"/>
-                  </a:lnTo>
-                  <a:lnTo>
-                    <a:pt x="1598773" y="2671775"/>
-                  </a:lnTo>
-                  <a:lnTo>
-                    <a:pt x="1521529" y="2678653"/>
-                  </a:lnTo>
-                  <a:lnTo>
-                    <a:pt x="1444286" y="2685463"/>
-                  </a:lnTo>
-                  <a:lnTo>
-                    <a:pt x="1367042" y="2692206"/>
-                  </a:lnTo>
-                  <a:lnTo>
-                    <a:pt x="1289799" y="2698883"/>
-                  </a:lnTo>
-                  <a:lnTo>
-                    <a:pt x="1212555" y="2705495"/>
-                  </a:lnTo>
-                  <a:lnTo>
-                    <a:pt x="1135311" y="2712041"/>
-                  </a:lnTo>
-                  <a:lnTo>
-                    <a:pt x="1058068" y="2718523"/>
-                  </a:lnTo>
-                  <a:lnTo>
-                    <a:pt x="980824" y="2724941"/>
-                  </a:lnTo>
-                  <a:lnTo>
-                    <a:pt x="903581" y="2731297"/>
-                  </a:lnTo>
-                  <a:lnTo>
-                    <a:pt x="826337" y="2737589"/>
-                  </a:lnTo>
-                  <a:lnTo>
-                    <a:pt x="749094" y="2743820"/>
-                  </a:lnTo>
-                  <a:lnTo>
-                    <a:pt x="671850" y="2749990"/>
-                  </a:lnTo>
-                  <a:lnTo>
-                    <a:pt x="594606" y="2756099"/>
-                  </a:lnTo>
-                  <a:lnTo>
-                    <a:pt x="517363" y="2762148"/>
-                  </a:lnTo>
-                  <a:lnTo>
-                    <a:pt x="440119" y="2768137"/>
-                  </a:lnTo>
-                  <a:lnTo>
-                    <a:pt x="362876" y="2774067"/>
-                  </a:lnTo>
-                  <a:lnTo>
-                    <a:pt x="285632" y="2779940"/>
-                  </a:lnTo>
-                  <a:lnTo>
-                    <a:pt x="208389" y="2785754"/>
-                  </a:lnTo>
-                  <a:lnTo>
-                    <a:pt x="131145" y="2791512"/>
-                  </a:lnTo>
-                  <a:lnTo>
-                    <a:pt x="53901" y="2797212"/>
-                  </a:lnTo>
-                  <a:lnTo>
-                    <a:pt x="0" y="2801151"/>
+                    <a:pt x="53901" y="70710"/>
+                  </a:lnTo>
+                  <a:lnTo>
+                    <a:pt x="131145" y="168878"/>
+                  </a:lnTo>
+                  <a:lnTo>
+                    <a:pt x="208389" y="263982"/>
+                  </a:lnTo>
+                  <a:lnTo>
+                    <a:pt x="285632" y="356116"/>
+                  </a:lnTo>
+                  <a:lnTo>
+                    <a:pt x="362876" y="445375"/>
+                  </a:lnTo>
+                  <a:lnTo>
+                    <a:pt x="440119" y="531847"/>
+                  </a:lnTo>
+                  <a:lnTo>
+                    <a:pt x="517363" y="615620"/>
+                  </a:lnTo>
+                  <a:lnTo>
+                    <a:pt x="594606" y="696778"/>
+                  </a:lnTo>
+                  <a:lnTo>
+                    <a:pt x="671850" y="775403"/>
+                  </a:lnTo>
+                  <a:lnTo>
+                    <a:pt x="749094" y="851573"/>
+                  </a:lnTo>
+                  <a:lnTo>
+                    <a:pt x="826337" y="925366"/>
+                  </a:lnTo>
+                  <a:lnTo>
+                    <a:pt x="903581" y="996855"/>
+                  </a:lnTo>
+                  <a:lnTo>
+                    <a:pt x="980824" y="1066112"/>
+                  </a:lnTo>
+                  <a:lnTo>
+                    <a:pt x="1058068" y="1133207"/>
+                  </a:lnTo>
+                  <a:lnTo>
+                    <a:pt x="1135311" y="1198208"/>
+                  </a:lnTo>
+                  <a:lnTo>
+                    <a:pt x="1212555" y="1261180"/>
+                  </a:lnTo>
+                  <a:lnTo>
+                    <a:pt x="1289799" y="1322187"/>
+                  </a:lnTo>
+                  <a:lnTo>
+                    <a:pt x="1367042" y="1381288"/>
+                  </a:lnTo>
+                  <a:lnTo>
+                    <a:pt x="1444286" y="1438545"/>
+                  </a:lnTo>
+                  <a:lnTo>
+                    <a:pt x="1521529" y="1494015"/>
+                  </a:lnTo>
+                  <a:lnTo>
+                    <a:pt x="1598773" y="1547753"/>
+                  </a:lnTo>
+                  <a:lnTo>
+                    <a:pt x="1676016" y="1599813"/>
+                  </a:lnTo>
+                  <a:lnTo>
+                    <a:pt x="1753260" y="1650249"/>
+                  </a:lnTo>
+                  <a:lnTo>
+                    <a:pt x="1830504" y="1699110"/>
+                  </a:lnTo>
+                  <a:lnTo>
+                    <a:pt x="1907747" y="1746446"/>
+                  </a:lnTo>
+                  <a:lnTo>
+                    <a:pt x="1984991" y="1792304"/>
+                  </a:lnTo>
+                  <a:lnTo>
+                    <a:pt x="2062234" y="1836730"/>
+                  </a:lnTo>
+                  <a:lnTo>
+                    <a:pt x="2139478" y="1879770"/>
+                  </a:lnTo>
+                  <a:lnTo>
+                    <a:pt x="2216721" y="1921466"/>
+                  </a:lnTo>
+                  <a:lnTo>
+                    <a:pt x="2293965" y="1961861"/>
+                  </a:lnTo>
+                  <a:lnTo>
+                    <a:pt x="2371209" y="2000995"/>
+                  </a:lnTo>
+                  <a:lnTo>
+                    <a:pt x="2448452" y="2038907"/>
+                  </a:lnTo>
+                  <a:lnTo>
+                    <a:pt x="2525696" y="2075636"/>
+                  </a:lnTo>
+                  <a:lnTo>
+                    <a:pt x="2602939" y="2111218"/>
+                  </a:lnTo>
+                  <a:lnTo>
+                    <a:pt x="2680183" y="2145689"/>
+                  </a:lnTo>
+                  <a:lnTo>
+                    <a:pt x="2757426" y="2179085"/>
+                  </a:lnTo>
+                  <a:lnTo>
+                    <a:pt x="2834670" y="2211438"/>
+                  </a:lnTo>
+                  <a:lnTo>
+                    <a:pt x="2911914" y="2242780"/>
+                  </a:lnTo>
+                  <a:lnTo>
+                    <a:pt x="2989157" y="2273145"/>
+                  </a:lnTo>
+                  <a:lnTo>
+                    <a:pt x="3066401" y="2302562"/>
+                  </a:lnTo>
+                  <a:lnTo>
+                    <a:pt x="3143644" y="2331060"/>
+                  </a:lnTo>
+                  <a:lnTo>
+                    <a:pt x="3220888" y="2358669"/>
+                  </a:lnTo>
+                  <a:lnTo>
+                    <a:pt x="3298131" y="2385416"/>
+                  </a:lnTo>
+                  <a:lnTo>
+                    <a:pt x="3375375" y="2378002"/>
+                  </a:lnTo>
+                  <a:lnTo>
+                    <a:pt x="3452619" y="2369687"/>
+                  </a:lnTo>
+                  <a:lnTo>
+                    <a:pt x="3529862" y="2361290"/>
+                  </a:lnTo>
+                  <a:lnTo>
+                    <a:pt x="3607106" y="2352809"/>
+                  </a:lnTo>
+                  <a:lnTo>
+                    <a:pt x="3684349" y="2344243"/>
+                  </a:lnTo>
+                  <a:lnTo>
+                    <a:pt x="3761593" y="2335593"/>
+                  </a:lnTo>
+                  <a:lnTo>
+                    <a:pt x="3838836" y="2326857"/>
+                  </a:lnTo>
+                  <a:lnTo>
+                    <a:pt x="3916080" y="2318034"/>
+                  </a:lnTo>
+                  <a:lnTo>
+                    <a:pt x="3993324" y="2309124"/>
+                  </a:lnTo>
+                  <a:lnTo>
+                    <a:pt x="4070567" y="2300125"/>
+                  </a:lnTo>
+                  <a:lnTo>
+                    <a:pt x="4147811" y="2291037"/>
+                  </a:lnTo>
+                  <a:lnTo>
+                    <a:pt x="4225054" y="2281858"/>
+                  </a:lnTo>
+                  <a:lnTo>
+                    <a:pt x="4302298" y="2272588"/>
+                  </a:lnTo>
+                  <a:lnTo>
+                    <a:pt x="4379541" y="2263227"/>
+                  </a:lnTo>
+                  <a:lnTo>
+                    <a:pt x="4456785" y="2253772"/>
+                  </a:lnTo>
+                  <a:lnTo>
+                    <a:pt x="4534029" y="2244224"/>
+                  </a:lnTo>
+                  <a:lnTo>
+                    <a:pt x="4611272" y="2234580"/>
+                  </a:lnTo>
+                  <a:lnTo>
+                    <a:pt x="4688516" y="2224841"/>
+                  </a:lnTo>
+                  <a:lnTo>
+                    <a:pt x="4765759" y="2215006"/>
+                  </a:lnTo>
+                  <a:lnTo>
+                    <a:pt x="4843003" y="2205072"/>
+                  </a:lnTo>
+                  <a:lnTo>
+                    <a:pt x="4920246" y="2195040"/>
+                  </a:lnTo>
+                  <a:lnTo>
+                    <a:pt x="4997490" y="2184909"/>
+                  </a:lnTo>
+                  <a:lnTo>
+                    <a:pt x="5074734" y="2174677"/>
+                  </a:lnTo>
+                  <a:lnTo>
+                    <a:pt x="5151977" y="2164343"/>
+                  </a:lnTo>
+                  <a:lnTo>
+                    <a:pt x="5229221" y="2153907"/>
+                  </a:lnTo>
+                  <a:lnTo>
+                    <a:pt x="5306464" y="2143367"/>
+                  </a:lnTo>
+                  <a:lnTo>
+                    <a:pt x="5383708" y="2132722"/>
+                  </a:lnTo>
+                  <a:lnTo>
+                    <a:pt x="5460951" y="2121972"/>
+                  </a:lnTo>
+                  <a:lnTo>
+                    <a:pt x="5538195" y="2111115"/>
+                  </a:lnTo>
+                  <a:lnTo>
+                    <a:pt x="5615439" y="2100150"/>
+                  </a:lnTo>
+                  <a:lnTo>
+                    <a:pt x="5692682" y="2089076"/>
+                  </a:lnTo>
+                  <a:lnTo>
+                    <a:pt x="5769926" y="2077892"/>
+                  </a:lnTo>
+                  <a:lnTo>
+                    <a:pt x="5847169" y="2066598"/>
+                  </a:lnTo>
+                  <a:lnTo>
+                    <a:pt x="5924413" y="2055191"/>
+                  </a:lnTo>
+                  <a:lnTo>
+                    <a:pt x="6001656" y="2043671"/>
+                  </a:lnTo>
+                  <a:lnTo>
+                    <a:pt x="6078900" y="2032036"/>
+                  </a:lnTo>
+                  <a:lnTo>
+                    <a:pt x="6156144" y="2020286"/>
+                  </a:lnTo>
+                  <a:lnTo>
+                    <a:pt x="6233387" y="2008420"/>
+                  </a:lnTo>
+                  <a:lnTo>
+                    <a:pt x="6310631" y="1996435"/>
+                  </a:lnTo>
+                  <a:lnTo>
+                    <a:pt x="6387874" y="1984332"/>
+                  </a:lnTo>
+                  <a:lnTo>
+                    <a:pt x="6465118" y="1972108"/>
+                  </a:lnTo>
+                  <a:lnTo>
+                    <a:pt x="6542361" y="1959763"/>
+                  </a:lnTo>
+                  <a:lnTo>
+                    <a:pt x="6619605" y="1947296"/>
+                  </a:lnTo>
+                  <a:lnTo>
+                    <a:pt x="6696849" y="1934705"/>
+                  </a:lnTo>
+                  <a:lnTo>
+                    <a:pt x="6774092" y="1921988"/>
+                  </a:lnTo>
+                  <a:lnTo>
+                    <a:pt x="6851336" y="1909146"/>
+                  </a:lnTo>
+                  <a:lnTo>
+                    <a:pt x="6928579" y="1896176"/>
+                  </a:lnTo>
+                  <a:lnTo>
+                    <a:pt x="7005823" y="1883077"/>
+                  </a:lnTo>
+                  <a:lnTo>
+                    <a:pt x="7083066" y="1869848"/>
+                  </a:lnTo>
+                  <a:lnTo>
+                    <a:pt x="7160310" y="1856488"/>
+                  </a:lnTo>
+                  <a:lnTo>
+                    <a:pt x="7237554" y="1842995"/>
+                  </a:lnTo>
+                  <a:lnTo>
+                    <a:pt x="7314797" y="1829368"/>
+                  </a:lnTo>
+                  <a:lnTo>
+                    <a:pt x="7392041" y="1815606"/>
+                  </a:lnTo>
+                  <a:lnTo>
+                    <a:pt x="7392041" y="3060925"/>
+                  </a:lnTo>
+                  <a:lnTo>
+                    <a:pt x="7314797" y="3055944"/>
+                  </a:lnTo>
+                  <a:lnTo>
+                    <a:pt x="7237554" y="3050802"/>
+                  </a:lnTo>
+                  <a:lnTo>
+                    <a:pt x="7160310" y="3045495"/>
+                  </a:lnTo>
+                  <a:lnTo>
+                    <a:pt x="7083066" y="3040017"/>
+                  </a:lnTo>
+                  <a:lnTo>
+                    <a:pt x="7005823" y="3034363"/>
+                  </a:lnTo>
+                  <a:lnTo>
+                    <a:pt x="6928579" y="3028526"/>
+                  </a:lnTo>
+                  <a:lnTo>
+                    <a:pt x="6851336" y="3022501"/>
+                  </a:lnTo>
+                  <a:lnTo>
+                    <a:pt x="6774092" y="3016282"/>
+                  </a:lnTo>
+                  <a:lnTo>
+                    <a:pt x="6696849" y="3009863"/>
+                  </a:lnTo>
+                  <a:lnTo>
+                    <a:pt x="6619605" y="3003237"/>
+                  </a:lnTo>
+                  <a:lnTo>
+                    <a:pt x="6542361" y="2996397"/>
+                  </a:lnTo>
+                  <a:lnTo>
+                    <a:pt x="6465118" y="2989337"/>
+                  </a:lnTo>
+                  <a:lnTo>
+                    <a:pt x="6387874" y="2982050"/>
+                  </a:lnTo>
+                  <a:lnTo>
+                    <a:pt x="6310631" y="2974527"/>
+                  </a:lnTo>
+                  <a:lnTo>
+                    <a:pt x="6233387" y="2966763"/>
+                  </a:lnTo>
+                  <a:lnTo>
+                    <a:pt x="6156144" y="2958748"/>
+                  </a:lnTo>
+                  <a:lnTo>
+                    <a:pt x="6078900" y="2950475"/>
+                  </a:lnTo>
+                  <a:lnTo>
+                    <a:pt x="6001656" y="2941935"/>
+                  </a:lnTo>
+                  <a:lnTo>
+                    <a:pt x="5924413" y="2933120"/>
+                  </a:lnTo>
+                  <a:lnTo>
+                    <a:pt x="5847169" y="2924021"/>
+                  </a:lnTo>
+                  <a:lnTo>
+                    <a:pt x="5769926" y="2914629"/>
+                  </a:lnTo>
+                  <a:lnTo>
+                    <a:pt x="5692682" y="2904934"/>
+                  </a:lnTo>
+                  <a:lnTo>
+                    <a:pt x="5615439" y="2894927"/>
+                  </a:lnTo>
+                  <a:lnTo>
+                    <a:pt x="5538195" y="2884597"/>
+                  </a:lnTo>
+                  <a:lnTo>
+                    <a:pt x="5460951" y="2873935"/>
+                  </a:lnTo>
+                  <a:lnTo>
+                    <a:pt x="5383708" y="2862929"/>
+                  </a:lnTo>
+                  <a:lnTo>
+                    <a:pt x="5306464" y="2851568"/>
+                  </a:lnTo>
+                  <a:lnTo>
+                    <a:pt x="5229221" y="2839842"/>
+                  </a:lnTo>
+                  <a:lnTo>
+                    <a:pt x="5151977" y="2827737"/>
+                  </a:lnTo>
+                  <a:lnTo>
+                    <a:pt x="5074734" y="2815242"/>
+                  </a:lnTo>
+                  <a:lnTo>
+                    <a:pt x="4997490" y="2802345"/>
+                  </a:lnTo>
+                  <a:lnTo>
+                    <a:pt x="4920246" y="2789033"/>
+                  </a:lnTo>
+                  <a:lnTo>
+                    <a:pt x="4843003" y="2775291"/>
+                  </a:lnTo>
+                  <a:lnTo>
+                    <a:pt x="4765759" y="2761106"/>
+                  </a:lnTo>
+                  <a:lnTo>
+                    <a:pt x="4688516" y="2746465"/>
+                  </a:lnTo>
+                  <a:lnTo>
+                    <a:pt x="4611272" y="2731351"/>
+                  </a:lnTo>
+                  <a:lnTo>
+                    <a:pt x="4534029" y="2715751"/>
+                  </a:lnTo>
+                  <a:lnTo>
+                    <a:pt x="4456785" y="2699648"/>
+                  </a:lnTo>
+                  <a:lnTo>
+                    <a:pt x="4379541" y="2683026"/>
+                  </a:lnTo>
+                  <a:lnTo>
+                    <a:pt x="4302298" y="2665869"/>
+                  </a:lnTo>
+                  <a:lnTo>
+                    <a:pt x="4225054" y="2648159"/>
+                  </a:lnTo>
+                  <a:lnTo>
+                    <a:pt x="4147811" y="2629878"/>
+                  </a:lnTo>
+                  <a:lnTo>
+                    <a:pt x="4070567" y="2611008"/>
+                  </a:lnTo>
+                  <a:lnTo>
+                    <a:pt x="3993324" y="2591530"/>
+                  </a:lnTo>
+                  <a:lnTo>
+                    <a:pt x="3916080" y="2571424"/>
+                  </a:lnTo>
+                  <a:lnTo>
+                    <a:pt x="3838836" y="2550671"/>
+                  </a:lnTo>
+                  <a:lnTo>
+                    <a:pt x="3761593" y="2529249"/>
+                  </a:lnTo>
+                  <a:lnTo>
+                    <a:pt x="3684349" y="2507136"/>
+                  </a:lnTo>
+                  <a:lnTo>
+                    <a:pt x="3607106" y="2484311"/>
+                  </a:lnTo>
+                  <a:lnTo>
+                    <a:pt x="3529862" y="2460751"/>
+                  </a:lnTo>
+                  <a:lnTo>
+                    <a:pt x="3452619" y="2436431"/>
+                  </a:lnTo>
+                  <a:lnTo>
+                    <a:pt x="3375375" y="2411328"/>
+                  </a:lnTo>
+                  <a:lnTo>
+                    <a:pt x="3298131" y="2386236"/>
+                  </a:lnTo>
+                  <a:lnTo>
+                    <a:pt x="3220888" y="2394388"/>
+                  </a:lnTo>
+                  <a:lnTo>
+                    <a:pt x="3143644" y="2402460"/>
+                  </a:lnTo>
+                  <a:lnTo>
+                    <a:pt x="3066401" y="2410453"/>
+                  </a:lnTo>
+                  <a:lnTo>
+                    <a:pt x="2989157" y="2418367"/>
+                  </a:lnTo>
+                  <a:lnTo>
+                    <a:pt x="2911914" y="2426204"/>
+                  </a:lnTo>
+                  <a:lnTo>
+                    <a:pt x="2834670" y="2433963"/>
+                  </a:lnTo>
+                  <a:lnTo>
+                    <a:pt x="2757426" y="2441647"/>
+                  </a:lnTo>
+                  <a:lnTo>
+                    <a:pt x="2680183" y="2449254"/>
+                  </a:lnTo>
+                  <a:lnTo>
+                    <a:pt x="2602939" y="2456787"/>
+                  </a:lnTo>
+                  <a:lnTo>
+                    <a:pt x="2525696" y="2464246"/>
+                  </a:lnTo>
+                  <a:lnTo>
+                    <a:pt x="2448452" y="2471631"/>
+                  </a:lnTo>
+                  <a:lnTo>
+                    <a:pt x="2371209" y="2478944"/>
+                  </a:lnTo>
+                  <a:lnTo>
+                    <a:pt x="2293965" y="2486185"/>
+                  </a:lnTo>
+                  <a:lnTo>
+                    <a:pt x="2216721" y="2493355"/>
+                  </a:lnTo>
+                  <a:lnTo>
+                    <a:pt x="2139478" y="2500454"/>
+                  </a:lnTo>
+                  <a:lnTo>
+                    <a:pt x="2062234" y="2507484"/>
+                  </a:lnTo>
+                  <a:lnTo>
+                    <a:pt x="1984991" y="2514444"/>
+                  </a:lnTo>
+                  <a:lnTo>
+                    <a:pt x="1907747" y="2521336"/>
+                  </a:lnTo>
+                  <a:lnTo>
+                    <a:pt x="1830504" y="2528160"/>
+                  </a:lnTo>
+                  <a:lnTo>
+                    <a:pt x="1753260" y="2534918"/>
+                  </a:lnTo>
+                  <a:lnTo>
+                    <a:pt x="1676016" y="2541608"/>
+                  </a:lnTo>
+                  <a:lnTo>
+                    <a:pt x="1598773" y="2548233"/>
+                  </a:lnTo>
+                  <a:lnTo>
+                    <a:pt x="1521529" y="2554793"/>
+                  </a:lnTo>
+                  <a:lnTo>
+                    <a:pt x="1444286" y="2561288"/>
+                  </a:lnTo>
+                  <a:lnTo>
+                    <a:pt x="1367042" y="2567720"/>
+                  </a:lnTo>
+                  <a:lnTo>
+                    <a:pt x="1289799" y="2574088"/>
+                  </a:lnTo>
+                  <a:lnTo>
+                    <a:pt x="1212555" y="2580394"/>
+                  </a:lnTo>
+                  <a:lnTo>
+                    <a:pt x="1135311" y="2586637"/>
+                  </a:lnTo>
+                  <a:lnTo>
+                    <a:pt x="1058068" y="2592820"/>
+                  </a:lnTo>
+                  <a:lnTo>
+                    <a:pt x="980824" y="2598941"/>
+                  </a:lnTo>
+                  <a:lnTo>
+                    <a:pt x="903581" y="2605002"/>
+                  </a:lnTo>
+                  <a:lnTo>
+                    <a:pt x="826337" y="2611004"/>
+                  </a:lnTo>
+                  <a:lnTo>
+                    <a:pt x="749094" y="2616947"/>
+                  </a:lnTo>
+                  <a:lnTo>
+                    <a:pt x="671850" y="2622831"/>
+                  </a:lnTo>
+                  <a:lnTo>
+                    <a:pt x="594606" y="2628658"/>
+                  </a:lnTo>
+                  <a:lnTo>
+                    <a:pt x="517363" y="2634427"/>
+                  </a:lnTo>
+                  <a:lnTo>
+                    <a:pt x="440119" y="2640139"/>
+                  </a:lnTo>
+                  <a:lnTo>
+                    <a:pt x="362876" y="2645796"/>
+                  </a:lnTo>
+                  <a:lnTo>
+                    <a:pt x="285632" y="2651396"/>
+                  </a:lnTo>
+                  <a:lnTo>
+                    <a:pt x="208389" y="2656942"/>
+                  </a:lnTo>
+                  <a:lnTo>
+                    <a:pt x="131145" y="2662433"/>
+                  </a:lnTo>
+                  <a:lnTo>
+                    <a:pt x="53901" y="2667870"/>
+                  </a:lnTo>
+                  <a:lnTo>
+                    <a:pt x="0" y="2671627"/>
                   </a:lnTo>
                   <a:close/>
                 </a:path>
@@ -3615,303 +3615,303 @@
           </p:nvSpPr>
           <p:spPr>
             <a:xfrm>
-              <a:off x="817517" y="2177810"/>
-              <a:ext cx="7392041" cy="2501064"/>
+              <a:off x="817517" y="2341744"/>
+              <a:ext cx="7392041" cy="2385416"/>
             </a:xfrm>
             <a:custGeom>
               <a:avLst/>
               <a:pathLst>
-                <a:path w="7392041" h="2501064">
+                <a:path w="7392041" h="2385416">
                   <a:moveTo>
                     <a:pt x="0" y="0"/>
                   </a:moveTo>
                   <a:lnTo>
-                    <a:pt x="53901" y="74138"/>
-                  </a:lnTo>
-                  <a:lnTo>
-                    <a:pt x="131145" y="177065"/>
-                  </a:lnTo>
-                  <a:lnTo>
-                    <a:pt x="208389" y="276780"/>
-                  </a:lnTo>
-                  <a:lnTo>
-                    <a:pt x="285632" y="373381"/>
-                  </a:lnTo>
-                  <a:lnTo>
-                    <a:pt x="362876" y="466967"/>
-                  </a:lnTo>
-                  <a:lnTo>
-                    <a:pt x="440119" y="557632"/>
-                  </a:lnTo>
-                  <a:lnTo>
-                    <a:pt x="517363" y="645467"/>
-                  </a:lnTo>
-                  <a:lnTo>
-                    <a:pt x="594606" y="730559"/>
-                  </a:lnTo>
-                  <a:lnTo>
-                    <a:pt x="671850" y="812996"/>
-                  </a:lnTo>
-                  <a:lnTo>
-                    <a:pt x="749094" y="892859"/>
-                  </a:lnTo>
-                  <a:lnTo>
-                    <a:pt x="826337" y="970229"/>
-                  </a:lnTo>
-                  <a:lnTo>
-                    <a:pt x="903581" y="1045184"/>
-                  </a:lnTo>
-                  <a:lnTo>
-                    <a:pt x="980824" y="1117799"/>
-                  </a:lnTo>
-                  <a:lnTo>
-                    <a:pt x="1058068" y="1188147"/>
-                  </a:lnTo>
-                  <a:lnTo>
-                    <a:pt x="1135311" y="1256299"/>
-                  </a:lnTo>
-                  <a:lnTo>
-                    <a:pt x="1212555" y="1322324"/>
-                  </a:lnTo>
-                  <a:lnTo>
-                    <a:pt x="1289799" y="1386288"/>
-                  </a:lnTo>
-                  <a:lnTo>
-                    <a:pt x="1367042" y="1448255"/>
-                  </a:lnTo>
-                  <a:lnTo>
-                    <a:pt x="1444286" y="1508288"/>
-                  </a:lnTo>
-                  <a:lnTo>
-                    <a:pt x="1521529" y="1566447"/>
-                  </a:lnTo>
-                  <a:lnTo>
-                    <a:pt x="1598773" y="1622790"/>
-                  </a:lnTo>
-                  <a:lnTo>
-                    <a:pt x="1676016" y="1677375"/>
-                  </a:lnTo>
-                  <a:lnTo>
-                    <a:pt x="1753260" y="1730255"/>
-                  </a:lnTo>
-                  <a:lnTo>
-                    <a:pt x="1830504" y="1781485"/>
-                  </a:lnTo>
-                  <a:lnTo>
-                    <a:pt x="1907747" y="1831116"/>
-                  </a:lnTo>
-                  <a:lnTo>
-                    <a:pt x="1984991" y="1879197"/>
-                  </a:lnTo>
-                  <a:lnTo>
-                    <a:pt x="2062234" y="1925778"/>
-                  </a:lnTo>
-                  <a:lnTo>
-                    <a:pt x="2139478" y="1970904"/>
-                  </a:lnTo>
-                  <a:lnTo>
-                    <a:pt x="2216721" y="2014622"/>
-                  </a:lnTo>
-                  <a:lnTo>
-                    <a:pt x="2293965" y="2056975"/>
-                  </a:lnTo>
-                  <a:lnTo>
-                    <a:pt x="2371209" y="2098006"/>
-                  </a:lnTo>
-                  <a:lnTo>
-                    <a:pt x="2448452" y="2137756"/>
-                  </a:lnTo>
-                  <a:lnTo>
-                    <a:pt x="2525696" y="2176265"/>
-                  </a:lnTo>
-                  <a:lnTo>
-                    <a:pt x="2602939" y="2213573"/>
-                  </a:lnTo>
-                  <a:lnTo>
-                    <a:pt x="2680183" y="2249715"/>
-                  </a:lnTo>
-                  <a:lnTo>
-                    <a:pt x="2757426" y="2284730"/>
-                  </a:lnTo>
-                  <a:lnTo>
-                    <a:pt x="2834670" y="2318651"/>
-                  </a:lnTo>
-                  <a:lnTo>
-                    <a:pt x="2911914" y="2351514"/>
-                  </a:lnTo>
-                  <a:lnTo>
-                    <a:pt x="2989157" y="2383350"/>
-                  </a:lnTo>
-                  <a:lnTo>
-                    <a:pt x="3066401" y="2414193"/>
-                  </a:lnTo>
-                  <a:lnTo>
-                    <a:pt x="3143644" y="2444073"/>
-                  </a:lnTo>
-                  <a:lnTo>
-                    <a:pt x="3220888" y="2473021"/>
-                  </a:lnTo>
-                  <a:lnTo>
-                    <a:pt x="3298131" y="2501064"/>
-                  </a:lnTo>
-                  <a:lnTo>
-                    <a:pt x="3375375" y="2493291"/>
-                  </a:lnTo>
-                  <a:lnTo>
-                    <a:pt x="3452619" y="2484573"/>
-                  </a:lnTo>
-                  <a:lnTo>
-                    <a:pt x="3529862" y="2475768"/>
-                  </a:lnTo>
-                  <a:lnTo>
-                    <a:pt x="3607106" y="2466876"/>
-                  </a:lnTo>
-                  <a:lnTo>
-                    <a:pt x="3684349" y="2457896"/>
-                  </a:lnTo>
-                  <a:lnTo>
-                    <a:pt x="3761593" y="2448826"/>
-                  </a:lnTo>
-                  <a:lnTo>
-                    <a:pt x="3838836" y="2439666"/>
-                  </a:lnTo>
-                  <a:lnTo>
-                    <a:pt x="3916080" y="2430416"/>
-                  </a:lnTo>
-                  <a:lnTo>
-                    <a:pt x="3993324" y="2421073"/>
-                  </a:lnTo>
-                  <a:lnTo>
-                    <a:pt x="4070567" y="2411638"/>
-                  </a:lnTo>
-                  <a:lnTo>
-                    <a:pt x="4147811" y="2402109"/>
-                  </a:lnTo>
-                  <a:lnTo>
-                    <a:pt x="4225054" y="2392486"/>
-                  </a:lnTo>
-                  <a:lnTo>
-                    <a:pt x="4302298" y="2382767"/>
-                  </a:lnTo>
-                  <a:lnTo>
-                    <a:pt x="4379541" y="2372951"/>
-                  </a:lnTo>
-                  <a:lnTo>
-                    <a:pt x="4456785" y="2363038"/>
-                  </a:lnTo>
-                  <a:lnTo>
-                    <a:pt x="4534029" y="2353027"/>
-                  </a:lnTo>
-                  <a:lnTo>
-                    <a:pt x="4611272" y="2342916"/>
-                  </a:lnTo>
-                  <a:lnTo>
-                    <a:pt x="4688516" y="2332705"/>
-                  </a:lnTo>
-                  <a:lnTo>
-                    <a:pt x="4765759" y="2322392"/>
-                  </a:lnTo>
-                  <a:lnTo>
-                    <a:pt x="4843003" y="2311977"/>
-                  </a:lnTo>
-                  <a:lnTo>
-                    <a:pt x="4920246" y="2301459"/>
-                  </a:lnTo>
-                  <a:lnTo>
-                    <a:pt x="4997490" y="2290836"/>
-                  </a:lnTo>
-                  <a:lnTo>
-                    <a:pt x="5074734" y="2280108"/>
-                  </a:lnTo>
-                  <a:lnTo>
-                    <a:pt x="5151977" y="2269273"/>
-                  </a:lnTo>
-                  <a:lnTo>
-                    <a:pt x="5229221" y="2258331"/>
-                  </a:lnTo>
-                  <a:lnTo>
-                    <a:pt x="5306464" y="2247280"/>
-                  </a:lnTo>
-                  <a:lnTo>
-                    <a:pt x="5383708" y="2236119"/>
-                  </a:lnTo>
-                  <a:lnTo>
-                    <a:pt x="5460951" y="2224848"/>
-                  </a:lnTo>
-                  <a:lnTo>
-                    <a:pt x="5538195" y="2213464"/>
-                  </a:lnTo>
-                  <a:lnTo>
-                    <a:pt x="5615439" y="2201968"/>
-                  </a:lnTo>
-                  <a:lnTo>
-                    <a:pt x="5692682" y="2190357"/>
-                  </a:lnTo>
-                  <a:lnTo>
-                    <a:pt x="5769926" y="2178632"/>
-                  </a:lnTo>
-                  <a:lnTo>
-                    <a:pt x="5847169" y="2166789"/>
-                  </a:lnTo>
-                  <a:lnTo>
-                    <a:pt x="5924413" y="2154829"/>
-                  </a:lnTo>
-                  <a:lnTo>
-                    <a:pt x="6001656" y="2142751"/>
-                  </a:lnTo>
-                  <a:lnTo>
-                    <a:pt x="6078900" y="2130552"/>
-                  </a:lnTo>
-                  <a:lnTo>
-                    <a:pt x="6156144" y="2118233"/>
-                  </a:lnTo>
-                  <a:lnTo>
-                    <a:pt x="6233387" y="2105791"/>
-                  </a:lnTo>
-                  <a:lnTo>
-                    <a:pt x="6310631" y="2093225"/>
-                  </a:lnTo>
-                  <a:lnTo>
-                    <a:pt x="6387874" y="2080535"/>
-                  </a:lnTo>
-                  <a:lnTo>
-                    <a:pt x="6465118" y="2067719"/>
-                  </a:lnTo>
-                  <a:lnTo>
-                    <a:pt x="6542361" y="2054776"/>
-                  </a:lnTo>
-                  <a:lnTo>
-                    <a:pt x="6619605" y="2041704"/>
-                  </a:lnTo>
-                  <a:lnTo>
-                    <a:pt x="6696849" y="2028502"/>
-                  </a:lnTo>
-                  <a:lnTo>
-                    <a:pt x="6774092" y="2015169"/>
-                  </a:lnTo>
-                  <a:lnTo>
-                    <a:pt x="6851336" y="2001704"/>
-                  </a:lnTo>
-                  <a:lnTo>
-                    <a:pt x="6928579" y="1988105"/>
-                  </a:lnTo>
-                  <a:lnTo>
-                    <a:pt x="7005823" y="1974371"/>
-                  </a:lnTo>
-                  <a:lnTo>
-                    <a:pt x="7083066" y="1960501"/>
-                  </a:lnTo>
-                  <a:lnTo>
-                    <a:pt x="7160310" y="1946493"/>
-                  </a:lnTo>
-                  <a:lnTo>
-                    <a:pt x="7237554" y="1932346"/>
-                  </a:lnTo>
-                  <a:lnTo>
-                    <a:pt x="7314797" y="1918058"/>
-                  </a:lnTo>
-                  <a:lnTo>
-                    <a:pt x="7392041" y="1903629"/>
+                    <a:pt x="53901" y="70710"/>
+                  </a:lnTo>
+                  <a:lnTo>
+                    <a:pt x="131145" y="168878"/>
+                  </a:lnTo>
+                  <a:lnTo>
+                    <a:pt x="208389" y="263982"/>
+                  </a:lnTo>
+                  <a:lnTo>
+                    <a:pt x="285632" y="356116"/>
+                  </a:lnTo>
+                  <a:lnTo>
+                    <a:pt x="362876" y="445375"/>
+                  </a:lnTo>
+                  <a:lnTo>
+                    <a:pt x="440119" y="531847"/>
+                  </a:lnTo>
+                  <a:lnTo>
+                    <a:pt x="517363" y="615620"/>
+                  </a:lnTo>
+                  <a:lnTo>
+                    <a:pt x="594606" y="696778"/>
+                  </a:lnTo>
+                  <a:lnTo>
+                    <a:pt x="671850" y="775403"/>
+                  </a:lnTo>
+                  <a:lnTo>
+                    <a:pt x="749094" y="851573"/>
+                  </a:lnTo>
+                  <a:lnTo>
+                    <a:pt x="826337" y="925366"/>
+                  </a:lnTo>
+                  <a:lnTo>
+                    <a:pt x="903581" y="996855"/>
+                  </a:lnTo>
+                  <a:lnTo>
+                    <a:pt x="980824" y="1066112"/>
+                  </a:lnTo>
+                  <a:lnTo>
+                    <a:pt x="1058068" y="1133207"/>
+                  </a:lnTo>
+                  <a:lnTo>
+                    <a:pt x="1135311" y="1198208"/>
+                  </a:lnTo>
+                  <a:lnTo>
+                    <a:pt x="1212555" y="1261180"/>
+                  </a:lnTo>
+                  <a:lnTo>
+                    <a:pt x="1289799" y="1322187"/>
+                  </a:lnTo>
+                  <a:lnTo>
+                    <a:pt x="1367042" y="1381288"/>
+                  </a:lnTo>
+                  <a:lnTo>
+                    <a:pt x="1444286" y="1438545"/>
+                  </a:lnTo>
+                  <a:lnTo>
+                    <a:pt x="1521529" y="1494015"/>
+                  </a:lnTo>
+                  <a:lnTo>
+                    <a:pt x="1598773" y="1547753"/>
+                  </a:lnTo>
+                  <a:lnTo>
+                    <a:pt x="1676016" y="1599813"/>
+                  </a:lnTo>
+                  <a:lnTo>
+                    <a:pt x="1753260" y="1650249"/>
+                  </a:lnTo>
+                  <a:lnTo>
+                    <a:pt x="1830504" y="1699110"/>
+                  </a:lnTo>
+                  <a:lnTo>
+                    <a:pt x="1907747" y="1746446"/>
+                  </a:lnTo>
+                  <a:lnTo>
+                    <a:pt x="1984991" y="1792304"/>
+                  </a:lnTo>
+                  <a:lnTo>
+                    <a:pt x="2062234" y="1836730"/>
+                  </a:lnTo>
+                  <a:lnTo>
+                    <a:pt x="2139478" y="1879770"/>
+                  </a:lnTo>
+                  <a:lnTo>
+                    <a:pt x="2216721" y="1921466"/>
+                  </a:lnTo>
+                  <a:lnTo>
+                    <a:pt x="2293965" y="1961861"/>
+                  </a:lnTo>
+                  <a:lnTo>
+                    <a:pt x="2371209" y="2000995"/>
+                  </a:lnTo>
+                  <a:lnTo>
+                    <a:pt x="2448452" y="2038907"/>
+                  </a:lnTo>
+                  <a:lnTo>
+                    <a:pt x="2525696" y="2075636"/>
+                  </a:lnTo>
+                  <a:lnTo>
+                    <a:pt x="2602939" y="2111218"/>
+                  </a:lnTo>
+                  <a:lnTo>
+                    <a:pt x="2680183" y="2145689"/>
+                  </a:lnTo>
+                  <a:lnTo>
+                    <a:pt x="2757426" y="2179085"/>
+                  </a:lnTo>
+                  <a:lnTo>
+                    <a:pt x="2834670" y="2211438"/>
+                  </a:lnTo>
+                  <a:lnTo>
+                    <a:pt x="2911914" y="2242780"/>
+                  </a:lnTo>
+                  <a:lnTo>
+                    <a:pt x="2989157" y="2273145"/>
+                  </a:lnTo>
+                  <a:lnTo>
+                    <a:pt x="3066401" y="2302562"/>
+                  </a:lnTo>
+                  <a:lnTo>
+                    <a:pt x="3143644" y="2331060"/>
+                  </a:lnTo>
+                  <a:lnTo>
+                    <a:pt x="3220888" y="2358669"/>
+                  </a:lnTo>
+                  <a:lnTo>
+                    <a:pt x="3298131" y="2385416"/>
+                  </a:lnTo>
+                  <a:lnTo>
+                    <a:pt x="3375375" y="2378002"/>
+                  </a:lnTo>
+                  <a:lnTo>
+                    <a:pt x="3452619" y="2369687"/>
+                  </a:lnTo>
+                  <a:lnTo>
+                    <a:pt x="3529862" y="2361290"/>
+                  </a:lnTo>
+                  <a:lnTo>
+                    <a:pt x="3607106" y="2352809"/>
+                  </a:lnTo>
+                  <a:lnTo>
+                    <a:pt x="3684349" y="2344243"/>
+                  </a:lnTo>
+                  <a:lnTo>
+                    <a:pt x="3761593" y="2335593"/>
+                  </a:lnTo>
+                  <a:lnTo>
+                    <a:pt x="3838836" y="2326857"/>
+                  </a:lnTo>
+                  <a:lnTo>
+                    <a:pt x="3916080" y="2318034"/>
+                  </a:lnTo>
+                  <a:lnTo>
+                    <a:pt x="3993324" y="2309124"/>
+                  </a:lnTo>
+                  <a:lnTo>
+                    <a:pt x="4070567" y="2300125"/>
+                  </a:lnTo>
+                  <a:lnTo>
+                    <a:pt x="4147811" y="2291037"/>
+                  </a:lnTo>
+                  <a:lnTo>
+                    <a:pt x="4225054" y="2281858"/>
+                  </a:lnTo>
+                  <a:lnTo>
+                    <a:pt x="4302298" y="2272588"/>
+                  </a:lnTo>
+                  <a:lnTo>
+                    <a:pt x="4379541" y="2263227"/>
+                  </a:lnTo>
+                  <a:lnTo>
+                    <a:pt x="4456785" y="2253772"/>
+                  </a:lnTo>
+                  <a:lnTo>
+                    <a:pt x="4534029" y="2244224"/>
+                  </a:lnTo>
+                  <a:lnTo>
+                    <a:pt x="4611272" y="2234580"/>
+                  </a:lnTo>
+                  <a:lnTo>
+                    <a:pt x="4688516" y="2224841"/>
+                  </a:lnTo>
+                  <a:lnTo>
+                    <a:pt x="4765759" y="2215006"/>
+                  </a:lnTo>
+                  <a:lnTo>
+                    <a:pt x="4843003" y="2205072"/>
+                  </a:lnTo>
+                  <a:lnTo>
+                    <a:pt x="4920246" y="2195040"/>
+                  </a:lnTo>
+                  <a:lnTo>
+                    <a:pt x="4997490" y="2184909"/>
+                  </a:lnTo>
+                  <a:lnTo>
+                    <a:pt x="5074734" y="2174677"/>
+                  </a:lnTo>
+                  <a:lnTo>
+                    <a:pt x="5151977" y="2164343"/>
+                  </a:lnTo>
+                  <a:lnTo>
+                    <a:pt x="5229221" y="2153907"/>
+                  </a:lnTo>
+                  <a:lnTo>
+                    <a:pt x="5306464" y="2143367"/>
+                  </a:lnTo>
+                  <a:lnTo>
+                    <a:pt x="5383708" y="2132722"/>
+                  </a:lnTo>
+                  <a:lnTo>
+                    <a:pt x="5460951" y="2121972"/>
+                  </a:lnTo>
+                  <a:lnTo>
+                    <a:pt x="5538195" y="2111115"/>
+                  </a:lnTo>
+                  <a:lnTo>
+                    <a:pt x="5615439" y="2100150"/>
+                  </a:lnTo>
+                  <a:lnTo>
+                    <a:pt x="5692682" y="2089076"/>
+                  </a:lnTo>
+                  <a:lnTo>
+                    <a:pt x="5769926" y="2077892"/>
+                  </a:lnTo>
+                  <a:lnTo>
+                    <a:pt x="5847169" y="2066598"/>
+                  </a:lnTo>
+                  <a:lnTo>
+                    <a:pt x="5924413" y="2055191"/>
+                  </a:lnTo>
+                  <a:lnTo>
+                    <a:pt x="6001656" y="2043671"/>
+                  </a:lnTo>
+                  <a:lnTo>
+                    <a:pt x="6078900" y="2032036"/>
+                  </a:lnTo>
+                  <a:lnTo>
+                    <a:pt x="6156144" y="2020286"/>
+                  </a:lnTo>
+                  <a:lnTo>
+                    <a:pt x="6233387" y="2008420"/>
+                  </a:lnTo>
+                  <a:lnTo>
+                    <a:pt x="6310631" y="1996435"/>
+                  </a:lnTo>
+                  <a:lnTo>
+                    <a:pt x="6387874" y="1984332"/>
+                  </a:lnTo>
+                  <a:lnTo>
+                    <a:pt x="6465118" y="1972108"/>
+                  </a:lnTo>
+                  <a:lnTo>
+                    <a:pt x="6542361" y="1959763"/>
+                  </a:lnTo>
+                  <a:lnTo>
+                    <a:pt x="6619605" y="1947296"/>
+                  </a:lnTo>
+                  <a:lnTo>
+                    <a:pt x="6696849" y="1934705"/>
+                  </a:lnTo>
+                  <a:lnTo>
+                    <a:pt x="6774092" y="1921988"/>
+                  </a:lnTo>
+                  <a:lnTo>
+                    <a:pt x="6851336" y="1909146"/>
+                  </a:lnTo>
+                  <a:lnTo>
+                    <a:pt x="6928579" y="1896176"/>
+                  </a:lnTo>
+                  <a:lnTo>
+                    <a:pt x="7005823" y="1883077"/>
+                  </a:lnTo>
+                  <a:lnTo>
+                    <a:pt x="7083066" y="1869848"/>
+                  </a:lnTo>
+                  <a:lnTo>
+                    <a:pt x="7160310" y="1856488"/>
+                  </a:lnTo>
+                  <a:lnTo>
+                    <a:pt x="7237554" y="1842995"/>
+                  </a:lnTo>
+                  <a:lnTo>
+                    <a:pt x="7314797" y="1829368"/>
+                  </a:lnTo>
+                  <a:lnTo>
+                    <a:pt x="7392041" y="1815606"/>
                   </a:lnTo>
                 </a:path>
               </a:pathLst>
@@ -3931,303 +3931,303 @@
           </p:nvSpPr>
           <p:spPr>
             <a:xfrm>
-              <a:off x="817517" y="4679734"/>
-              <a:ext cx="7392041" cy="707398"/>
+              <a:off x="817517" y="4727981"/>
+              <a:ext cx="7392041" cy="674688"/>
             </a:xfrm>
             <a:custGeom>
               <a:avLst/>
               <a:pathLst>
-                <a:path w="7392041" h="707398">
+                <a:path w="7392041" h="674688">
                   <a:moveTo>
-                    <a:pt x="7392041" y="707398"/>
+                    <a:pt x="7392041" y="674688"/>
                   </a:moveTo>
                   <a:lnTo>
-                    <a:pt x="7314797" y="702176"/>
-                  </a:lnTo>
-                  <a:lnTo>
-                    <a:pt x="7237554" y="696785"/>
-                  </a:lnTo>
-                  <a:lnTo>
-                    <a:pt x="7160310" y="691221"/>
-                  </a:lnTo>
-                  <a:lnTo>
-                    <a:pt x="7083066" y="685478"/>
-                  </a:lnTo>
-                  <a:lnTo>
-                    <a:pt x="7005823" y="679549"/>
-                  </a:lnTo>
-                  <a:lnTo>
-                    <a:pt x="6928579" y="673429"/>
-                  </a:lnTo>
-                  <a:lnTo>
-                    <a:pt x="6851336" y="667112"/>
-                  </a:lnTo>
-                  <a:lnTo>
-                    <a:pt x="6774092" y="660592"/>
-                  </a:lnTo>
-                  <a:lnTo>
-                    <a:pt x="6696849" y="653861"/>
-                  </a:lnTo>
-                  <a:lnTo>
-                    <a:pt x="6619605" y="646914"/>
-                  </a:lnTo>
-                  <a:lnTo>
-                    <a:pt x="6542361" y="639743"/>
-                  </a:lnTo>
-                  <a:lnTo>
-                    <a:pt x="6465118" y="632340"/>
-                  </a:lnTo>
-                  <a:lnTo>
-                    <a:pt x="6387874" y="624700"/>
-                  </a:lnTo>
-                  <a:lnTo>
-                    <a:pt x="6310631" y="616813"/>
-                  </a:lnTo>
-                  <a:lnTo>
-                    <a:pt x="6233387" y="608671"/>
-                  </a:lnTo>
-                  <a:lnTo>
-                    <a:pt x="6156144" y="600268"/>
-                  </a:lnTo>
-                  <a:lnTo>
-                    <a:pt x="6078900" y="591594"/>
-                  </a:lnTo>
-                  <a:lnTo>
-                    <a:pt x="6001656" y="582640"/>
-                  </a:lnTo>
-                  <a:lnTo>
-                    <a:pt x="5924413" y="573398"/>
-                  </a:lnTo>
-                  <a:lnTo>
-                    <a:pt x="5847169" y="563857"/>
-                  </a:lnTo>
-                  <a:lnTo>
-                    <a:pt x="5769926" y="554010"/>
-                  </a:lnTo>
-                  <a:lnTo>
-                    <a:pt x="5692682" y="543845"/>
-                  </a:lnTo>
-                  <a:lnTo>
-                    <a:pt x="5615439" y="533353"/>
-                  </a:lnTo>
-                  <a:lnTo>
-                    <a:pt x="5538195" y="522523"/>
-                  </a:lnTo>
-                  <a:lnTo>
-                    <a:pt x="5460951" y="511343"/>
-                  </a:lnTo>
-                  <a:lnTo>
-                    <a:pt x="5383708" y="499804"/>
-                  </a:lnTo>
-                  <a:lnTo>
-                    <a:pt x="5306464" y="487892"/>
-                  </a:lnTo>
-                  <a:lnTo>
-                    <a:pt x="5229221" y="475597"/>
-                  </a:lnTo>
-                  <a:lnTo>
-                    <a:pt x="5151977" y="462906"/>
-                  </a:lnTo>
-                  <a:lnTo>
-                    <a:pt x="5074734" y="449805"/>
-                  </a:lnTo>
-                  <a:lnTo>
-                    <a:pt x="4997490" y="436283"/>
-                  </a:lnTo>
-                  <a:lnTo>
-                    <a:pt x="4920246" y="422325"/>
-                  </a:lnTo>
-                  <a:lnTo>
-                    <a:pt x="4843003" y="407917"/>
-                  </a:lnTo>
-                  <a:lnTo>
-                    <a:pt x="4765759" y="393044"/>
-                  </a:lnTo>
-                  <a:lnTo>
-                    <a:pt x="4688516" y="377693"/>
-                  </a:lnTo>
-                  <a:lnTo>
-                    <a:pt x="4611272" y="361847"/>
-                  </a:lnTo>
-                  <a:lnTo>
-                    <a:pt x="4534029" y="345490"/>
-                  </a:lnTo>
-                  <a:lnTo>
-                    <a:pt x="4456785" y="328607"/>
-                  </a:lnTo>
-                  <a:lnTo>
-                    <a:pt x="4379541" y="311179"/>
-                  </a:lnTo>
-                  <a:lnTo>
-                    <a:pt x="4302298" y="293190"/>
-                  </a:lnTo>
-                  <a:lnTo>
-                    <a:pt x="4225054" y="274621"/>
-                  </a:lnTo>
-                  <a:lnTo>
-                    <a:pt x="4147811" y="255454"/>
-                  </a:lnTo>
-                  <a:lnTo>
-                    <a:pt x="4070567" y="235669"/>
-                  </a:lnTo>
-                  <a:lnTo>
-                    <a:pt x="3993324" y="215247"/>
-                  </a:lnTo>
-                  <a:lnTo>
-                    <a:pt x="3916080" y="194166"/>
-                  </a:lnTo>
-                  <a:lnTo>
-                    <a:pt x="3838836" y="172407"/>
-                  </a:lnTo>
-                  <a:lnTo>
-                    <a:pt x="3761593" y="149946"/>
-                  </a:lnTo>
-                  <a:lnTo>
-                    <a:pt x="3684349" y="126761"/>
-                  </a:lnTo>
-                  <a:lnTo>
-                    <a:pt x="3607106" y="102830"/>
-                  </a:lnTo>
-                  <a:lnTo>
-                    <a:pt x="3529862" y="78127"/>
-                  </a:lnTo>
-                  <a:lnTo>
-                    <a:pt x="3452619" y="52629"/>
-                  </a:lnTo>
-                  <a:lnTo>
-                    <a:pt x="3375375" y="26308"/>
+                    <a:pt x="7314797" y="669708"/>
+                  </a:lnTo>
+                  <a:lnTo>
+                    <a:pt x="7237554" y="664566"/>
+                  </a:lnTo>
+                  <a:lnTo>
+                    <a:pt x="7160310" y="659259"/>
+                  </a:lnTo>
+                  <a:lnTo>
+                    <a:pt x="7083066" y="653781"/>
+                  </a:lnTo>
+                  <a:lnTo>
+                    <a:pt x="7005823" y="648127"/>
+                  </a:lnTo>
+                  <a:lnTo>
+                    <a:pt x="6928579" y="642290"/>
+                  </a:lnTo>
+                  <a:lnTo>
+                    <a:pt x="6851336" y="636265"/>
+                  </a:lnTo>
+                  <a:lnTo>
+                    <a:pt x="6774092" y="630046"/>
+                  </a:lnTo>
+                  <a:lnTo>
+                    <a:pt x="6696849" y="623627"/>
+                  </a:lnTo>
+                  <a:lnTo>
+                    <a:pt x="6619605" y="617001"/>
+                  </a:lnTo>
+                  <a:lnTo>
+                    <a:pt x="6542361" y="610161"/>
+                  </a:lnTo>
+                  <a:lnTo>
+                    <a:pt x="6465118" y="603101"/>
+                  </a:lnTo>
+                  <a:lnTo>
+                    <a:pt x="6387874" y="595814"/>
+                  </a:lnTo>
+                  <a:lnTo>
+                    <a:pt x="6310631" y="588291"/>
+                  </a:lnTo>
+                  <a:lnTo>
+                    <a:pt x="6233387" y="580527"/>
+                  </a:lnTo>
+                  <a:lnTo>
+                    <a:pt x="6156144" y="572512"/>
+                  </a:lnTo>
+                  <a:lnTo>
+                    <a:pt x="6078900" y="564239"/>
+                  </a:lnTo>
+                  <a:lnTo>
+                    <a:pt x="6001656" y="555699"/>
+                  </a:lnTo>
+                  <a:lnTo>
+                    <a:pt x="5924413" y="546884"/>
+                  </a:lnTo>
+                  <a:lnTo>
+                    <a:pt x="5847169" y="537785"/>
+                  </a:lnTo>
+                  <a:lnTo>
+                    <a:pt x="5769926" y="528393"/>
+                  </a:lnTo>
+                  <a:lnTo>
+                    <a:pt x="5692682" y="518698"/>
+                  </a:lnTo>
+                  <a:lnTo>
+                    <a:pt x="5615439" y="508691"/>
+                  </a:lnTo>
+                  <a:lnTo>
+                    <a:pt x="5538195" y="498361"/>
+                  </a:lnTo>
+                  <a:lnTo>
+                    <a:pt x="5460951" y="487699"/>
+                  </a:lnTo>
+                  <a:lnTo>
+                    <a:pt x="5383708" y="476693"/>
+                  </a:lnTo>
+                  <a:lnTo>
+                    <a:pt x="5306464" y="465332"/>
+                  </a:lnTo>
+                  <a:lnTo>
+                    <a:pt x="5229221" y="453605"/>
+                  </a:lnTo>
+                  <a:lnTo>
+                    <a:pt x="5151977" y="441501"/>
+                  </a:lnTo>
+                  <a:lnTo>
+                    <a:pt x="5074734" y="429006"/>
+                  </a:lnTo>
+                  <a:lnTo>
+                    <a:pt x="4997490" y="416109"/>
+                  </a:lnTo>
+                  <a:lnTo>
+                    <a:pt x="4920246" y="402796"/>
+                  </a:lnTo>
+                  <a:lnTo>
+                    <a:pt x="4843003" y="389055"/>
+                  </a:lnTo>
+                  <a:lnTo>
+                    <a:pt x="4765759" y="374870"/>
+                  </a:lnTo>
+                  <a:lnTo>
+                    <a:pt x="4688516" y="360229"/>
+                  </a:lnTo>
+                  <a:lnTo>
+                    <a:pt x="4611272" y="345115"/>
+                  </a:lnTo>
+                  <a:lnTo>
+                    <a:pt x="4534029" y="329515"/>
+                  </a:lnTo>
+                  <a:lnTo>
+                    <a:pt x="4456785" y="313412"/>
+                  </a:lnTo>
+                  <a:lnTo>
+                    <a:pt x="4379541" y="296790"/>
+                  </a:lnTo>
+                  <a:lnTo>
+                    <a:pt x="4302298" y="279633"/>
+                  </a:lnTo>
+                  <a:lnTo>
+                    <a:pt x="4225054" y="261923"/>
+                  </a:lnTo>
+                  <a:lnTo>
+                    <a:pt x="4147811" y="243642"/>
+                  </a:lnTo>
+                  <a:lnTo>
+                    <a:pt x="4070567" y="224772"/>
+                  </a:lnTo>
+                  <a:lnTo>
+                    <a:pt x="3993324" y="205294"/>
+                  </a:lnTo>
+                  <a:lnTo>
+                    <a:pt x="3916080" y="185188"/>
+                  </a:lnTo>
+                  <a:lnTo>
+                    <a:pt x="3838836" y="164435"/>
+                  </a:lnTo>
+                  <a:lnTo>
+                    <a:pt x="3761593" y="143012"/>
+                  </a:lnTo>
+                  <a:lnTo>
+                    <a:pt x="3684349" y="120900"/>
+                  </a:lnTo>
+                  <a:lnTo>
+                    <a:pt x="3607106" y="98075"/>
+                  </a:lnTo>
+                  <a:lnTo>
+                    <a:pt x="3529862" y="74515"/>
+                  </a:lnTo>
+                  <a:lnTo>
+                    <a:pt x="3452619" y="50195"/>
+                  </a:lnTo>
+                  <a:lnTo>
+                    <a:pt x="3375375" y="25092"/>
                   </a:lnTo>
                   <a:lnTo>
                     <a:pt x="3298131" y="0"/>
                   </a:lnTo>
                   <a:lnTo>
-                    <a:pt x="3220888" y="8547"/>
-                  </a:lnTo>
-                  <a:lnTo>
-                    <a:pt x="3143644" y="17011"/>
-                  </a:lnTo>
-                  <a:lnTo>
-                    <a:pt x="3066401" y="25391"/>
-                  </a:lnTo>
-                  <a:lnTo>
-                    <a:pt x="2989157" y="33689"/>
-                  </a:lnTo>
-                  <a:lnTo>
-                    <a:pt x="2911914" y="41906"/>
-                  </a:lnTo>
-                  <a:lnTo>
-                    <a:pt x="2834670" y="50041"/>
-                  </a:lnTo>
-                  <a:lnTo>
-                    <a:pt x="2757426" y="58097"/>
-                  </a:lnTo>
-                  <a:lnTo>
-                    <a:pt x="2680183" y="66073"/>
-                  </a:lnTo>
-                  <a:lnTo>
-                    <a:pt x="2602939" y="73971"/>
-                  </a:lnTo>
-                  <a:lnTo>
-                    <a:pt x="2525696" y="81792"/>
-                  </a:lnTo>
-                  <a:lnTo>
-                    <a:pt x="2448452" y="89535"/>
-                  </a:lnTo>
-                  <a:lnTo>
-                    <a:pt x="2371209" y="97203"/>
-                  </a:lnTo>
-                  <a:lnTo>
-                    <a:pt x="2293965" y="104795"/>
-                  </a:lnTo>
-                  <a:lnTo>
-                    <a:pt x="2216721" y="112312"/>
-                  </a:lnTo>
-                  <a:lnTo>
-                    <a:pt x="2139478" y="119756"/>
-                  </a:lnTo>
-                  <a:lnTo>
-                    <a:pt x="2062234" y="127126"/>
-                  </a:lnTo>
-                  <a:lnTo>
-                    <a:pt x="1984991" y="134424"/>
-                  </a:lnTo>
-                  <a:lnTo>
-                    <a:pt x="1907747" y="141650"/>
-                  </a:lnTo>
-                  <a:lnTo>
-                    <a:pt x="1830504" y="148805"/>
-                  </a:lnTo>
-                  <a:lnTo>
-                    <a:pt x="1753260" y="155890"/>
-                  </a:lnTo>
-                  <a:lnTo>
-                    <a:pt x="1676016" y="162905"/>
-                  </a:lnTo>
-                  <a:lnTo>
-                    <a:pt x="1598773" y="169851"/>
-                  </a:lnTo>
-                  <a:lnTo>
-                    <a:pt x="1521529" y="176729"/>
-                  </a:lnTo>
-                  <a:lnTo>
-                    <a:pt x="1444286" y="183539"/>
-                  </a:lnTo>
-                  <a:lnTo>
-                    <a:pt x="1367042" y="190282"/>
-                  </a:lnTo>
-                  <a:lnTo>
-                    <a:pt x="1289799" y="196959"/>
-                  </a:lnTo>
-                  <a:lnTo>
-                    <a:pt x="1212555" y="203571"/>
-                  </a:lnTo>
-                  <a:lnTo>
-                    <a:pt x="1135311" y="210117"/>
-                  </a:lnTo>
-                  <a:lnTo>
-                    <a:pt x="1058068" y="216599"/>
-                  </a:lnTo>
-                  <a:lnTo>
-                    <a:pt x="980824" y="223017"/>
-                  </a:lnTo>
-                  <a:lnTo>
-                    <a:pt x="903581" y="229372"/>
-                  </a:lnTo>
-                  <a:lnTo>
-                    <a:pt x="826337" y="235665"/>
-                  </a:lnTo>
-                  <a:lnTo>
-                    <a:pt x="749094" y="241896"/>
-                  </a:lnTo>
-                  <a:lnTo>
-                    <a:pt x="671850" y="248066"/>
-                  </a:lnTo>
-                  <a:lnTo>
-                    <a:pt x="594606" y="254174"/>
-                  </a:lnTo>
-                  <a:lnTo>
-                    <a:pt x="517363" y="260223"/>
-                  </a:lnTo>
-                  <a:lnTo>
-                    <a:pt x="440119" y="266213"/>
-                  </a:lnTo>
-                  <a:lnTo>
-                    <a:pt x="362876" y="272143"/>
-                  </a:lnTo>
-                  <a:lnTo>
-                    <a:pt x="285632" y="278016"/>
-                  </a:lnTo>
-                  <a:lnTo>
-                    <a:pt x="208389" y="283830"/>
-                  </a:lnTo>
-                  <a:lnTo>
-                    <a:pt x="131145" y="289587"/>
-                  </a:lnTo>
-                  <a:lnTo>
-                    <a:pt x="53901" y="295288"/>
-                  </a:lnTo>
-                  <a:lnTo>
-                    <a:pt x="0" y="299227"/>
+                    <a:pt x="3220888" y="8152"/>
+                  </a:lnTo>
+                  <a:lnTo>
+                    <a:pt x="3143644" y="16224"/>
+                  </a:lnTo>
+                  <a:lnTo>
+                    <a:pt x="3066401" y="24217"/>
+                  </a:lnTo>
+                  <a:lnTo>
+                    <a:pt x="2989157" y="32131"/>
+                  </a:lnTo>
+                  <a:lnTo>
+                    <a:pt x="2911914" y="39968"/>
+                  </a:lnTo>
+                  <a:lnTo>
+                    <a:pt x="2834670" y="47727"/>
+                  </a:lnTo>
+                  <a:lnTo>
+                    <a:pt x="2757426" y="55410"/>
+                  </a:lnTo>
+                  <a:lnTo>
+                    <a:pt x="2680183" y="63018"/>
+                  </a:lnTo>
+                  <a:lnTo>
+                    <a:pt x="2602939" y="70551"/>
+                  </a:lnTo>
+                  <a:lnTo>
+                    <a:pt x="2525696" y="78010"/>
+                  </a:lnTo>
+                  <a:lnTo>
+                    <a:pt x="2448452" y="85395"/>
+                  </a:lnTo>
+                  <a:lnTo>
+                    <a:pt x="2371209" y="92708"/>
+                  </a:lnTo>
+                  <a:lnTo>
+                    <a:pt x="2293965" y="99949"/>
+                  </a:lnTo>
+                  <a:lnTo>
+                    <a:pt x="2216721" y="107119"/>
+                  </a:lnTo>
+                  <a:lnTo>
+                    <a:pt x="2139478" y="114218"/>
+                  </a:lnTo>
+                  <a:lnTo>
+                    <a:pt x="2062234" y="121248"/>
+                  </a:lnTo>
+                  <a:lnTo>
+                    <a:pt x="1984991" y="128208"/>
+                  </a:lnTo>
+                  <a:lnTo>
+                    <a:pt x="1907747" y="135100"/>
+                  </a:lnTo>
+                  <a:lnTo>
+                    <a:pt x="1830504" y="141924"/>
+                  </a:lnTo>
+                  <a:lnTo>
+                    <a:pt x="1753260" y="148681"/>
+                  </a:lnTo>
+                  <a:lnTo>
+                    <a:pt x="1676016" y="155372"/>
+                  </a:lnTo>
+                  <a:lnTo>
+                    <a:pt x="1598773" y="161997"/>
+                  </a:lnTo>
+                  <a:lnTo>
+                    <a:pt x="1521529" y="168557"/>
+                  </a:lnTo>
+                  <a:lnTo>
+                    <a:pt x="1444286" y="175052"/>
+                  </a:lnTo>
+                  <a:lnTo>
+                    <a:pt x="1367042" y="181484"/>
+                  </a:lnTo>
+                  <a:lnTo>
+                    <a:pt x="1289799" y="187852"/>
+                  </a:lnTo>
+                  <a:lnTo>
+                    <a:pt x="1212555" y="194158"/>
+                  </a:lnTo>
+                  <a:lnTo>
+                    <a:pt x="1135311" y="200401"/>
+                  </a:lnTo>
+                  <a:lnTo>
+                    <a:pt x="1058068" y="206584"/>
+                  </a:lnTo>
+                  <a:lnTo>
+                    <a:pt x="980824" y="212705"/>
+                  </a:lnTo>
+                  <a:lnTo>
+                    <a:pt x="903581" y="218766"/>
+                  </a:lnTo>
+                  <a:lnTo>
+                    <a:pt x="826337" y="224768"/>
+                  </a:lnTo>
+                  <a:lnTo>
+                    <a:pt x="749094" y="230711"/>
+                  </a:lnTo>
+                  <a:lnTo>
+                    <a:pt x="671850" y="236595"/>
+                  </a:lnTo>
+                  <a:lnTo>
+                    <a:pt x="594606" y="242422"/>
+                  </a:lnTo>
+                  <a:lnTo>
+                    <a:pt x="517363" y="248191"/>
+                  </a:lnTo>
+                  <a:lnTo>
+                    <a:pt x="440119" y="253903"/>
+                  </a:lnTo>
+                  <a:lnTo>
+                    <a:pt x="362876" y="259559"/>
+                  </a:lnTo>
+                  <a:lnTo>
+                    <a:pt x="285632" y="265160"/>
+                  </a:lnTo>
+                  <a:lnTo>
+                    <a:pt x="208389" y="270706"/>
+                  </a:lnTo>
+                  <a:lnTo>
+                    <a:pt x="131145" y="276197"/>
+                  </a:lnTo>
+                  <a:lnTo>
+                    <a:pt x="53901" y="281634"/>
+                  </a:lnTo>
+                  <a:lnTo>
+                    <a:pt x="0" y="285391"/>
                   </a:lnTo>
                 </a:path>
               </a:pathLst>
@@ -4247,303 +4247,303 @@
           </p:nvSpPr>
           <p:spPr>
             <a:xfrm>
-              <a:off x="817517" y="4162719"/>
-              <a:ext cx="7392041" cy="898751"/>
+              <a:off x="817517" y="4234872"/>
+              <a:ext cx="7392041" cy="857193"/>
             </a:xfrm>
             <a:custGeom>
               <a:avLst/>
               <a:pathLst>
-                <a:path w="7392041" h="898751">
+                <a:path w="7392041" h="857193">
                   <a:moveTo>
                     <a:pt x="0" y="0"/>
                   </a:moveTo>
                   <a:lnTo>
-                    <a:pt x="53901" y="10539"/>
-                  </a:lnTo>
-                  <a:lnTo>
-                    <a:pt x="131145" y="25479"/>
-                  </a:lnTo>
-                  <a:lnTo>
-                    <a:pt x="208389" y="40256"/>
-                  </a:lnTo>
-                  <a:lnTo>
-                    <a:pt x="285632" y="54873"/>
-                  </a:lnTo>
-                  <a:lnTo>
-                    <a:pt x="362876" y="69331"/>
-                  </a:lnTo>
-                  <a:lnTo>
-                    <a:pt x="440119" y="83633"/>
-                  </a:lnTo>
-                  <a:lnTo>
-                    <a:pt x="517363" y="97779"/>
-                  </a:lnTo>
-                  <a:lnTo>
-                    <a:pt x="594606" y="111771"/>
-                  </a:lnTo>
-                  <a:lnTo>
-                    <a:pt x="671850" y="125612"/>
-                  </a:lnTo>
-                  <a:lnTo>
-                    <a:pt x="749094" y="139302"/>
-                  </a:lnTo>
-                  <a:lnTo>
-                    <a:pt x="826337" y="152843"/>
-                  </a:lnTo>
-                  <a:lnTo>
-                    <a:pt x="903581" y="166238"/>
-                  </a:lnTo>
-                  <a:lnTo>
-                    <a:pt x="980824" y="179487"/>
-                  </a:lnTo>
-                  <a:lnTo>
-                    <a:pt x="1058068" y="192592"/>
-                  </a:lnTo>
-                  <a:lnTo>
-                    <a:pt x="1135311" y="205555"/>
-                  </a:lnTo>
-                  <a:lnTo>
-                    <a:pt x="1212555" y="218378"/>
-                  </a:lnTo>
-                  <a:lnTo>
-                    <a:pt x="1289799" y="231061"/>
-                  </a:lnTo>
-                  <a:lnTo>
-                    <a:pt x="1367042" y="243606"/>
-                  </a:lnTo>
-                  <a:lnTo>
-                    <a:pt x="1444286" y="256015"/>
-                  </a:lnTo>
-                  <a:lnTo>
-                    <a:pt x="1521529" y="268289"/>
-                  </a:lnTo>
-                  <a:lnTo>
-                    <a:pt x="1598773" y="280430"/>
-                  </a:lnTo>
-                  <a:lnTo>
-                    <a:pt x="1676016" y="292440"/>
-                  </a:lnTo>
-                  <a:lnTo>
-                    <a:pt x="1753260" y="304318"/>
-                  </a:lnTo>
-                  <a:lnTo>
-                    <a:pt x="1830504" y="316068"/>
-                  </a:lnTo>
-                  <a:lnTo>
-                    <a:pt x="1907747" y="327691"/>
-                  </a:lnTo>
-                  <a:lnTo>
-                    <a:pt x="1984991" y="339187"/>
-                  </a:lnTo>
-                  <a:lnTo>
-                    <a:pt x="2062234" y="350558"/>
-                  </a:lnTo>
-                  <a:lnTo>
-                    <a:pt x="2139478" y="361806"/>
-                  </a:lnTo>
-                  <a:lnTo>
-                    <a:pt x="2216721" y="372931"/>
-                  </a:lnTo>
-                  <a:lnTo>
-                    <a:pt x="2293965" y="383936"/>
-                  </a:lnTo>
-                  <a:lnTo>
-                    <a:pt x="2371209" y="394822"/>
-                  </a:lnTo>
-                  <a:lnTo>
-                    <a:pt x="2448452" y="405589"/>
-                  </a:lnTo>
-                  <a:lnTo>
-                    <a:pt x="2525696" y="416239"/>
-                  </a:lnTo>
-                  <a:lnTo>
-                    <a:pt x="2602939" y="426774"/>
-                  </a:lnTo>
-                  <a:lnTo>
-                    <a:pt x="2680183" y="437194"/>
-                  </a:lnTo>
-                  <a:lnTo>
-                    <a:pt x="2757426" y="447501"/>
-                  </a:lnTo>
-                  <a:lnTo>
-                    <a:pt x="2834670" y="457697"/>
-                  </a:lnTo>
-                  <a:lnTo>
-                    <a:pt x="2911914" y="467781"/>
-                  </a:lnTo>
-                  <a:lnTo>
-                    <a:pt x="2989157" y="477756"/>
-                  </a:lnTo>
-                  <a:lnTo>
-                    <a:pt x="3066401" y="487623"/>
-                  </a:lnTo>
-                  <a:lnTo>
-                    <a:pt x="3143644" y="497383"/>
-                  </a:lnTo>
-                  <a:lnTo>
-                    <a:pt x="3220888" y="507036"/>
-                  </a:lnTo>
-                  <a:lnTo>
-                    <a:pt x="3298131" y="516585"/>
-                  </a:lnTo>
-                  <a:lnTo>
-                    <a:pt x="3375375" y="526030"/>
-                  </a:lnTo>
-                  <a:lnTo>
-                    <a:pt x="3452619" y="535373"/>
-                  </a:lnTo>
-                  <a:lnTo>
-                    <a:pt x="3529862" y="544614"/>
-                  </a:lnTo>
-                  <a:lnTo>
-                    <a:pt x="3607106" y="553755"/>
-                  </a:lnTo>
-                  <a:lnTo>
-                    <a:pt x="3684349" y="562796"/>
-                  </a:lnTo>
-                  <a:lnTo>
-                    <a:pt x="3761593" y="571740"/>
-                  </a:lnTo>
-                  <a:lnTo>
-                    <a:pt x="3838836" y="580586"/>
-                  </a:lnTo>
-                  <a:lnTo>
-                    <a:pt x="3916080" y="589336"/>
-                  </a:lnTo>
-                  <a:lnTo>
-                    <a:pt x="3993324" y="597991"/>
-                  </a:lnTo>
-                  <a:lnTo>
-                    <a:pt x="4070567" y="606553"/>
-                  </a:lnTo>
-                  <a:lnTo>
-                    <a:pt x="4147811" y="615021"/>
-                  </a:lnTo>
-                  <a:lnTo>
-                    <a:pt x="4225054" y="623397"/>
-                  </a:lnTo>
-                  <a:lnTo>
-                    <a:pt x="4302298" y="631683"/>
-                  </a:lnTo>
-                  <a:lnTo>
-                    <a:pt x="4379541" y="639878"/>
-                  </a:lnTo>
-                  <a:lnTo>
-                    <a:pt x="4456785" y="647985"/>
-                  </a:lnTo>
-                  <a:lnTo>
-                    <a:pt x="4534029" y="656003"/>
-                  </a:lnTo>
-                  <a:lnTo>
-                    <a:pt x="4611272" y="663935"/>
-                  </a:lnTo>
-                  <a:lnTo>
-                    <a:pt x="4688516" y="671780"/>
-                  </a:lnTo>
-                  <a:lnTo>
-                    <a:pt x="4765759" y="679540"/>
-                  </a:lnTo>
-                  <a:lnTo>
-                    <a:pt x="4843003" y="687216"/>
-                  </a:lnTo>
-                  <a:lnTo>
-                    <a:pt x="4920246" y="694808"/>
-                  </a:lnTo>
-                  <a:lnTo>
-                    <a:pt x="4997490" y="702318"/>
-                  </a:lnTo>
-                  <a:lnTo>
-                    <a:pt x="5074734" y="709747"/>
-                  </a:lnTo>
-                  <a:lnTo>
-                    <a:pt x="5151977" y="717095"/>
-                  </a:lnTo>
-                  <a:lnTo>
-                    <a:pt x="5229221" y="724363"/>
-                  </a:lnTo>
-                  <a:lnTo>
-                    <a:pt x="5306464" y="731552"/>
-                  </a:lnTo>
-                  <a:lnTo>
-                    <a:pt x="5383708" y="738663"/>
-                  </a:lnTo>
-                  <a:lnTo>
-                    <a:pt x="5460951" y="745697"/>
-                  </a:lnTo>
-                  <a:lnTo>
-                    <a:pt x="5538195" y="752654"/>
-                  </a:lnTo>
-                  <a:lnTo>
-                    <a:pt x="5615439" y="759536"/>
-                  </a:lnTo>
-                  <a:lnTo>
-                    <a:pt x="5692682" y="766344"/>
-                  </a:lnTo>
-                  <a:lnTo>
-                    <a:pt x="5769926" y="773077"/>
-                  </a:lnTo>
-                  <a:lnTo>
-                    <a:pt x="5847169" y="779737"/>
-                  </a:lnTo>
-                  <a:lnTo>
-                    <a:pt x="5924413" y="786325"/>
-                  </a:lnTo>
-                  <a:lnTo>
-                    <a:pt x="6001656" y="792841"/>
-                  </a:lnTo>
-                  <a:lnTo>
-                    <a:pt x="6078900" y="799287"/>
-                  </a:lnTo>
-                  <a:lnTo>
-                    <a:pt x="6156144" y="805663"/>
-                  </a:lnTo>
-                  <a:lnTo>
-                    <a:pt x="6233387" y="811969"/>
-                  </a:lnTo>
-                  <a:lnTo>
-                    <a:pt x="6310631" y="818207"/>
-                  </a:lnTo>
-                  <a:lnTo>
-                    <a:pt x="6387874" y="824377"/>
-                  </a:lnTo>
-                  <a:lnTo>
-                    <a:pt x="6465118" y="830481"/>
-                  </a:lnTo>
-                  <a:lnTo>
-                    <a:pt x="6542361" y="836518"/>
-                  </a:lnTo>
-                  <a:lnTo>
-                    <a:pt x="6619605" y="842489"/>
-                  </a:lnTo>
-                  <a:lnTo>
-                    <a:pt x="6696849" y="848396"/>
-                  </a:lnTo>
-                  <a:lnTo>
-                    <a:pt x="6774092" y="854238"/>
-                  </a:lnTo>
-                  <a:lnTo>
-                    <a:pt x="6851336" y="860017"/>
-                  </a:lnTo>
-                  <a:lnTo>
-                    <a:pt x="6928579" y="865733"/>
-                  </a:lnTo>
-                  <a:lnTo>
-                    <a:pt x="7005823" y="871387"/>
-                  </a:lnTo>
-                  <a:lnTo>
-                    <a:pt x="7083066" y="876980"/>
-                  </a:lnTo>
-                  <a:lnTo>
-                    <a:pt x="7160310" y="882512"/>
-                  </a:lnTo>
-                  <a:lnTo>
-                    <a:pt x="7237554" y="887984"/>
-                  </a:lnTo>
-                  <a:lnTo>
-                    <a:pt x="7314797" y="893397"/>
-                  </a:lnTo>
-                  <a:lnTo>
-                    <a:pt x="7392041" y="898751"/>
+                    <a:pt x="53901" y="10052"/>
+                  </a:lnTo>
+                  <a:lnTo>
+                    <a:pt x="131145" y="24301"/>
+                  </a:lnTo>
+                  <a:lnTo>
+                    <a:pt x="208389" y="38395"/>
+                  </a:lnTo>
+                  <a:lnTo>
+                    <a:pt x="285632" y="52336"/>
+                  </a:lnTo>
+                  <a:lnTo>
+                    <a:pt x="362876" y="66126"/>
+                  </a:lnTo>
+                  <a:lnTo>
+                    <a:pt x="440119" y="79766"/>
+                  </a:lnTo>
+                  <a:lnTo>
+                    <a:pt x="517363" y="93257"/>
+                  </a:lnTo>
+                  <a:lnTo>
+                    <a:pt x="594606" y="106603"/>
+                  </a:lnTo>
+                  <a:lnTo>
+                    <a:pt x="671850" y="119803"/>
+                  </a:lnTo>
+                  <a:lnTo>
+                    <a:pt x="749094" y="132861"/>
+                  </a:lnTo>
+                  <a:lnTo>
+                    <a:pt x="826337" y="145776"/>
+                  </a:lnTo>
+                  <a:lnTo>
+                    <a:pt x="903581" y="158551"/>
+                  </a:lnTo>
+                  <a:lnTo>
+                    <a:pt x="980824" y="171188"/>
+                  </a:lnTo>
+                  <a:lnTo>
+                    <a:pt x="1058068" y="183687"/>
+                  </a:lnTo>
+                  <a:lnTo>
+                    <a:pt x="1135311" y="196050"/>
+                  </a:lnTo>
+                  <a:lnTo>
+                    <a:pt x="1212555" y="208280"/>
+                  </a:lnTo>
+                  <a:lnTo>
+                    <a:pt x="1289799" y="220376"/>
+                  </a:lnTo>
+                  <a:lnTo>
+                    <a:pt x="1367042" y="232342"/>
+                  </a:lnTo>
+                  <a:lnTo>
+                    <a:pt x="1444286" y="244177"/>
+                  </a:lnTo>
+                  <a:lnTo>
+                    <a:pt x="1521529" y="255884"/>
+                  </a:lnTo>
+                  <a:lnTo>
+                    <a:pt x="1598773" y="267463"/>
+                  </a:lnTo>
+                  <a:lnTo>
+                    <a:pt x="1676016" y="278917"/>
+                  </a:lnTo>
+                  <a:lnTo>
+                    <a:pt x="1753260" y="290247"/>
+                  </a:lnTo>
+                  <a:lnTo>
+                    <a:pt x="1830504" y="301453"/>
+                  </a:lnTo>
+                  <a:lnTo>
+                    <a:pt x="1907747" y="312538"/>
+                  </a:lnTo>
+                  <a:lnTo>
+                    <a:pt x="1984991" y="323503"/>
+                  </a:lnTo>
+                  <a:lnTo>
+                    <a:pt x="2062234" y="334348"/>
+                  </a:lnTo>
+                  <a:lnTo>
+                    <a:pt x="2139478" y="345076"/>
+                  </a:lnTo>
+                  <a:lnTo>
+                    <a:pt x="2216721" y="355687"/>
+                  </a:lnTo>
+                  <a:lnTo>
+                    <a:pt x="2293965" y="366183"/>
+                  </a:lnTo>
+                  <a:lnTo>
+                    <a:pt x="2371209" y="376565"/>
+                  </a:lnTo>
+                  <a:lnTo>
+                    <a:pt x="2448452" y="386835"/>
+                  </a:lnTo>
+                  <a:lnTo>
+                    <a:pt x="2525696" y="396993"/>
+                  </a:lnTo>
+                  <a:lnTo>
+                    <a:pt x="2602939" y="407040"/>
+                  </a:lnTo>
+                  <a:lnTo>
+                    <a:pt x="2680183" y="416979"/>
+                  </a:lnTo>
+                  <a:lnTo>
+                    <a:pt x="2757426" y="426809"/>
+                  </a:lnTo>
+                  <a:lnTo>
+                    <a:pt x="2834670" y="436533"/>
+                  </a:lnTo>
+                  <a:lnTo>
+                    <a:pt x="2911914" y="446151"/>
+                  </a:lnTo>
+                  <a:lnTo>
+                    <a:pt x="2989157" y="455665"/>
+                  </a:lnTo>
+                  <a:lnTo>
+                    <a:pt x="3066401" y="465075"/>
+                  </a:lnTo>
+                  <a:lnTo>
+                    <a:pt x="3143644" y="474384"/>
+                  </a:lnTo>
+                  <a:lnTo>
+                    <a:pt x="3220888" y="483591"/>
+                  </a:lnTo>
+                  <a:lnTo>
+                    <a:pt x="3298131" y="492698"/>
+                  </a:lnTo>
+                  <a:lnTo>
+                    <a:pt x="3375375" y="501707"/>
+                  </a:lnTo>
+                  <a:lnTo>
+                    <a:pt x="3452619" y="510617"/>
+                  </a:lnTo>
+                  <a:lnTo>
+                    <a:pt x="3529862" y="519431"/>
+                  </a:lnTo>
+                  <a:lnTo>
+                    <a:pt x="3607106" y="528149"/>
+                  </a:lnTo>
+                  <a:lnTo>
+                    <a:pt x="3684349" y="536773"/>
+                  </a:lnTo>
+                  <a:lnTo>
+                    <a:pt x="3761593" y="545303"/>
+                  </a:lnTo>
+                  <a:lnTo>
+                    <a:pt x="3838836" y="553740"/>
+                  </a:lnTo>
+                  <a:lnTo>
+                    <a:pt x="3916080" y="562086"/>
+                  </a:lnTo>
+                  <a:lnTo>
+                    <a:pt x="3993324" y="570341"/>
+                  </a:lnTo>
+                  <a:lnTo>
+                    <a:pt x="4070567" y="578506"/>
+                  </a:lnTo>
+                  <a:lnTo>
+                    <a:pt x="4147811" y="586583"/>
+                  </a:lnTo>
+                  <a:lnTo>
+                    <a:pt x="4225054" y="594572"/>
+                  </a:lnTo>
+                  <a:lnTo>
+                    <a:pt x="4302298" y="602474"/>
+                  </a:lnTo>
+                  <a:lnTo>
+                    <a:pt x="4379541" y="610290"/>
+                  </a:lnTo>
+                  <a:lnTo>
+                    <a:pt x="4456785" y="618022"/>
+                  </a:lnTo>
+                  <a:lnTo>
+                    <a:pt x="4534029" y="625670"/>
+                  </a:lnTo>
+                  <a:lnTo>
+                    <a:pt x="4611272" y="633234"/>
+                  </a:lnTo>
+                  <a:lnTo>
+                    <a:pt x="4688516" y="640717"/>
+                  </a:lnTo>
+                  <a:lnTo>
+                    <a:pt x="4765759" y="648118"/>
+                  </a:lnTo>
+                  <a:lnTo>
+                    <a:pt x="4843003" y="655439"/>
+                  </a:lnTo>
+                  <a:lnTo>
+                    <a:pt x="4920246" y="662681"/>
+                  </a:lnTo>
+                  <a:lnTo>
+                    <a:pt x="4997490" y="669843"/>
+                  </a:lnTo>
+                  <a:lnTo>
+                    <a:pt x="5074734" y="676928"/>
+                  </a:lnTo>
+                  <a:lnTo>
+                    <a:pt x="5151977" y="683936"/>
+                  </a:lnTo>
+                  <a:lnTo>
+                    <a:pt x="5229221" y="690868"/>
+                  </a:lnTo>
+                  <a:lnTo>
+                    <a:pt x="5306464" y="697725"/>
+                  </a:lnTo>
+                  <a:lnTo>
+                    <a:pt x="5383708" y="704507"/>
+                  </a:lnTo>
+                  <a:lnTo>
+                    <a:pt x="5460951" y="711216"/>
+                  </a:lnTo>
+                  <a:lnTo>
+                    <a:pt x="5538195" y="717852"/>
+                  </a:lnTo>
+                  <a:lnTo>
+                    <a:pt x="5615439" y="724416"/>
+                  </a:lnTo>
+                  <a:lnTo>
+                    <a:pt x="5692682" y="730908"/>
+                  </a:lnTo>
+                  <a:lnTo>
+                    <a:pt x="5769926" y="737330"/>
+                  </a:lnTo>
+                  <a:lnTo>
+                    <a:pt x="5847169" y="743682"/>
+                  </a:lnTo>
+                  <a:lnTo>
+                    <a:pt x="5924413" y="749966"/>
+                  </a:lnTo>
+                  <a:lnTo>
+                    <a:pt x="6001656" y="756181"/>
+                  </a:lnTo>
+                  <a:lnTo>
+                    <a:pt x="6078900" y="762328"/>
+                  </a:lnTo>
+                  <a:lnTo>
+                    <a:pt x="6156144" y="768409"/>
+                  </a:lnTo>
+                  <a:lnTo>
+                    <a:pt x="6233387" y="774424"/>
+                  </a:lnTo>
+                  <a:lnTo>
+                    <a:pt x="6310631" y="780374"/>
+                  </a:lnTo>
+                  <a:lnTo>
+                    <a:pt x="6387874" y="786258"/>
+                  </a:lnTo>
+                  <a:lnTo>
+                    <a:pt x="6465118" y="792079"/>
+                  </a:lnTo>
+                  <a:lnTo>
+                    <a:pt x="6542361" y="797837"/>
+                  </a:lnTo>
+                  <a:lnTo>
+                    <a:pt x="6619605" y="803533"/>
+                  </a:lnTo>
+                  <a:lnTo>
+                    <a:pt x="6696849" y="809166"/>
+                  </a:lnTo>
+                  <a:lnTo>
+                    <a:pt x="6774092" y="814738"/>
+                  </a:lnTo>
+                  <a:lnTo>
+                    <a:pt x="6851336" y="820250"/>
+                  </a:lnTo>
+                  <a:lnTo>
+                    <a:pt x="6928579" y="825702"/>
+                  </a:lnTo>
+                  <a:lnTo>
+                    <a:pt x="7005823" y="831095"/>
+                  </a:lnTo>
+                  <a:lnTo>
+                    <a:pt x="7083066" y="836429"/>
+                  </a:lnTo>
+                  <a:lnTo>
+                    <a:pt x="7160310" y="841705"/>
+                  </a:lnTo>
+                  <a:lnTo>
+                    <a:pt x="7237554" y="846924"/>
+                  </a:lnTo>
+                  <a:lnTo>
+                    <a:pt x="7314797" y="852087"/>
+                  </a:lnTo>
+                  <a:lnTo>
+                    <a:pt x="7392041" y="857193"/>
                   </a:lnTo>
                 </a:path>
               </a:pathLst>
@@ -4572,7 +4572,7 @@
           </p:nvSpPr>
           <p:spPr>
             <a:xfrm>
-              <a:off x="817517" y="4679530"/>
+              <a:off x="817517" y="4727786"/>
               <a:ext cx="7799693" cy="0"/>
             </a:xfrm>
             <a:custGeom>
@@ -4615,15 +4615,15 @@
           </p:nvSpPr>
           <p:spPr>
             <a:xfrm>
-              <a:off x="4117484" y="1896563"/>
-              <a:ext cx="0" cy="3826579"/>
+              <a:off x="4117484" y="2073503"/>
+              <a:ext cx="0" cy="3649639"/>
             </a:xfrm>
             <a:custGeom>
               <a:avLst/>
               <a:pathLst>
-                <a:path w="0" h="3826579">
+                <a:path w="0" h="3649639">
                   <a:moveTo>
-                    <a:pt x="0" y="3826579"/>
+                    <a:pt x="0" y="3649639"/>
                   </a:moveTo>
                   <a:lnTo>
                     <a:pt x="0" y="0"/>
@@ -4658,7 +4658,7 @@
           </p:nvSpPr>
           <p:spPr>
             <a:xfrm>
-              <a:off x="692708" y="5509156"/>
+              <a:off x="692708" y="5517199"/>
               <a:ext cx="62179" cy="80101"/>
             </a:xfrm>
             <a:prstGeom prst="rect">
@@ -4704,7 +4704,7 @@
           </p:nvSpPr>
           <p:spPr>
             <a:xfrm>
-              <a:off x="692708" y="4639479"/>
+              <a:off x="692708" y="4687735"/>
               <a:ext cx="62179" cy="80101"/>
             </a:xfrm>
             <a:prstGeom prst="rect">
@@ -4750,7 +4750,7 @@
           </p:nvSpPr>
           <p:spPr>
             <a:xfrm>
-              <a:off x="692708" y="3769802"/>
+              <a:off x="692708" y="3858272"/>
               <a:ext cx="62179" cy="80101"/>
             </a:xfrm>
             <a:prstGeom prst="rect">
@@ -4796,7 +4796,7 @@
           </p:nvSpPr>
           <p:spPr>
             <a:xfrm>
-              <a:off x="692708" y="2900125"/>
+              <a:off x="692708" y="3028808"/>
               <a:ext cx="62179" cy="80101"/>
             </a:xfrm>
             <a:prstGeom prst="rect">
@@ -4842,7 +4842,7 @@
           </p:nvSpPr>
           <p:spPr>
             <a:xfrm>
-              <a:off x="692708" y="2030448"/>
+              <a:off x="692708" y="2199345"/>
               <a:ext cx="62179" cy="80101"/>
             </a:xfrm>
             <a:prstGeom prst="rect">
@@ -5118,7 +5118,7 @@
           </p:nvSpPr>
           <p:spPr>
             <a:xfrm rot="-5400000">
-              <a:off x="68446" y="3759743"/>
+              <a:off x="68446" y="3848213"/>
               <a:ext cx="1016904" cy="100218"/>
             </a:xfrm>
             <a:prstGeom prst="rect">
@@ -5159,6 +5159,52 @@
         <p:sp>
           <p:nvSpPr>
             <p:cNvPr id="38" name="tx38"/>
+            <p:cNvSpPr/>
+            <p:nvPr/>
+          </p:nvSpPr>
+          <p:spPr>
+            <a:xfrm>
+              <a:off x="817517" y="1896563"/>
+              <a:ext cx="5626211" cy="82021"/>
+            </a:xfrm>
+            <a:prstGeom prst="rect">
+              <a:avLst/>
+            </a:prstGeom>
+            <a:noFill/>
+          </p:spPr>
+          <p:txBody>
+            <a:bodyPr lIns="0" rIns="0" tIns="0" bIns="0" anchorCtr="1" anchor="ctr" wrap="none"/>
+            <a:lstStyle/>
+            <a:p>
+              <a:pPr algn="l" marL="0" marR="0" indent="0">
+                <a:lnSpc>
+                  <a:spcPts val="900"/>
+                </a:lnSpc>
+                <a:spcBef>
+                  <a:spcPts val="0"/>
+                </a:spcBef>
+                <a:spcAft>
+                  <a:spcPts val="0"/>
+                </a:spcAft>
+              </a:pPr>
+              <a:r>
+                <a:rPr sz="900">
+                  <a:solidFill>
+                    <a:srgbClr val="404040">
+                      <a:alpha val="100000"/>
+                    </a:srgbClr>
+                  </a:solidFill>
+                  <a:latin typeface="Helvetica"/>
+                  <a:cs typeface="Helvetica"/>
+                </a:rPr>
+                <a:t>subHR per 0.1 ratio decline: 1.13 (0.89-1.44)  |  per IQR decline (Δ = 0.30): 1.45 (0.72-2.93)  |  IQR: [0.84, 1.14]</a:t>
+              </a:r>
+            </a:p>
+          </p:txBody>
+        </p:sp>
+        <p:sp>
+          <p:nvSpPr>
+            <p:cNvPr id="39" name="tx39"/>
             <p:cNvSpPr/>
             <p:nvPr/>
           </p:nvSpPr>

--- a/docs/pptx/auc3/jx-auc3-linsubhr-ratio-hosp-immune-other.pptx
+++ b/docs/pptx/auc3/jx-auc3-linsubhr-ratio-hosp-immune-other.pptx
@@ -5165,7 +5165,7 @@
           <p:spPr>
             <a:xfrm>
               <a:off x="817517" y="1896563"/>
-              <a:ext cx="5626211" cy="82021"/>
+              <a:ext cx="6169365" cy="82021"/>
             </a:xfrm>
             <a:prstGeom prst="rect">
               <a:avLst/>
@@ -5197,7 +5197,7 @@
                   <a:latin typeface="Helvetica"/>
                   <a:cs typeface="Helvetica"/>
                 </a:rPr>
-                <a:t>subHR per 0.1 ratio decline: 1.13 (0.89-1.44)  |  per IQR decline (Δ = 0.30): 1.45 (0.72-2.93)  |  IQR: [0.84, 1.14]</a:t>
+                <a:t>subHR per 0.1 ratio decline: 1.13 (0.89-1.44), p = 0.304  |  per IQR decline (Δ = 0.30): 1.45 (0.72-2.93)  |  IQR: [0.84, 1.14]</a:t>
               </a:r>
             </a:p>
           </p:txBody>

--- a/docs/pptx/auc3/jx-auc3-linsubhr-ratio-hosp-immune-other.pptx
+++ b/docs/pptx/auc3/jx-auc3-linsubhr-ratio-hosp-immune-other.pptx
@@ -2443,7 +2443,7 @@
           </p:nvSpPr>
           <p:spPr>
             <a:xfrm>
-              <a:off x="1615213" y="2073503"/>
+              <a:off x="1531834" y="2073503"/>
               <a:ext cx="0" cy="3649639"/>
             </a:xfrm>
             <a:custGeom>
@@ -2486,7 +2486,7 @@
           </p:nvSpPr>
           <p:spPr>
             <a:xfrm>
-              <a:off x="3387871" y="2073503"/>
+              <a:off x="3586410" y="2073503"/>
               <a:ext cx="0" cy="3649639"/>
             </a:xfrm>
             <a:custGeom>
@@ -2529,7 +2529,7 @@
           </p:nvSpPr>
           <p:spPr>
             <a:xfrm>
-              <a:off x="5160528" y="2073503"/>
+              <a:off x="5640985" y="2073503"/>
               <a:ext cx="0" cy="3649639"/>
             </a:xfrm>
             <a:custGeom>
@@ -2572,7 +2572,7 @@
           </p:nvSpPr>
           <p:spPr>
             <a:xfrm>
-              <a:off x="6933186" y="2073503"/>
+              <a:off x="7695561" y="2073503"/>
               <a:ext cx="0" cy="3649639"/>
             </a:xfrm>
             <a:custGeom>
@@ -2830,7 +2830,7 @@
           </p:nvSpPr>
           <p:spPr>
             <a:xfrm>
-              <a:off x="2501542" y="2073503"/>
+              <a:off x="2559122" y="2073503"/>
               <a:ext cx="0" cy="3649639"/>
             </a:xfrm>
             <a:custGeom>
@@ -2873,7 +2873,7 @@
           </p:nvSpPr>
           <p:spPr>
             <a:xfrm>
-              <a:off x="4274200" y="2073503"/>
+              <a:off x="4613698" y="2073503"/>
               <a:ext cx="0" cy="3649639"/>
             </a:xfrm>
             <a:custGeom>
@@ -2916,7 +2916,7 @@
           </p:nvSpPr>
           <p:spPr>
             <a:xfrm>
-              <a:off x="6046857" y="2073503"/>
+              <a:off x="6668273" y="2073503"/>
               <a:ext cx="0" cy="3649639"/>
             </a:xfrm>
             <a:custGeom>
@@ -2953,643 +2953,618 @@
         </p:sp>
         <p:sp>
           <p:nvSpPr>
-            <p:cNvPr id="20" name="pl20"/>
+            <p:cNvPr id="20" name="pg20"/>
             <p:cNvSpPr/>
             <p:nvPr/>
           </p:nvSpPr>
           <p:spPr>
             <a:xfrm>
-              <a:off x="7819515" y="2073503"/>
-              <a:ext cx="0" cy="3649639"/>
+              <a:off x="1172049" y="2073503"/>
+              <a:ext cx="7090630" cy="3329166"/>
             </a:xfrm>
             <a:custGeom>
               <a:avLst/>
               <a:pathLst>
-                <a:path w="0" h="3649639">
+                <a:path w="7090630" h="3329166">
                   <a:moveTo>
-                    <a:pt x="0" y="3649639"/>
+                    <a:pt x="55517" y="0"/>
                   </a:moveTo>
                   <a:lnTo>
-                    <a:pt x="0" y="0"/>
-                  </a:lnTo>
-                  <a:lnTo>
-                    <a:pt x="0" y="0"/>
-                  </a:lnTo>
-                </a:path>
-              </a:pathLst>
-            </a:custGeom>
-            <a:ln w="13550" cap="flat">
-              <a:solidFill>
-                <a:srgbClr val="EBEBEB">
-                  <a:alpha val="100000"/>
-                </a:srgbClr>
-              </a:solidFill>
-              <a:prstDash val="solid"/>
-              <a:round/>
-            </a:ln>
-          </p:spPr>
-          <p:txBody>
-            <a:bodyPr/>
-            <a:lstStyle/>
-            <a:p/>
-          </p:txBody>
-        </p:sp>
-        <p:sp>
-          <p:nvSpPr>
-            <p:cNvPr id="21" name="pg21"/>
-            <p:cNvSpPr/>
-            <p:nvPr/>
-          </p:nvSpPr>
-          <p:spPr>
-            <a:xfrm>
-              <a:off x="817517" y="2341744"/>
-              <a:ext cx="7392041" cy="3060925"/>
-            </a:xfrm>
-            <a:custGeom>
-              <a:avLst/>
-              <a:pathLst>
-                <a:path w="7392041" h="3060925">
-                  <a:moveTo>
-                    <a:pt x="0" y="0"/>
-                  </a:moveTo>
-                  <a:lnTo>
-                    <a:pt x="53901" y="70710"/>
-                  </a:lnTo>
-                  <a:lnTo>
-                    <a:pt x="131145" y="168878"/>
-                  </a:lnTo>
-                  <a:lnTo>
-                    <a:pt x="208389" y="263982"/>
-                  </a:lnTo>
-                  <a:lnTo>
-                    <a:pt x="285632" y="356116"/>
-                  </a:lnTo>
-                  <a:lnTo>
-                    <a:pt x="362876" y="445375"/>
-                  </a:lnTo>
-                  <a:lnTo>
-                    <a:pt x="440119" y="531847"/>
-                  </a:lnTo>
-                  <a:lnTo>
-                    <a:pt x="517363" y="615620"/>
-                  </a:lnTo>
-                  <a:lnTo>
-                    <a:pt x="594606" y="696778"/>
-                  </a:lnTo>
-                  <a:lnTo>
-                    <a:pt x="671850" y="775403"/>
-                  </a:lnTo>
-                  <a:lnTo>
-                    <a:pt x="749094" y="851573"/>
-                  </a:lnTo>
-                  <a:lnTo>
-                    <a:pt x="826337" y="925366"/>
-                  </a:lnTo>
-                  <a:lnTo>
-                    <a:pt x="903581" y="996855"/>
-                  </a:lnTo>
-                  <a:lnTo>
-                    <a:pt x="980824" y="1066112"/>
-                  </a:lnTo>
-                  <a:lnTo>
-                    <a:pt x="1058068" y="1133207"/>
-                  </a:lnTo>
-                  <a:lnTo>
-                    <a:pt x="1135311" y="1198208"/>
-                  </a:lnTo>
-                  <a:lnTo>
-                    <a:pt x="1212555" y="1261180"/>
-                  </a:lnTo>
-                  <a:lnTo>
-                    <a:pt x="1289799" y="1322187"/>
-                  </a:lnTo>
-                  <a:lnTo>
-                    <a:pt x="1367042" y="1381288"/>
-                  </a:lnTo>
-                  <a:lnTo>
-                    <a:pt x="1444286" y="1438545"/>
-                  </a:lnTo>
-                  <a:lnTo>
-                    <a:pt x="1521529" y="1494015"/>
-                  </a:lnTo>
-                  <a:lnTo>
-                    <a:pt x="1598773" y="1547753"/>
-                  </a:lnTo>
-                  <a:lnTo>
-                    <a:pt x="1676016" y="1599813"/>
-                  </a:lnTo>
-                  <a:lnTo>
-                    <a:pt x="1753260" y="1650249"/>
-                  </a:lnTo>
-                  <a:lnTo>
-                    <a:pt x="1830504" y="1699110"/>
-                  </a:lnTo>
-                  <a:lnTo>
-                    <a:pt x="1907747" y="1746446"/>
-                  </a:lnTo>
-                  <a:lnTo>
-                    <a:pt x="1984991" y="1792304"/>
-                  </a:lnTo>
-                  <a:lnTo>
-                    <a:pt x="2062234" y="1836730"/>
-                  </a:lnTo>
-                  <a:lnTo>
-                    <a:pt x="2139478" y="1879770"/>
-                  </a:lnTo>
-                  <a:lnTo>
-                    <a:pt x="2216721" y="1921466"/>
-                  </a:lnTo>
-                  <a:lnTo>
-                    <a:pt x="2293965" y="1961861"/>
-                  </a:lnTo>
-                  <a:lnTo>
-                    <a:pt x="2371209" y="2000995"/>
-                  </a:lnTo>
-                  <a:lnTo>
-                    <a:pt x="2448452" y="2038907"/>
-                  </a:lnTo>
-                  <a:lnTo>
-                    <a:pt x="2525696" y="2075636"/>
-                  </a:lnTo>
-                  <a:lnTo>
-                    <a:pt x="2602939" y="2111218"/>
-                  </a:lnTo>
-                  <a:lnTo>
-                    <a:pt x="2680183" y="2145689"/>
-                  </a:lnTo>
-                  <a:lnTo>
-                    <a:pt x="2757426" y="2179085"/>
-                  </a:lnTo>
-                  <a:lnTo>
-                    <a:pt x="2834670" y="2211438"/>
-                  </a:lnTo>
-                  <a:lnTo>
-                    <a:pt x="2911914" y="2242780"/>
-                  </a:lnTo>
-                  <a:lnTo>
-                    <a:pt x="2989157" y="2273145"/>
-                  </a:lnTo>
-                  <a:lnTo>
-                    <a:pt x="3066401" y="2302562"/>
-                  </a:lnTo>
-                  <a:lnTo>
-                    <a:pt x="3143644" y="2331060"/>
-                  </a:lnTo>
-                  <a:lnTo>
-                    <a:pt x="3220888" y="2358669"/>
-                  </a:lnTo>
-                  <a:lnTo>
-                    <a:pt x="3298131" y="2385416"/>
-                  </a:lnTo>
-                  <a:lnTo>
-                    <a:pt x="3375375" y="2378002"/>
-                  </a:lnTo>
-                  <a:lnTo>
-                    <a:pt x="3452619" y="2369687"/>
-                  </a:lnTo>
-                  <a:lnTo>
-                    <a:pt x="3529862" y="2361290"/>
-                  </a:lnTo>
-                  <a:lnTo>
-                    <a:pt x="3607106" y="2352809"/>
-                  </a:lnTo>
-                  <a:lnTo>
-                    <a:pt x="3684349" y="2344243"/>
-                  </a:lnTo>
-                  <a:lnTo>
-                    <a:pt x="3761593" y="2335593"/>
-                  </a:lnTo>
-                  <a:lnTo>
-                    <a:pt x="3838836" y="2326857"/>
-                  </a:lnTo>
-                  <a:lnTo>
-                    <a:pt x="3916080" y="2318034"/>
-                  </a:lnTo>
-                  <a:lnTo>
-                    <a:pt x="3993324" y="2309124"/>
-                  </a:lnTo>
-                  <a:lnTo>
-                    <a:pt x="4070567" y="2300125"/>
-                  </a:lnTo>
-                  <a:lnTo>
-                    <a:pt x="4147811" y="2291037"/>
-                  </a:lnTo>
-                  <a:lnTo>
-                    <a:pt x="4225054" y="2281858"/>
-                  </a:lnTo>
-                  <a:lnTo>
-                    <a:pt x="4302298" y="2272588"/>
-                  </a:lnTo>
-                  <a:lnTo>
-                    <a:pt x="4379541" y="2263227"/>
-                  </a:lnTo>
-                  <a:lnTo>
-                    <a:pt x="4456785" y="2253772"/>
-                  </a:lnTo>
-                  <a:lnTo>
-                    <a:pt x="4534029" y="2244224"/>
-                  </a:lnTo>
-                  <a:lnTo>
-                    <a:pt x="4611272" y="2234580"/>
-                  </a:lnTo>
-                  <a:lnTo>
-                    <a:pt x="4688516" y="2224841"/>
-                  </a:lnTo>
-                  <a:lnTo>
-                    <a:pt x="4765759" y="2215006"/>
-                  </a:lnTo>
-                  <a:lnTo>
-                    <a:pt x="4843003" y="2205072"/>
-                  </a:lnTo>
-                  <a:lnTo>
-                    <a:pt x="4920246" y="2195040"/>
-                  </a:lnTo>
-                  <a:lnTo>
-                    <a:pt x="4997490" y="2184909"/>
-                  </a:lnTo>
-                  <a:lnTo>
-                    <a:pt x="5074734" y="2174677"/>
-                  </a:lnTo>
-                  <a:lnTo>
-                    <a:pt x="5151977" y="2164343"/>
-                  </a:lnTo>
-                  <a:lnTo>
-                    <a:pt x="5229221" y="2153907"/>
-                  </a:lnTo>
-                  <a:lnTo>
-                    <a:pt x="5306464" y="2143367"/>
-                  </a:lnTo>
-                  <a:lnTo>
-                    <a:pt x="5383708" y="2132722"/>
-                  </a:lnTo>
-                  <a:lnTo>
-                    <a:pt x="5460951" y="2121972"/>
-                  </a:lnTo>
-                  <a:lnTo>
-                    <a:pt x="5538195" y="2111115"/>
-                  </a:lnTo>
-                  <a:lnTo>
-                    <a:pt x="5615439" y="2100150"/>
-                  </a:lnTo>
-                  <a:lnTo>
-                    <a:pt x="5692682" y="2089076"/>
-                  </a:lnTo>
-                  <a:lnTo>
-                    <a:pt x="5769926" y="2077892"/>
-                  </a:lnTo>
-                  <a:lnTo>
-                    <a:pt x="5847169" y="2066598"/>
-                  </a:lnTo>
-                  <a:lnTo>
-                    <a:pt x="5924413" y="2055191"/>
-                  </a:lnTo>
-                  <a:lnTo>
-                    <a:pt x="6001656" y="2043671"/>
-                  </a:lnTo>
-                  <a:lnTo>
-                    <a:pt x="6078900" y="2032036"/>
-                  </a:lnTo>
-                  <a:lnTo>
-                    <a:pt x="6156144" y="2020286"/>
-                  </a:lnTo>
-                  <a:lnTo>
-                    <a:pt x="6233387" y="2008420"/>
-                  </a:lnTo>
-                  <a:lnTo>
-                    <a:pt x="6310631" y="1996435"/>
-                  </a:lnTo>
-                  <a:lnTo>
-                    <a:pt x="6387874" y="1984332"/>
-                  </a:lnTo>
-                  <a:lnTo>
-                    <a:pt x="6465118" y="1972108"/>
-                  </a:lnTo>
-                  <a:lnTo>
-                    <a:pt x="6542361" y="1959763"/>
-                  </a:lnTo>
-                  <a:lnTo>
-                    <a:pt x="6619605" y="1947296"/>
-                  </a:lnTo>
-                  <a:lnTo>
-                    <a:pt x="6696849" y="1934705"/>
-                  </a:lnTo>
-                  <a:lnTo>
-                    <a:pt x="6774092" y="1921988"/>
-                  </a:lnTo>
-                  <a:lnTo>
-                    <a:pt x="6851336" y="1909146"/>
-                  </a:lnTo>
-                  <a:lnTo>
-                    <a:pt x="6928579" y="1896176"/>
-                  </a:lnTo>
-                  <a:lnTo>
-                    <a:pt x="7005823" y="1883077"/>
-                  </a:lnTo>
-                  <a:lnTo>
-                    <a:pt x="7083066" y="1869848"/>
-                  </a:lnTo>
-                  <a:lnTo>
-                    <a:pt x="7160310" y="1856488"/>
-                  </a:lnTo>
-                  <a:lnTo>
-                    <a:pt x="7237554" y="1842995"/>
-                  </a:lnTo>
-                  <a:lnTo>
-                    <a:pt x="7314797" y="1829368"/>
-                  </a:lnTo>
-                  <a:lnTo>
-                    <a:pt x="7392041" y="1815606"/>
-                  </a:lnTo>
-                  <a:lnTo>
-                    <a:pt x="7392041" y="3060925"/>
-                  </a:lnTo>
-                  <a:lnTo>
-                    <a:pt x="7314797" y="3055944"/>
-                  </a:lnTo>
-                  <a:lnTo>
-                    <a:pt x="7237554" y="3050802"/>
-                  </a:lnTo>
-                  <a:lnTo>
-                    <a:pt x="7160310" y="3045495"/>
-                  </a:lnTo>
-                  <a:lnTo>
-                    <a:pt x="7083066" y="3040017"/>
-                  </a:lnTo>
-                  <a:lnTo>
-                    <a:pt x="7005823" y="3034363"/>
-                  </a:lnTo>
-                  <a:lnTo>
-                    <a:pt x="6928579" y="3028526"/>
-                  </a:lnTo>
-                  <a:lnTo>
-                    <a:pt x="6851336" y="3022501"/>
-                  </a:lnTo>
-                  <a:lnTo>
-                    <a:pt x="6774092" y="3016282"/>
-                  </a:lnTo>
-                  <a:lnTo>
-                    <a:pt x="6696849" y="3009863"/>
-                  </a:lnTo>
-                  <a:lnTo>
-                    <a:pt x="6619605" y="3003237"/>
-                  </a:lnTo>
-                  <a:lnTo>
-                    <a:pt x="6542361" y="2996397"/>
-                  </a:lnTo>
-                  <a:lnTo>
-                    <a:pt x="6465118" y="2989337"/>
-                  </a:lnTo>
-                  <a:lnTo>
-                    <a:pt x="6387874" y="2982050"/>
-                  </a:lnTo>
-                  <a:lnTo>
-                    <a:pt x="6310631" y="2974527"/>
-                  </a:lnTo>
-                  <a:lnTo>
-                    <a:pt x="6233387" y="2966763"/>
-                  </a:lnTo>
-                  <a:lnTo>
-                    <a:pt x="6156144" y="2958748"/>
-                  </a:lnTo>
-                  <a:lnTo>
-                    <a:pt x="6078900" y="2950475"/>
-                  </a:lnTo>
-                  <a:lnTo>
-                    <a:pt x="6001656" y="2941935"/>
-                  </a:lnTo>
-                  <a:lnTo>
-                    <a:pt x="5924413" y="2933120"/>
-                  </a:lnTo>
-                  <a:lnTo>
-                    <a:pt x="5847169" y="2924021"/>
-                  </a:lnTo>
-                  <a:lnTo>
-                    <a:pt x="5769926" y="2914629"/>
-                  </a:lnTo>
-                  <a:lnTo>
-                    <a:pt x="5692682" y="2904934"/>
-                  </a:lnTo>
-                  <a:lnTo>
-                    <a:pt x="5615439" y="2894927"/>
-                  </a:lnTo>
-                  <a:lnTo>
-                    <a:pt x="5538195" y="2884597"/>
-                  </a:lnTo>
-                  <a:lnTo>
-                    <a:pt x="5460951" y="2873935"/>
-                  </a:lnTo>
-                  <a:lnTo>
-                    <a:pt x="5383708" y="2862929"/>
-                  </a:lnTo>
-                  <a:lnTo>
-                    <a:pt x="5306464" y="2851568"/>
-                  </a:lnTo>
-                  <a:lnTo>
-                    <a:pt x="5229221" y="2839842"/>
-                  </a:lnTo>
-                  <a:lnTo>
-                    <a:pt x="5151977" y="2827737"/>
-                  </a:lnTo>
-                  <a:lnTo>
-                    <a:pt x="5074734" y="2815242"/>
-                  </a:lnTo>
-                  <a:lnTo>
-                    <a:pt x="4997490" y="2802345"/>
-                  </a:lnTo>
-                  <a:lnTo>
-                    <a:pt x="4920246" y="2789033"/>
-                  </a:lnTo>
-                  <a:lnTo>
-                    <a:pt x="4843003" y="2775291"/>
-                  </a:lnTo>
-                  <a:lnTo>
-                    <a:pt x="4765759" y="2761106"/>
-                  </a:lnTo>
-                  <a:lnTo>
-                    <a:pt x="4688516" y="2746465"/>
-                  </a:lnTo>
-                  <a:lnTo>
-                    <a:pt x="4611272" y="2731351"/>
-                  </a:lnTo>
-                  <a:lnTo>
-                    <a:pt x="4534029" y="2715751"/>
-                  </a:lnTo>
-                  <a:lnTo>
-                    <a:pt x="4456785" y="2699648"/>
-                  </a:lnTo>
-                  <a:lnTo>
-                    <a:pt x="4379541" y="2683026"/>
-                  </a:lnTo>
-                  <a:lnTo>
-                    <a:pt x="4302298" y="2665869"/>
-                  </a:lnTo>
-                  <a:lnTo>
-                    <a:pt x="4225054" y="2648159"/>
-                  </a:lnTo>
-                  <a:lnTo>
-                    <a:pt x="4147811" y="2629878"/>
-                  </a:lnTo>
-                  <a:lnTo>
-                    <a:pt x="4070567" y="2611008"/>
-                  </a:lnTo>
-                  <a:lnTo>
-                    <a:pt x="3993324" y="2591530"/>
-                  </a:lnTo>
-                  <a:lnTo>
-                    <a:pt x="3916080" y="2571424"/>
-                  </a:lnTo>
-                  <a:lnTo>
-                    <a:pt x="3838836" y="2550671"/>
-                  </a:lnTo>
-                  <a:lnTo>
-                    <a:pt x="3761593" y="2529249"/>
-                  </a:lnTo>
-                  <a:lnTo>
-                    <a:pt x="3684349" y="2507136"/>
-                  </a:lnTo>
-                  <a:lnTo>
-                    <a:pt x="3607106" y="2484311"/>
-                  </a:lnTo>
-                  <a:lnTo>
-                    <a:pt x="3529862" y="2460751"/>
-                  </a:lnTo>
-                  <a:lnTo>
-                    <a:pt x="3452619" y="2436431"/>
-                  </a:lnTo>
-                  <a:lnTo>
-                    <a:pt x="3375375" y="2411328"/>
-                  </a:lnTo>
-                  <a:lnTo>
-                    <a:pt x="3298131" y="2386236"/>
-                  </a:lnTo>
-                  <a:lnTo>
-                    <a:pt x="3220888" y="2394388"/>
-                  </a:lnTo>
-                  <a:lnTo>
-                    <a:pt x="3143644" y="2402460"/>
-                  </a:lnTo>
-                  <a:lnTo>
-                    <a:pt x="3066401" y="2410453"/>
-                  </a:lnTo>
-                  <a:lnTo>
-                    <a:pt x="2989157" y="2418367"/>
-                  </a:lnTo>
-                  <a:lnTo>
-                    <a:pt x="2911914" y="2426204"/>
-                  </a:lnTo>
-                  <a:lnTo>
-                    <a:pt x="2834670" y="2433963"/>
-                  </a:lnTo>
-                  <a:lnTo>
-                    <a:pt x="2757426" y="2441647"/>
-                  </a:lnTo>
-                  <a:lnTo>
-                    <a:pt x="2680183" y="2449254"/>
-                  </a:lnTo>
-                  <a:lnTo>
-                    <a:pt x="2602939" y="2456787"/>
-                  </a:lnTo>
-                  <a:lnTo>
-                    <a:pt x="2525696" y="2464246"/>
-                  </a:lnTo>
-                  <a:lnTo>
-                    <a:pt x="2448452" y="2471631"/>
-                  </a:lnTo>
-                  <a:lnTo>
-                    <a:pt x="2371209" y="2478944"/>
-                  </a:lnTo>
-                  <a:lnTo>
-                    <a:pt x="2293965" y="2486185"/>
-                  </a:lnTo>
-                  <a:lnTo>
-                    <a:pt x="2216721" y="2493355"/>
-                  </a:lnTo>
-                  <a:lnTo>
-                    <a:pt x="2139478" y="2500454"/>
-                  </a:lnTo>
-                  <a:lnTo>
-                    <a:pt x="2062234" y="2507484"/>
-                  </a:lnTo>
-                  <a:lnTo>
-                    <a:pt x="1984991" y="2514444"/>
-                  </a:lnTo>
-                  <a:lnTo>
-                    <a:pt x="1907747" y="2521336"/>
-                  </a:lnTo>
-                  <a:lnTo>
-                    <a:pt x="1830504" y="2528160"/>
-                  </a:lnTo>
-                  <a:lnTo>
-                    <a:pt x="1753260" y="2534918"/>
-                  </a:lnTo>
-                  <a:lnTo>
-                    <a:pt x="1676016" y="2541608"/>
-                  </a:lnTo>
-                  <a:lnTo>
-                    <a:pt x="1598773" y="2548233"/>
-                  </a:lnTo>
-                  <a:lnTo>
-                    <a:pt x="1521529" y="2554793"/>
-                  </a:lnTo>
-                  <a:lnTo>
-                    <a:pt x="1444286" y="2561288"/>
-                  </a:lnTo>
-                  <a:lnTo>
-                    <a:pt x="1367042" y="2567720"/>
-                  </a:lnTo>
-                  <a:lnTo>
-                    <a:pt x="1289799" y="2574088"/>
-                  </a:lnTo>
-                  <a:lnTo>
-                    <a:pt x="1212555" y="2580394"/>
-                  </a:lnTo>
-                  <a:lnTo>
-                    <a:pt x="1135311" y="2586637"/>
-                  </a:lnTo>
-                  <a:lnTo>
-                    <a:pt x="1058068" y="2592820"/>
-                  </a:lnTo>
-                  <a:lnTo>
-                    <a:pt x="980824" y="2598941"/>
-                  </a:lnTo>
-                  <a:lnTo>
-                    <a:pt x="903581" y="2605002"/>
-                  </a:lnTo>
-                  <a:lnTo>
-                    <a:pt x="826337" y="2611004"/>
-                  </a:lnTo>
-                  <a:lnTo>
-                    <a:pt x="749094" y="2616947"/>
-                  </a:lnTo>
-                  <a:lnTo>
-                    <a:pt x="671850" y="2622831"/>
-                  </a:lnTo>
-                  <a:lnTo>
-                    <a:pt x="594606" y="2628658"/>
-                  </a:lnTo>
-                  <a:lnTo>
-                    <a:pt x="517363" y="2634427"/>
-                  </a:lnTo>
-                  <a:lnTo>
-                    <a:pt x="440119" y="2640139"/>
-                  </a:lnTo>
-                  <a:lnTo>
-                    <a:pt x="362876" y="2645796"/>
-                  </a:lnTo>
-                  <a:lnTo>
-                    <a:pt x="285632" y="2651396"/>
-                  </a:lnTo>
-                  <a:lnTo>
-                    <a:pt x="208389" y="2656942"/>
-                  </a:lnTo>
-                  <a:lnTo>
-                    <a:pt x="131145" y="2662433"/>
-                  </a:lnTo>
-                  <a:lnTo>
-                    <a:pt x="53901" y="2667870"/>
-                  </a:lnTo>
-                  <a:lnTo>
-                    <a:pt x="0" y="2671627"/>
+                    <a:pt x="71622" y="25058"/>
+                  </a:lnTo>
+                  <a:lnTo>
+                    <a:pt x="143245" y="133025"/>
+                  </a:lnTo>
+                  <a:lnTo>
+                    <a:pt x="214867" y="237621"/>
+                  </a:lnTo>
+                  <a:lnTo>
+                    <a:pt x="286490" y="338952"/>
+                  </a:lnTo>
+                  <a:lnTo>
+                    <a:pt x="358112" y="437120"/>
+                  </a:lnTo>
+                  <a:lnTo>
+                    <a:pt x="429735" y="532223"/>
+                  </a:lnTo>
+                  <a:lnTo>
+                    <a:pt x="501357" y="624358"/>
+                  </a:lnTo>
+                  <a:lnTo>
+                    <a:pt x="572980" y="713617"/>
+                  </a:lnTo>
+                  <a:lnTo>
+                    <a:pt x="644602" y="800089"/>
+                  </a:lnTo>
+                  <a:lnTo>
+                    <a:pt x="716225" y="883862"/>
+                  </a:lnTo>
+                  <a:lnTo>
+                    <a:pt x="787847" y="965020"/>
+                  </a:lnTo>
+                  <a:lnTo>
+                    <a:pt x="859470" y="1043645"/>
+                  </a:lnTo>
+                  <a:lnTo>
+                    <a:pt x="931092" y="1119815"/>
+                  </a:lnTo>
+                  <a:lnTo>
+                    <a:pt x="1002715" y="1193607"/>
+                  </a:lnTo>
+                  <a:lnTo>
+                    <a:pt x="1074337" y="1265096"/>
+                  </a:lnTo>
+                  <a:lnTo>
+                    <a:pt x="1145960" y="1334354"/>
+                  </a:lnTo>
+                  <a:lnTo>
+                    <a:pt x="1217582" y="1401449"/>
+                  </a:lnTo>
+                  <a:lnTo>
+                    <a:pt x="1289205" y="1466450"/>
+                  </a:lnTo>
+                  <a:lnTo>
+                    <a:pt x="1360827" y="1529422"/>
+                  </a:lnTo>
+                  <a:lnTo>
+                    <a:pt x="1432450" y="1590428"/>
+                  </a:lnTo>
+                  <a:lnTo>
+                    <a:pt x="1504073" y="1649530"/>
+                  </a:lnTo>
+                  <a:lnTo>
+                    <a:pt x="1575695" y="1706787"/>
+                  </a:lnTo>
+                  <a:lnTo>
+                    <a:pt x="1647318" y="1762257"/>
+                  </a:lnTo>
+                  <a:lnTo>
+                    <a:pt x="1718940" y="1815995"/>
+                  </a:lnTo>
+                  <a:lnTo>
+                    <a:pt x="1790563" y="1868055"/>
+                  </a:lnTo>
+                  <a:lnTo>
+                    <a:pt x="1862185" y="1918491"/>
+                  </a:lnTo>
+                  <a:lnTo>
+                    <a:pt x="1933808" y="1967352"/>
+                  </a:lnTo>
+                  <a:lnTo>
+                    <a:pt x="2005430" y="2014687"/>
+                  </a:lnTo>
+                  <a:lnTo>
+                    <a:pt x="2077053" y="2060546"/>
+                  </a:lnTo>
+                  <a:lnTo>
+                    <a:pt x="2148675" y="2104972"/>
+                  </a:lnTo>
+                  <a:lnTo>
+                    <a:pt x="2220298" y="2148012"/>
+                  </a:lnTo>
+                  <a:lnTo>
+                    <a:pt x="2291920" y="2189708"/>
+                  </a:lnTo>
+                  <a:lnTo>
+                    <a:pt x="2363543" y="2230103"/>
+                  </a:lnTo>
+                  <a:lnTo>
+                    <a:pt x="2435165" y="2269237"/>
+                  </a:lnTo>
+                  <a:lnTo>
+                    <a:pt x="2506788" y="2307149"/>
+                  </a:lnTo>
+                  <a:lnTo>
+                    <a:pt x="2578410" y="2343878"/>
+                  </a:lnTo>
+                  <a:lnTo>
+                    <a:pt x="2650033" y="2379460"/>
+                  </a:lnTo>
+                  <a:lnTo>
+                    <a:pt x="2721655" y="2413931"/>
+                  </a:lnTo>
+                  <a:lnTo>
+                    <a:pt x="2793278" y="2447326"/>
+                  </a:lnTo>
+                  <a:lnTo>
+                    <a:pt x="2864901" y="2479679"/>
+                  </a:lnTo>
+                  <a:lnTo>
+                    <a:pt x="2936523" y="2511022"/>
+                  </a:lnTo>
+                  <a:lnTo>
+                    <a:pt x="3008146" y="2541387"/>
+                  </a:lnTo>
+                  <a:lnTo>
+                    <a:pt x="3079768" y="2570804"/>
+                  </a:lnTo>
+                  <a:lnTo>
+                    <a:pt x="3151391" y="2599302"/>
+                  </a:lnTo>
+                  <a:lnTo>
+                    <a:pt x="3223013" y="2626911"/>
+                  </a:lnTo>
+                  <a:lnTo>
+                    <a:pt x="3294636" y="2653658"/>
+                  </a:lnTo>
+                  <a:lnTo>
+                    <a:pt x="3366258" y="2646244"/>
+                  </a:lnTo>
+                  <a:lnTo>
+                    <a:pt x="3437881" y="2637929"/>
+                  </a:lnTo>
+                  <a:lnTo>
+                    <a:pt x="3509503" y="2629531"/>
+                  </a:lnTo>
+                  <a:lnTo>
+                    <a:pt x="3581126" y="2621050"/>
+                  </a:lnTo>
+                  <a:lnTo>
+                    <a:pt x="3652748" y="2612485"/>
+                  </a:lnTo>
+                  <a:lnTo>
+                    <a:pt x="3724371" y="2603835"/>
+                  </a:lnTo>
+                  <a:lnTo>
+                    <a:pt x="3795993" y="2595099"/>
+                  </a:lnTo>
+                  <a:lnTo>
+                    <a:pt x="3867616" y="2586276"/>
+                  </a:lnTo>
+                  <a:lnTo>
+                    <a:pt x="3939238" y="2577366"/>
+                  </a:lnTo>
+                  <a:lnTo>
+                    <a:pt x="4010861" y="2568367"/>
+                  </a:lnTo>
+                  <a:lnTo>
+                    <a:pt x="4082483" y="2559278"/>
+                  </a:lnTo>
+                  <a:lnTo>
+                    <a:pt x="4154106" y="2550100"/>
+                  </a:lnTo>
+                  <a:lnTo>
+                    <a:pt x="4225729" y="2540830"/>
+                  </a:lnTo>
+                  <a:lnTo>
+                    <a:pt x="4297351" y="2531469"/>
+                  </a:lnTo>
+                  <a:lnTo>
+                    <a:pt x="4368974" y="2522014"/>
+                  </a:lnTo>
+                  <a:lnTo>
+                    <a:pt x="4440596" y="2512466"/>
+                  </a:lnTo>
+                  <a:lnTo>
+                    <a:pt x="4512219" y="2502822"/>
+                  </a:lnTo>
+                  <a:lnTo>
+                    <a:pt x="4583841" y="2493083"/>
+                  </a:lnTo>
+                  <a:lnTo>
+                    <a:pt x="4655464" y="2483248"/>
+                  </a:lnTo>
+                  <a:lnTo>
+                    <a:pt x="4727086" y="2473314"/>
+                  </a:lnTo>
+                  <a:lnTo>
+                    <a:pt x="4798709" y="2463282"/>
+                  </a:lnTo>
+                  <a:lnTo>
+                    <a:pt x="4870331" y="2453151"/>
+                  </a:lnTo>
+                  <a:lnTo>
+                    <a:pt x="4941954" y="2442919"/>
+                  </a:lnTo>
+                  <a:lnTo>
+                    <a:pt x="5013576" y="2432585"/>
+                  </a:lnTo>
+                  <a:lnTo>
+                    <a:pt x="5085199" y="2422148"/>
+                  </a:lnTo>
+                  <a:lnTo>
+                    <a:pt x="5156821" y="2411608"/>
+                  </a:lnTo>
+                  <a:lnTo>
+                    <a:pt x="5228444" y="2400964"/>
+                  </a:lnTo>
+                  <a:lnTo>
+                    <a:pt x="5300066" y="2390213"/>
+                  </a:lnTo>
+                  <a:lnTo>
+                    <a:pt x="5371689" y="2379356"/>
+                  </a:lnTo>
+                  <a:lnTo>
+                    <a:pt x="5443311" y="2368392"/>
+                  </a:lnTo>
+                  <a:lnTo>
+                    <a:pt x="5514934" y="2357318"/>
+                  </a:lnTo>
+                  <a:lnTo>
+                    <a:pt x="5586557" y="2346134"/>
+                  </a:lnTo>
+                  <a:lnTo>
+                    <a:pt x="5658179" y="2334840"/>
+                  </a:lnTo>
+                  <a:lnTo>
+                    <a:pt x="5729802" y="2323433"/>
+                  </a:lnTo>
+                  <a:lnTo>
+                    <a:pt x="5801424" y="2311913"/>
+                  </a:lnTo>
+                  <a:lnTo>
+                    <a:pt x="5873047" y="2300278"/>
+                  </a:lnTo>
+                  <a:lnTo>
+                    <a:pt x="5944669" y="2288528"/>
+                  </a:lnTo>
+                  <a:lnTo>
+                    <a:pt x="6016292" y="2276662"/>
+                  </a:lnTo>
+                  <a:lnTo>
+                    <a:pt x="6087914" y="2264677"/>
+                  </a:lnTo>
+                  <a:lnTo>
+                    <a:pt x="6159537" y="2252574"/>
+                  </a:lnTo>
+                  <a:lnTo>
+                    <a:pt x="6231159" y="2240350"/>
+                  </a:lnTo>
+                  <a:lnTo>
+                    <a:pt x="6302782" y="2228005"/>
+                  </a:lnTo>
+                  <a:lnTo>
+                    <a:pt x="6374404" y="2215538"/>
+                  </a:lnTo>
+                  <a:lnTo>
+                    <a:pt x="6446027" y="2202947"/>
+                  </a:lnTo>
+                  <a:lnTo>
+                    <a:pt x="6517649" y="2190230"/>
+                  </a:lnTo>
+                  <a:lnTo>
+                    <a:pt x="6589272" y="2177388"/>
+                  </a:lnTo>
+                  <a:lnTo>
+                    <a:pt x="6660894" y="2164418"/>
+                  </a:lnTo>
+                  <a:lnTo>
+                    <a:pt x="6732517" y="2151319"/>
+                  </a:lnTo>
+                  <a:lnTo>
+                    <a:pt x="6804139" y="2138090"/>
+                  </a:lnTo>
+                  <a:lnTo>
+                    <a:pt x="6875762" y="2124730"/>
+                  </a:lnTo>
+                  <a:lnTo>
+                    <a:pt x="6947385" y="2111237"/>
+                  </a:lnTo>
+                  <a:lnTo>
+                    <a:pt x="7019007" y="2097610"/>
+                  </a:lnTo>
+                  <a:lnTo>
+                    <a:pt x="7090630" y="2083848"/>
+                  </a:lnTo>
+                  <a:lnTo>
+                    <a:pt x="7090630" y="3329166"/>
+                  </a:lnTo>
+                  <a:lnTo>
+                    <a:pt x="7019007" y="3324186"/>
+                  </a:lnTo>
+                  <a:lnTo>
+                    <a:pt x="6947385" y="3319044"/>
+                  </a:lnTo>
+                  <a:lnTo>
+                    <a:pt x="6875762" y="3313737"/>
+                  </a:lnTo>
+                  <a:lnTo>
+                    <a:pt x="6804139" y="3308259"/>
+                  </a:lnTo>
+                  <a:lnTo>
+                    <a:pt x="6732517" y="3302605"/>
+                  </a:lnTo>
+                  <a:lnTo>
+                    <a:pt x="6660894" y="3296768"/>
+                  </a:lnTo>
+                  <a:lnTo>
+                    <a:pt x="6589272" y="3290743"/>
+                  </a:lnTo>
+                  <a:lnTo>
+                    <a:pt x="6517649" y="3284524"/>
+                  </a:lnTo>
+                  <a:lnTo>
+                    <a:pt x="6446027" y="3278105"/>
+                  </a:lnTo>
+                  <a:lnTo>
+                    <a:pt x="6374404" y="3271479"/>
+                  </a:lnTo>
+                  <a:lnTo>
+                    <a:pt x="6302782" y="3264639"/>
+                  </a:lnTo>
+                  <a:lnTo>
+                    <a:pt x="6231159" y="3257579"/>
+                  </a:lnTo>
+                  <a:lnTo>
+                    <a:pt x="6159537" y="3250292"/>
+                  </a:lnTo>
+                  <a:lnTo>
+                    <a:pt x="6087914" y="3242769"/>
+                  </a:lnTo>
+                  <a:lnTo>
+                    <a:pt x="6016292" y="3235005"/>
+                  </a:lnTo>
+                  <a:lnTo>
+                    <a:pt x="5944669" y="3226990"/>
+                  </a:lnTo>
+                  <a:lnTo>
+                    <a:pt x="5873047" y="3218716"/>
+                  </a:lnTo>
+                  <a:lnTo>
+                    <a:pt x="5801424" y="3210177"/>
+                  </a:lnTo>
+                  <a:lnTo>
+                    <a:pt x="5729802" y="3201362"/>
+                  </a:lnTo>
+                  <a:lnTo>
+                    <a:pt x="5658179" y="3192263"/>
+                  </a:lnTo>
+                  <a:lnTo>
+                    <a:pt x="5586557" y="3182871"/>
+                  </a:lnTo>
+                  <a:lnTo>
+                    <a:pt x="5514934" y="3173176"/>
+                  </a:lnTo>
+                  <a:lnTo>
+                    <a:pt x="5443311" y="3163169"/>
+                  </a:lnTo>
+                  <a:lnTo>
+                    <a:pt x="5371689" y="3152839"/>
+                  </a:lnTo>
+                  <a:lnTo>
+                    <a:pt x="5300066" y="3142177"/>
+                  </a:lnTo>
+                  <a:lnTo>
+                    <a:pt x="5228444" y="3131171"/>
+                  </a:lnTo>
+                  <a:lnTo>
+                    <a:pt x="5156821" y="3119810"/>
+                  </a:lnTo>
+                  <a:lnTo>
+                    <a:pt x="5085199" y="3108083"/>
+                  </a:lnTo>
+                  <a:lnTo>
+                    <a:pt x="5013576" y="3095979"/>
+                  </a:lnTo>
+                  <a:lnTo>
+                    <a:pt x="4941954" y="3083484"/>
+                  </a:lnTo>
+                  <a:lnTo>
+                    <a:pt x="4870331" y="3070587"/>
+                  </a:lnTo>
+                  <a:lnTo>
+                    <a:pt x="4798709" y="3057274"/>
+                  </a:lnTo>
+                  <a:lnTo>
+                    <a:pt x="4727086" y="3043533"/>
+                  </a:lnTo>
+                  <a:lnTo>
+                    <a:pt x="4655464" y="3029348"/>
+                  </a:lnTo>
+                  <a:lnTo>
+                    <a:pt x="4583841" y="3014707"/>
+                  </a:lnTo>
+                  <a:lnTo>
+                    <a:pt x="4512219" y="2999593"/>
+                  </a:lnTo>
+                  <a:lnTo>
+                    <a:pt x="4440596" y="2983993"/>
+                  </a:lnTo>
+                  <a:lnTo>
+                    <a:pt x="4368974" y="2967890"/>
+                  </a:lnTo>
+                  <a:lnTo>
+                    <a:pt x="4297351" y="2951268"/>
+                  </a:lnTo>
+                  <a:lnTo>
+                    <a:pt x="4225729" y="2934111"/>
+                  </a:lnTo>
+                  <a:lnTo>
+                    <a:pt x="4154106" y="2916401"/>
+                  </a:lnTo>
+                  <a:lnTo>
+                    <a:pt x="4082483" y="2898120"/>
+                  </a:lnTo>
+                  <a:lnTo>
+                    <a:pt x="4010861" y="2879250"/>
+                  </a:lnTo>
+                  <a:lnTo>
+                    <a:pt x="3939238" y="2859772"/>
+                  </a:lnTo>
+                  <a:lnTo>
+                    <a:pt x="3867616" y="2839666"/>
+                  </a:lnTo>
+                  <a:lnTo>
+                    <a:pt x="3795993" y="2818913"/>
+                  </a:lnTo>
+                  <a:lnTo>
+                    <a:pt x="3724371" y="2797490"/>
+                  </a:lnTo>
+                  <a:lnTo>
+                    <a:pt x="3652748" y="2775378"/>
+                  </a:lnTo>
+                  <a:lnTo>
+                    <a:pt x="3581126" y="2752553"/>
+                  </a:lnTo>
+                  <a:lnTo>
+                    <a:pt x="3509503" y="2728993"/>
+                  </a:lnTo>
+                  <a:lnTo>
+                    <a:pt x="3437881" y="2704673"/>
+                  </a:lnTo>
+                  <a:lnTo>
+                    <a:pt x="3366258" y="2679570"/>
+                  </a:lnTo>
+                  <a:lnTo>
+                    <a:pt x="3294636" y="2654477"/>
+                  </a:lnTo>
+                  <a:lnTo>
+                    <a:pt x="3223013" y="2662630"/>
+                  </a:lnTo>
+                  <a:lnTo>
+                    <a:pt x="3151391" y="2670702"/>
+                  </a:lnTo>
+                  <a:lnTo>
+                    <a:pt x="3079768" y="2678695"/>
+                  </a:lnTo>
+                  <a:lnTo>
+                    <a:pt x="3008146" y="2686609"/>
+                  </a:lnTo>
+                  <a:lnTo>
+                    <a:pt x="2936523" y="2694446"/>
+                  </a:lnTo>
+                  <a:lnTo>
+                    <a:pt x="2864901" y="2702205"/>
+                  </a:lnTo>
+                  <a:lnTo>
+                    <a:pt x="2793278" y="2709888"/>
+                  </a:lnTo>
+                  <a:lnTo>
+                    <a:pt x="2721655" y="2717496"/>
+                  </a:lnTo>
+                  <a:lnTo>
+                    <a:pt x="2650033" y="2725029"/>
+                  </a:lnTo>
+                  <a:lnTo>
+                    <a:pt x="2578410" y="2732488"/>
+                  </a:lnTo>
+                  <a:lnTo>
+                    <a:pt x="2506788" y="2739873"/>
+                  </a:lnTo>
+                  <a:lnTo>
+                    <a:pt x="2435165" y="2747186"/>
+                  </a:lnTo>
+                  <a:lnTo>
+                    <a:pt x="2363543" y="2754427"/>
+                  </a:lnTo>
+                  <a:lnTo>
+                    <a:pt x="2291920" y="2761597"/>
+                  </a:lnTo>
+                  <a:lnTo>
+                    <a:pt x="2220298" y="2768696"/>
+                  </a:lnTo>
+                  <a:lnTo>
+                    <a:pt x="2148675" y="2775726"/>
+                  </a:lnTo>
+                  <a:lnTo>
+                    <a:pt x="2077053" y="2782686"/>
+                  </a:lnTo>
+                  <a:lnTo>
+                    <a:pt x="2005430" y="2789578"/>
+                  </a:lnTo>
+                  <a:lnTo>
+                    <a:pt x="1933808" y="2796402"/>
+                  </a:lnTo>
+                  <a:lnTo>
+                    <a:pt x="1862185" y="2803159"/>
+                  </a:lnTo>
+                  <a:lnTo>
+                    <a:pt x="1790563" y="2809850"/>
+                  </a:lnTo>
+                  <a:lnTo>
+                    <a:pt x="1718940" y="2816475"/>
+                  </a:lnTo>
+                  <a:lnTo>
+                    <a:pt x="1647318" y="2823035"/>
+                  </a:lnTo>
+                  <a:lnTo>
+                    <a:pt x="1575695" y="2829530"/>
+                  </a:lnTo>
+                  <a:lnTo>
+                    <a:pt x="1504073" y="2835962"/>
+                  </a:lnTo>
+                  <a:lnTo>
+                    <a:pt x="1432450" y="2842330"/>
+                  </a:lnTo>
+                  <a:lnTo>
+                    <a:pt x="1360827" y="2848636"/>
+                  </a:lnTo>
+                  <a:lnTo>
+                    <a:pt x="1289205" y="2854879"/>
+                  </a:lnTo>
+                  <a:lnTo>
+                    <a:pt x="1217582" y="2861062"/>
+                  </a:lnTo>
+                  <a:lnTo>
+                    <a:pt x="1145960" y="2867183"/>
+                  </a:lnTo>
+                  <a:lnTo>
+                    <a:pt x="1074337" y="2873244"/>
+                  </a:lnTo>
+                  <a:lnTo>
+                    <a:pt x="1002715" y="2879246"/>
+                  </a:lnTo>
+                  <a:lnTo>
+                    <a:pt x="931092" y="2885189"/>
+                  </a:lnTo>
+                  <a:lnTo>
+                    <a:pt x="859470" y="2891073"/>
+                  </a:lnTo>
+                  <a:lnTo>
+                    <a:pt x="787847" y="2896900"/>
+                  </a:lnTo>
+                  <a:lnTo>
+                    <a:pt x="716225" y="2902669"/>
+                  </a:lnTo>
+                  <a:lnTo>
+                    <a:pt x="644602" y="2908381"/>
+                  </a:lnTo>
+                  <a:lnTo>
+                    <a:pt x="572980" y="2914037"/>
+                  </a:lnTo>
+                  <a:lnTo>
+                    <a:pt x="501357" y="2919638"/>
+                  </a:lnTo>
+                  <a:lnTo>
+                    <a:pt x="429735" y="2925184"/>
+                  </a:lnTo>
+                  <a:lnTo>
+                    <a:pt x="358112" y="2930675"/>
+                  </a:lnTo>
+                  <a:lnTo>
+                    <a:pt x="286490" y="2936112"/>
+                  </a:lnTo>
+                  <a:lnTo>
+                    <a:pt x="214867" y="2941496"/>
+                  </a:lnTo>
+                  <a:lnTo>
+                    <a:pt x="143245" y="2946826"/>
+                  </a:lnTo>
+                  <a:lnTo>
+                    <a:pt x="71622" y="2952105"/>
+                  </a:lnTo>
+                  <a:lnTo>
+                    <a:pt x="0" y="2957331"/>
                   </a:lnTo>
                   <a:close/>
                 </a:path>
@@ -3609,309 +3584,643 @@
         </p:sp>
         <p:sp>
           <p:nvSpPr>
+            <p:cNvPr id="21" name="pl21"/>
+            <p:cNvSpPr/>
+            <p:nvPr/>
+          </p:nvSpPr>
+          <p:spPr>
+            <a:xfrm>
+              <a:off x="1227567" y="2073503"/>
+              <a:ext cx="7035112" cy="2653658"/>
+            </a:xfrm>
+            <a:custGeom>
+              <a:avLst/>
+              <a:pathLst>
+                <a:path w="7035112" h="2653658">
+                  <a:moveTo>
+                    <a:pt x="0" y="0"/>
+                  </a:moveTo>
+                  <a:lnTo>
+                    <a:pt x="16104" y="25058"/>
+                  </a:lnTo>
+                  <a:lnTo>
+                    <a:pt x="87727" y="133025"/>
+                  </a:lnTo>
+                  <a:lnTo>
+                    <a:pt x="159349" y="237621"/>
+                  </a:lnTo>
+                  <a:lnTo>
+                    <a:pt x="230972" y="338952"/>
+                  </a:lnTo>
+                  <a:lnTo>
+                    <a:pt x="302594" y="437120"/>
+                  </a:lnTo>
+                  <a:lnTo>
+                    <a:pt x="374217" y="532223"/>
+                  </a:lnTo>
+                  <a:lnTo>
+                    <a:pt x="445839" y="624358"/>
+                  </a:lnTo>
+                  <a:lnTo>
+                    <a:pt x="517462" y="713617"/>
+                  </a:lnTo>
+                  <a:lnTo>
+                    <a:pt x="589084" y="800089"/>
+                  </a:lnTo>
+                  <a:lnTo>
+                    <a:pt x="660707" y="883862"/>
+                  </a:lnTo>
+                  <a:lnTo>
+                    <a:pt x="732329" y="965020"/>
+                  </a:lnTo>
+                  <a:lnTo>
+                    <a:pt x="803952" y="1043645"/>
+                  </a:lnTo>
+                  <a:lnTo>
+                    <a:pt x="875574" y="1119815"/>
+                  </a:lnTo>
+                  <a:lnTo>
+                    <a:pt x="947197" y="1193607"/>
+                  </a:lnTo>
+                  <a:lnTo>
+                    <a:pt x="1018819" y="1265096"/>
+                  </a:lnTo>
+                  <a:lnTo>
+                    <a:pt x="1090442" y="1334354"/>
+                  </a:lnTo>
+                  <a:lnTo>
+                    <a:pt x="1162064" y="1401449"/>
+                  </a:lnTo>
+                  <a:lnTo>
+                    <a:pt x="1233687" y="1466450"/>
+                  </a:lnTo>
+                  <a:lnTo>
+                    <a:pt x="1305310" y="1529422"/>
+                  </a:lnTo>
+                  <a:lnTo>
+                    <a:pt x="1376932" y="1590428"/>
+                  </a:lnTo>
+                  <a:lnTo>
+                    <a:pt x="1448555" y="1649530"/>
+                  </a:lnTo>
+                  <a:lnTo>
+                    <a:pt x="1520177" y="1706787"/>
+                  </a:lnTo>
+                  <a:lnTo>
+                    <a:pt x="1591800" y="1762257"/>
+                  </a:lnTo>
+                  <a:lnTo>
+                    <a:pt x="1663422" y="1815995"/>
+                  </a:lnTo>
+                  <a:lnTo>
+                    <a:pt x="1735045" y="1868055"/>
+                  </a:lnTo>
+                  <a:lnTo>
+                    <a:pt x="1806667" y="1918491"/>
+                  </a:lnTo>
+                  <a:lnTo>
+                    <a:pt x="1878290" y="1967352"/>
+                  </a:lnTo>
+                  <a:lnTo>
+                    <a:pt x="1949912" y="2014687"/>
+                  </a:lnTo>
+                  <a:lnTo>
+                    <a:pt x="2021535" y="2060546"/>
+                  </a:lnTo>
+                  <a:lnTo>
+                    <a:pt x="2093157" y="2104972"/>
+                  </a:lnTo>
+                  <a:lnTo>
+                    <a:pt x="2164780" y="2148012"/>
+                  </a:lnTo>
+                  <a:lnTo>
+                    <a:pt x="2236402" y="2189708"/>
+                  </a:lnTo>
+                  <a:lnTo>
+                    <a:pt x="2308025" y="2230103"/>
+                  </a:lnTo>
+                  <a:lnTo>
+                    <a:pt x="2379647" y="2269237"/>
+                  </a:lnTo>
+                  <a:lnTo>
+                    <a:pt x="2451270" y="2307149"/>
+                  </a:lnTo>
+                  <a:lnTo>
+                    <a:pt x="2522892" y="2343878"/>
+                  </a:lnTo>
+                  <a:lnTo>
+                    <a:pt x="2594515" y="2379460"/>
+                  </a:lnTo>
+                  <a:lnTo>
+                    <a:pt x="2666138" y="2413931"/>
+                  </a:lnTo>
+                  <a:lnTo>
+                    <a:pt x="2737760" y="2447326"/>
+                  </a:lnTo>
+                  <a:lnTo>
+                    <a:pt x="2809383" y="2479679"/>
+                  </a:lnTo>
+                  <a:lnTo>
+                    <a:pt x="2881005" y="2511022"/>
+                  </a:lnTo>
+                  <a:lnTo>
+                    <a:pt x="2952628" y="2541387"/>
+                  </a:lnTo>
+                  <a:lnTo>
+                    <a:pt x="3024250" y="2570804"/>
+                  </a:lnTo>
+                  <a:lnTo>
+                    <a:pt x="3095873" y="2599302"/>
+                  </a:lnTo>
+                  <a:lnTo>
+                    <a:pt x="3167495" y="2626911"/>
+                  </a:lnTo>
+                  <a:lnTo>
+                    <a:pt x="3239118" y="2653658"/>
+                  </a:lnTo>
+                  <a:lnTo>
+                    <a:pt x="3310740" y="2646244"/>
+                  </a:lnTo>
+                  <a:lnTo>
+                    <a:pt x="3382363" y="2637929"/>
+                  </a:lnTo>
+                  <a:lnTo>
+                    <a:pt x="3453985" y="2629531"/>
+                  </a:lnTo>
+                  <a:lnTo>
+                    <a:pt x="3525608" y="2621050"/>
+                  </a:lnTo>
+                  <a:lnTo>
+                    <a:pt x="3597230" y="2612485"/>
+                  </a:lnTo>
+                  <a:lnTo>
+                    <a:pt x="3668853" y="2603835"/>
+                  </a:lnTo>
+                  <a:lnTo>
+                    <a:pt x="3740475" y="2595099"/>
+                  </a:lnTo>
+                  <a:lnTo>
+                    <a:pt x="3812098" y="2586276"/>
+                  </a:lnTo>
+                  <a:lnTo>
+                    <a:pt x="3883720" y="2577366"/>
+                  </a:lnTo>
+                  <a:lnTo>
+                    <a:pt x="3955343" y="2568367"/>
+                  </a:lnTo>
+                  <a:lnTo>
+                    <a:pt x="4026966" y="2559278"/>
+                  </a:lnTo>
+                  <a:lnTo>
+                    <a:pt x="4098588" y="2550100"/>
+                  </a:lnTo>
+                  <a:lnTo>
+                    <a:pt x="4170211" y="2540830"/>
+                  </a:lnTo>
+                  <a:lnTo>
+                    <a:pt x="4241833" y="2531469"/>
+                  </a:lnTo>
+                  <a:lnTo>
+                    <a:pt x="4313456" y="2522014"/>
+                  </a:lnTo>
+                  <a:lnTo>
+                    <a:pt x="4385078" y="2512466"/>
+                  </a:lnTo>
+                  <a:lnTo>
+                    <a:pt x="4456701" y="2502822"/>
+                  </a:lnTo>
+                  <a:lnTo>
+                    <a:pt x="4528323" y="2493083"/>
+                  </a:lnTo>
+                  <a:lnTo>
+                    <a:pt x="4599946" y="2483248"/>
+                  </a:lnTo>
+                  <a:lnTo>
+                    <a:pt x="4671568" y="2473314"/>
+                  </a:lnTo>
+                  <a:lnTo>
+                    <a:pt x="4743191" y="2463282"/>
+                  </a:lnTo>
+                  <a:lnTo>
+                    <a:pt x="4814813" y="2453151"/>
+                  </a:lnTo>
+                  <a:lnTo>
+                    <a:pt x="4886436" y="2442919"/>
+                  </a:lnTo>
+                  <a:lnTo>
+                    <a:pt x="4958058" y="2432585"/>
+                  </a:lnTo>
+                  <a:lnTo>
+                    <a:pt x="5029681" y="2422148"/>
+                  </a:lnTo>
+                  <a:lnTo>
+                    <a:pt x="5101303" y="2411608"/>
+                  </a:lnTo>
+                  <a:lnTo>
+                    <a:pt x="5172926" y="2400964"/>
+                  </a:lnTo>
+                  <a:lnTo>
+                    <a:pt x="5244548" y="2390213"/>
+                  </a:lnTo>
+                  <a:lnTo>
+                    <a:pt x="5316171" y="2379356"/>
+                  </a:lnTo>
+                  <a:lnTo>
+                    <a:pt x="5387794" y="2368392"/>
+                  </a:lnTo>
+                  <a:lnTo>
+                    <a:pt x="5459416" y="2357318"/>
+                  </a:lnTo>
+                  <a:lnTo>
+                    <a:pt x="5531039" y="2346134"/>
+                  </a:lnTo>
+                  <a:lnTo>
+                    <a:pt x="5602661" y="2334840"/>
+                  </a:lnTo>
+                  <a:lnTo>
+                    <a:pt x="5674284" y="2323433"/>
+                  </a:lnTo>
+                  <a:lnTo>
+                    <a:pt x="5745906" y="2311913"/>
+                  </a:lnTo>
+                  <a:lnTo>
+                    <a:pt x="5817529" y="2300278"/>
+                  </a:lnTo>
+                  <a:lnTo>
+                    <a:pt x="5889151" y="2288528"/>
+                  </a:lnTo>
+                  <a:lnTo>
+                    <a:pt x="5960774" y="2276662"/>
+                  </a:lnTo>
+                  <a:lnTo>
+                    <a:pt x="6032396" y="2264677"/>
+                  </a:lnTo>
+                  <a:lnTo>
+                    <a:pt x="6104019" y="2252574"/>
+                  </a:lnTo>
+                  <a:lnTo>
+                    <a:pt x="6175641" y="2240350"/>
+                  </a:lnTo>
+                  <a:lnTo>
+                    <a:pt x="6247264" y="2228005"/>
+                  </a:lnTo>
+                  <a:lnTo>
+                    <a:pt x="6318886" y="2215538"/>
+                  </a:lnTo>
+                  <a:lnTo>
+                    <a:pt x="6390509" y="2202947"/>
+                  </a:lnTo>
+                  <a:lnTo>
+                    <a:pt x="6462131" y="2190230"/>
+                  </a:lnTo>
+                  <a:lnTo>
+                    <a:pt x="6533754" y="2177388"/>
+                  </a:lnTo>
+                  <a:lnTo>
+                    <a:pt x="6605376" y="2164418"/>
+                  </a:lnTo>
+                  <a:lnTo>
+                    <a:pt x="6676999" y="2151319"/>
+                  </a:lnTo>
+                  <a:lnTo>
+                    <a:pt x="6748622" y="2138090"/>
+                  </a:lnTo>
+                  <a:lnTo>
+                    <a:pt x="6820244" y="2124730"/>
+                  </a:lnTo>
+                  <a:lnTo>
+                    <a:pt x="6891867" y="2111237"/>
+                  </a:lnTo>
+                  <a:lnTo>
+                    <a:pt x="6963489" y="2097610"/>
+                  </a:lnTo>
+                  <a:lnTo>
+                    <a:pt x="7035112" y="2083848"/>
+                  </a:lnTo>
+                </a:path>
+              </a:pathLst>
+            </a:custGeom>
+          </p:spPr>
+          <p:txBody>
+            <a:bodyPr/>
+            <a:lstStyle/>
+            <a:p/>
+          </p:txBody>
+        </p:sp>
+        <p:sp>
+          <p:nvSpPr>
             <p:cNvPr id="22" name="pl22"/>
             <p:cNvSpPr/>
             <p:nvPr/>
           </p:nvSpPr>
           <p:spPr>
             <a:xfrm>
-              <a:off x="817517" y="2341744"/>
-              <a:ext cx="7392041" cy="2385416"/>
+              <a:off x="1172049" y="4727981"/>
+              <a:ext cx="7090630" cy="674688"/>
             </a:xfrm>
             <a:custGeom>
               <a:avLst/>
               <a:pathLst>
-                <a:path w="7392041" h="2385416">
+                <a:path w="7090630" h="674688">
                   <a:moveTo>
-                    <a:pt x="0" y="0"/>
+                    <a:pt x="7090630" y="674688"/>
                   </a:moveTo>
                   <a:lnTo>
-                    <a:pt x="53901" y="70710"/>
-                  </a:lnTo>
-                  <a:lnTo>
-                    <a:pt x="131145" y="168878"/>
-                  </a:lnTo>
-                  <a:lnTo>
-                    <a:pt x="208389" y="263982"/>
-                  </a:lnTo>
-                  <a:lnTo>
-                    <a:pt x="285632" y="356116"/>
-                  </a:lnTo>
-                  <a:lnTo>
-                    <a:pt x="362876" y="445375"/>
-                  </a:lnTo>
-                  <a:lnTo>
-                    <a:pt x="440119" y="531847"/>
-                  </a:lnTo>
-                  <a:lnTo>
-                    <a:pt x="517363" y="615620"/>
-                  </a:lnTo>
-                  <a:lnTo>
-                    <a:pt x="594606" y="696778"/>
-                  </a:lnTo>
-                  <a:lnTo>
-                    <a:pt x="671850" y="775403"/>
-                  </a:lnTo>
-                  <a:lnTo>
-                    <a:pt x="749094" y="851573"/>
-                  </a:lnTo>
-                  <a:lnTo>
-                    <a:pt x="826337" y="925366"/>
-                  </a:lnTo>
-                  <a:lnTo>
-                    <a:pt x="903581" y="996855"/>
-                  </a:lnTo>
-                  <a:lnTo>
-                    <a:pt x="980824" y="1066112"/>
-                  </a:lnTo>
-                  <a:lnTo>
-                    <a:pt x="1058068" y="1133207"/>
-                  </a:lnTo>
-                  <a:lnTo>
-                    <a:pt x="1135311" y="1198208"/>
-                  </a:lnTo>
-                  <a:lnTo>
-                    <a:pt x="1212555" y="1261180"/>
-                  </a:lnTo>
-                  <a:lnTo>
-                    <a:pt x="1289799" y="1322187"/>
-                  </a:lnTo>
-                  <a:lnTo>
-                    <a:pt x="1367042" y="1381288"/>
-                  </a:lnTo>
-                  <a:lnTo>
-                    <a:pt x="1444286" y="1438545"/>
-                  </a:lnTo>
-                  <a:lnTo>
-                    <a:pt x="1521529" y="1494015"/>
-                  </a:lnTo>
-                  <a:lnTo>
-                    <a:pt x="1598773" y="1547753"/>
-                  </a:lnTo>
-                  <a:lnTo>
-                    <a:pt x="1676016" y="1599813"/>
-                  </a:lnTo>
-                  <a:lnTo>
-                    <a:pt x="1753260" y="1650249"/>
-                  </a:lnTo>
-                  <a:lnTo>
-                    <a:pt x="1830504" y="1699110"/>
-                  </a:lnTo>
-                  <a:lnTo>
-                    <a:pt x="1907747" y="1746446"/>
-                  </a:lnTo>
-                  <a:lnTo>
-                    <a:pt x="1984991" y="1792304"/>
-                  </a:lnTo>
-                  <a:lnTo>
-                    <a:pt x="2062234" y="1836730"/>
-                  </a:lnTo>
-                  <a:lnTo>
-                    <a:pt x="2139478" y="1879770"/>
-                  </a:lnTo>
-                  <a:lnTo>
-                    <a:pt x="2216721" y="1921466"/>
-                  </a:lnTo>
-                  <a:lnTo>
-                    <a:pt x="2293965" y="1961861"/>
-                  </a:lnTo>
-                  <a:lnTo>
-                    <a:pt x="2371209" y="2000995"/>
-                  </a:lnTo>
-                  <a:lnTo>
-                    <a:pt x="2448452" y="2038907"/>
-                  </a:lnTo>
-                  <a:lnTo>
-                    <a:pt x="2525696" y="2075636"/>
-                  </a:lnTo>
-                  <a:lnTo>
-                    <a:pt x="2602939" y="2111218"/>
-                  </a:lnTo>
-                  <a:lnTo>
-                    <a:pt x="2680183" y="2145689"/>
-                  </a:lnTo>
-                  <a:lnTo>
-                    <a:pt x="2757426" y="2179085"/>
-                  </a:lnTo>
-                  <a:lnTo>
-                    <a:pt x="2834670" y="2211438"/>
-                  </a:lnTo>
-                  <a:lnTo>
-                    <a:pt x="2911914" y="2242780"/>
-                  </a:lnTo>
-                  <a:lnTo>
-                    <a:pt x="2989157" y="2273145"/>
-                  </a:lnTo>
-                  <a:lnTo>
-                    <a:pt x="3066401" y="2302562"/>
-                  </a:lnTo>
-                  <a:lnTo>
-                    <a:pt x="3143644" y="2331060"/>
-                  </a:lnTo>
-                  <a:lnTo>
-                    <a:pt x="3220888" y="2358669"/>
-                  </a:lnTo>
-                  <a:lnTo>
-                    <a:pt x="3298131" y="2385416"/>
-                  </a:lnTo>
-                  <a:lnTo>
-                    <a:pt x="3375375" y="2378002"/>
-                  </a:lnTo>
-                  <a:lnTo>
-                    <a:pt x="3452619" y="2369687"/>
-                  </a:lnTo>
-                  <a:lnTo>
-                    <a:pt x="3529862" y="2361290"/>
-                  </a:lnTo>
-                  <a:lnTo>
-                    <a:pt x="3607106" y="2352809"/>
-                  </a:lnTo>
-                  <a:lnTo>
-                    <a:pt x="3684349" y="2344243"/>
-                  </a:lnTo>
-                  <a:lnTo>
-                    <a:pt x="3761593" y="2335593"/>
-                  </a:lnTo>
-                  <a:lnTo>
-                    <a:pt x="3838836" y="2326857"/>
-                  </a:lnTo>
-                  <a:lnTo>
-                    <a:pt x="3916080" y="2318034"/>
-                  </a:lnTo>
-                  <a:lnTo>
-                    <a:pt x="3993324" y="2309124"/>
-                  </a:lnTo>
-                  <a:lnTo>
-                    <a:pt x="4070567" y="2300125"/>
-                  </a:lnTo>
-                  <a:lnTo>
-                    <a:pt x="4147811" y="2291037"/>
-                  </a:lnTo>
-                  <a:lnTo>
-                    <a:pt x="4225054" y="2281858"/>
-                  </a:lnTo>
-                  <a:lnTo>
-                    <a:pt x="4302298" y="2272588"/>
-                  </a:lnTo>
-                  <a:lnTo>
-                    <a:pt x="4379541" y="2263227"/>
-                  </a:lnTo>
-                  <a:lnTo>
-                    <a:pt x="4456785" y="2253772"/>
-                  </a:lnTo>
-                  <a:lnTo>
-                    <a:pt x="4534029" y="2244224"/>
-                  </a:lnTo>
-                  <a:lnTo>
-                    <a:pt x="4611272" y="2234580"/>
-                  </a:lnTo>
-                  <a:lnTo>
-                    <a:pt x="4688516" y="2224841"/>
-                  </a:lnTo>
-                  <a:lnTo>
-                    <a:pt x="4765759" y="2215006"/>
-                  </a:lnTo>
-                  <a:lnTo>
-                    <a:pt x="4843003" y="2205072"/>
-                  </a:lnTo>
-                  <a:lnTo>
-                    <a:pt x="4920246" y="2195040"/>
-                  </a:lnTo>
-                  <a:lnTo>
-                    <a:pt x="4997490" y="2184909"/>
-                  </a:lnTo>
-                  <a:lnTo>
-                    <a:pt x="5074734" y="2174677"/>
-                  </a:lnTo>
-                  <a:lnTo>
-                    <a:pt x="5151977" y="2164343"/>
-                  </a:lnTo>
-                  <a:lnTo>
-                    <a:pt x="5229221" y="2153907"/>
-                  </a:lnTo>
-                  <a:lnTo>
-                    <a:pt x="5306464" y="2143367"/>
-                  </a:lnTo>
-                  <a:lnTo>
-                    <a:pt x="5383708" y="2132722"/>
-                  </a:lnTo>
-                  <a:lnTo>
-                    <a:pt x="5460951" y="2121972"/>
-                  </a:lnTo>
-                  <a:lnTo>
-                    <a:pt x="5538195" y="2111115"/>
-                  </a:lnTo>
-                  <a:lnTo>
-                    <a:pt x="5615439" y="2100150"/>
-                  </a:lnTo>
-                  <a:lnTo>
-                    <a:pt x="5692682" y="2089076"/>
-                  </a:lnTo>
-                  <a:lnTo>
-                    <a:pt x="5769926" y="2077892"/>
-                  </a:lnTo>
-                  <a:lnTo>
-                    <a:pt x="5847169" y="2066598"/>
-                  </a:lnTo>
-                  <a:lnTo>
-                    <a:pt x="5924413" y="2055191"/>
-                  </a:lnTo>
-                  <a:lnTo>
-                    <a:pt x="6001656" y="2043671"/>
-                  </a:lnTo>
-                  <a:lnTo>
-                    <a:pt x="6078900" y="2032036"/>
-                  </a:lnTo>
-                  <a:lnTo>
-                    <a:pt x="6156144" y="2020286"/>
-                  </a:lnTo>
-                  <a:lnTo>
-                    <a:pt x="6233387" y="2008420"/>
-                  </a:lnTo>
-                  <a:lnTo>
-                    <a:pt x="6310631" y="1996435"/>
-                  </a:lnTo>
-                  <a:lnTo>
-                    <a:pt x="6387874" y="1984332"/>
-                  </a:lnTo>
-                  <a:lnTo>
-                    <a:pt x="6465118" y="1972108"/>
-                  </a:lnTo>
-                  <a:lnTo>
-                    <a:pt x="6542361" y="1959763"/>
-                  </a:lnTo>
-                  <a:lnTo>
-                    <a:pt x="6619605" y="1947296"/>
-                  </a:lnTo>
-                  <a:lnTo>
-                    <a:pt x="6696849" y="1934705"/>
-                  </a:lnTo>
-                  <a:lnTo>
-                    <a:pt x="6774092" y="1921988"/>
-                  </a:lnTo>
-                  <a:lnTo>
-                    <a:pt x="6851336" y="1909146"/>
-                  </a:lnTo>
-                  <a:lnTo>
-                    <a:pt x="6928579" y="1896176"/>
-                  </a:lnTo>
-                  <a:lnTo>
-                    <a:pt x="7005823" y="1883077"/>
-                  </a:lnTo>
-                  <a:lnTo>
-                    <a:pt x="7083066" y="1869848"/>
-                  </a:lnTo>
-                  <a:lnTo>
-                    <a:pt x="7160310" y="1856488"/>
-                  </a:lnTo>
-                  <a:lnTo>
-                    <a:pt x="7237554" y="1842995"/>
-                  </a:lnTo>
-                  <a:lnTo>
-                    <a:pt x="7314797" y="1829368"/>
-                  </a:lnTo>
-                  <a:lnTo>
-                    <a:pt x="7392041" y="1815606"/>
+                    <a:pt x="7019007" y="669708"/>
+                  </a:lnTo>
+                  <a:lnTo>
+                    <a:pt x="6947385" y="664566"/>
+                  </a:lnTo>
+                  <a:lnTo>
+                    <a:pt x="6875762" y="659259"/>
+                  </a:lnTo>
+                  <a:lnTo>
+                    <a:pt x="6804139" y="653781"/>
+                  </a:lnTo>
+                  <a:lnTo>
+                    <a:pt x="6732517" y="648127"/>
+                  </a:lnTo>
+                  <a:lnTo>
+                    <a:pt x="6660894" y="642290"/>
+                  </a:lnTo>
+                  <a:lnTo>
+                    <a:pt x="6589272" y="636265"/>
+                  </a:lnTo>
+                  <a:lnTo>
+                    <a:pt x="6517649" y="630046"/>
+                  </a:lnTo>
+                  <a:lnTo>
+                    <a:pt x="6446027" y="623627"/>
+                  </a:lnTo>
+                  <a:lnTo>
+                    <a:pt x="6374404" y="617001"/>
+                  </a:lnTo>
+                  <a:lnTo>
+                    <a:pt x="6302782" y="610161"/>
+                  </a:lnTo>
+                  <a:lnTo>
+                    <a:pt x="6231159" y="603101"/>
+                  </a:lnTo>
+                  <a:lnTo>
+                    <a:pt x="6159537" y="595814"/>
+                  </a:lnTo>
+                  <a:lnTo>
+                    <a:pt x="6087914" y="588291"/>
+                  </a:lnTo>
+                  <a:lnTo>
+                    <a:pt x="6016292" y="580527"/>
+                  </a:lnTo>
+                  <a:lnTo>
+                    <a:pt x="5944669" y="572512"/>
+                  </a:lnTo>
+                  <a:lnTo>
+                    <a:pt x="5873047" y="564239"/>
+                  </a:lnTo>
+                  <a:lnTo>
+                    <a:pt x="5801424" y="555699"/>
+                  </a:lnTo>
+                  <a:lnTo>
+                    <a:pt x="5729802" y="546884"/>
+                  </a:lnTo>
+                  <a:lnTo>
+                    <a:pt x="5658179" y="537785"/>
+                  </a:lnTo>
+                  <a:lnTo>
+                    <a:pt x="5586557" y="528393"/>
+                  </a:lnTo>
+                  <a:lnTo>
+                    <a:pt x="5514934" y="518698"/>
+                  </a:lnTo>
+                  <a:lnTo>
+                    <a:pt x="5443311" y="508691"/>
+                  </a:lnTo>
+                  <a:lnTo>
+                    <a:pt x="5371689" y="498361"/>
+                  </a:lnTo>
+                  <a:lnTo>
+                    <a:pt x="5300066" y="487699"/>
+                  </a:lnTo>
+                  <a:lnTo>
+                    <a:pt x="5228444" y="476693"/>
+                  </a:lnTo>
+                  <a:lnTo>
+                    <a:pt x="5156821" y="465332"/>
+                  </a:lnTo>
+                  <a:lnTo>
+                    <a:pt x="5085199" y="453605"/>
+                  </a:lnTo>
+                  <a:lnTo>
+                    <a:pt x="5013576" y="441501"/>
+                  </a:lnTo>
+                  <a:lnTo>
+                    <a:pt x="4941954" y="429006"/>
+                  </a:lnTo>
+                  <a:lnTo>
+                    <a:pt x="4870331" y="416109"/>
+                  </a:lnTo>
+                  <a:lnTo>
+                    <a:pt x="4798709" y="402796"/>
+                  </a:lnTo>
+                  <a:lnTo>
+                    <a:pt x="4727086" y="389055"/>
+                  </a:lnTo>
+                  <a:lnTo>
+                    <a:pt x="4655464" y="374870"/>
+                  </a:lnTo>
+                  <a:lnTo>
+                    <a:pt x="4583841" y="360229"/>
+                  </a:lnTo>
+                  <a:lnTo>
+                    <a:pt x="4512219" y="345115"/>
+                  </a:lnTo>
+                  <a:lnTo>
+                    <a:pt x="4440596" y="329515"/>
+                  </a:lnTo>
+                  <a:lnTo>
+                    <a:pt x="4368974" y="313412"/>
+                  </a:lnTo>
+                  <a:lnTo>
+                    <a:pt x="4297351" y="296790"/>
+                  </a:lnTo>
+                  <a:lnTo>
+                    <a:pt x="4225729" y="279633"/>
+                  </a:lnTo>
+                  <a:lnTo>
+                    <a:pt x="4154106" y="261923"/>
+                  </a:lnTo>
+                  <a:lnTo>
+                    <a:pt x="4082483" y="243642"/>
+                  </a:lnTo>
+                  <a:lnTo>
+                    <a:pt x="4010861" y="224772"/>
+                  </a:lnTo>
+                  <a:lnTo>
+                    <a:pt x="3939238" y="205294"/>
+                  </a:lnTo>
+                  <a:lnTo>
+                    <a:pt x="3867616" y="185188"/>
+                  </a:lnTo>
+                  <a:lnTo>
+                    <a:pt x="3795993" y="164435"/>
+                  </a:lnTo>
+                  <a:lnTo>
+                    <a:pt x="3724371" y="143012"/>
+                  </a:lnTo>
+                  <a:lnTo>
+                    <a:pt x="3652748" y="120900"/>
+                  </a:lnTo>
+                  <a:lnTo>
+                    <a:pt x="3581126" y="98075"/>
+                  </a:lnTo>
+                  <a:lnTo>
+                    <a:pt x="3509503" y="74515"/>
+                  </a:lnTo>
+                  <a:lnTo>
+                    <a:pt x="3437881" y="50195"/>
+                  </a:lnTo>
+                  <a:lnTo>
+                    <a:pt x="3366258" y="25092"/>
+                  </a:lnTo>
+                  <a:lnTo>
+                    <a:pt x="3294636" y="0"/>
+                  </a:lnTo>
+                  <a:lnTo>
+                    <a:pt x="3223013" y="8152"/>
+                  </a:lnTo>
+                  <a:lnTo>
+                    <a:pt x="3151391" y="16224"/>
+                  </a:lnTo>
+                  <a:lnTo>
+                    <a:pt x="3079768" y="24217"/>
+                  </a:lnTo>
+                  <a:lnTo>
+                    <a:pt x="3008146" y="32131"/>
+                  </a:lnTo>
+                  <a:lnTo>
+                    <a:pt x="2936523" y="39968"/>
+                  </a:lnTo>
+                  <a:lnTo>
+                    <a:pt x="2864901" y="47727"/>
+                  </a:lnTo>
+                  <a:lnTo>
+                    <a:pt x="2793278" y="55410"/>
+                  </a:lnTo>
+                  <a:lnTo>
+                    <a:pt x="2721655" y="63018"/>
+                  </a:lnTo>
+                  <a:lnTo>
+                    <a:pt x="2650033" y="70551"/>
+                  </a:lnTo>
+                  <a:lnTo>
+                    <a:pt x="2578410" y="78010"/>
+                  </a:lnTo>
+                  <a:lnTo>
+                    <a:pt x="2506788" y="85395"/>
+                  </a:lnTo>
+                  <a:lnTo>
+                    <a:pt x="2435165" y="92708"/>
+                  </a:lnTo>
+                  <a:lnTo>
+                    <a:pt x="2363543" y="99949"/>
+                  </a:lnTo>
+                  <a:lnTo>
+                    <a:pt x="2291920" y="107119"/>
+                  </a:lnTo>
+                  <a:lnTo>
+                    <a:pt x="2220298" y="114218"/>
+                  </a:lnTo>
+                  <a:lnTo>
+                    <a:pt x="2148675" y="121248"/>
+                  </a:lnTo>
+                  <a:lnTo>
+                    <a:pt x="2077053" y="128208"/>
+                  </a:lnTo>
+                  <a:lnTo>
+                    <a:pt x="2005430" y="135100"/>
+                  </a:lnTo>
+                  <a:lnTo>
+                    <a:pt x="1933808" y="141924"/>
+                  </a:lnTo>
+                  <a:lnTo>
+                    <a:pt x="1862185" y="148681"/>
+                  </a:lnTo>
+                  <a:lnTo>
+                    <a:pt x="1790563" y="155372"/>
+                  </a:lnTo>
+                  <a:lnTo>
+                    <a:pt x="1718940" y="161997"/>
+                  </a:lnTo>
+                  <a:lnTo>
+                    <a:pt x="1647318" y="168557"/>
+                  </a:lnTo>
+                  <a:lnTo>
+                    <a:pt x="1575695" y="175052"/>
+                  </a:lnTo>
+                  <a:lnTo>
+                    <a:pt x="1504073" y="181484"/>
+                  </a:lnTo>
+                  <a:lnTo>
+                    <a:pt x="1432450" y="187852"/>
+                  </a:lnTo>
+                  <a:lnTo>
+                    <a:pt x="1360827" y="194158"/>
+                  </a:lnTo>
+                  <a:lnTo>
+                    <a:pt x="1289205" y="200401"/>
+                  </a:lnTo>
+                  <a:lnTo>
+                    <a:pt x="1217582" y="206584"/>
+                  </a:lnTo>
+                  <a:lnTo>
+                    <a:pt x="1145960" y="212705"/>
+                  </a:lnTo>
+                  <a:lnTo>
+                    <a:pt x="1074337" y="218766"/>
+                  </a:lnTo>
+                  <a:lnTo>
+                    <a:pt x="1002715" y="224768"/>
+                  </a:lnTo>
+                  <a:lnTo>
+                    <a:pt x="931092" y="230711"/>
+                  </a:lnTo>
+                  <a:lnTo>
+                    <a:pt x="859470" y="236595"/>
+                  </a:lnTo>
+                  <a:lnTo>
+                    <a:pt x="787847" y="242422"/>
+                  </a:lnTo>
+                  <a:lnTo>
+                    <a:pt x="716225" y="248191"/>
+                  </a:lnTo>
+                  <a:lnTo>
+                    <a:pt x="644602" y="253903"/>
+                  </a:lnTo>
+                  <a:lnTo>
+                    <a:pt x="572980" y="259559"/>
+                  </a:lnTo>
+                  <a:lnTo>
+                    <a:pt x="501357" y="265160"/>
+                  </a:lnTo>
+                  <a:lnTo>
+                    <a:pt x="429735" y="270706"/>
+                  </a:lnTo>
+                  <a:lnTo>
+                    <a:pt x="358112" y="276197"/>
+                  </a:lnTo>
+                  <a:lnTo>
+                    <a:pt x="286490" y="281634"/>
+                  </a:lnTo>
+                  <a:lnTo>
+                    <a:pt x="214867" y="287018"/>
+                  </a:lnTo>
+                  <a:lnTo>
+                    <a:pt x="143245" y="292349"/>
+                  </a:lnTo>
+                  <a:lnTo>
+                    <a:pt x="71622" y="297627"/>
+                  </a:lnTo>
+                  <a:lnTo>
+                    <a:pt x="0" y="302853"/>
                   </a:lnTo>
                 </a:path>
               </a:pathLst>
@@ -3931,619 +4240,312 @@
           </p:nvSpPr>
           <p:spPr>
             <a:xfrm>
-              <a:off x="817517" y="4727981"/>
-              <a:ext cx="7392041" cy="674688"/>
+              <a:off x="1172049" y="4186348"/>
+              <a:ext cx="7090630" cy="905717"/>
             </a:xfrm>
             <a:custGeom>
               <a:avLst/>
               <a:pathLst>
-                <a:path w="7392041" h="674688">
-                  <a:moveTo>
-                    <a:pt x="7392041" y="674688"/>
-                  </a:moveTo>
-                  <a:lnTo>
-                    <a:pt x="7314797" y="669708"/>
-                  </a:lnTo>
-                  <a:lnTo>
-                    <a:pt x="7237554" y="664566"/>
-                  </a:lnTo>
-                  <a:lnTo>
-                    <a:pt x="7160310" y="659259"/>
-                  </a:lnTo>
-                  <a:lnTo>
-                    <a:pt x="7083066" y="653781"/>
-                  </a:lnTo>
-                  <a:lnTo>
-                    <a:pt x="7005823" y="648127"/>
-                  </a:lnTo>
-                  <a:lnTo>
-                    <a:pt x="6928579" y="642290"/>
-                  </a:lnTo>
-                  <a:lnTo>
-                    <a:pt x="6851336" y="636265"/>
-                  </a:lnTo>
-                  <a:lnTo>
-                    <a:pt x="6774092" y="630046"/>
-                  </a:lnTo>
-                  <a:lnTo>
-                    <a:pt x="6696849" y="623627"/>
-                  </a:lnTo>
-                  <a:lnTo>
-                    <a:pt x="6619605" y="617001"/>
-                  </a:lnTo>
-                  <a:lnTo>
-                    <a:pt x="6542361" y="610161"/>
-                  </a:lnTo>
-                  <a:lnTo>
-                    <a:pt x="6465118" y="603101"/>
-                  </a:lnTo>
-                  <a:lnTo>
-                    <a:pt x="6387874" y="595814"/>
-                  </a:lnTo>
-                  <a:lnTo>
-                    <a:pt x="6310631" y="588291"/>
-                  </a:lnTo>
-                  <a:lnTo>
-                    <a:pt x="6233387" y="580527"/>
-                  </a:lnTo>
-                  <a:lnTo>
-                    <a:pt x="6156144" y="572512"/>
-                  </a:lnTo>
-                  <a:lnTo>
-                    <a:pt x="6078900" y="564239"/>
-                  </a:lnTo>
-                  <a:lnTo>
-                    <a:pt x="6001656" y="555699"/>
-                  </a:lnTo>
-                  <a:lnTo>
-                    <a:pt x="5924413" y="546884"/>
-                  </a:lnTo>
-                  <a:lnTo>
-                    <a:pt x="5847169" y="537785"/>
-                  </a:lnTo>
-                  <a:lnTo>
-                    <a:pt x="5769926" y="528393"/>
-                  </a:lnTo>
-                  <a:lnTo>
-                    <a:pt x="5692682" y="518698"/>
-                  </a:lnTo>
-                  <a:lnTo>
-                    <a:pt x="5615439" y="508691"/>
-                  </a:lnTo>
-                  <a:lnTo>
-                    <a:pt x="5538195" y="498361"/>
-                  </a:lnTo>
-                  <a:lnTo>
-                    <a:pt x="5460951" y="487699"/>
-                  </a:lnTo>
-                  <a:lnTo>
-                    <a:pt x="5383708" y="476693"/>
-                  </a:lnTo>
-                  <a:lnTo>
-                    <a:pt x="5306464" y="465332"/>
-                  </a:lnTo>
-                  <a:lnTo>
-                    <a:pt x="5229221" y="453605"/>
-                  </a:lnTo>
-                  <a:lnTo>
-                    <a:pt x="5151977" y="441501"/>
-                  </a:lnTo>
-                  <a:lnTo>
-                    <a:pt x="5074734" y="429006"/>
-                  </a:lnTo>
-                  <a:lnTo>
-                    <a:pt x="4997490" y="416109"/>
-                  </a:lnTo>
-                  <a:lnTo>
-                    <a:pt x="4920246" y="402796"/>
-                  </a:lnTo>
-                  <a:lnTo>
-                    <a:pt x="4843003" y="389055"/>
-                  </a:lnTo>
-                  <a:lnTo>
-                    <a:pt x="4765759" y="374870"/>
-                  </a:lnTo>
-                  <a:lnTo>
-                    <a:pt x="4688516" y="360229"/>
-                  </a:lnTo>
-                  <a:lnTo>
-                    <a:pt x="4611272" y="345115"/>
-                  </a:lnTo>
-                  <a:lnTo>
-                    <a:pt x="4534029" y="329515"/>
-                  </a:lnTo>
-                  <a:lnTo>
-                    <a:pt x="4456785" y="313412"/>
-                  </a:lnTo>
-                  <a:lnTo>
-                    <a:pt x="4379541" y="296790"/>
-                  </a:lnTo>
-                  <a:lnTo>
-                    <a:pt x="4302298" y="279633"/>
-                  </a:lnTo>
-                  <a:lnTo>
-                    <a:pt x="4225054" y="261923"/>
-                  </a:lnTo>
-                  <a:lnTo>
-                    <a:pt x="4147811" y="243642"/>
-                  </a:lnTo>
-                  <a:lnTo>
-                    <a:pt x="4070567" y="224772"/>
-                  </a:lnTo>
-                  <a:lnTo>
-                    <a:pt x="3993324" y="205294"/>
-                  </a:lnTo>
-                  <a:lnTo>
-                    <a:pt x="3916080" y="185188"/>
-                  </a:lnTo>
-                  <a:lnTo>
-                    <a:pt x="3838836" y="164435"/>
-                  </a:lnTo>
-                  <a:lnTo>
-                    <a:pt x="3761593" y="143012"/>
-                  </a:lnTo>
-                  <a:lnTo>
-                    <a:pt x="3684349" y="120900"/>
-                  </a:lnTo>
-                  <a:lnTo>
-                    <a:pt x="3607106" y="98075"/>
-                  </a:lnTo>
-                  <a:lnTo>
-                    <a:pt x="3529862" y="74515"/>
-                  </a:lnTo>
-                  <a:lnTo>
-                    <a:pt x="3452619" y="50195"/>
-                  </a:lnTo>
-                  <a:lnTo>
-                    <a:pt x="3375375" y="25092"/>
-                  </a:lnTo>
-                  <a:lnTo>
-                    <a:pt x="3298131" y="0"/>
-                  </a:lnTo>
-                  <a:lnTo>
-                    <a:pt x="3220888" y="8152"/>
-                  </a:lnTo>
-                  <a:lnTo>
-                    <a:pt x="3143644" y="16224"/>
-                  </a:lnTo>
-                  <a:lnTo>
-                    <a:pt x="3066401" y="24217"/>
-                  </a:lnTo>
-                  <a:lnTo>
-                    <a:pt x="2989157" y="32131"/>
-                  </a:lnTo>
-                  <a:lnTo>
-                    <a:pt x="2911914" y="39968"/>
-                  </a:lnTo>
-                  <a:lnTo>
-                    <a:pt x="2834670" y="47727"/>
-                  </a:lnTo>
-                  <a:lnTo>
-                    <a:pt x="2757426" y="55410"/>
-                  </a:lnTo>
-                  <a:lnTo>
-                    <a:pt x="2680183" y="63018"/>
-                  </a:lnTo>
-                  <a:lnTo>
-                    <a:pt x="2602939" y="70551"/>
-                  </a:lnTo>
-                  <a:lnTo>
-                    <a:pt x="2525696" y="78010"/>
-                  </a:lnTo>
-                  <a:lnTo>
-                    <a:pt x="2448452" y="85395"/>
-                  </a:lnTo>
-                  <a:lnTo>
-                    <a:pt x="2371209" y="92708"/>
-                  </a:lnTo>
-                  <a:lnTo>
-                    <a:pt x="2293965" y="99949"/>
-                  </a:lnTo>
-                  <a:lnTo>
-                    <a:pt x="2216721" y="107119"/>
-                  </a:lnTo>
-                  <a:lnTo>
-                    <a:pt x="2139478" y="114218"/>
-                  </a:lnTo>
-                  <a:lnTo>
-                    <a:pt x="2062234" y="121248"/>
-                  </a:lnTo>
-                  <a:lnTo>
-                    <a:pt x="1984991" y="128208"/>
-                  </a:lnTo>
-                  <a:lnTo>
-                    <a:pt x="1907747" y="135100"/>
-                  </a:lnTo>
-                  <a:lnTo>
-                    <a:pt x="1830504" y="141924"/>
-                  </a:lnTo>
-                  <a:lnTo>
-                    <a:pt x="1753260" y="148681"/>
-                  </a:lnTo>
-                  <a:lnTo>
-                    <a:pt x="1676016" y="155372"/>
-                  </a:lnTo>
-                  <a:lnTo>
-                    <a:pt x="1598773" y="161997"/>
-                  </a:lnTo>
-                  <a:lnTo>
-                    <a:pt x="1521529" y="168557"/>
-                  </a:lnTo>
-                  <a:lnTo>
-                    <a:pt x="1444286" y="175052"/>
-                  </a:lnTo>
-                  <a:lnTo>
-                    <a:pt x="1367042" y="181484"/>
-                  </a:lnTo>
-                  <a:lnTo>
-                    <a:pt x="1289799" y="187852"/>
-                  </a:lnTo>
-                  <a:lnTo>
-                    <a:pt x="1212555" y="194158"/>
-                  </a:lnTo>
-                  <a:lnTo>
-                    <a:pt x="1135311" y="200401"/>
-                  </a:lnTo>
-                  <a:lnTo>
-                    <a:pt x="1058068" y="206584"/>
-                  </a:lnTo>
-                  <a:lnTo>
-                    <a:pt x="980824" y="212705"/>
-                  </a:lnTo>
-                  <a:lnTo>
-                    <a:pt x="903581" y="218766"/>
-                  </a:lnTo>
-                  <a:lnTo>
-                    <a:pt x="826337" y="224768"/>
-                  </a:lnTo>
-                  <a:lnTo>
-                    <a:pt x="749094" y="230711"/>
-                  </a:lnTo>
-                  <a:lnTo>
-                    <a:pt x="671850" y="236595"/>
-                  </a:lnTo>
-                  <a:lnTo>
-                    <a:pt x="594606" y="242422"/>
-                  </a:lnTo>
-                  <a:lnTo>
-                    <a:pt x="517363" y="248191"/>
-                  </a:lnTo>
-                  <a:lnTo>
-                    <a:pt x="440119" y="253903"/>
-                  </a:lnTo>
-                  <a:lnTo>
-                    <a:pt x="362876" y="259559"/>
-                  </a:lnTo>
-                  <a:lnTo>
-                    <a:pt x="285632" y="265160"/>
-                  </a:lnTo>
-                  <a:lnTo>
-                    <a:pt x="208389" y="270706"/>
-                  </a:lnTo>
-                  <a:lnTo>
-                    <a:pt x="131145" y="276197"/>
-                  </a:lnTo>
-                  <a:lnTo>
-                    <a:pt x="53901" y="281634"/>
-                  </a:lnTo>
-                  <a:lnTo>
-                    <a:pt x="0" y="285391"/>
-                  </a:lnTo>
-                </a:path>
-              </a:pathLst>
-            </a:custGeom>
-          </p:spPr>
-          <p:txBody>
-            <a:bodyPr/>
-            <a:lstStyle/>
-            <a:p/>
-          </p:txBody>
-        </p:sp>
-        <p:sp>
-          <p:nvSpPr>
-            <p:cNvPr id="24" name="pl24"/>
-            <p:cNvSpPr/>
-            <p:nvPr/>
-          </p:nvSpPr>
-          <p:spPr>
-            <a:xfrm>
-              <a:off x="817517" y="4234872"/>
-              <a:ext cx="7392041" cy="857193"/>
-            </a:xfrm>
-            <a:custGeom>
-              <a:avLst/>
-              <a:pathLst>
-                <a:path w="7392041" h="857193">
+                <a:path w="7090630" h="905717">
                   <a:moveTo>
                     <a:pt x="0" y="0"/>
                   </a:moveTo>
                   <a:lnTo>
-                    <a:pt x="53901" y="10052"/>
-                  </a:lnTo>
-                  <a:lnTo>
-                    <a:pt x="131145" y="24301"/>
-                  </a:lnTo>
-                  <a:lnTo>
-                    <a:pt x="208389" y="38395"/>
-                  </a:lnTo>
-                  <a:lnTo>
-                    <a:pt x="285632" y="52336"/>
-                  </a:lnTo>
-                  <a:lnTo>
-                    <a:pt x="362876" y="66126"/>
-                  </a:lnTo>
-                  <a:lnTo>
-                    <a:pt x="440119" y="79766"/>
-                  </a:lnTo>
-                  <a:lnTo>
-                    <a:pt x="517363" y="93257"/>
-                  </a:lnTo>
-                  <a:lnTo>
-                    <a:pt x="594606" y="106603"/>
-                  </a:lnTo>
-                  <a:lnTo>
-                    <a:pt x="671850" y="119803"/>
-                  </a:lnTo>
-                  <a:lnTo>
-                    <a:pt x="749094" y="132861"/>
-                  </a:lnTo>
-                  <a:lnTo>
-                    <a:pt x="826337" y="145776"/>
-                  </a:lnTo>
-                  <a:lnTo>
-                    <a:pt x="903581" y="158551"/>
-                  </a:lnTo>
-                  <a:lnTo>
-                    <a:pt x="980824" y="171188"/>
-                  </a:lnTo>
-                  <a:lnTo>
-                    <a:pt x="1058068" y="183687"/>
-                  </a:lnTo>
-                  <a:lnTo>
-                    <a:pt x="1135311" y="196050"/>
-                  </a:lnTo>
-                  <a:lnTo>
-                    <a:pt x="1212555" y="208280"/>
-                  </a:lnTo>
-                  <a:lnTo>
-                    <a:pt x="1289799" y="220376"/>
-                  </a:lnTo>
-                  <a:lnTo>
-                    <a:pt x="1367042" y="232342"/>
-                  </a:lnTo>
-                  <a:lnTo>
-                    <a:pt x="1444286" y="244177"/>
-                  </a:lnTo>
-                  <a:lnTo>
-                    <a:pt x="1521529" y="255884"/>
-                  </a:lnTo>
-                  <a:lnTo>
-                    <a:pt x="1598773" y="267463"/>
-                  </a:lnTo>
-                  <a:lnTo>
-                    <a:pt x="1676016" y="278917"/>
-                  </a:lnTo>
-                  <a:lnTo>
-                    <a:pt x="1753260" y="290247"/>
-                  </a:lnTo>
-                  <a:lnTo>
-                    <a:pt x="1830504" y="301453"/>
-                  </a:lnTo>
-                  <a:lnTo>
-                    <a:pt x="1907747" y="312538"/>
-                  </a:lnTo>
-                  <a:lnTo>
-                    <a:pt x="1984991" y="323503"/>
-                  </a:lnTo>
-                  <a:lnTo>
-                    <a:pt x="2062234" y="334348"/>
-                  </a:lnTo>
-                  <a:lnTo>
-                    <a:pt x="2139478" y="345076"/>
-                  </a:lnTo>
-                  <a:lnTo>
-                    <a:pt x="2216721" y="355687"/>
-                  </a:lnTo>
-                  <a:lnTo>
-                    <a:pt x="2293965" y="366183"/>
-                  </a:lnTo>
-                  <a:lnTo>
-                    <a:pt x="2371209" y="376565"/>
-                  </a:lnTo>
-                  <a:lnTo>
-                    <a:pt x="2448452" y="386835"/>
-                  </a:lnTo>
-                  <a:lnTo>
-                    <a:pt x="2525696" y="396993"/>
-                  </a:lnTo>
-                  <a:lnTo>
-                    <a:pt x="2602939" y="407040"/>
-                  </a:lnTo>
-                  <a:lnTo>
-                    <a:pt x="2680183" y="416979"/>
-                  </a:lnTo>
-                  <a:lnTo>
-                    <a:pt x="2757426" y="426809"/>
-                  </a:lnTo>
-                  <a:lnTo>
-                    <a:pt x="2834670" y="436533"/>
-                  </a:lnTo>
-                  <a:lnTo>
-                    <a:pt x="2911914" y="446151"/>
-                  </a:lnTo>
-                  <a:lnTo>
-                    <a:pt x="2989157" y="455665"/>
-                  </a:lnTo>
-                  <a:lnTo>
-                    <a:pt x="3066401" y="465075"/>
-                  </a:lnTo>
-                  <a:lnTo>
-                    <a:pt x="3143644" y="474384"/>
-                  </a:lnTo>
-                  <a:lnTo>
-                    <a:pt x="3220888" y="483591"/>
-                  </a:lnTo>
-                  <a:lnTo>
-                    <a:pt x="3298131" y="492698"/>
-                  </a:lnTo>
-                  <a:lnTo>
-                    <a:pt x="3375375" y="501707"/>
-                  </a:lnTo>
-                  <a:lnTo>
-                    <a:pt x="3452619" y="510617"/>
-                  </a:lnTo>
-                  <a:lnTo>
-                    <a:pt x="3529862" y="519431"/>
-                  </a:lnTo>
-                  <a:lnTo>
-                    <a:pt x="3607106" y="528149"/>
-                  </a:lnTo>
-                  <a:lnTo>
-                    <a:pt x="3684349" y="536773"/>
-                  </a:lnTo>
-                  <a:lnTo>
-                    <a:pt x="3761593" y="545303"/>
-                  </a:lnTo>
-                  <a:lnTo>
-                    <a:pt x="3838836" y="553740"/>
-                  </a:lnTo>
-                  <a:lnTo>
-                    <a:pt x="3916080" y="562086"/>
-                  </a:lnTo>
-                  <a:lnTo>
-                    <a:pt x="3993324" y="570341"/>
-                  </a:lnTo>
-                  <a:lnTo>
-                    <a:pt x="4070567" y="578506"/>
-                  </a:lnTo>
-                  <a:lnTo>
-                    <a:pt x="4147811" y="586583"/>
-                  </a:lnTo>
-                  <a:lnTo>
-                    <a:pt x="4225054" y="594572"/>
-                  </a:lnTo>
-                  <a:lnTo>
-                    <a:pt x="4302298" y="602474"/>
-                  </a:lnTo>
-                  <a:lnTo>
-                    <a:pt x="4379541" y="610290"/>
-                  </a:lnTo>
-                  <a:lnTo>
-                    <a:pt x="4456785" y="618022"/>
-                  </a:lnTo>
-                  <a:lnTo>
-                    <a:pt x="4534029" y="625670"/>
-                  </a:lnTo>
-                  <a:lnTo>
-                    <a:pt x="4611272" y="633234"/>
-                  </a:lnTo>
-                  <a:lnTo>
-                    <a:pt x="4688516" y="640717"/>
-                  </a:lnTo>
-                  <a:lnTo>
-                    <a:pt x="4765759" y="648118"/>
-                  </a:lnTo>
-                  <a:lnTo>
-                    <a:pt x="4843003" y="655439"/>
-                  </a:lnTo>
-                  <a:lnTo>
-                    <a:pt x="4920246" y="662681"/>
-                  </a:lnTo>
-                  <a:lnTo>
-                    <a:pt x="4997490" y="669843"/>
-                  </a:lnTo>
-                  <a:lnTo>
-                    <a:pt x="5074734" y="676928"/>
-                  </a:lnTo>
-                  <a:lnTo>
-                    <a:pt x="5151977" y="683936"/>
-                  </a:lnTo>
-                  <a:lnTo>
-                    <a:pt x="5229221" y="690868"/>
-                  </a:lnTo>
-                  <a:lnTo>
-                    <a:pt x="5306464" y="697725"/>
-                  </a:lnTo>
-                  <a:lnTo>
-                    <a:pt x="5383708" y="704507"/>
-                  </a:lnTo>
-                  <a:lnTo>
-                    <a:pt x="5460951" y="711216"/>
-                  </a:lnTo>
-                  <a:lnTo>
-                    <a:pt x="5538195" y="717852"/>
-                  </a:lnTo>
-                  <a:lnTo>
-                    <a:pt x="5615439" y="724416"/>
-                  </a:lnTo>
-                  <a:lnTo>
-                    <a:pt x="5692682" y="730908"/>
-                  </a:lnTo>
-                  <a:lnTo>
-                    <a:pt x="5769926" y="737330"/>
-                  </a:lnTo>
-                  <a:lnTo>
-                    <a:pt x="5847169" y="743682"/>
-                  </a:lnTo>
-                  <a:lnTo>
-                    <a:pt x="5924413" y="749966"/>
-                  </a:lnTo>
-                  <a:lnTo>
-                    <a:pt x="6001656" y="756181"/>
-                  </a:lnTo>
-                  <a:lnTo>
-                    <a:pt x="6078900" y="762328"/>
-                  </a:lnTo>
-                  <a:lnTo>
-                    <a:pt x="6156144" y="768409"/>
-                  </a:lnTo>
-                  <a:lnTo>
-                    <a:pt x="6233387" y="774424"/>
-                  </a:lnTo>
-                  <a:lnTo>
-                    <a:pt x="6310631" y="780374"/>
-                  </a:lnTo>
-                  <a:lnTo>
-                    <a:pt x="6387874" y="786258"/>
-                  </a:lnTo>
-                  <a:lnTo>
-                    <a:pt x="6465118" y="792079"/>
-                  </a:lnTo>
-                  <a:lnTo>
-                    <a:pt x="6542361" y="797837"/>
-                  </a:lnTo>
-                  <a:lnTo>
-                    <a:pt x="6619605" y="803533"/>
-                  </a:lnTo>
-                  <a:lnTo>
-                    <a:pt x="6696849" y="809166"/>
-                  </a:lnTo>
-                  <a:lnTo>
-                    <a:pt x="6774092" y="814738"/>
-                  </a:lnTo>
-                  <a:lnTo>
-                    <a:pt x="6851336" y="820250"/>
-                  </a:lnTo>
-                  <a:lnTo>
-                    <a:pt x="6928579" y="825702"/>
-                  </a:lnTo>
-                  <a:lnTo>
-                    <a:pt x="7005823" y="831095"/>
-                  </a:lnTo>
-                  <a:lnTo>
-                    <a:pt x="7083066" y="836429"/>
-                  </a:lnTo>
-                  <a:lnTo>
-                    <a:pt x="7160310" y="841705"/>
-                  </a:lnTo>
-                  <a:lnTo>
-                    <a:pt x="7237554" y="846924"/>
-                  </a:lnTo>
-                  <a:lnTo>
-                    <a:pt x="7314797" y="852087"/>
-                  </a:lnTo>
-                  <a:lnTo>
-                    <a:pt x="7392041" y="857193"/>
+                    <a:pt x="71622" y="14884"/>
+                  </a:lnTo>
+                  <a:lnTo>
+                    <a:pt x="143245" y="29608"/>
+                  </a:lnTo>
+                  <a:lnTo>
+                    <a:pt x="214867" y="44171"/>
+                  </a:lnTo>
+                  <a:lnTo>
+                    <a:pt x="286490" y="58576"/>
+                  </a:lnTo>
+                  <a:lnTo>
+                    <a:pt x="358112" y="72825"/>
+                  </a:lnTo>
+                  <a:lnTo>
+                    <a:pt x="429735" y="86919"/>
+                  </a:lnTo>
+                  <a:lnTo>
+                    <a:pt x="501357" y="100860"/>
+                  </a:lnTo>
+                  <a:lnTo>
+                    <a:pt x="572980" y="114650"/>
+                  </a:lnTo>
+                  <a:lnTo>
+                    <a:pt x="644602" y="128290"/>
+                  </a:lnTo>
+                  <a:lnTo>
+                    <a:pt x="716225" y="141782"/>
+                  </a:lnTo>
+                  <a:lnTo>
+                    <a:pt x="787847" y="155127"/>
+                  </a:lnTo>
+                  <a:lnTo>
+                    <a:pt x="859470" y="168328"/>
+                  </a:lnTo>
+                  <a:lnTo>
+                    <a:pt x="931092" y="181385"/>
+                  </a:lnTo>
+                  <a:lnTo>
+                    <a:pt x="1002715" y="194300"/>
+                  </a:lnTo>
+                  <a:lnTo>
+                    <a:pt x="1074337" y="207076"/>
+                  </a:lnTo>
+                  <a:lnTo>
+                    <a:pt x="1145960" y="219712"/>
+                  </a:lnTo>
+                  <a:lnTo>
+                    <a:pt x="1217582" y="232211"/>
+                  </a:lnTo>
+                  <a:lnTo>
+                    <a:pt x="1289205" y="244575"/>
+                  </a:lnTo>
+                  <a:lnTo>
+                    <a:pt x="1360827" y="256804"/>
+                  </a:lnTo>
+                  <a:lnTo>
+                    <a:pt x="1432450" y="268901"/>
+                  </a:lnTo>
+                  <a:lnTo>
+                    <a:pt x="1504073" y="280866"/>
+                  </a:lnTo>
+                  <a:lnTo>
+                    <a:pt x="1575695" y="292701"/>
+                  </a:lnTo>
+                  <a:lnTo>
+                    <a:pt x="1647318" y="304408"/>
+                  </a:lnTo>
+                  <a:lnTo>
+                    <a:pt x="1718940" y="315988"/>
+                  </a:lnTo>
+                  <a:lnTo>
+                    <a:pt x="1790563" y="327442"/>
+                  </a:lnTo>
+                  <a:lnTo>
+                    <a:pt x="1862185" y="338771"/>
+                  </a:lnTo>
+                  <a:lnTo>
+                    <a:pt x="1933808" y="349978"/>
+                  </a:lnTo>
+                  <a:lnTo>
+                    <a:pt x="2005430" y="361063"/>
+                  </a:lnTo>
+                  <a:lnTo>
+                    <a:pt x="2077053" y="372027"/>
+                  </a:lnTo>
+                  <a:lnTo>
+                    <a:pt x="2148675" y="382873"/>
+                  </a:lnTo>
+                  <a:lnTo>
+                    <a:pt x="2220298" y="393600"/>
+                  </a:lnTo>
+                  <a:lnTo>
+                    <a:pt x="2291920" y="404212"/>
+                  </a:lnTo>
+                  <a:lnTo>
+                    <a:pt x="2363543" y="414708"/>
+                  </a:lnTo>
+                  <a:lnTo>
+                    <a:pt x="2435165" y="425090"/>
+                  </a:lnTo>
+                  <a:lnTo>
+                    <a:pt x="2506788" y="435359"/>
+                  </a:lnTo>
+                  <a:lnTo>
+                    <a:pt x="2578410" y="445517"/>
+                  </a:lnTo>
+                  <a:lnTo>
+                    <a:pt x="2650033" y="455565"/>
+                  </a:lnTo>
+                  <a:lnTo>
+                    <a:pt x="2721655" y="465503"/>
+                  </a:lnTo>
+                  <a:lnTo>
+                    <a:pt x="2793278" y="475334"/>
+                  </a:lnTo>
+                  <a:lnTo>
+                    <a:pt x="2864901" y="485057"/>
+                  </a:lnTo>
+                  <a:lnTo>
+                    <a:pt x="2936523" y="494676"/>
+                  </a:lnTo>
+                  <a:lnTo>
+                    <a:pt x="3008146" y="504189"/>
+                  </a:lnTo>
+                  <a:lnTo>
+                    <a:pt x="3079768" y="513600"/>
+                  </a:lnTo>
+                  <a:lnTo>
+                    <a:pt x="3151391" y="522908"/>
+                  </a:lnTo>
+                  <a:lnTo>
+                    <a:pt x="3223013" y="532115"/>
+                  </a:lnTo>
+                  <a:lnTo>
+                    <a:pt x="3294636" y="541223"/>
+                  </a:lnTo>
+                  <a:lnTo>
+                    <a:pt x="3366258" y="550231"/>
+                  </a:lnTo>
+                  <a:lnTo>
+                    <a:pt x="3437881" y="559142"/>
+                  </a:lnTo>
+                  <a:lnTo>
+                    <a:pt x="3509503" y="567956"/>
+                  </a:lnTo>
+                  <a:lnTo>
+                    <a:pt x="3581126" y="576674"/>
+                  </a:lnTo>
+                  <a:lnTo>
+                    <a:pt x="3652748" y="585297"/>
+                  </a:lnTo>
+                  <a:lnTo>
+                    <a:pt x="3724371" y="593827"/>
+                  </a:lnTo>
+                  <a:lnTo>
+                    <a:pt x="3795993" y="602264"/>
+                  </a:lnTo>
+                  <a:lnTo>
+                    <a:pt x="3867616" y="610610"/>
+                  </a:lnTo>
+                  <a:lnTo>
+                    <a:pt x="3939238" y="618865"/>
+                  </a:lnTo>
+                  <a:lnTo>
+                    <a:pt x="4010861" y="627030"/>
+                  </a:lnTo>
+                  <a:lnTo>
+                    <a:pt x="4082483" y="635107"/>
+                  </a:lnTo>
+                  <a:lnTo>
+                    <a:pt x="4154106" y="643096"/>
+                  </a:lnTo>
+                  <a:lnTo>
+                    <a:pt x="4225729" y="650998"/>
+                  </a:lnTo>
+                  <a:lnTo>
+                    <a:pt x="4297351" y="658815"/>
+                  </a:lnTo>
+                  <a:lnTo>
+                    <a:pt x="4368974" y="666547"/>
+                  </a:lnTo>
+                  <a:lnTo>
+                    <a:pt x="4440596" y="674194"/>
+                  </a:lnTo>
+                  <a:lnTo>
+                    <a:pt x="4512219" y="681759"/>
+                  </a:lnTo>
+                  <a:lnTo>
+                    <a:pt x="4583841" y="689241"/>
+                  </a:lnTo>
+                  <a:lnTo>
+                    <a:pt x="4655464" y="696643"/>
+                  </a:lnTo>
+                  <a:lnTo>
+                    <a:pt x="4727086" y="703964"/>
+                  </a:lnTo>
+                  <a:lnTo>
+                    <a:pt x="4798709" y="711205"/>
+                  </a:lnTo>
+                  <a:lnTo>
+                    <a:pt x="4870331" y="718368"/>
+                  </a:lnTo>
+                  <a:lnTo>
+                    <a:pt x="4941954" y="725453"/>
+                  </a:lnTo>
+                  <a:lnTo>
+                    <a:pt x="5013576" y="732461"/>
+                  </a:lnTo>
+                  <a:lnTo>
+                    <a:pt x="5085199" y="739393"/>
+                  </a:lnTo>
+                  <a:lnTo>
+                    <a:pt x="5156821" y="746250"/>
+                  </a:lnTo>
+                  <a:lnTo>
+                    <a:pt x="5228444" y="753032"/>
+                  </a:lnTo>
+                  <a:lnTo>
+                    <a:pt x="5300066" y="759741"/>
+                  </a:lnTo>
+                  <a:lnTo>
+                    <a:pt x="5371689" y="766376"/>
+                  </a:lnTo>
+                  <a:lnTo>
+                    <a:pt x="5443311" y="772940"/>
+                  </a:lnTo>
+                  <a:lnTo>
+                    <a:pt x="5514934" y="779433"/>
+                  </a:lnTo>
+                  <a:lnTo>
+                    <a:pt x="5586557" y="785855"/>
+                  </a:lnTo>
+                  <a:lnTo>
+                    <a:pt x="5658179" y="792207"/>
+                  </a:lnTo>
+                  <a:lnTo>
+                    <a:pt x="5729802" y="798490"/>
+                  </a:lnTo>
+                  <a:lnTo>
+                    <a:pt x="5801424" y="804705"/>
+                  </a:lnTo>
+                  <a:lnTo>
+                    <a:pt x="5873047" y="810853"/>
+                  </a:lnTo>
+                  <a:lnTo>
+                    <a:pt x="5944669" y="816934"/>
+                  </a:lnTo>
+                  <a:lnTo>
+                    <a:pt x="6016292" y="822948"/>
+                  </a:lnTo>
+                  <a:lnTo>
+                    <a:pt x="6087914" y="828898"/>
+                  </a:lnTo>
+                  <a:lnTo>
+                    <a:pt x="6159537" y="834783"/>
+                  </a:lnTo>
+                  <a:lnTo>
+                    <a:pt x="6231159" y="840604"/>
+                  </a:lnTo>
+                  <a:lnTo>
+                    <a:pt x="6302782" y="846362"/>
+                  </a:lnTo>
+                  <a:lnTo>
+                    <a:pt x="6374404" y="852057"/>
+                  </a:lnTo>
+                  <a:lnTo>
+                    <a:pt x="6446027" y="857690"/>
+                  </a:lnTo>
+                  <a:lnTo>
+                    <a:pt x="6517649" y="863263"/>
+                  </a:lnTo>
+                  <a:lnTo>
+                    <a:pt x="6589272" y="868775"/>
+                  </a:lnTo>
+                  <a:lnTo>
+                    <a:pt x="6660894" y="874227"/>
+                  </a:lnTo>
+                  <a:lnTo>
+                    <a:pt x="6732517" y="879619"/>
+                  </a:lnTo>
+                  <a:lnTo>
+                    <a:pt x="6804139" y="884953"/>
+                  </a:lnTo>
+                  <a:lnTo>
+                    <a:pt x="6875762" y="890230"/>
+                  </a:lnTo>
+                  <a:lnTo>
+                    <a:pt x="6947385" y="895449"/>
+                  </a:lnTo>
+                  <a:lnTo>
+                    <a:pt x="7019007" y="900611"/>
+                  </a:lnTo>
+                  <a:lnTo>
+                    <a:pt x="7090630" y="905717"/>
                   </a:lnTo>
                 </a:path>
               </a:pathLst>
@@ -4566,7 +4568,7 @@
         </p:sp>
         <p:sp>
           <p:nvSpPr>
-            <p:cNvPr id="25" name="pl25"/>
+            <p:cNvPr id="24" name="pl24"/>
             <p:cNvSpPr/>
             <p:nvPr/>
           </p:nvSpPr>
@@ -4609,13 +4611,13 @@
         </p:sp>
         <p:sp>
           <p:nvSpPr>
-            <p:cNvPr id="26" name="pl26"/>
+            <p:cNvPr id="25" name="pl25"/>
             <p:cNvSpPr/>
             <p:nvPr/>
           </p:nvSpPr>
           <p:spPr>
             <a:xfrm>
-              <a:off x="4117484" y="2073503"/>
+              <a:off x="4468386" y="2073503"/>
               <a:ext cx="0" cy="3649639"/>
             </a:xfrm>
             <a:custGeom>
@@ -4652,7 +4654,7 @@
         </p:sp>
         <p:sp>
           <p:nvSpPr>
-            <p:cNvPr id="27" name="tx27"/>
+            <p:cNvPr id="26" name="tx26"/>
             <p:cNvSpPr/>
             <p:nvPr/>
           </p:nvSpPr>
@@ -4698,7 +4700,7 @@
         </p:sp>
         <p:sp>
           <p:nvSpPr>
-            <p:cNvPr id="28" name="tx28"/>
+            <p:cNvPr id="27" name="tx27"/>
             <p:cNvSpPr/>
             <p:nvPr/>
           </p:nvSpPr>
@@ -4744,7 +4746,7 @@
         </p:sp>
         <p:sp>
           <p:nvSpPr>
-            <p:cNvPr id="29" name="tx29"/>
+            <p:cNvPr id="28" name="tx28"/>
             <p:cNvSpPr/>
             <p:nvPr/>
           </p:nvSpPr>
@@ -4790,7 +4792,7 @@
         </p:sp>
         <p:sp>
           <p:nvSpPr>
-            <p:cNvPr id="30" name="tx30"/>
+            <p:cNvPr id="29" name="tx29"/>
             <p:cNvSpPr/>
             <p:nvPr/>
           </p:nvSpPr>
@@ -4836,7 +4838,7 @@
         </p:sp>
         <p:sp>
           <p:nvSpPr>
-            <p:cNvPr id="31" name="tx31"/>
+            <p:cNvPr id="30" name="tx30"/>
             <p:cNvSpPr/>
             <p:nvPr/>
           </p:nvSpPr>
@@ -4882,14 +4884,14 @@
         </p:sp>
         <p:sp>
           <p:nvSpPr>
-            <p:cNvPr id="32" name="tx32"/>
+            <p:cNvPr id="31" name="tx31"/>
             <p:cNvSpPr/>
             <p:nvPr/>
           </p:nvSpPr>
           <p:spPr>
             <a:xfrm>
-              <a:off x="2423864" y="5785772"/>
-              <a:ext cx="155356" cy="80101"/>
+              <a:off x="2478335" y="5785772"/>
+              <a:ext cx="161574" cy="80101"/>
             </a:xfrm>
             <a:prstGeom prst="rect">
               <a:avLst/>
@@ -4921,21 +4923,21 @@
                   <a:latin typeface="Helvetica"/>
                   <a:cs typeface="Helvetica"/>
                 </a:rPr>
-                <a:t>0.8</a:t>
+                <a:t>-25</a:t>
               </a:r>
             </a:p>
           </p:txBody>
         </p:sp>
         <p:sp>
           <p:nvSpPr>
-            <p:cNvPr id="33" name="tx33"/>
+            <p:cNvPr id="32" name="tx32"/>
             <p:cNvSpPr/>
             <p:nvPr/>
           </p:nvSpPr>
           <p:spPr>
             <a:xfrm>
-              <a:off x="4196521" y="5785772"/>
-              <a:ext cx="155356" cy="80101"/>
+              <a:off x="4582608" y="5785772"/>
+              <a:ext cx="62179" cy="80101"/>
             </a:xfrm>
             <a:prstGeom prst="rect">
               <a:avLst/>
@@ -4967,21 +4969,21 @@
                   <a:latin typeface="Helvetica"/>
                   <a:cs typeface="Helvetica"/>
                 </a:rPr>
-                <a:t>1.0</a:t>
+                <a:t>0</a:t>
               </a:r>
             </a:p>
           </p:txBody>
         </p:sp>
         <p:sp>
           <p:nvSpPr>
-            <p:cNvPr id="34" name="tx34"/>
+            <p:cNvPr id="33" name="tx33"/>
             <p:cNvSpPr/>
             <p:nvPr/>
           </p:nvSpPr>
           <p:spPr>
             <a:xfrm>
-              <a:off x="5969179" y="5785772"/>
-              <a:ext cx="155356" cy="80101"/>
+              <a:off x="6606094" y="5785772"/>
+              <a:ext cx="124358" cy="80101"/>
             </a:xfrm>
             <a:prstGeom prst="rect">
               <a:avLst/>
@@ -5013,67 +5015,21 @@
                   <a:latin typeface="Helvetica"/>
                   <a:cs typeface="Helvetica"/>
                 </a:rPr>
-                <a:t>1.2</a:t>
+                <a:t>25</a:t>
               </a:r>
             </a:p>
           </p:txBody>
         </p:sp>
         <p:sp>
           <p:nvSpPr>
-            <p:cNvPr id="35" name="tx35"/>
+            <p:cNvPr id="34" name="tx34"/>
             <p:cNvSpPr/>
             <p:nvPr/>
           </p:nvSpPr>
           <p:spPr>
             <a:xfrm>
-              <a:off x="7741836" y="5785772"/>
-              <a:ext cx="155356" cy="80101"/>
-            </a:xfrm>
-            <a:prstGeom prst="rect">
-              <a:avLst/>
-            </a:prstGeom>
-            <a:noFill/>
-          </p:spPr>
-          <p:txBody>
-            <a:bodyPr lIns="0" rIns="0" tIns="0" bIns="0" anchorCtr="1" anchor="ctr" wrap="none"/>
-            <a:lstStyle/>
-            <a:p>
-              <a:pPr algn="l" marL="0" marR="0" indent="0">
-                <a:lnSpc>
-                  <a:spcPts val="880"/>
-                </a:lnSpc>
-                <a:spcBef>
-                  <a:spcPts val="0"/>
-                </a:spcBef>
-                <a:spcAft>
-                  <a:spcPts val="0"/>
-                </a:spcAft>
-              </a:pPr>
-              <a:r>
-                <a:rPr sz="880">
-                  <a:solidFill>
-                    <a:srgbClr val="4D4D4D">
-                      <a:alpha val="100000"/>
-                    </a:srgbClr>
-                  </a:solidFill>
-                  <a:latin typeface="Helvetica"/>
-                  <a:cs typeface="Helvetica"/>
-                </a:rPr>
-                <a:t>1.4</a:t>
-              </a:r>
-            </a:p>
-          </p:txBody>
-        </p:sp>
-        <p:sp>
-          <p:nvSpPr>
-            <p:cNvPr id="36" name="tx36"/>
-            <p:cNvSpPr/>
-            <p:nvPr/>
-          </p:nvSpPr>
-          <p:spPr>
-            <a:xfrm>
-              <a:off x="3879271" y="5925448"/>
-              <a:ext cx="1676186" cy="100218"/>
+              <a:off x="2928340" y="5925448"/>
+              <a:ext cx="3578047" cy="100218"/>
             </a:xfrm>
             <a:prstGeom prst="rect">
               <a:avLst/>
@@ -5105,14 +5061,14 @@
                   <a:latin typeface="Helvetica"/>
                   <a:cs typeface="Helvetica"/>
                 </a:rPr>
-                <a:t>CKD-EPI Cr-Cys / CG ratio</a:t>
+                <a:t>eGFR difference (%): 100 × (CKD-EPI Cr-Cys − CG) / CG</a:t>
               </a:r>
             </a:p>
           </p:txBody>
         </p:sp>
         <p:sp>
           <p:nvSpPr>
-            <p:cNvPr id="37" name="tx37"/>
+            <p:cNvPr id="35" name="tx35"/>
             <p:cNvSpPr/>
             <p:nvPr/>
           </p:nvSpPr>
@@ -5158,14 +5114,14 @@
         </p:sp>
         <p:sp>
           <p:nvSpPr>
-            <p:cNvPr id="38" name="tx38"/>
+            <p:cNvPr id="36" name="tx36"/>
             <p:cNvSpPr/>
             <p:nvPr/>
           </p:nvSpPr>
           <p:spPr>
             <a:xfrm>
               <a:off x="817517" y="1896563"/>
-              <a:ext cx="6169365" cy="82021"/>
+              <a:ext cx="6321612" cy="82021"/>
             </a:xfrm>
             <a:prstGeom prst="rect">
               <a:avLst/>
@@ -5197,14 +5153,14 @@
                   <a:latin typeface="Helvetica"/>
                   <a:cs typeface="Helvetica"/>
                 </a:rPr>
-                <a:t>subHR per 0.1 ratio decline: 1.13 (0.89-1.44), p = 0.304  |  per IQR decline (Δ = 0.30): 1.45 (0.72-2.93)  |  IQR: [0.84, 1.14]</a:t>
+                <a:t>subHR per 10 % decline: 1.13 (0.89-1.44), p = 0.304  |  per IQR decline (Δ = 29.5 %): 1.45 (0.72-2.93)  |  IQR: [-15.6, 13.9] %</a:t>
               </a:r>
             </a:p>
           </p:txBody>
         </p:sp>
         <p:sp>
           <p:nvSpPr>
-            <p:cNvPr id="39" name="tx39"/>
+            <p:cNvPr id="37" name="tx37"/>
             <p:cNvSpPr/>
             <p:nvPr/>
           </p:nvSpPr>

--- a/docs/pptx/auc3/jx-auc3-linsubhr-ratio-hosp-immune-other.pptx
+++ b/docs/pptx/auc3/jx-auc3-linsubhr-ratio-hosp-immune-other.pptx
@@ -2265,34 +2265,26 @@
         </p:sp>
         <p:sp>
           <p:nvSpPr>
-            <p:cNvPr id="4" name="pl4"/>
+            <p:cNvPr id="4" name="rc4"/>
             <p:cNvSpPr/>
             <p:nvPr/>
           </p:nvSpPr>
           <p:spPr>
             <a:xfrm>
-              <a:off x="817517" y="5142518"/>
-              <a:ext cx="7799693" cy="0"/>
+              <a:off x="457200" y="1600200"/>
+              <a:ext cx="8229600" cy="4525962"/>
             </a:xfrm>
-            <a:custGeom>
+            <a:prstGeom prst="rect">
               <a:avLst/>
-              <a:pathLst>
-                <a:path w="7799693" h="0">
-                  <a:moveTo>
-                    <a:pt x="0" y="0"/>
-                  </a:moveTo>
-                  <a:lnTo>
-                    <a:pt x="7799693" y="0"/>
-                  </a:lnTo>
-                  <a:lnTo>
-                    <a:pt x="7799693" y="0"/>
-                  </a:lnTo>
-                </a:path>
-              </a:pathLst>
-            </a:custGeom>
-            <a:ln w="6775" cap="flat">
+            </a:prstGeom>
+            <a:solidFill>
+              <a:srgbClr val="FFFFFF">
+                <a:alpha val="100000"/>
+              </a:srgbClr>
+            </a:solidFill>
+            <a:ln w="13550" cap="rnd">
               <a:solidFill>
-                <a:srgbClr val="EBEBEB">
+                <a:srgbClr val="FFFFFF">
                   <a:alpha val="100000"/>
                 </a:srgbClr>
               </a:solidFill>
@@ -2314,21 +2306,21 @@
           </p:nvSpPr>
           <p:spPr>
             <a:xfrm>
-              <a:off x="817517" y="4313054"/>
-              <a:ext cx="7799693" cy="0"/>
+              <a:off x="887106" y="3250627"/>
+              <a:ext cx="7660515" cy="0"/>
             </a:xfrm>
             <a:custGeom>
               <a:avLst/>
               <a:pathLst>
-                <a:path w="7799693" h="0">
+                <a:path w="7660515" h="0">
                   <a:moveTo>
                     <a:pt x="0" y="0"/>
                   </a:moveTo>
                   <a:lnTo>
-                    <a:pt x="7799693" y="0"/>
-                  </a:lnTo>
-                  <a:lnTo>
-                    <a:pt x="7799693" y="0"/>
+                    <a:pt x="7660515" y="0"/>
+                  </a:lnTo>
+                  <a:lnTo>
+                    <a:pt x="7660515" y="0"/>
                   </a:lnTo>
                 </a:path>
               </a:pathLst>
@@ -2357,21 +2349,21 @@
           </p:nvSpPr>
           <p:spPr>
             <a:xfrm>
-              <a:off x="817517" y="3483591"/>
-              <a:ext cx="7799693" cy="0"/>
+              <a:off x="887106" y="2951293"/>
+              <a:ext cx="7660515" cy="0"/>
             </a:xfrm>
             <a:custGeom>
               <a:avLst/>
               <a:pathLst>
-                <a:path w="7799693" h="0">
+                <a:path w="7660515" h="0">
                   <a:moveTo>
                     <a:pt x="0" y="0"/>
                   </a:moveTo>
                   <a:lnTo>
-                    <a:pt x="7799693" y="0"/>
-                  </a:lnTo>
-                  <a:lnTo>
-                    <a:pt x="7799693" y="0"/>
+                    <a:pt x="7660515" y="0"/>
+                  </a:lnTo>
+                  <a:lnTo>
+                    <a:pt x="7660515" y="0"/>
                   </a:lnTo>
                 </a:path>
               </a:pathLst>
@@ -2400,21 +2392,21 @@
           </p:nvSpPr>
           <p:spPr>
             <a:xfrm>
-              <a:off x="817517" y="2654127"/>
-              <a:ext cx="7799693" cy="0"/>
+              <a:off x="887106" y="2651959"/>
+              <a:ext cx="7660515" cy="0"/>
             </a:xfrm>
             <a:custGeom>
               <a:avLst/>
               <a:pathLst>
-                <a:path w="7799693" h="0">
+                <a:path w="7660515" h="0">
                   <a:moveTo>
                     <a:pt x="0" y="0"/>
                   </a:moveTo>
                   <a:lnTo>
-                    <a:pt x="7799693" y="0"/>
-                  </a:lnTo>
-                  <a:lnTo>
-                    <a:pt x="7799693" y="0"/>
+                    <a:pt x="7660515" y="0"/>
+                  </a:lnTo>
+                  <a:lnTo>
+                    <a:pt x="7660515" y="0"/>
                   </a:lnTo>
                 </a:path>
               </a:pathLst>
@@ -2443,21 +2435,21 @@
           </p:nvSpPr>
           <p:spPr>
             <a:xfrm>
-              <a:off x="1531834" y="2073503"/>
-              <a:ext cx="0" cy="3649639"/>
+              <a:off x="887106" y="2352625"/>
+              <a:ext cx="7660515" cy="0"/>
             </a:xfrm>
             <a:custGeom>
               <a:avLst/>
               <a:pathLst>
-                <a:path w="0" h="3649639">
+                <a:path w="7660515" h="0">
                   <a:moveTo>
-                    <a:pt x="0" y="3649639"/>
+                    <a:pt x="0" y="0"/>
                   </a:moveTo>
                   <a:lnTo>
-                    <a:pt x="0" y="0"/>
-                  </a:lnTo>
-                  <a:lnTo>
-                    <a:pt x="0" y="0"/>
+                    <a:pt x="7660515" y="0"/>
+                  </a:lnTo>
+                  <a:lnTo>
+                    <a:pt x="7660515" y="0"/>
                   </a:lnTo>
                 </a:path>
               </a:pathLst>
@@ -2486,15 +2478,15 @@
           </p:nvSpPr>
           <p:spPr>
             <a:xfrm>
-              <a:off x="3586410" y="2073503"/>
-              <a:ext cx="0" cy="3649639"/>
+              <a:off x="1588677" y="2143092"/>
+              <a:ext cx="0" cy="1317069"/>
             </a:xfrm>
             <a:custGeom>
               <a:avLst/>
               <a:pathLst>
-                <a:path w="0" h="3649639">
+                <a:path w="0" h="1317069">
                   <a:moveTo>
-                    <a:pt x="0" y="3649639"/>
+                    <a:pt x="0" y="1317069"/>
                   </a:moveTo>
                   <a:lnTo>
                     <a:pt x="0" y="0"/>
@@ -2529,15 +2521,15 @@
           </p:nvSpPr>
           <p:spPr>
             <a:xfrm>
-              <a:off x="5640985" y="2073503"/>
-              <a:ext cx="0" cy="3649639"/>
+              <a:off x="3606590" y="2143092"/>
+              <a:ext cx="0" cy="1317069"/>
             </a:xfrm>
             <a:custGeom>
               <a:avLst/>
               <a:pathLst>
-                <a:path w="0" h="3649639">
+                <a:path w="0" h="1317069">
                   <a:moveTo>
-                    <a:pt x="0" y="3649639"/>
+                    <a:pt x="0" y="1317069"/>
                   </a:moveTo>
                   <a:lnTo>
                     <a:pt x="0" y="0"/>
@@ -2572,15 +2564,15 @@
           </p:nvSpPr>
           <p:spPr>
             <a:xfrm>
-              <a:off x="7695561" y="2073503"/>
-              <a:ext cx="0" cy="3649639"/>
+              <a:off x="5624504" y="2143092"/>
+              <a:ext cx="0" cy="1317069"/>
             </a:xfrm>
             <a:custGeom>
               <a:avLst/>
               <a:pathLst>
-                <a:path w="0" h="3649639">
+                <a:path w="0" h="1317069">
                   <a:moveTo>
-                    <a:pt x="0" y="3649639"/>
+                    <a:pt x="0" y="1317069"/>
                   </a:moveTo>
                   <a:lnTo>
                     <a:pt x="0" y="0"/>
@@ -2615,26 +2607,26 @@
           </p:nvSpPr>
           <p:spPr>
             <a:xfrm>
-              <a:off x="817517" y="5557249"/>
-              <a:ext cx="7799693" cy="0"/>
+              <a:off x="7642418" y="2143092"/>
+              <a:ext cx="0" cy="1317069"/>
             </a:xfrm>
             <a:custGeom>
               <a:avLst/>
               <a:pathLst>
-                <a:path w="7799693" h="0">
+                <a:path w="0" h="1317069">
                   <a:moveTo>
+                    <a:pt x="0" y="1317069"/>
+                  </a:moveTo>
+                  <a:lnTo>
                     <a:pt x="0" y="0"/>
-                  </a:moveTo>
-                  <a:lnTo>
-                    <a:pt x="7799693" y="0"/>
-                  </a:lnTo>
-                  <a:lnTo>
-                    <a:pt x="7799693" y="0"/>
+                  </a:lnTo>
+                  <a:lnTo>
+                    <a:pt x="0" y="0"/>
                   </a:lnTo>
                 </a:path>
               </a:pathLst>
             </a:custGeom>
-            <a:ln w="13550" cap="flat">
+            <a:ln w="6775" cap="flat">
               <a:solidFill>
                 <a:srgbClr val="EBEBEB">
                   <a:alpha val="100000"/>
@@ -2658,21 +2650,21 @@
           </p:nvSpPr>
           <p:spPr>
             <a:xfrm>
-              <a:off x="817517" y="4727786"/>
-              <a:ext cx="7799693" cy="0"/>
+              <a:off x="887106" y="3400294"/>
+              <a:ext cx="7660515" cy="0"/>
             </a:xfrm>
             <a:custGeom>
               <a:avLst/>
               <a:pathLst>
-                <a:path w="7799693" h="0">
+                <a:path w="7660515" h="0">
                   <a:moveTo>
                     <a:pt x="0" y="0"/>
                   </a:moveTo>
                   <a:lnTo>
-                    <a:pt x="7799693" y="0"/>
-                  </a:lnTo>
-                  <a:lnTo>
-                    <a:pt x="7799693" y="0"/>
+                    <a:pt x="7660515" y="0"/>
+                  </a:lnTo>
+                  <a:lnTo>
+                    <a:pt x="7660515" y="0"/>
                   </a:lnTo>
                 </a:path>
               </a:pathLst>
@@ -2701,21 +2693,21 @@
           </p:nvSpPr>
           <p:spPr>
             <a:xfrm>
-              <a:off x="817517" y="3898322"/>
-              <a:ext cx="7799693" cy="0"/>
+              <a:off x="887106" y="3100960"/>
+              <a:ext cx="7660515" cy="0"/>
             </a:xfrm>
             <a:custGeom>
               <a:avLst/>
               <a:pathLst>
-                <a:path w="7799693" h="0">
+                <a:path w="7660515" h="0">
                   <a:moveTo>
                     <a:pt x="0" y="0"/>
                   </a:moveTo>
                   <a:lnTo>
-                    <a:pt x="7799693" y="0"/>
-                  </a:lnTo>
-                  <a:lnTo>
-                    <a:pt x="7799693" y="0"/>
+                    <a:pt x="7660515" y="0"/>
+                  </a:lnTo>
+                  <a:lnTo>
+                    <a:pt x="7660515" y="0"/>
                   </a:lnTo>
                 </a:path>
               </a:pathLst>
@@ -2744,21 +2736,21 @@
           </p:nvSpPr>
           <p:spPr>
             <a:xfrm>
-              <a:off x="817517" y="3068859"/>
-              <a:ext cx="7799693" cy="0"/>
+              <a:off x="887106" y="2801626"/>
+              <a:ext cx="7660515" cy="0"/>
             </a:xfrm>
             <a:custGeom>
               <a:avLst/>
               <a:pathLst>
-                <a:path w="7799693" h="0">
+                <a:path w="7660515" h="0">
                   <a:moveTo>
                     <a:pt x="0" y="0"/>
                   </a:moveTo>
                   <a:lnTo>
-                    <a:pt x="7799693" y="0"/>
-                  </a:lnTo>
-                  <a:lnTo>
-                    <a:pt x="7799693" y="0"/>
+                    <a:pt x="7660515" y="0"/>
+                  </a:lnTo>
+                  <a:lnTo>
+                    <a:pt x="7660515" y="0"/>
                   </a:lnTo>
                 </a:path>
               </a:pathLst>
@@ -2787,21 +2779,21 @@
           </p:nvSpPr>
           <p:spPr>
             <a:xfrm>
-              <a:off x="817517" y="2239395"/>
-              <a:ext cx="7799693" cy="0"/>
+              <a:off x="887106" y="2502292"/>
+              <a:ext cx="7660515" cy="0"/>
             </a:xfrm>
             <a:custGeom>
               <a:avLst/>
               <a:pathLst>
-                <a:path w="7799693" h="0">
+                <a:path w="7660515" h="0">
                   <a:moveTo>
                     <a:pt x="0" y="0"/>
                   </a:moveTo>
                   <a:lnTo>
-                    <a:pt x="7799693" y="0"/>
-                  </a:lnTo>
-                  <a:lnTo>
-                    <a:pt x="7799693" y="0"/>
+                    <a:pt x="7660515" y="0"/>
+                  </a:lnTo>
+                  <a:lnTo>
+                    <a:pt x="7660515" y="0"/>
                   </a:lnTo>
                 </a:path>
               </a:pathLst>
@@ -2830,21 +2822,21 @@
           </p:nvSpPr>
           <p:spPr>
             <a:xfrm>
-              <a:off x="2559122" y="2073503"/>
-              <a:ext cx="0" cy="3649639"/>
+              <a:off x="887106" y="2202958"/>
+              <a:ext cx="7660515" cy="0"/>
             </a:xfrm>
             <a:custGeom>
               <a:avLst/>
               <a:pathLst>
-                <a:path w="0" h="3649639">
+                <a:path w="7660515" h="0">
                   <a:moveTo>
-                    <a:pt x="0" y="3649639"/>
+                    <a:pt x="0" y="0"/>
                   </a:moveTo>
                   <a:lnTo>
-                    <a:pt x="0" y="0"/>
-                  </a:lnTo>
-                  <a:lnTo>
-                    <a:pt x="0" y="0"/>
+                    <a:pt x="7660515" y="0"/>
+                  </a:lnTo>
+                  <a:lnTo>
+                    <a:pt x="7660515" y="0"/>
                   </a:lnTo>
                 </a:path>
               </a:pathLst>
@@ -2873,15 +2865,15 @@
           </p:nvSpPr>
           <p:spPr>
             <a:xfrm>
-              <a:off x="4613698" y="2073503"/>
-              <a:ext cx="0" cy="3649639"/>
+              <a:off x="2597634" y="2143092"/>
+              <a:ext cx="0" cy="1317069"/>
             </a:xfrm>
             <a:custGeom>
               <a:avLst/>
               <a:pathLst>
-                <a:path w="0" h="3649639">
+                <a:path w="0" h="1317069">
                   <a:moveTo>
-                    <a:pt x="0" y="3649639"/>
+                    <a:pt x="0" y="1317069"/>
                   </a:moveTo>
                   <a:lnTo>
                     <a:pt x="0" y="0"/>
@@ -2916,15 +2908,15 @@
           </p:nvSpPr>
           <p:spPr>
             <a:xfrm>
-              <a:off x="6668273" y="2073503"/>
-              <a:ext cx="0" cy="3649639"/>
+              <a:off x="4615547" y="2143092"/>
+              <a:ext cx="0" cy="1317069"/>
             </a:xfrm>
             <a:custGeom>
               <a:avLst/>
               <a:pathLst>
-                <a:path w="0" h="3649639">
+                <a:path w="0" h="1317069">
                   <a:moveTo>
-                    <a:pt x="0" y="3649639"/>
+                    <a:pt x="0" y="1317069"/>
                   </a:moveTo>
                   <a:lnTo>
                     <a:pt x="0" y="0"/>
@@ -2953,618 +2945,661 @@
         </p:sp>
         <p:sp>
           <p:nvSpPr>
-            <p:cNvPr id="20" name="pg20"/>
+            <p:cNvPr id="20" name="pl20"/>
             <p:cNvSpPr/>
             <p:nvPr/>
           </p:nvSpPr>
           <p:spPr>
             <a:xfrm>
-              <a:off x="1172049" y="2073503"/>
-              <a:ext cx="7090630" cy="3329166"/>
+              <a:off x="6633461" y="2143092"/>
+              <a:ext cx="0" cy="1317069"/>
             </a:xfrm>
             <a:custGeom>
               <a:avLst/>
               <a:pathLst>
-                <a:path w="7090630" h="3329166">
+                <a:path w="0" h="1317069">
                   <a:moveTo>
-                    <a:pt x="55517" y="0"/>
+                    <a:pt x="0" y="1317069"/>
                   </a:moveTo>
                   <a:lnTo>
-                    <a:pt x="71622" y="25058"/>
-                  </a:lnTo>
-                  <a:lnTo>
-                    <a:pt x="143245" y="133025"/>
-                  </a:lnTo>
-                  <a:lnTo>
-                    <a:pt x="214867" y="237621"/>
-                  </a:lnTo>
-                  <a:lnTo>
-                    <a:pt x="286490" y="338952"/>
-                  </a:lnTo>
-                  <a:lnTo>
-                    <a:pt x="358112" y="437120"/>
-                  </a:lnTo>
-                  <a:lnTo>
-                    <a:pt x="429735" y="532223"/>
-                  </a:lnTo>
-                  <a:lnTo>
-                    <a:pt x="501357" y="624358"/>
-                  </a:lnTo>
-                  <a:lnTo>
-                    <a:pt x="572980" y="713617"/>
-                  </a:lnTo>
-                  <a:lnTo>
-                    <a:pt x="644602" y="800089"/>
-                  </a:lnTo>
-                  <a:lnTo>
-                    <a:pt x="716225" y="883862"/>
-                  </a:lnTo>
-                  <a:lnTo>
-                    <a:pt x="787847" y="965020"/>
-                  </a:lnTo>
-                  <a:lnTo>
-                    <a:pt x="859470" y="1043645"/>
-                  </a:lnTo>
-                  <a:lnTo>
-                    <a:pt x="931092" y="1119815"/>
-                  </a:lnTo>
-                  <a:lnTo>
-                    <a:pt x="1002715" y="1193607"/>
-                  </a:lnTo>
-                  <a:lnTo>
-                    <a:pt x="1074337" y="1265096"/>
-                  </a:lnTo>
-                  <a:lnTo>
-                    <a:pt x="1145960" y="1334354"/>
-                  </a:lnTo>
-                  <a:lnTo>
-                    <a:pt x="1217582" y="1401449"/>
-                  </a:lnTo>
-                  <a:lnTo>
-                    <a:pt x="1289205" y="1466450"/>
-                  </a:lnTo>
-                  <a:lnTo>
-                    <a:pt x="1360827" y="1529422"/>
-                  </a:lnTo>
-                  <a:lnTo>
-                    <a:pt x="1432450" y="1590428"/>
-                  </a:lnTo>
-                  <a:lnTo>
-                    <a:pt x="1504073" y="1649530"/>
-                  </a:lnTo>
-                  <a:lnTo>
-                    <a:pt x="1575695" y="1706787"/>
-                  </a:lnTo>
-                  <a:lnTo>
-                    <a:pt x="1647318" y="1762257"/>
-                  </a:lnTo>
-                  <a:lnTo>
-                    <a:pt x="1718940" y="1815995"/>
-                  </a:lnTo>
-                  <a:lnTo>
-                    <a:pt x="1790563" y="1868055"/>
-                  </a:lnTo>
-                  <a:lnTo>
-                    <a:pt x="1862185" y="1918491"/>
-                  </a:lnTo>
-                  <a:lnTo>
-                    <a:pt x="1933808" y="1967352"/>
-                  </a:lnTo>
-                  <a:lnTo>
-                    <a:pt x="2005430" y="2014687"/>
-                  </a:lnTo>
-                  <a:lnTo>
-                    <a:pt x="2077053" y="2060546"/>
-                  </a:lnTo>
-                  <a:lnTo>
-                    <a:pt x="2148675" y="2104972"/>
-                  </a:lnTo>
-                  <a:lnTo>
-                    <a:pt x="2220298" y="2148012"/>
-                  </a:lnTo>
-                  <a:lnTo>
-                    <a:pt x="2291920" y="2189708"/>
-                  </a:lnTo>
-                  <a:lnTo>
-                    <a:pt x="2363543" y="2230103"/>
-                  </a:lnTo>
-                  <a:lnTo>
-                    <a:pt x="2435165" y="2269237"/>
-                  </a:lnTo>
-                  <a:lnTo>
-                    <a:pt x="2506788" y="2307149"/>
-                  </a:lnTo>
-                  <a:lnTo>
-                    <a:pt x="2578410" y="2343878"/>
-                  </a:lnTo>
-                  <a:lnTo>
-                    <a:pt x="2650033" y="2379460"/>
-                  </a:lnTo>
-                  <a:lnTo>
-                    <a:pt x="2721655" y="2413931"/>
-                  </a:lnTo>
-                  <a:lnTo>
-                    <a:pt x="2793278" y="2447326"/>
-                  </a:lnTo>
-                  <a:lnTo>
-                    <a:pt x="2864901" y="2479679"/>
-                  </a:lnTo>
-                  <a:lnTo>
-                    <a:pt x="2936523" y="2511022"/>
-                  </a:lnTo>
-                  <a:lnTo>
-                    <a:pt x="3008146" y="2541387"/>
-                  </a:lnTo>
-                  <a:lnTo>
-                    <a:pt x="3079768" y="2570804"/>
-                  </a:lnTo>
-                  <a:lnTo>
-                    <a:pt x="3151391" y="2599302"/>
-                  </a:lnTo>
-                  <a:lnTo>
-                    <a:pt x="3223013" y="2626911"/>
-                  </a:lnTo>
-                  <a:lnTo>
-                    <a:pt x="3294636" y="2653658"/>
-                  </a:lnTo>
-                  <a:lnTo>
-                    <a:pt x="3366258" y="2646244"/>
-                  </a:lnTo>
-                  <a:lnTo>
-                    <a:pt x="3437881" y="2637929"/>
-                  </a:lnTo>
-                  <a:lnTo>
-                    <a:pt x="3509503" y="2629531"/>
-                  </a:lnTo>
-                  <a:lnTo>
-                    <a:pt x="3581126" y="2621050"/>
-                  </a:lnTo>
-                  <a:lnTo>
-                    <a:pt x="3652748" y="2612485"/>
-                  </a:lnTo>
-                  <a:lnTo>
-                    <a:pt x="3724371" y="2603835"/>
-                  </a:lnTo>
-                  <a:lnTo>
-                    <a:pt x="3795993" y="2595099"/>
-                  </a:lnTo>
-                  <a:lnTo>
-                    <a:pt x="3867616" y="2586276"/>
-                  </a:lnTo>
-                  <a:lnTo>
-                    <a:pt x="3939238" y="2577366"/>
-                  </a:lnTo>
-                  <a:lnTo>
-                    <a:pt x="4010861" y="2568367"/>
-                  </a:lnTo>
-                  <a:lnTo>
-                    <a:pt x="4082483" y="2559278"/>
-                  </a:lnTo>
-                  <a:lnTo>
-                    <a:pt x="4154106" y="2550100"/>
-                  </a:lnTo>
-                  <a:lnTo>
-                    <a:pt x="4225729" y="2540830"/>
-                  </a:lnTo>
-                  <a:lnTo>
-                    <a:pt x="4297351" y="2531469"/>
-                  </a:lnTo>
-                  <a:lnTo>
-                    <a:pt x="4368974" y="2522014"/>
-                  </a:lnTo>
-                  <a:lnTo>
-                    <a:pt x="4440596" y="2512466"/>
-                  </a:lnTo>
-                  <a:lnTo>
-                    <a:pt x="4512219" y="2502822"/>
-                  </a:lnTo>
-                  <a:lnTo>
-                    <a:pt x="4583841" y="2493083"/>
-                  </a:lnTo>
-                  <a:lnTo>
-                    <a:pt x="4655464" y="2483248"/>
-                  </a:lnTo>
-                  <a:lnTo>
-                    <a:pt x="4727086" y="2473314"/>
-                  </a:lnTo>
-                  <a:lnTo>
-                    <a:pt x="4798709" y="2463282"/>
-                  </a:lnTo>
-                  <a:lnTo>
-                    <a:pt x="4870331" y="2453151"/>
-                  </a:lnTo>
-                  <a:lnTo>
-                    <a:pt x="4941954" y="2442919"/>
-                  </a:lnTo>
-                  <a:lnTo>
-                    <a:pt x="5013576" y="2432585"/>
-                  </a:lnTo>
-                  <a:lnTo>
-                    <a:pt x="5085199" y="2422148"/>
-                  </a:lnTo>
-                  <a:lnTo>
-                    <a:pt x="5156821" y="2411608"/>
-                  </a:lnTo>
-                  <a:lnTo>
-                    <a:pt x="5228444" y="2400964"/>
-                  </a:lnTo>
-                  <a:lnTo>
-                    <a:pt x="5300066" y="2390213"/>
-                  </a:lnTo>
-                  <a:lnTo>
-                    <a:pt x="5371689" y="2379356"/>
-                  </a:lnTo>
-                  <a:lnTo>
-                    <a:pt x="5443311" y="2368392"/>
-                  </a:lnTo>
-                  <a:lnTo>
-                    <a:pt x="5514934" y="2357318"/>
-                  </a:lnTo>
-                  <a:lnTo>
-                    <a:pt x="5586557" y="2346134"/>
-                  </a:lnTo>
-                  <a:lnTo>
-                    <a:pt x="5658179" y="2334840"/>
-                  </a:lnTo>
-                  <a:lnTo>
-                    <a:pt x="5729802" y="2323433"/>
-                  </a:lnTo>
-                  <a:lnTo>
-                    <a:pt x="5801424" y="2311913"/>
-                  </a:lnTo>
-                  <a:lnTo>
-                    <a:pt x="5873047" y="2300278"/>
-                  </a:lnTo>
-                  <a:lnTo>
-                    <a:pt x="5944669" y="2288528"/>
-                  </a:lnTo>
-                  <a:lnTo>
-                    <a:pt x="6016292" y="2276662"/>
-                  </a:lnTo>
-                  <a:lnTo>
-                    <a:pt x="6087914" y="2264677"/>
-                  </a:lnTo>
-                  <a:lnTo>
-                    <a:pt x="6159537" y="2252574"/>
-                  </a:lnTo>
-                  <a:lnTo>
-                    <a:pt x="6231159" y="2240350"/>
-                  </a:lnTo>
-                  <a:lnTo>
-                    <a:pt x="6302782" y="2228005"/>
-                  </a:lnTo>
-                  <a:lnTo>
-                    <a:pt x="6374404" y="2215538"/>
-                  </a:lnTo>
-                  <a:lnTo>
-                    <a:pt x="6446027" y="2202947"/>
-                  </a:lnTo>
-                  <a:lnTo>
-                    <a:pt x="6517649" y="2190230"/>
-                  </a:lnTo>
-                  <a:lnTo>
-                    <a:pt x="6589272" y="2177388"/>
-                  </a:lnTo>
-                  <a:lnTo>
-                    <a:pt x="6660894" y="2164418"/>
-                  </a:lnTo>
-                  <a:lnTo>
-                    <a:pt x="6732517" y="2151319"/>
-                  </a:lnTo>
-                  <a:lnTo>
-                    <a:pt x="6804139" y="2138090"/>
-                  </a:lnTo>
-                  <a:lnTo>
-                    <a:pt x="6875762" y="2124730"/>
-                  </a:lnTo>
-                  <a:lnTo>
-                    <a:pt x="6947385" y="2111237"/>
-                  </a:lnTo>
-                  <a:lnTo>
-                    <a:pt x="7019007" y="2097610"/>
-                  </a:lnTo>
-                  <a:lnTo>
-                    <a:pt x="7090630" y="2083848"/>
-                  </a:lnTo>
-                  <a:lnTo>
-                    <a:pt x="7090630" y="3329166"/>
-                  </a:lnTo>
-                  <a:lnTo>
-                    <a:pt x="7019007" y="3324186"/>
-                  </a:lnTo>
-                  <a:lnTo>
-                    <a:pt x="6947385" y="3319044"/>
-                  </a:lnTo>
-                  <a:lnTo>
-                    <a:pt x="6875762" y="3313737"/>
-                  </a:lnTo>
-                  <a:lnTo>
-                    <a:pt x="6804139" y="3308259"/>
-                  </a:lnTo>
-                  <a:lnTo>
-                    <a:pt x="6732517" y="3302605"/>
-                  </a:lnTo>
-                  <a:lnTo>
-                    <a:pt x="6660894" y="3296768"/>
-                  </a:lnTo>
-                  <a:lnTo>
-                    <a:pt x="6589272" y="3290743"/>
-                  </a:lnTo>
-                  <a:lnTo>
-                    <a:pt x="6517649" y="3284524"/>
-                  </a:lnTo>
-                  <a:lnTo>
-                    <a:pt x="6446027" y="3278105"/>
-                  </a:lnTo>
-                  <a:lnTo>
-                    <a:pt x="6374404" y="3271479"/>
-                  </a:lnTo>
-                  <a:lnTo>
-                    <a:pt x="6302782" y="3264639"/>
-                  </a:lnTo>
-                  <a:lnTo>
-                    <a:pt x="6231159" y="3257579"/>
-                  </a:lnTo>
-                  <a:lnTo>
-                    <a:pt x="6159537" y="3250292"/>
-                  </a:lnTo>
-                  <a:lnTo>
-                    <a:pt x="6087914" y="3242769"/>
-                  </a:lnTo>
-                  <a:lnTo>
-                    <a:pt x="6016292" y="3235005"/>
-                  </a:lnTo>
-                  <a:lnTo>
-                    <a:pt x="5944669" y="3226990"/>
-                  </a:lnTo>
-                  <a:lnTo>
-                    <a:pt x="5873047" y="3218716"/>
-                  </a:lnTo>
-                  <a:lnTo>
-                    <a:pt x="5801424" y="3210177"/>
-                  </a:lnTo>
-                  <a:lnTo>
-                    <a:pt x="5729802" y="3201362"/>
-                  </a:lnTo>
-                  <a:lnTo>
-                    <a:pt x="5658179" y="3192263"/>
-                  </a:lnTo>
-                  <a:lnTo>
-                    <a:pt x="5586557" y="3182871"/>
-                  </a:lnTo>
-                  <a:lnTo>
-                    <a:pt x="5514934" y="3173176"/>
-                  </a:lnTo>
-                  <a:lnTo>
-                    <a:pt x="5443311" y="3163169"/>
-                  </a:lnTo>
-                  <a:lnTo>
-                    <a:pt x="5371689" y="3152839"/>
-                  </a:lnTo>
-                  <a:lnTo>
-                    <a:pt x="5300066" y="3142177"/>
-                  </a:lnTo>
-                  <a:lnTo>
-                    <a:pt x="5228444" y="3131171"/>
-                  </a:lnTo>
-                  <a:lnTo>
-                    <a:pt x="5156821" y="3119810"/>
-                  </a:lnTo>
-                  <a:lnTo>
-                    <a:pt x="5085199" y="3108083"/>
-                  </a:lnTo>
-                  <a:lnTo>
-                    <a:pt x="5013576" y="3095979"/>
-                  </a:lnTo>
-                  <a:lnTo>
-                    <a:pt x="4941954" y="3083484"/>
-                  </a:lnTo>
-                  <a:lnTo>
-                    <a:pt x="4870331" y="3070587"/>
-                  </a:lnTo>
-                  <a:lnTo>
-                    <a:pt x="4798709" y="3057274"/>
-                  </a:lnTo>
-                  <a:lnTo>
-                    <a:pt x="4727086" y="3043533"/>
-                  </a:lnTo>
-                  <a:lnTo>
-                    <a:pt x="4655464" y="3029348"/>
-                  </a:lnTo>
-                  <a:lnTo>
-                    <a:pt x="4583841" y="3014707"/>
-                  </a:lnTo>
-                  <a:lnTo>
-                    <a:pt x="4512219" y="2999593"/>
-                  </a:lnTo>
-                  <a:lnTo>
-                    <a:pt x="4440596" y="2983993"/>
-                  </a:lnTo>
-                  <a:lnTo>
-                    <a:pt x="4368974" y="2967890"/>
-                  </a:lnTo>
-                  <a:lnTo>
-                    <a:pt x="4297351" y="2951268"/>
-                  </a:lnTo>
-                  <a:lnTo>
-                    <a:pt x="4225729" y="2934111"/>
-                  </a:lnTo>
-                  <a:lnTo>
-                    <a:pt x="4154106" y="2916401"/>
-                  </a:lnTo>
-                  <a:lnTo>
-                    <a:pt x="4082483" y="2898120"/>
-                  </a:lnTo>
-                  <a:lnTo>
-                    <a:pt x="4010861" y="2879250"/>
-                  </a:lnTo>
-                  <a:lnTo>
-                    <a:pt x="3939238" y="2859772"/>
-                  </a:lnTo>
-                  <a:lnTo>
-                    <a:pt x="3867616" y="2839666"/>
-                  </a:lnTo>
-                  <a:lnTo>
-                    <a:pt x="3795993" y="2818913"/>
-                  </a:lnTo>
-                  <a:lnTo>
-                    <a:pt x="3724371" y="2797490"/>
-                  </a:lnTo>
-                  <a:lnTo>
-                    <a:pt x="3652748" y="2775378"/>
-                  </a:lnTo>
-                  <a:lnTo>
-                    <a:pt x="3581126" y="2752553"/>
-                  </a:lnTo>
-                  <a:lnTo>
-                    <a:pt x="3509503" y="2728993"/>
-                  </a:lnTo>
-                  <a:lnTo>
-                    <a:pt x="3437881" y="2704673"/>
-                  </a:lnTo>
-                  <a:lnTo>
-                    <a:pt x="3366258" y="2679570"/>
-                  </a:lnTo>
-                  <a:lnTo>
-                    <a:pt x="3294636" y="2654477"/>
-                  </a:lnTo>
-                  <a:lnTo>
-                    <a:pt x="3223013" y="2662630"/>
-                  </a:lnTo>
-                  <a:lnTo>
-                    <a:pt x="3151391" y="2670702"/>
-                  </a:lnTo>
-                  <a:lnTo>
-                    <a:pt x="3079768" y="2678695"/>
-                  </a:lnTo>
-                  <a:lnTo>
-                    <a:pt x="3008146" y="2686609"/>
-                  </a:lnTo>
-                  <a:lnTo>
-                    <a:pt x="2936523" y="2694446"/>
-                  </a:lnTo>
-                  <a:lnTo>
-                    <a:pt x="2864901" y="2702205"/>
-                  </a:lnTo>
-                  <a:lnTo>
-                    <a:pt x="2793278" y="2709888"/>
-                  </a:lnTo>
-                  <a:lnTo>
-                    <a:pt x="2721655" y="2717496"/>
-                  </a:lnTo>
-                  <a:lnTo>
-                    <a:pt x="2650033" y="2725029"/>
-                  </a:lnTo>
-                  <a:lnTo>
-                    <a:pt x="2578410" y="2732488"/>
-                  </a:lnTo>
-                  <a:lnTo>
-                    <a:pt x="2506788" y="2739873"/>
-                  </a:lnTo>
-                  <a:lnTo>
-                    <a:pt x="2435165" y="2747186"/>
-                  </a:lnTo>
-                  <a:lnTo>
-                    <a:pt x="2363543" y="2754427"/>
-                  </a:lnTo>
-                  <a:lnTo>
-                    <a:pt x="2291920" y="2761597"/>
-                  </a:lnTo>
-                  <a:lnTo>
-                    <a:pt x="2220298" y="2768696"/>
-                  </a:lnTo>
-                  <a:lnTo>
-                    <a:pt x="2148675" y="2775726"/>
-                  </a:lnTo>
-                  <a:lnTo>
-                    <a:pt x="2077053" y="2782686"/>
-                  </a:lnTo>
-                  <a:lnTo>
-                    <a:pt x="2005430" y="2789578"/>
-                  </a:lnTo>
-                  <a:lnTo>
-                    <a:pt x="1933808" y="2796402"/>
-                  </a:lnTo>
-                  <a:lnTo>
-                    <a:pt x="1862185" y="2803159"/>
-                  </a:lnTo>
-                  <a:lnTo>
-                    <a:pt x="1790563" y="2809850"/>
-                  </a:lnTo>
-                  <a:lnTo>
-                    <a:pt x="1718940" y="2816475"/>
-                  </a:lnTo>
-                  <a:lnTo>
-                    <a:pt x="1647318" y="2823035"/>
-                  </a:lnTo>
-                  <a:lnTo>
-                    <a:pt x="1575695" y="2829530"/>
-                  </a:lnTo>
-                  <a:lnTo>
-                    <a:pt x="1504073" y="2835962"/>
-                  </a:lnTo>
-                  <a:lnTo>
-                    <a:pt x="1432450" y="2842330"/>
-                  </a:lnTo>
-                  <a:lnTo>
-                    <a:pt x="1360827" y="2848636"/>
-                  </a:lnTo>
-                  <a:lnTo>
-                    <a:pt x="1289205" y="2854879"/>
-                  </a:lnTo>
-                  <a:lnTo>
-                    <a:pt x="1217582" y="2861062"/>
-                  </a:lnTo>
-                  <a:lnTo>
-                    <a:pt x="1145960" y="2867183"/>
-                  </a:lnTo>
-                  <a:lnTo>
-                    <a:pt x="1074337" y="2873244"/>
-                  </a:lnTo>
-                  <a:lnTo>
-                    <a:pt x="1002715" y="2879246"/>
-                  </a:lnTo>
-                  <a:lnTo>
-                    <a:pt x="931092" y="2885189"/>
-                  </a:lnTo>
-                  <a:lnTo>
-                    <a:pt x="859470" y="2891073"/>
-                  </a:lnTo>
-                  <a:lnTo>
-                    <a:pt x="787847" y="2896900"/>
-                  </a:lnTo>
-                  <a:lnTo>
-                    <a:pt x="716225" y="2902669"/>
-                  </a:lnTo>
-                  <a:lnTo>
-                    <a:pt x="644602" y="2908381"/>
-                  </a:lnTo>
-                  <a:lnTo>
-                    <a:pt x="572980" y="2914037"/>
-                  </a:lnTo>
-                  <a:lnTo>
-                    <a:pt x="501357" y="2919638"/>
-                  </a:lnTo>
-                  <a:lnTo>
-                    <a:pt x="429735" y="2925184"/>
-                  </a:lnTo>
-                  <a:lnTo>
-                    <a:pt x="358112" y="2930675"/>
-                  </a:lnTo>
-                  <a:lnTo>
-                    <a:pt x="286490" y="2936112"/>
-                  </a:lnTo>
-                  <a:lnTo>
-                    <a:pt x="214867" y="2941496"/>
-                  </a:lnTo>
-                  <a:lnTo>
-                    <a:pt x="143245" y="2946826"/>
-                  </a:lnTo>
-                  <a:lnTo>
-                    <a:pt x="71622" y="2952105"/>
-                  </a:lnTo>
-                  <a:lnTo>
-                    <a:pt x="0" y="2957331"/>
+                    <a:pt x="0" y="0"/>
+                  </a:lnTo>
+                  <a:lnTo>
+                    <a:pt x="0" y="0"/>
+                  </a:lnTo>
+                </a:path>
+              </a:pathLst>
+            </a:custGeom>
+            <a:ln w="13550" cap="flat">
+              <a:solidFill>
+                <a:srgbClr val="EBEBEB">
+                  <a:alpha val="100000"/>
+                </a:srgbClr>
+              </a:solidFill>
+              <a:prstDash val="solid"/>
+              <a:round/>
+            </a:ln>
+          </p:spPr>
+          <p:txBody>
+            <a:bodyPr/>
+            <a:lstStyle/>
+            <a:p/>
+          </p:txBody>
+        </p:sp>
+        <p:sp>
+          <p:nvSpPr>
+            <p:cNvPr id="21" name="pg21"/>
+            <p:cNvSpPr/>
+            <p:nvPr/>
+          </p:nvSpPr>
+          <p:spPr>
+            <a:xfrm>
+              <a:off x="1235312" y="2143092"/>
+              <a:ext cx="6964104" cy="1201418"/>
+            </a:xfrm>
+            <a:custGeom>
+              <a:avLst/>
+              <a:pathLst>
+                <a:path w="6964104" h="1201418">
+                  <a:moveTo>
+                    <a:pt x="54527" y="0"/>
+                  </a:moveTo>
+                  <a:lnTo>
+                    <a:pt x="70344" y="9043"/>
+                  </a:lnTo>
+                  <a:lnTo>
+                    <a:pt x="140688" y="48005"/>
+                  </a:lnTo>
+                  <a:lnTo>
+                    <a:pt x="211033" y="85751"/>
+                  </a:lnTo>
+                  <a:lnTo>
+                    <a:pt x="281377" y="122319"/>
+                  </a:lnTo>
+                  <a:lnTo>
+                    <a:pt x="351722" y="157746"/>
+                  </a:lnTo>
+                  <a:lnTo>
+                    <a:pt x="422066" y="192067"/>
+                  </a:lnTo>
+                  <a:lnTo>
+                    <a:pt x="492411" y="225316"/>
+                  </a:lnTo>
+                  <a:lnTo>
+                    <a:pt x="562755" y="257527"/>
+                  </a:lnTo>
+                  <a:lnTo>
+                    <a:pt x="633100" y="288733"/>
+                  </a:lnTo>
+                  <a:lnTo>
+                    <a:pt x="703444" y="318965"/>
+                  </a:lnTo>
+                  <a:lnTo>
+                    <a:pt x="773789" y="348253"/>
+                  </a:lnTo>
+                  <a:lnTo>
+                    <a:pt x="844133" y="376627"/>
+                  </a:lnTo>
+                  <a:lnTo>
+                    <a:pt x="914478" y="404115"/>
+                  </a:lnTo>
+                  <a:lnTo>
+                    <a:pt x="984822" y="430745"/>
+                  </a:lnTo>
+                  <a:lnTo>
+                    <a:pt x="1055167" y="456543"/>
+                  </a:lnTo>
+                  <a:lnTo>
+                    <a:pt x="1125511" y="481537"/>
+                  </a:lnTo>
+                  <a:lnTo>
+                    <a:pt x="1195856" y="505750"/>
+                  </a:lnTo>
+                  <a:lnTo>
+                    <a:pt x="1266200" y="529207"/>
+                  </a:lnTo>
+                  <a:lnTo>
+                    <a:pt x="1336545" y="551932"/>
+                  </a:lnTo>
+                  <a:lnTo>
+                    <a:pt x="1406889" y="573948"/>
+                  </a:lnTo>
+                  <a:lnTo>
+                    <a:pt x="1477234" y="595276"/>
+                  </a:lnTo>
+                  <a:lnTo>
+                    <a:pt x="1547578" y="615939"/>
+                  </a:lnTo>
+                  <a:lnTo>
+                    <a:pt x="1617923" y="635957"/>
+                  </a:lnTo>
+                  <a:lnTo>
+                    <a:pt x="1688267" y="655349"/>
+                  </a:lnTo>
+                  <a:lnTo>
+                    <a:pt x="1758612" y="674137"/>
+                  </a:lnTo>
+                  <a:lnTo>
+                    <a:pt x="1828956" y="692338"/>
+                  </a:lnTo>
+                  <a:lnTo>
+                    <a:pt x="1899301" y="709971"/>
+                  </a:lnTo>
+                  <a:lnTo>
+                    <a:pt x="1969645" y="727053"/>
+                  </a:lnTo>
+                  <a:lnTo>
+                    <a:pt x="2039990" y="743602"/>
+                  </a:lnTo>
+                  <a:lnTo>
+                    <a:pt x="2110334" y="759635"/>
+                  </a:lnTo>
+                  <a:lnTo>
+                    <a:pt x="2180679" y="775167"/>
+                  </a:lnTo>
+                  <a:lnTo>
+                    <a:pt x="2251023" y="790214"/>
+                  </a:lnTo>
+                  <a:lnTo>
+                    <a:pt x="2321368" y="804791"/>
+                  </a:lnTo>
+                  <a:lnTo>
+                    <a:pt x="2391712" y="818914"/>
+                  </a:lnTo>
+                  <a:lnTo>
+                    <a:pt x="2462057" y="832595"/>
+                  </a:lnTo>
+                  <a:lnTo>
+                    <a:pt x="2532401" y="845850"/>
+                  </a:lnTo>
+                  <a:lnTo>
+                    <a:pt x="2602746" y="858691"/>
+                  </a:lnTo>
+                  <a:lnTo>
+                    <a:pt x="2673090" y="871131"/>
+                  </a:lnTo>
+                  <a:lnTo>
+                    <a:pt x="2743435" y="883182"/>
+                  </a:lnTo>
+                  <a:lnTo>
+                    <a:pt x="2813779" y="894858"/>
+                  </a:lnTo>
+                  <a:lnTo>
+                    <a:pt x="2884124" y="906169"/>
+                  </a:lnTo>
+                  <a:lnTo>
+                    <a:pt x="2954468" y="917126"/>
+                  </a:lnTo>
+                  <a:lnTo>
+                    <a:pt x="3024813" y="927742"/>
+                  </a:lnTo>
+                  <a:lnTo>
+                    <a:pt x="3095157" y="938027"/>
+                  </a:lnTo>
+                  <a:lnTo>
+                    <a:pt x="3165502" y="947990"/>
+                  </a:lnTo>
+                  <a:lnTo>
+                    <a:pt x="3235846" y="957642"/>
+                  </a:lnTo>
+                  <a:lnTo>
+                    <a:pt x="3306191" y="954967"/>
+                  </a:lnTo>
+                  <a:lnTo>
+                    <a:pt x="3376535" y="951966"/>
+                  </a:lnTo>
+                  <a:lnTo>
+                    <a:pt x="3446880" y="948936"/>
+                  </a:lnTo>
+                  <a:lnTo>
+                    <a:pt x="3517224" y="945875"/>
+                  </a:lnTo>
+                  <a:lnTo>
+                    <a:pt x="3587569" y="942784"/>
+                  </a:lnTo>
+                  <a:lnTo>
+                    <a:pt x="3657913" y="939662"/>
+                  </a:lnTo>
+                  <a:lnTo>
+                    <a:pt x="3728257" y="936510"/>
+                  </a:lnTo>
+                  <a:lnTo>
+                    <a:pt x="3798602" y="933326"/>
+                  </a:lnTo>
+                  <a:lnTo>
+                    <a:pt x="3868946" y="930110"/>
+                  </a:lnTo>
+                  <a:lnTo>
+                    <a:pt x="3939291" y="926863"/>
+                  </a:lnTo>
+                  <a:lnTo>
+                    <a:pt x="4009635" y="923583"/>
+                  </a:lnTo>
+                  <a:lnTo>
+                    <a:pt x="4079980" y="920271"/>
+                  </a:lnTo>
+                  <a:lnTo>
+                    <a:pt x="4150324" y="916926"/>
+                  </a:lnTo>
+                  <a:lnTo>
+                    <a:pt x="4220669" y="913547"/>
+                  </a:lnTo>
+                  <a:lnTo>
+                    <a:pt x="4291013" y="910135"/>
+                  </a:lnTo>
+                  <a:lnTo>
+                    <a:pt x="4361358" y="906689"/>
+                  </a:lnTo>
+                  <a:lnTo>
+                    <a:pt x="4431702" y="903209"/>
+                  </a:lnTo>
+                  <a:lnTo>
+                    <a:pt x="4502047" y="899695"/>
+                  </a:lnTo>
+                  <a:lnTo>
+                    <a:pt x="4572391" y="896145"/>
+                  </a:lnTo>
+                  <a:lnTo>
+                    <a:pt x="4642736" y="892561"/>
+                  </a:lnTo>
+                  <a:lnTo>
+                    <a:pt x="4713080" y="888940"/>
+                  </a:lnTo>
+                  <a:lnTo>
+                    <a:pt x="4783425" y="885284"/>
+                  </a:lnTo>
+                  <a:lnTo>
+                    <a:pt x="4853769" y="881592"/>
+                  </a:lnTo>
+                  <a:lnTo>
+                    <a:pt x="4924114" y="877862"/>
+                  </a:lnTo>
+                  <a:lnTo>
+                    <a:pt x="4994458" y="874096"/>
+                  </a:lnTo>
+                  <a:lnTo>
+                    <a:pt x="5064803" y="870292"/>
+                  </a:lnTo>
+                  <a:lnTo>
+                    <a:pt x="5135147" y="866451"/>
+                  </a:lnTo>
+                  <a:lnTo>
+                    <a:pt x="5205492" y="862571"/>
+                  </a:lnTo>
+                  <a:lnTo>
+                    <a:pt x="5275836" y="858653"/>
+                  </a:lnTo>
+                  <a:lnTo>
+                    <a:pt x="5346181" y="854696"/>
+                  </a:lnTo>
+                  <a:lnTo>
+                    <a:pt x="5416525" y="850700"/>
+                  </a:lnTo>
+                  <a:lnTo>
+                    <a:pt x="5486870" y="846664"/>
+                  </a:lnTo>
+                  <a:lnTo>
+                    <a:pt x="5557214" y="842588"/>
+                  </a:lnTo>
+                  <a:lnTo>
+                    <a:pt x="5627559" y="838472"/>
+                  </a:lnTo>
+                  <a:lnTo>
+                    <a:pt x="5697903" y="834315"/>
+                  </a:lnTo>
+                  <a:lnTo>
+                    <a:pt x="5768248" y="830116"/>
+                  </a:lnTo>
+                  <a:lnTo>
+                    <a:pt x="5838592" y="825876"/>
+                  </a:lnTo>
+                  <a:lnTo>
+                    <a:pt x="5908937" y="821593"/>
+                  </a:lnTo>
+                  <a:lnTo>
+                    <a:pt x="5979281" y="817268"/>
+                  </a:lnTo>
+                  <a:lnTo>
+                    <a:pt x="6049626" y="812901"/>
+                  </a:lnTo>
+                  <a:lnTo>
+                    <a:pt x="6119970" y="808489"/>
+                  </a:lnTo>
+                  <a:lnTo>
+                    <a:pt x="6190315" y="804034"/>
+                  </a:lnTo>
+                  <a:lnTo>
+                    <a:pt x="6260659" y="799535"/>
+                  </a:lnTo>
+                  <a:lnTo>
+                    <a:pt x="6331004" y="794991"/>
+                  </a:lnTo>
+                  <a:lnTo>
+                    <a:pt x="6401348" y="790402"/>
+                  </a:lnTo>
+                  <a:lnTo>
+                    <a:pt x="6471693" y="785768"/>
+                  </a:lnTo>
+                  <a:lnTo>
+                    <a:pt x="6542037" y="781087"/>
+                  </a:lnTo>
+                  <a:lnTo>
+                    <a:pt x="6612382" y="776360"/>
+                  </a:lnTo>
+                  <a:lnTo>
+                    <a:pt x="6682726" y="771586"/>
+                  </a:lnTo>
+                  <a:lnTo>
+                    <a:pt x="6753071" y="766765"/>
+                  </a:lnTo>
+                  <a:lnTo>
+                    <a:pt x="6823415" y="761895"/>
+                  </a:lnTo>
+                  <a:lnTo>
+                    <a:pt x="6893760" y="756978"/>
+                  </a:lnTo>
+                  <a:lnTo>
+                    <a:pt x="6964104" y="752011"/>
+                  </a:lnTo>
+                  <a:lnTo>
+                    <a:pt x="6964104" y="1201418"/>
+                  </a:lnTo>
+                  <a:lnTo>
+                    <a:pt x="6893760" y="1199620"/>
+                  </a:lnTo>
+                  <a:lnTo>
+                    <a:pt x="6823415" y="1197765"/>
+                  </a:lnTo>
+                  <a:lnTo>
+                    <a:pt x="6753071" y="1195850"/>
+                  </a:lnTo>
+                  <a:lnTo>
+                    <a:pt x="6682726" y="1193873"/>
+                  </a:lnTo>
+                  <a:lnTo>
+                    <a:pt x="6612382" y="1191832"/>
+                  </a:lnTo>
+                  <a:lnTo>
+                    <a:pt x="6542037" y="1189726"/>
+                  </a:lnTo>
+                  <a:lnTo>
+                    <a:pt x="6471693" y="1187551"/>
+                  </a:lnTo>
+                  <a:lnTo>
+                    <a:pt x="6401348" y="1185307"/>
+                  </a:lnTo>
+                  <a:lnTo>
+                    <a:pt x="6331004" y="1182991"/>
+                  </a:lnTo>
+                  <a:lnTo>
+                    <a:pt x="6260659" y="1180599"/>
+                  </a:lnTo>
+                  <a:lnTo>
+                    <a:pt x="6190315" y="1178131"/>
+                  </a:lnTo>
+                  <a:lnTo>
+                    <a:pt x="6119970" y="1175583"/>
+                  </a:lnTo>
+                  <a:lnTo>
+                    <a:pt x="6049626" y="1172953"/>
+                  </a:lnTo>
+                  <a:lnTo>
+                    <a:pt x="5979281" y="1170239"/>
+                  </a:lnTo>
+                  <a:lnTo>
+                    <a:pt x="5908937" y="1167437"/>
+                  </a:lnTo>
+                  <a:lnTo>
+                    <a:pt x="5838592" y="1164544"/>
+                  </a:lnTo>
+                  <a:lnTo>
+                    <a:pt x="5768248" y="1161559"/>
+                  </a:lnTo>
+                  <a:lnTo>
+                    <a:pt x="5697903" y="1158477"/>
+                  </a:lnTo>
+                  <a:lnTo>
+                    <a:pt x="5627559" y="1155296"/>
+                  </a:lnTo>
+                  <a:lnTo>
+                    <a:pt x="5557214" y="1152012"/>
+                  </a:lnTo>
+                  <a:lnTo>
+                    <a:pt x="5486870" y="1148623"/>
+                  </a:lnTo>
+                  <a:lnTo>
+                    <a:pt x="5416525" y="1145124"/>
+                  </a:lnTo>
+                  <a:lnTo>
+                    <a:pt x="5346181" y="1141513"/>
+                  </a:lnTo>
+                  <a:lnTo>
+                    <a:pt x="5275836" y="1137785"/>
+                  </a:lnTo>
+                  <a:lnTo>
+                    <a:pt x="5205492" y="1133937"/>
+                  </a:lnTo>
+                  <a:lnTo>
+                    <a:pt x="5135147" y="1129966"/>
+                  </a:lnTo>
+                  <a:lnTo>
+                    <a:pt x="5064803" y="1125866"/>
+                  </a:lnTo>
+                  <a:lnTo>
+                    <a:pt x="4994458" y="1121634"/>
+                  </a:lnTo>
+                  <a:lnTo>
+                    <a:pt x="4924114" y="1117266"/>
+                  </a:lnTo>
+                  <a:lnTo>
+                    <a:pt x="4853769" y="1112757"/>
+                  </a:lnTo>
+                  <a:lnTo>
+                    <a:pt x="4783425" y="1108102"/>
+                  </a:lnTo>
+                  <a:lnTo>
+                    <a:pt x="4713080" y="1103298"/>
+                  </a:lnTo>
+                  <a:lnTo>
+                    <a:pt x="4642736" y="1098339"/>
+                  </a:lnTo>
+                  <a:lnTo>
+                    <a:pt x="4572391" y="1093220"/>
+                  </a:lnTo>
+                  <a:lnTo>
+                    <a:pt x="4502047" y="1087936"/>
+                  </a:lnTo>
+                  <a:lnTo>
+                    <a:pt x="4431702" y="1082482"/>
+                  </a:lnTo>
+                  <a:lnTo>
+                    <a:pt x="4361358" y="1076853"/>
+                  </a:lnTo>
+                  <a:lnTo>
+                    <a:pt x="4291013" y="1071041"/>
+                  </a:lnTo>
+                  <a:lnTo>
+                    <a:pt x="4220669" y="1065043"/>
+                  </a:lnTo>
+                  <a:lnTo>
+                    <a:pt x="4150324" y="1058851"/>
+                  </a:lnTo>
+                  <a:lnTo>
+                    <a:pt x="4079980" y="1052460"/>
+                  </a:lnTo>
+                  <a:lnTo>
+                    <a:pt x="4009635" y="1045863"/>
+                  </a:lnTo>
+                  <a:lnTo>
+                    <a:pt x="3939291" y="1039053"/>
+                  </a:lnTo>
+                  <a:lnTo>
+                    <a:pt x="3868946" y="1032024"/>
+                  </a:lnTo>
+                  <a:lnTo>
+                    <a:pt x="3798602" y="1024768"/>
+                  </a:lnTo>
+                  <a:lnTo>
+                    <a:pt x="3728257" y="1017279"/>
+                  </a:lnTo>
+                  <a:lnTo>
+                    <a:pt x="3657913" y="1009548"/>
+                  </a:lnTo>
+                  <a:lnTo>
+                    <a:pt x="3587569" y="1001568"/>
+                  </a:lnTo>
+                  <a:lnTo>
+                    <a:pt x="3517224" y="993331"/>
+                  </a:lnTo>
+                  <a:lnTo>
+                    <a:pt x="3446880" y="984829"/>
+                  </a:lnTo>
+                  <a:lnTo>
+                    <a:pt x="3376535" y="976053"/>
+                  </a:lnTo>
+                  <a:lnTo>
+                    <a:pt x="3306191" y="966993"/>
+                  </a:lnTo>
+                  <a:lnTo>
+                    <a:pt x="3235846" y="957938"/>
+                  </a:lnTo>
+                  <a:lnTo>
+                    <a:pt x="3165502" y="960880"/>
+                  </a:lnTo>
+                  <a:lnTo>
+                    <a:pt x="3095157" y="963793"/>
+                  </a:lnTo>
+                  <a:lnTo>
+                    <a:pt x="3024813" y="966678"/>
+                  </a:lnTo>
+                  <a:lnTo>
+                    <a:pt x="2954468" y="969534"/>
+                  </a:lnTo>
+                  <a:lnTo>
+                    <a:pt x="2884124" y="972362"/>
+                  </a:lnTo>
+                  <a:lnTo>
+                    <a:pt x="2813779" y="975162"/>
+                  </a:lnTo>
+                  <a:lnTo>
+                    <a:pt x="2743435" y="977935"/>
+                  </a:lnTo>
+                  <a:lnTo>
+                    <a:pt x="2673090" y="980680"/>
+                  </a:lnTo>
+                  <a:lnTo>
+                    <a:pt x="2602746" y="983399"/>
+                  </a:lnTo>
+                  <a:lnTo>
+                    <a:pt x="2532401" y="986090"/>
+                  </a:lnTo>
+                  <a:lnTo>
+                    <a:pt x="2462057" y="988755"/>
+                  </a:lnTo>
+                  <a:lnTo>
+                    <a:pt x="2391712" y="991394"/>
+                  </a:lnTo>
+                  <a:lnTo>
+                    <a:pt x="2321368" y="994008"/>
+                  </a:lnTo>
+                  <a:lnTo>
+                    <a:pt x="2251023" y="996595"/>
+                  </a:lnTo>
+                  <a:lnTo>
+                    <a:pt x="2180679" y="999157"/>
+                  </a:lnTo>
+                  <a:lnTo>
+                    <a:pt x="2110334" y="1001694"/>
+                  </a:lnTo>
+                  <a:lnTo>
+                    <a:pt x="2039990" y="1004206"/>
+                  </a:lnTo>
+                  <a:lnTo>
+                    <a:pt x="1969645" y="1006693"/>
+                  </a:lnTo>
+                  <a:lnTo>
+                    <a:pt x="1899301" y="1009155"/>
+                  </a:lnTo>
+                  <a:lnTo>
+                    <a:pt x="1828956" y="1011594"/>
+                  </a:lnTo>
+                  <a:lnTo>
+                    <a:pt x="1758612" y="1014008"/>
+                  </a:lnTo>
+                  <a:lnTo>
+                    <a:pt x="1688267" y="1016399"/>
+                  </a:lnTo>
+                  <a:lnTo>
+                    <a:pt x="1617923" y="1018767"/>
+                  </a:lnTo>
+                  <a:lnTo>
+                    <a:pt x="1547578" y="1021111"/>
+                  </a:lnTo>
+                  <a:lnTo>
+                    <a:pt x="1477234" y="1023432"/>
+                  </a:lnTo>
+                  <a:lnTo>
+                    <a:pt x="1406889" y="1025730"/>
+                  </a:lnTo>
+                  <a:lnTo>
+                    <a:pt x="1336545" y="1028005"/>
+                  </a:lnTo>
+                  <a:lnTo>
+                    <a:pt x="1266200" y="1030258"/>
+                  </a:lnTo>
+                  <a:lnTo>
+                    <a:pt x="1195856" y="1032489"/>
+                  </a:lnTo>
+                  <a:lnTo>
+                    <a:pt x="1125511" y="1034699"/>
+                  </a:lnTo>
+                  <a:lnTo>
+                    <a:pt x="1055167" y="1036886"/>
+                  </a:lnTo>
+                  <a:lnTo>
+                    <a:pt x="984822" y="1039052"/>
+                  </a:lnTo>
+                  <a:lnTo>
+                    <a:pt x="914478" y="1041196"/>
+                  </a:lnTo>
+                  <a:lnTo>
+                    <a:pt x="844133" y="1043320"/>
+                  </a:lnTo>
+                  <a:lnTo>
+                    <a:pt x="773789" y="1045423"/>
+                  </a:lnTo>
+                  <a:lnTo>
+                    <a:pt x="703444" y="1047505"/>
+                  </a:lnTo>
+                  <a:lnTo>
+                    <a:pt x="633100" y="1049566"/>
+                  </a:lnTo>
+                  <a:lnTo>
+                    <a:pt x="562755" y="1051607"/>
+                  </a:lnTo>
+                  <a:lnTo>
+                    <a:pt x="492411" y="1053628"/>
+                  </a:lnTo>
+                  <a:lnTo>
+                    <a:pt x="422066" y="1055630"/>
+                  </a:lnTo>
+                  <a:lnTo>
+                    <a:pt x="351722" y="1057611"/>
+                  </a:lnTo>
+                  <a:lnTo>
+                    <a:pt x="281377" y="1059573"/>
+                  </a:lnTo>
+                  <a:lnTo>
+                    <a:pt x="211033" y="1061516"/>
+                  </a:lnTo>
+                  <a:lnTo>
+                    <a:pt x="140688" y="1063440"/>
+                  </a:lnTo>
+                  <a:lnTo>
+                    <a:pt x="70344" y="1065345"/>
+                  </a:lnTo>
+                  <a:lnTo>
+                    <a:pt x="0" y="1067231"/>
                   </a:lnTo>
                   <a:close/>
                 </a:path>
@@ -3584,643 +3619,318 @@
         </p:sp>
         <p:sp>
           <p:nvSpPr>
-            <p:cNvPr id="21" name="pl21"/>
-            <p:cNvSpPr/>
-            <p:nvPr/>
-          </p:nvSpPr>
-          <p:spPr>
-            <a:xfrm>
-              <a:off x="1227567" y="2073503"/>
-              <a:ext cx="7035112" cy="2653658"/>
-            </a:xfrm>
-            <a:custGeom>
-              <a:avLst/>
-              <a:pathLst>
-                <a:path w="7035112" h="2653658">
-                  <a:moveTo>
-                    <a:pt x="0" y="0"/>
-                  </a:moveTo>
-                  <a:lnTo>
-                    <a:pt x="16104" y="25058"/>
-                  </a:lnTo>
-                  <a:lnTo>
-                    <a:pt x="87727" y="133025"/>
-                  </a:lnTo>
-                  <a:lnTo>
-                    <a:pt x="159349" y="237621"/>
-                  </a:lnTo>
-                  <a:lnTo>
-                    <a:pt x="230972" y="338952"/>
-                  </a:lnTo>
-                  <a:lnTo>
-                    <a:pt x="302594" y="437120"/>
-                  </a:lnTo>
-                  <a:lnTo>
-                    <a:pt x="374217" y="532223"/>
-                  </a:lnTo>
-                  <a:lnTo>
-                    <a:pt x="445839" y="624358"/>
-                  </a:lnTo>
-                  <a:lnTo>
-                    <a:pt x="517462" y="713617"/>
-                  </a:lnTo>
-                  <a:lnTo>
-                    <a:pt x="589084" y="800089"/>
-                  </a:lnTo>
-                  <a:lnTo>
-                    <a:pt x="660707" y="883862"/>
-                  </a:lnTo>
-                  <a:lnTo>
-                    <a:pt x="732329" y="965020"/>
-                  </a:lnTo>
-                  <a:lnTo>
-                    <a:pt x="803952" y="1043645"/>
-                  </a:lnTo>
-                  <a:lnTo>
-                    <a:pt x="875574" y="1119815"/>
-                  </a:lnTo>
-                  <a:lnTo>
-                    <a:pt x="947197" y="1193607"/>
-                  </a:lnTo>
-                  <a:lnTo>
-                    <a:pt x="1018819" y="1265096"/>
-                  </a:lnTo>
-                  <a:lnTo>
-                    <a:pt x="1090442" y="1334354"/>
-                  </a:lnTo>
-                  <a:lnTo>
-                    <a:pt x="1162064" y="1401449"/>
-                  </a:lnTo>
-                  <a:lnTo>
-                    <a:pt x="1233687" y="1466450"/>
-                  </a:lnTo>
-                  <a:lnTo>
-                    <a:pt x="1305310" y="1529422"/>
-                  </a:lnTo>
-                  <a:lnTo>
-                    <a:pt x="1376932" y="1590428"/>
-                  </a:lnTo>
-                  <a:lnTo>
-                    <a:pt x="1448555" y="1649530"/>
-                  </a:lnTo>
-                  <a:lnTo>
-                    <a:pt x="1520177" y="1706787"/>
-                  </a:lnTo>
-                  <a:lnTo>
-                    <a:pt x="1591800" y="1762257"/>
-                  </a:lnTo>
-                  <a:lnTo>
-                    <a:pt x="1663422" y="1815995"/>
-                  </a:lnTo>
-                  <a:lnTo>
-                    <a:pt x="1735045" y="1868055"/>
-                  </a:lnTo>
-                  <a:lnTo>
-                    <a:pt x="1806667" y="1918491"/>
-                  </a:lnTo>
-                  <a:lnTo>
-                    <a:pt x="1878290" y="1967352"/>
-                  </a:lnTo>
-                  <a:lnTo>
-                    <a:pt x="1949912" y="2014687"/>
-                  </a:lnTo>
-                  <a:lnTo>
-                    <a:pt x="2021535" y="2060546"/>
-                  </a:lnTo>
-                  <a:lnTo>
-                    <a:pt x="2093157" y="2104972"/>
-                  </a:lnTo>
-                  <a:lnTo>
-                    <a:pt x="2164780" y="2148012"/>
-                  </a:lnTo>
-                  <a:lnTo>
-                    <a:pt x="2236402" y="2189708"/>
-                  </a:lnTo>
-                  <a:lnTo>
-                    <a:pt x="2308025" y="2230103"/>
-                  </a:lnTo>
-                  <a:lnTo>
-                    <a:pt x="2379647" y="2269237"/>
-                  </a:lnTo>
-                  <a:lnTo>
-                    <a:pt x="2451270" y="2307149"/>
-                  </a:lnTo>
-                  <a:lnTo>
-                    <a:pt x="2522892" y="2343878"/>
-                  </a:lnTo>
-                  <a:lnTo>
-                    <a:pt x="2594515" y="2379460"/>
-                  </a:lnTo>
-                  <a:lnTo>
-                    <a:pt x="2666138" y="2413931"/>
-                  </a:lnTo>
-                  <a:lnTo>
-                    <a:pt x="2737760" y="2447326"/>
-                  </a:lnTo>
-                  <a:lnTo>
-                    <a:pt x="2809383" y="2479679"/>
-                  </a:lnTo>
-                  <a:lnTo>
-                    <a:pt x="2881005" y="2511022"/>
-                  </a:lnTo>
-                  <a:lnTo>
-                    <a:pt x="2952628" y="2541387"/>
-                  </a:lnTo>
-                  <a:lnTo>
-                    <a:pt x="3024250" y="2570804"/>
-                  </a:lnTo>
-                  <a:lnTo>
-                    <a:pt x="3095873" y="2599302"/>
-                  </a:lnTo>
-                  <a:lnTo>
-                    <a:pt x="3167495" y="2626911"/>
-                  </a:lnTo>
-                  <a:lnTo>
-                    <a:pt x="3239118" y="2653658"/>
-                  </a:lnTo>
-                  <a:lnTo>
-                    <a:pt x="3310740" y="2646244"/>
-                  </a:lnTo>
-                  <a:lnTo>
-                    <a:pt x="3382363" y="2637929"/>
-                  </a:lnTo>
-                  <a:lnTo>
-                    <a:pt x="3453985" y="2629531"/>
-                  </a:lnTo>
-                  <a:lnTo>
-                    <a:pt x="3525608" y="2621050"/>
-                  </a:lnTo>
-                  <a:lnTo>
-                    <a:pt x="3597230" y="2612485"/>
-                  </a:lnTo>
-                  <a:lnTo>
-                    <a:pt x="3668853" y="2603835"/>
-                  </a:lnTo>
-                  <a:lnTo>
-                    <a:pt x="3740475" y="2595099"/>
-                  </a:lnTo>
-                  <a:lnTo>
-                    <a:pt x="3812098" y="2586276"/>
-                  </a:lnTo>
-                  <a:lnTo>
-                    <a:pt x="3883720" y="2577366"/>
-                  </a:lnTo>
-                  <a:lnTo>
-                    <a:pt x="3955343" y="2568367"/>
-                  </a:lnTo>
-                  <a:lnTo>
-                    <a:pt x="4026966" y="2559278"/>
-                  </a:lnTo>
-                  <a:lnTo>
-                    <a:pt x="4098588" y="2550100"/>
-                  </a:lnTo>
-                  <a:lnTo>
-                    <a:pt x="4170211" y="2540830"/>
-                  </a:lnTo>
-                  <a:lnTo>
-                    <a:pt x="4241833" y="2531469"/>
-                  </a:lnTo>
-                  <a:lnTo>
-                    <a:pt x="4313456" y="2522014"/>
-                  </a:lnTo>
-                  <a:lnTo>
-                    <a:pt x="4385078" y="2512466"/>
-                  </a:lnTo>
-                  <a:lnTo>
-                    <a:pt x="4456701" y="2502822"/>
-                  </a:lnTo>
-                  <a:lnTo>
-                    <a:pt x="4528323" y="2493083"/>
-                  </a:lnTo>
-                  <a:lnTo>
-                    <a:pt x="4599946" y="2483248"/>
-                  </a:lnTo>
-                  <a:lnTo>
-                    <a:pt x="4671568" y="2473314"/>
-                  </a:lnTo>
-                  <a:lnTo>
-                    <a:pt x="4743191" y="2463282"/>
-                  </a:lnTo>
-                  <a:lnTo>
-                    <a:pt x="4814813" y="2453151"/>
-                  </a:lnTo>
-                  <a:lnTo>
-                    <a:pt x="4886436" y="2442919"/>
-                  </a:lnTo>
-                  <a:lnTo>
-                    <a:pt x="4958058" y="2432585"/>
-                  </a:lnTo>
-                  <a:lnTo>
-                    <a:pt x="5029681" y="2422148"/>
-                  </a:lnTo>
-                  <a:lnTo>
-                    <a:pt x="5101303" y="2411608"/>
-                  </a:lnTo>
-                  <a:lnTo>
-                    <a:pt x="5172926" y="2400964"/>
-                  </a:lnTo>
-                  <a:lnTo>
-                    <a:pt x="5244548" y="2390213"/>
-                  </a:lnTo>
-                  <a:lnTo>
-                    <a:pt x="5316171" y="2379356"/>
-                  </a:lnTo>
-                  <a:lnTo>
-                    <a:pt x="5387794" y="2368392"/>
-                  </a:lnTo>
-                  <a:lnTo>
-                    <a:pt x="5459416" y="2357318"/>
-                  </a:lnTo>
-                  <a:lnTo>
-                    <a:pt x="5531039" y="2346134"/>
-                  </a:lnTo>
-                  <a:lnTo>
-                    <a:pt x="5602661" y="2334840"/>
-                  </a:lnTo>
-                  <a:lnTo>
-                    <a:pt x="5674284" y="2323433"/>
-                  </a:lnTo>
-                  <a:lnTo>
-                    <a:pt x="5745906" y="2311913"/>
-                  </a:lnTo>
-                  <a:lnTo>
-                    <a:pt x="5817529" y="2300278"/>
-                  </a:lnTo>
-                  <a:lnTo>
-                    <a:pt x="5889151" y="2288528"/>
-                  </a:lnTo>
-                  <a:lnTo>
-                    <a:pt x="5960774" y="2276662"/>
-                  </a:lnTo>
-                  <a:lnTo>
-                    <a:pt x="6032396" y="2264677"/>
-                  </a:lnTo>
-                  <a:lnTo>
-                    <a:pt x="6104019" y="2252574"/>
-                  </a:lnTo>
-                  <a:lnTo>
-                    <a:pt x="6175641" y="2240350"/>
-                  </a:lnTo>
-                  <a:lnTo>
-                    <a:pt x="6247264" y="2228005"/>
-                  </a:lnTo>
-                  <a:lnTo>
-                    <a:pt x="6318886" y="2215538"/>
-                  </a:lnTo>
-                  <a:lnTo>
-                    <a:pt x="6390509" y="2202947"/>
-                  </a:lnTo>
-                  <a:lnTo>
-                    <a:pt x="6462131" y="2190230"/>
-                  </a:lnTo>
-                  <a:lnTo>
-                    <a:pt x="6533754" y="2177388"/>
-                  </a:lnTo>
-                  <a:lnTo>
-                    <a:pt x="6605376" y="2164418"/>
-                  </a:lnTo>
-                  <a:lnTo>
-                    <a:pt x="6676999" y="2151319"/>
-                  </a:lnTo>
-                  <a:lnTo>
-                    <a:pt x="6748622" y="2138090"/>
-                  </a:lnTo>
-                  <a:lnTo>
-                    <a:pt x="6820244" y="2124730"/>
-                  </a:lnTo>
-                  <a:lnTo>
-                    <a:pt x="6891867" y="2111237"/>
-                  </a:lnTo>
-                  <a:lnTo>
-                    <a:pt x="6963489" y="2097610"/>
-                  </a:lnTo>
-                  <a:lnTo>
-                    <a:pt x="7035112" y="2083848"/>
-                  </a:lnTo>
-                </a:path>
-              </a:pathLst>
-            </a:custGeom>
-          </p:spPr>
-          <p:txBody>
-            <a:bodyPr/>
-            <a:lstStyle/>
-            <a:p/>
-          </p:txBody>
-        </p:sp>
-        <p:sp>
-          <p:nvSpPr>
             <p:cNvPr id="22" name="pl22"/>
             <p:cNvSpPr/>
             <p:nvPr/>
           </p:nvSpPr>
           <p:spPr>
             <a:xfrm>
-              <a:off x="1172049" y="4727981"/>
-              <a:ext cx="7090630" cy="674688"/>
+              <a:off x="1289839" y="2143092"/>
+              <a:ext cx="6909577" cy="957642"/>
             </a:xfrm>
             <a:custGeom>
               <a:avLst/>
               <a:pathLst>
-                <a:path w="7090630" h="674688">
+                <a:path w="6909577" h="957642">
                   <a:moveTo>
-                    <a:pt x="7090630" y="674688"/>
+                    <a:pt x="0" y="0"/>
                   </a:moveTo>
                   <a:lnTo>
-                    <a:pt x="7019007" y="669708"/>
-                  </a:lnTo>
-                  <a:lnTo>
-                    <a:pt x="6947385" y="664566"/>
-                  </a:lnTo>
-                  <a:lnTo>
-                    <a:pt x="6875762" y="659259"/>
-                  </a:lnTo>
-                  <a:lnTo>
-                    <a:pt x="6804139" y="653781"/>
-                  </a:lnTo>
-                  <a:lnTo>
-                    <a:pt x="6732517" y="648127"/>
-                  </a:lnTo>
-                  <a:lnTo>
-                    <a:pt x="6660894" y="642290"/>
-                  </a:lnTo>
-                  <a:lnTo>
-                    <a:pt x="6589272" y="636265"/>
-                  </a:lnTo>
-                  <a:lnTo>
-                    <a:pt x="6517649" y="630046"/>
-                  </a:lnTo>
-                  <a:lnTo>
-                    <a:pt x="6446027" y="623627"/>
-                  </a:lnTo>
-                  <a:lnTo>
-                    <a:pt x="6374404" y="617001"/>
-                  </a:lnTo>
-                  <a:lnTo>
-                    <a:pt x="6302782" y="610161"/>
-                  </a:lnTo>
-                  <a:lnTo>
-                    <a:pt x="6231159" y="603101"/>
-                  </a:lnTo>
-                  <a:lnTo>
-                    <a:pt x="6159537" y="595814"/>
-                  </a:lnTo>
-                  <a:lnTo>
-                    <a:pt x="6087914" y="588291"/>
-                  </a:lnTo>
-                  <a:lnTo>
-                    <a:pt x="6016292" y="580527"/>
-                  </a:lnTo>
-                  <a:lnTo>
-                    <a:pt x="5944669" y="572512"/>
-                  </a:lnTo>
-                  <a:lnTo>
-                    <a:pt x="5873047" y="564239"/>
-                  </a:lnTo>
-                  <a:lnTo>
-                    <a:pt x="5801424" y="555699"/>
-                  </a:lnTo>
-                  <a:lnTo>
-                    <a:pt x="5729802" y="546884"/>
-                  </a:lnTo>
-                  <a:lnTo>
-                    <a:pt x="5658179" y="537785"/>
-                  </a:lnTo>
-                  <a:lnTo>
-                    <a:pt x="5586557" y="528393"/>
-                  </a:lnTo>
-                  <a:lnTo>
-                    <a:pt x="5514934" y="518698"/>
-                  </a:lnTo>
-                  <a:lnTo>
-                    <a:pt x="5443311" y="508691"/>
-                  </a:lnTo>
-                  <a:lnTo>
-                    <a:pt x="5371689" y="498361"/>
-                  </a:lnTo>
-                  <a:lnTo>
-                    <a:pt x="5300066" y="487699"/>
-                  </a:lnTo>
-                  <a:lnTo>
-                    <a:pt x="5228444" y="476693"/>
-                  </a:lnTo>
-                  <a:lnTo>
-                    <a:pt x="5156821" y="465332"/>
-                  </a:lnTo>
-                  <a:lnTo>
-                    <a:pt x="5085199" y="453605"/>
-                  </a:lnTo>
-                  <a:lnTo>
-                    <a:pt x="5013576" y="441501"/>
-                  </a:lnTo>
-                  <a:lnTo>
-                    <a:pt x="4941954" y="429006"/>
-                  </a:lnTo>
-                  <a:lnTo>
-                    <a:pt x="4870331" y="416109"/>
-                  </a:lnTo>
-                  <a:lnTo>
-                    <a:pt x="4798709" y="402796"/>
-                  </a:lnTo>
-                  <a:lnTo>
-                    <a:pt x="4727086" y="389055"/>
-                  </a:lnTo>
-                  <a:lnTo>
-                    <a:pt x="4655464" y="374870"/>
-                  </a:lnTo>
-                  <a:lnTo>
-                    <a:pt x="4583841" y="360229"/>
-                  </a:lnTo>
-                  <a:lnTo>
-                    <a:pt x="4512219" y="345115"/>
-                  </a:lnTo>
-                  <a:lnTo>
-                    <a:pt x="4440596" y="329515"/>
-                  </a:lnTo>
-                  <a:lnTo>
-                    <a:pt x="4368974" y="313412"/>
-                  </a:lnTo>
-                  <a:lnTo>
-                    <a:pt x="4297351" y="296790"/>
-                  </a:lnTo>
-                  <a:lnTo>
-                    <a:pt x="4225729" y="279633"/>
-                  </a:lnTo>
-                  <a:lnTo>
-                    <a:pt x="4154106" y="261923"/>
-                  </a:lnTo>
-                  <a:lnTo>
-                    <a:pt x="4082483" y="243642"/>
-                  </a:lnTo>
-                  <a:lnTo>
-                    <a:pt x="4010861" y="224772"/>
-                  </a:lnTo>
-                  <a:lnTo>
-                    <a:pt x="3939238" y="205294"/>
-                  </a:lnTo>
-                  <a:lnTo>
-                    <a:pt x="3867616" y="185188"/>
-                  </a:lnTo>
-                  <a:lnTo>
-                    <a:pt x="3795993" y="164435"/>
-                  </a:lnTo>
-                  <a:lnTo>
-                    <a:pt x="3724371" y="143012"/>
-                  </a:lnTo>
-                  <a:lnTo>
-                    <a:pt x="3652748" y="120900"/>
-                  </a:lnTo>
-                  <a:lnTo>
-                    <a:pt x="3581126" y="98075"/>
-                  </a:lnTo>
-                  <a:lnTo>
-                    <a:pt x="3509503" y="74515"/>
-                  </a:lnTo>
-                  <a:lnTo>
-                    <a:pt x="3437881" y="50195"/>
-                  </a:lnTo>
-                  <a:lnTo>
-                    <a:pt x="3366258" y="25092"/>
-                  </a:lnTo>
-                  <a:lnTo>
-                    <a:pt x="3294636" y="0"/>
-                  </a:lnTo>
-                  <a:lnTo>
-                    <a:pt x="3223013" y="8152"/>
-                  </a:lnTo>
-                  <a:lnTo>
-                    <a:pt x="3151391" y="16224"/>
-                  </a:lnTo>
-                  <a:lnTo>
-                    <a:pt x="3079768" y="24217"/>
-                  </a:lnTo>
-                  <a:lnTo>
-                    <a:pt x="3008146" y="32131"/>
-                  </a:lnTo>
-                  <a:lnTo>
-                    <a:pt x="2936523" y="39968"/>
-                  </a:lnTo>
-                  <a:lnTo>
-                    <a:pt x="2864901" y="47727"/>
-                  </a:lnTo>
-                  <a:lnTo>
-                    <a:pt x="2793278" y="55410"/>
-                  </a:lnTo>
-                  <a:lnTo>
-                    <a:pt x="2721655" y="63018"/>
-                  </a:lnTo>
-                  <a:lnTo>
-                    <a:pt x="2650033" y="70551"/>
-                  </a:lnTo>
-                  <a:lnTo>
-                    <a:pt x="2578410" y="78010"/>
-                  </a:lnTo>
-                  <a:lnTo>
-                    <a:pt x="2506788" y="85395"/>
-                  </a:lnTo>
-                  <a:lnTo>
-                    <a:pt x="2435165" y="92708"/>
-                  </a:lnTo>
-                  <a:lnTo>
-                    <a:pt x="2363543" y="99949"/>
-                  </a:lnTo>
-                  <a:lnTo>
-                    <a:pt x="2291920" y="107119"/>
-                  </a:lnTo>
-                  <a:lnTo>
-                    <a:pt x="2220298" y="114218"/>
-                  </a:lnTo>
-                  <a:lnTo>
-                    <a:pt x="2148675" y="121248"/>
-                  </a:lnTo>
-                  <a:lnTo>
-                    <a:pt x="2077053" y="128208"/>
-                  </a:lnTo>
-                  <a:lnTo>
-                    <a:pt x="2005430" y="135100"/>
-                  </a:lnTo>
-                  <a:lnTo>
-                    <a:pt x="1933808" y="141924"/>
-                  </a:lnTo>
-                  <a:lnTo>
-                    <a:pt x="1862185" y="148681"/>
-                  </a:lnTo>
-                  <a:lnTo>
-                    <a:pt x="1790563" y="155372"/>
-                  </a:lnTo>
-                  <a:lnTo>
-                    <a:pt x="1718940" y="161997"/>
-                  </a:lnTo>
-                  <a:lnTo>
-                    <a:pt x="1647318" y="168557"/>
-                  </a:lnTo>
-                  <a:lnTo>
-                    <a:pt x="1575695" y="175052"/>
-                  </a:lnTo>
-                  <a:lnTo>
-                    <a:pt x="1504073" y="181484"/>
-                  </a:lnTo>
-                  <a:lnTo>
-                    <a:pt x="1432450" y="187852"/>
-                  </a:lnTo>
-                  <a:lnTo>
-                    <a:pt x="1360827" y="194158"/>
-                  </a:lnTo>
-                  <a:lnTo>
-                    <a:pt x="1289205" y="200401"/>
-                  </a:lnTo>
-                  <a:lnTo>
-                    <a:pt x="1217582" y="206584"/>
-                  </a:lnTo>
-                  <a:lnTo>
-                    <a:pt x="1145960" y="212705"/>
-                  </a:lnTo>
-                  <a:lnTo>
-                    <a:pt x="1074337" y="218766"/>
-                  </a:lnTo>
-                  <a:lnTo>
-                    <a:pt x="1002715" y="224768"/>
-                  </a:lnTo>
-                  <a:lnTo>
-                    <a:pt x="931092" y="230711"/>
-                  </a:lnTo>
-                  <a:lnTo>
-                    <a:pt x="859470" y="236595"/>
-                  </a:lnTo>
-                  <a:lnTo>
-                    <a:pt x="787847" y="242422"/>
-                  </a:lnTo>
-                  <a:lnTo>
-                    <a:pt x="716225" y="248191"/>
-                  </a:lnTo>
-                  <a:lnTo>
-                    <a:pt x="644602" y="253903"/>
-                  </a:lnTo>
-                  <a:lnTo>
-                    <a:pt x="572980" y="259559"/>
-                  </a:lnTo>
-                  <a:lnTo>
-                    <a:pt x="501357" y="265160"/>
-                  </a:lnTo>
-                  <a:lnTo>
-                    <a:pt x="429735" y="270706"/>
-                  </a:lnTo>
-                  <a:lnTo>
-                    <a:pt x="358112" y="276197"/>
-                  </a:lnTo>
-                  <a:lnTo>
-                    <a:pt x="286490" y="281634"/>
-                  </a:lnTo>
-                  <a:lnTo>
-                    <a:pt x="214867" y="287018"/>
-                  </a:lnTo>
-                  <a:lnTo>
-                    <a:pt x="143245" y="292349"/>
-                  </a:lnTo>
-                  <a:lnTo>
-                    <a:pt x="71622" y="297627"/>
-                  </a:lnTo>
-                  <a:lnTo>
-                    <a:pt x="0" y="302853"/>
+                    <a:pt x="15817" y="9043"/>
+                  </a:lnTo>
+                  <a:lnTo>
+                    <a:pt x="86161" y="48005"/>
+                  </a:lnTo>
+                  <a:lnTo>
+                    <a:pt x="156506" y="85751"/>
+                  </a:lnTo>
+                  <a:lnTo>
+                    <a:pt x="226850" y="122319"/>
+                  </a:lnTo>
+                  <a:lnTo>
+                    <a:pt x="297195" y="157746"/>
+                  </a:lnTo>
+                  <a:lnTo>
+                    <a:pt x="367539" y="192067"/>
+                  </a:lnTo>
+                  <a:lnTo>
+                    <a:pt x="437884" y="225316"/>
+                  </a:lnTo>
+                  <a:lnTo>
+                    <a:pt x="508228" y="257527"/>
+                  </a:lnTo>
+                  <a:lnTo>
+                    <a:pt x="578573" y="288733"/>
+                  </a:lnTo>
+                  <a:lnTo>
+                    <a:pt x="648917" y="318965"/>
+                  </a:lnTo>
+                  <a:lnTo>
+                    <a:pt x="719262" y="348253"/>
+                  </a:lnTo>
+                  <a:lnTo>
+                    <a:pt x="789606" y="376627"/>
+                  </a:lnTo>
+                  <a:lnTo>
+                    <a:pt x="859951" y="404115"/>
+                  </a:lnTo>
+                  <a:lnTo>
+                    <a:pt x="930295" y="430745"/>
+                  </a:lnTo>
+                  <a:lnTo>
+                    <a:pt x="1000640" y="456543"/>
+                  </a:lnTo>
+                  <a:lnTo>
+                    <a:pt x="1070984" y="481537"/>
+                  </a:lnTo>
+                  <a:lnTo>
+                    <a:pt x="1141329" y="505750"/>
+                  </a:lnTo>
+                  <a:lnTo>
+                    <a:pt x="1211673" y="529207"/>
+                  </a:lnTo>
+                  <a:lnTo>
+                    <a:pt x="1282018" y="551932"/>
+                  </a:lnTo>
+                  <a:lnTo>
+                    <a:pt x="1352362" y="573948"/>
+                  </a:lnTo>
+                  <a:lnTo>
+                    <a:pt x="1422707" y="595276"/>
+                  </a:lnTo>
+                  <a:lnTo>
+                    <a:pt x="1493051" y="615939"/>
+                  </a:lnTo>
+                  <a:lnTo>
+                    <a:pt x="1563395" y="635957"/>
+                  </a:lnTo>
+                  <a:lnTo>
+                    <a:pt x="1633740" y="655349"/>
+                  </a:lnTo>
+                  <a:lnTo>
+                    <a:pt x="1704084" y="674137"/>
+                  </a:lnTo>
+                  <a:lnTo>
+                    <a:pt x="1774429" y="692338"/>
+                  </a:lnTo>
+                  <a:lnTo>
+                    <a:pt x="1844773" y="709971"/>
+                  </a:lnTo>
+                  <a:lnTo>
+                    <a:pt x="1915118" y="727053"/>
+                  </a:lnTo>
+                  <a:lnTo>
+                    <a:pt x="1985462" y="743602"/>
+                  </a:lnTo>
+                  <a:lnTo>
+                    <a:pt x="2055807" y="759635"/>
+                  </a:lnTo>
+                  <a:lnTo>
+                    <a:pt x="2126151" y="775167"/>
+                  </a:lnTo>
+                  <a:lnTo>
+                    <a:pt x="2196496" y="790214"/>
+                  </a:lnTo>
+                  <a:lnTo>
+                    <a:pt x="2266840" y="804791"/>
+                  </a:lnTo>
+                  <a:lnTo>
+                    <a:pt x="2337185" y="818914"/>
+                  </a:lnTo>
+                  <a:lnTo>
+                    <a:pt x="2407529" y="832595"/>
+                  </a:lnTo>
+                  <a:lnTo>
+                    <a:pt x="2477874" y="845850"/>
+                  </a:lnTo>
+                  <a:lnTo>
+                    <a:pt x="2548218" y="858691"/>
+                  </a:lnTo>
+                  <a:lnTo>
+                    <a:pt x="2618563" y="871131"/>
+                  </a:lnTo>
+                  <a:lnTo>
+                    <a:pt x="2688907" y="883182"/>
+                  </a:lnTo>
+                  <a:lnTo>
+                    <a:pt x="2759252" y="894858"/>
+                  </a:lnTo>
+                  <a:lnTo>
+                    <a:pt x="2829596" y="906169"/>
+                  </a:lnTo>
+                  <a:lnTo>
+                    <a:pt x="2899941" y="917126"/>
+                  </a:lnTo>
+                  <a:lnTo>
+                    <a:pt x="2970285" y="927742"/>
+                  </a:lnTo>
+                  <a:lnTo>
+                    <a:pt x="3040630" y="938027"/>
+                  </a:lnTo>
+                  <a:lnTo>
+                    <a:pt x="3110974" y="947990"/>
+                  </a:lnTo>
+                  <a:lnTo>
+                    <a:pt x="3181319" y="957642"/>
+                  </a:lnTo>
+                  <a:lnTo>
+                    <a:pt x="3251663" y="954967"/>
+                  </a:lnTo>
+                  <a:lnTo>
+                    <a:pt x="3322008" y="951966"/>
+                  </a:lnTo>
+                  <a:lnTo>
+                    <a:pt x="3392352" y="948936"/>
+                  </a:lnTo>
+                  <a:lnTo>
+                    <a:pt x="3462697" y="945875"/>
+                  </a:lnTo>
+                  <a:lnTo>
+                    <a:pt x="3533041" y="942784"/>
+                  </a:lnTo>
+                  <a:lnTo>
+                    <a:pt x="3603386" y="939662"/>
+                  </a:lnTo>
+                  <a:lnTo>
+                    <a:pt x="3673730" y="936510"/>
+                  </a:lnTo>
+                  <a:lnTo>
+                    <a:pt x="3744075" y="933326"/>
+                  </a:lnTo>
+                  <a:lnTo>
+                    <a:pt x="3814419" y="930110"/>
+                  </a:lnTo>
+                  <a:lnTo>
+                    <a:pt x="3884764" y="926863"/>
+                  </a:lnTo>
+                  <a:lnTo>
+                    <a:pt x="3955108" y="923583"/>
+                  </a:lnTo>
+                  <a:lnTo>
+                    <a:pt x="4025453" y="920271"/>
+                  </a:lnTo>
+                  <a:lnTo>
+                    <a:pt x="4095797" y="916926"/>
+                  </a:lnTo>
+                  <a:lnTo>
+                    <a:pt x="4166142" y="913547"/>
+                  </a:lnTo>
+                  <a:lnTo>
+                    <a:pt x="4236486" y="910135"/>
+                  </a:lnTo>
+                  <a:lnTo>
+                    <a:pt x="4306831" y="906689"/>
+                  </a:lnTo>
+                  <a:lnTo>
+                    <a:pt x="4377175" y="903209"/>
+                  </a:lnTo>
+                  <a:lnTo>
+                    <a:pt x="4447520" y="899695"/>
+                  </a:lnTo>
+                  <a:lnTo>
+                    <a:pt x="4517864" y="896145"/>
+                  </a:lnTo>
+                  <a:lnTo>
+                    <a:pt x="4588209" y="892561"/>
+                  </a:lnTo>
+                  <a:lnTo>
+                    <a:pt x="4658553" y="888940"/>
+                  </a:lnTo>
+                  <a:lnTo>
+                    <a:pt x="4728898" y="885284"/>
+                  </a:lnTo>
+                  <a:lnTo>
+                    <a:pt x="4799242" y="881592"/>
+                  </a:lnTo>
+                  <a:lnTo>
+                    <a:pt x="4869587" y="877862"/>
+                  </a:lnTo>
+                  <a:lnTo>
+                    <a:pt x="4939931" y="874096"/>
+                  </a:lnTo>
+                  <a:lnTo>
+                    <a:pt x="5010276" y="870292"/>
+                  </a:lnTo>
+                  <a:lnTo>
+                    <a:pt x="5080620" y="866451"/>
+                  </a:lnTo>
+                  <a:lnTo>
+                    <a:pt x="5150965" y="862571"/>
+                  </a:lnTo>
+                  <a:lnTo>
+                    <a:pt x="5221309" y="858653"/>
+                  </a:lnTo>
+                  <a:lnTo>
+                    <a:pt x="5291653" y="854696"/>
+                  </a:lnTo>
+                  <a:lnTo>
+                    <a:pt x="5361998" y="850700"/>
+                  </a:lnTo>
+                  <a:lnTo>
+                    <a:pt x="5432342" y="846664"/>
+                  </a:lnTo>
+                  <a:lnTo>
+                    <a:pt x="5502687" y="842588"/>
+                  </a:lnTo>
+                  <a:lnTo>
+                    <a:pt x="5573031" y="838472"/>
+                  </a:lnTo>
+                  <a:lnTo>
+                    <a:pt x="5643376" y="834315"/>
+                  </a:lnTo>
+                  <a:lnTo>
+                    <a:pt x="5713720" y="830116"/>
+                  </a:lnTo>
+                  <a:lnTo>
+                    <a:pt x="5784065" y="825876"/>
+                  </a:lnTo>
+                  <a:lnTo>
+                    <a:pt x="5854409" y="821593"/>
+                  </a:lnTo>
+                  <a:lnTo>
+                    <a:pt x="5924754" y="817268"/>
+                  </a:lnTo>
+                  <a:lnTo>
+                    <a:pt x="5995098" y="812901"/>
+                  </a:lnTo>
+                  <a:lnTo>
+                    <a:pt x="6065443" y="808489"/>
+                  </a:lnTo>
+                  <a:lnTo>
+                    <a:pt x="6135787" y="804034"/>
+                  </a:lnTo>
+                  <a:lnTo>
+                    <a:pt x="6206132" y="799535"/>
+                  </a:lnTo>
+                  <a:lnTo>
+                    <a:pt x="6276476" y="794991"/>
+                  </a:lnTo>
+                  <a:lnTo>
+                    <a:pt x="6346821" y="790402"/>
+                  </a:lnTo>
+                  <a:lnTo>
+                    <a:pt x="6417165" y="785768"/>
+                  </a:lnTo>
+                  <a:lnTo>
+                    <a:pt x="6487510" y="781087"/>
+                  </a:lnTo>
+                  <a:lnTo>
+                    <a:pt x="6557854" y="776360"/>
+                  </a:lnTo>
+                  <a:lnTo>
+                    <a:pt x="6628199" y="771586"/>
+                  </a:lnTo>
+                  <a:lnTo>
+                    <a:pt x="6698543" y="766765"/>
+                  </a:lnTo>
+                  <a:lnTo>
+                    <a:pt x="6768888" y="761895"/>
+                  </a:lnTo>
+                  <a:lnTo>
+                    <a:pt x="6839232" y="756978"/>
+                  </a:lnTo>
+                  <a:lnTo>
+                    <a:pt x="6909577" y="752011"/>
                   </a:lnTo>
                 </a:path>
               </a:pathLst>
@@ -4240,312 +3950,637 @@
           </p:nvSpPr>
           <p:spPr>
             <a:xfrm>
-              <a:off x="1172049" y="4186348"/>
-              <a:ext cx="7090630" cy="905717"/>
+              <a:off x="1235312" y="3101030"/>
+              <a:ext cx="6964104" cy="243479"/>
             </a:xfrm>
             <a:custGeom>
               <a:avLst/>
               <a:pathLst>
-                <a:path w="7090630" h="905717">
+                <a:path w="6964104" h="243479">
+                  <a:moveTo>
+                    <a:pt x="6964104" y="243479"/>
+                  </a:moveTo>
+                  <a:lnTo>
+                    <a:pt x="6893760" y="241681"/>
+                  </a:lnTo>
+                  <a:lnTo>
+                    <a:pt x="6823415" y="239826"/>
+                  </a:lnTo>
+                  <a:lnTo>
+                    <a:pt x="6753071" y="237911"/>
+                  </a:lnTo>
+                  <a:lnTo>
+                    <a:pt x="6682726" y="235934"/>
+                  </a:lnTo>
+                  <a:lnTo>
+                    <a:pt x="6612382" y="233893"/>
+                  </a:lnTo>
+                  <a:lnTo>
+                    <a:pt x="6542037" y="231787"/>
+                  </a:lnTo>
+                  <a:lnTo>
+                    <a:pt x="6471693" y="229613"/>
+                  </a:lnTo>
+                  <a:lnTo>
+                    <a:pt x="6401348" y="227369"/>
+                  </a:lnTo>
+                  <a:lnTo>
+                    <a:pt x="6331004" y="225052"/>
+                  </a:lnTo>
+                  <a:lnTo>
+                    <a:pt x="6260659" y="222661"/>
+                  </a:lnTo>
+                  <a:lnTo>
+                    <a:pt x="6190315" y="220193"/>
+                  </a:lnTo>
+                  <a:lnTo>
+                    <a:pt x="6119970" y="217645"/>
+                  </a:lnTo>
+                  <a:lnTo>
+                    <a:pt x="6049626" y="215015"/>
+                  </a:lnTo>
+                  <a:lnTo>
+                    <a:pt x="5979281" y="212300"/>
+                  </a:lnTo>
+                  <a:lnTo>
+                    <a:pt x="5908937" y="209498"/>
+                  </a:lnTo>
+                  <a:lnTo>
+                    <a:pt x="5838592" y="206606"/>
+                  </a:lnTo>
+                  <a:lnTo>
+                    <a:pt x="5768248" y="203620"/>
+                  </a:lnTo>
+                  <a:lnTo>
+                    <a:pt x="5697903" y="200538"/>
+                  </a:lnTo>
+                  <a:lnTo>
+                    <a:pt x="5627559" y="197357"/>
+                  </a:lnTo>
+                  <a:lnTo>
+                    <a:pt x="5557214" y="194074"/>
+                  </a:lnTo>
+                  <a:lnTo>
+                    <a:pt x="5486870" y="190684"/>
+                  </a:lnTo>
+                  <a:lnTo>
+                    <a:pt x="5416525" y="187186"/>
+                  </a:lnTo>
+                  <a:lnTo>
+                    <a:pt x="5346181" y="183574"/>
+                  </a:lnTo>
+                  <a:lnTo>
+                    <a:pt x="5275836" y="179847"/>
+                  </a:lnTo>
+                  <a:lnTo>
+                    <a:pt x="5205492" y="175999"/>
+                  </a:lnTo>
+                  <a:lnTo>
+                    <a:pt x="5135147" y="172027"/>
+                  </a:lnTo>
+                  <a:lnTo>
+                    <a:pt x="5064803" y="167927"/>
+                  </a:lnTo>
+                  <a:lnTo>
+                    <a:pt x="4994458" y="163695"/>
+                  </a:lnTo>
+                  <a:lnTo>
+                    <a:pt x="4924114" y="159327"/>
+                  </a:lnTo>
+                  <a:lnTo>
+                    <a:pt x="4853769" y="154818"/>
+                  </a:lnTo>
+                  <a:lnTo>
+                    <a:pt x="4783425" y="150164"/>
+                  </a:lnTo>
+                  <a:lnTo>
+                    <a:pt x="4713080" y="145359"/>
+                  </a:lnTo>
+                  <a:lnTo>
+                    <a:pt x="4642736" y="140400"/>
+                  </a:lnTo>
+                  <a:lnTo>
+                    <a:pt x="4572391" y="135282"/>
+                  </a:lnTo>
+                  <a:lnTo>
+                    <a:pt x="4502047" y="129998"/>
+                  </a:lnTo>
+                  <a:lnTo>
+                    <a:pt x="4431702" y="124544"/>
+                  </a:lnTo>
+                  <a:lnTo>
+                    <a:pt x="4361358" y="118914"/>
+                  </a:lnTo>
+                  <a:lnTo>
+                    <a:pt x="4291013" y="113103"/>
+                  </a:lnTo>
+                  <a:lnTo>
+                    <a:pt x="4220669" y="107104"/>
+                  </a:lnTo>
+                  <a:lnTo>
+                    <a:pt x="4150324" y="100913"/>
+                  </a:lnTo>
+                  <a:lnTo>
+                    <a:pt x="4079980" y="94521"/>
+                  </a:lnTo>
+                  <a:lnTo>
+                    <a:pt x="4009635" y="87924"/>
+                  </a:lnTo>
+                  <a:lnTo>
+                    <a:pt x="3939291" y="81114"/>
+                  </a:lnTo>
+                  <a:lnTo>
+                    <a:pt x="3868946" y="74085"/>
+                  </a:lnTo>
+                  <a:lnTo>
+                    <a:pt x="3798602" y="66830"/>
+                  </a:lnTo>
+                  <a:lnTo>
+                    <a:pt x="3728257" y="59340"/>
+                  </a:lnTo>
+                  <a:lnTo>
+                    <a:pt x="3657913" y="51609"/>
+                  </a:lnTo>
+                  <a:lnTo>
+                    <a:pt x="3587569" y="43630"/>
+                  </a:lnTo>
+                  <a:lnTo>
+                    <a:pt x="3517224" y="35393"/>
+                  </a:lnTo>
+                  <a:lnTo>
+                    <a:pt x="3446880" y="26890"/>
+                  </a:lnTo>
+                  <a:lnTo>
+                    <a:pt x="3376535" y="18114"/>
+                  </a:lnTo>
+                  <a:lnTo>
+                    <a:pt x="3306191" y="9055"/>
+                  </a:lnTo>
+                  <a:lnTo>
+                    <a:pt x="3235846" y="0"/>
+                  </a:lnTo>
+                  <a:lnTo>
+                    <a:pt x="3165502" y="2942"/>
+                  </a:lnTo>
+                  <a:lnTo>
+                    <a:pt x="3095157" y="5855"/>
+                  </a:lnTo>
+                  <a:lnTo>
+                    <a:pt x="3024813" y="8739"/>
+                  </a:lnTo>
+                  <a:lnTo>
+                    <a:pt x="2954468" y="11595"/>
+                  </a:lnTo>
+                  <a:lnTo>
+                    <a:pt x="2884124" y="14423"/>
+                  </a:lnTo>
+                  <a:lnTo>
+                    <a:pt x="2813779" y="17223"/>
+                  </a:lnTo>
+                  <a:lnTo>
+                    <a:pt x="2743435" y="19996"/>
+                  </a:lnTo>
+                  <a:lnTo>
+                    <a:pt x="2673090" y="22741"/>
+                  </a:lnTo>
+                  <a:lnTo>
+                    <a:pt x="2602746" y="25460"/>
+                  </a:lnTo>
+                  <a:lnTo>
+                    <a:pt x="2532401" y="28152"/>
+                  </a:lnTo>
+                  <a:lnTo>
+                    <a:pt x="2462057" y="30817"/>
+                  </a:lnTo>
+                  <a:lnTo>
+                    <a:pt x="2391712" y="33456"/>
+                  </a:lnTo>
+                  <a:lnTo>
+                    <a:pt x="2321368" y="36069"/>
+                  </a:lnTo>
+                  <a:lnTo>
+                    <a:pt x="2251023" y="38656"/>
+                  </a:lnTo>
+                  <a:lnTo>
+                    <a:pt x="2180679" y="41218"/>
+                  </a:lnTo>
+                  <a:lnTo>
+                    <a:pt x="2110334" y="43755"/>
+                  </a:lnTo>
+                  <a:lnTo>
+                    <a:pt x="2039990" y="46267"/>
+                  </a:lnTo>
+                  <a:lnTo>
+                    <a:pt x="1969645" y="48754"/>
+                  </a:lnTo>
+                  <a:lnTo>
+                    <a:pt x="1899301" y="51217"/>
+                  </a:lnTo>
+                  <a:lnTo>
+                    <a:pt x="1828956" y="53655"/>
+                  </a:lnTo>
+                  <a:lnTo>
+                    <a:pt x="1758612" y="56070"/>
+                  </a:lnTo>
+                  <a:lnTo>
+                    <a:pt x="1688267" y="58461"/>
+                  </a:lnTo>
+                  <a:lnTo>
+                    <a:pt x="1617923" y="60828"/>
+                  </a:lnTo>
+                  <a:lnTo>
+                    <a:pt x="1547578" y="63172"/>
+                  </a:lnTo>
+                  <a:lnTo>
+                    <a:pt x="1477234" y="65493"/>
+                  </a:lnTo>
+                  <a:lnTo>
+                    <a:pt x="1406889" y="67791"/>
+                  </a:lnTo>
+                  <a:lnTo>
+                    <a:pt x="1336545" y="70067"/>
+                  </a:lnTo>
+                  <a:lnTo>
+                    <a:pt x="1266200" y="72320"/>
+                  </a:lnTo>
+                  <a:lnTo>
+                    <a:pt x="1195856" y="74551"/>
+                  </a:lnTo>
+                  <a:lnTo>
+                    <a:pt x="1125511" y="76760"/>
+                  </a:lnTo>
+                  <a:lnTo>
+                    <a:pt x="1055167" y="78947"/>
+                  </a:lnTo>
+                  <a:lnTo>
+                    <a:pt x="984822" y="81113"/>
+                  </a:lnTo>
+                  <a:lnTo>
+                    <a:pt x="914478" y="83258"/>
+                  </a:lnTo>
+                  <a:lnTo>
+                    <a:pt x="844133" y="85381"/>
+                  </a:lnTo>
+                  <a:lnTo>
+                    <a:pt x="773789" y="87484"/>
+                  </a:lnTo>
+                  <a:lnTo>
+                    <a:pt x="703444" y="89566"/>
+                  </a:lnTo>
+                  <a:lnTo>
+                    <a:pt x="633100" y="91627"/>
+                  </a:lnTo>
+                  <a:lnTo>
+                    <a:pt x="562755" y="93669"/>
+                  </a:lnTo>
+                  <a:lnTo>
+                    <a:pt x="492411" y="95690"/>
+                  </a:lnTo>
+                  <a:lnTo>
+                    <a:pt x="422066" y="97691"/>
+                  </a:lnTo>
+                  <a:lnTo>
+                    <a:pt x="351722" y="99673"/>
+                  </a:lnTo>
+                  <a:lnTo>
+                    <a:pt x="281377" y="101635"/>
+                  </a:lnTo>
+                  <a:lnTo>
+                    <a:pt x="211033" y="103578"/>
+                  </a:lnTo>
+                  <a:lnTo>
+                    <a:pt x="140688" y="105501"/>
+                  </a:lnTo>
+                  <a:lnTo>
+                    <a:pt x="70344" y="107406"/>
+                  </a:lnTo>
+                  <a:lnTo>
+                    <a:pt x="0" y="109292"/>
+                  </a:lnTo>
+                </a:path>
+              </a:pathLst>
+            </a:custGeom>
+          </p:spPr>
+          <p:txBody>
+            <a:bodyPr/>
+            <a:lstStyle/>
+            <a:p/>
+          </p:txBody>
+        </p:sp>
+        <p:sp>
+          <p:nvSpPr>
+            <p:cNvPr id="24" name="pl24"/>
+            <p:cNvSpPr/>
+            <p:nvPr/>
+          </p:nvSpPr>
+          <p:spPr>
+            <a:xfrm>
+              <a:off x="1235312" y="2905568"/>
+              <a:ext cx="6964104" cy="326852"/>
+            </a:xfrm>
+            <a:custGeom>
+              <a:avLst/>
+              <a:pathLst>
+                <a:path w="6964104" h="326852">
                   <a:moveTo>
                     <a:pt x="0" y="0"/>
                   </a:moveTo>
                   <a:lnTo>
-                    <a:pt x="71622" y="14884"/>
-                  </a:lnTo>
-                  <a:lnTo>
-                    <a:pt x="143245" y="29608"/>
-                  </a:lnTo>
-                  <a:lnTo>
-                    <a:pt x="214867" y="44171"/>
-                  </a:lnTo>
-                  <a:lnTo>
-                    <a:pt x="286490" y="58576"/>
-                  </a:lnTo>
-                  <a:lnTo>
-                    <a:pt x="358112" y="72825"/>
-                  </a:lnTo>
-                  <a:lnTo>
-                    <a:pt x="429735" y="86919"/>
-                  </a:lnTo>
-                  <a:lnTo>
-                    <a:pt x="501357" y="100860"/>
-                  </a:lnTo>
-                  <a:lnTo>
-                    <a:pt x="572980" y="114650"/>
-                  </a:lnTo>
-                  <a:lnTo>
-                    <a:pt x="644602" y="128290"/>
-                  </a:lnTo>
-                  <a:lnTo>
-                    <a:pt x="716225" y="141782"/>
-                  </a:lnTo>
-                  <a:lnTo>
-                    <a:pt x="787847" y="155127"/>
-                  </a:lnTo>
-                  <a:lnTo>
-                    <a:pt x="859470" y="168328"/>
-                  </a:lnTo>
-                  <a:lnTo>
-                    <a:pt x="931092" y="181385"/>
-                  </a:lnTo>
-                  <a:lnTo>
-                    <a:pt x="1002715" y="194300"/>
-                  </a:lnTo>
-                  <a:lnTo>
-                    <a:pt x="1074337" y="207076"/>
-                  </a:lnTo>
-                  <a:lnTo>
-                    <a:pt x="1145960" y="219712"/>
-                  </a:lnTo>
-                  <a:lnTo>
-                    <a:pt x="1217582" y="232211"/>
-                  </a:lnTo>
-                  <a:lnTo>
-                    <a:pt x="1289205" y="244575"/>
-                  </a:lnTo>
-                  <a:lnTo>
-                    <a:pt x="1360827" y="256804"/>
-                  </a:lnTo>
-                  <a:lnTo>
-                    <a:pt x="1432450" y="268901"/>
-                  </a:lnTo>
-                  <a:lnTo>
-                    <a:pt x="1504073" y="280866"/>
-                  </a:lnTo>
-                  <a:lnTo>
-                    <a:pt x="1575695" y="292701"/>
-                  </a:lnTo>
-                  <a:lnTo>
-                    <a:pt x="1647318" y="304408"/>
-                  </a:lnTo>
-                  <a:lnTo>
-                    <a:pt x="1718940" y="315988"/>
-                  </a:lnTo>
-                  <a:lnTo>
-                    <a:pt x="1790563" y="327442"/>
-                  </a:lnTo>
-                  <a:lnTo>
-                    <a:pt x="1862185" y="338771"/>
-                  </a:lnTo>
-                  <a:lnTo>
-                    <a:pt x="1933808" y="349978"/>
-                  </a:lnTo>
-                  <a:lnTo>
-                    <a:pt x="2005430" y="361063"/>
-                  </a:lnTo>
-                  <a:lnTo>
-                    <a:pt x="2077053" y="372027"/>
-                  </a:lnTo>
-                  <a:lnTo>
-                    <a:pt x="2148675" y="382873"/>
-                  </a:lnTo>
-                  <a:lnTo>
-                    <a:pt x="2220298" y="393600"/>
-                  </a:lnTo>
-                  <a:lnTo>
-                    <a:pt x="2291920" y="404212"/>
-                  </a:lnTo>
-                  <a:lnTo>
-                    <a:pt x="2363543" y="414708"/>
-                  </a:lnTo>
-                  <a:lnTo>
-                    <a:pt x="2435165" y="425090"/>
-                  </a:lnTo>
-                  <a:lnTo>
-                    <a:pt x="2506788" y="435359"/>
-                  </a:lnTo>
-                  <a:lnTo>
-                    <a:pt x="2578410" y="445517"/>
-                  </a:lnTo>
-                  <a:lnTo>
-                    <a:pt x="2650033" y="455565"/>
-                  </a:lnTo>
-                  <a:lnTo>
-                    <a:pt x="2721655" y="465503"/>
-                  </a:lnTo>
-                  <a:lnTo>
-                    <a:pt x="2793278" y="475334"/>
-                  </a:lnTo>
-                  <a:lnTo>
-                    <a:pt x="2864901" y="485057"/>
-                  </a:lnTo>
-                  <a:lnTo>
-                    <a:pt x="2936523" y="494676"/>
-                  </a:lnTo>
-                  <a:lnTo>
-                    <a:pt x="3008146" y="504189"/>
-                  </a:lnTo>
-                  <a:lnTo>
-                    <a:pt x="3079768" y="513600"/>
-                  </a:lnTo>
-                  <a:lnTo>
-                    <a:pt x="3151391" y="522908"/>
-                  </a:lnTo>
-                  <a:lnTo>
-                    <a:pt x="3223013" y="532115"/>
-                  </a:lnTo>
-                  <a:lnTo>
-                    <a:pt x="3294636" y="541223"/>
-                  </a:lnTo>
-                  <a:lnTo>
-                    <a:pt x="3366258" y="550231"/>
-                  </a:lnTo>
-                  <a:lnTo>
-                    <a:pt x="3437881" y="559142"/>
-                  </a:lnTo>
-                  <a:lnTo>
-                    <a:pt x="3509503" y="567956"/>
-                  </a:lnTo>
-                  <a:lnTo>
-                    <a:pt x="3581126" y="576674"/>
-                  </a:lnTo>
-                  <a:lnTo>
-                    <a:pt x="3652748" y="585297"/>
-                  </a:lnTo>
-                  <a:lnTo>
-                    <a:pt x="3724371" y="593827"/>
-                  </a:lnTo>
-                  <a:lnTo>
-                    <a:pt x="3795993" y="602264"/>
-                  </a:lnTo>
-                  <a:lnTo>
-                    <a:pt x="3867616" y="610610"/>
-                  </a:lnTo>
-                  <a:lnTo>
-                    <a:pt x="3939238" y="618865"/>
-                  </a:lnTo>
-                  <a:lnTo>
-                    <a:pt x="4010861" y="627030"/>
-                  </a:lnTo>
-                  <a:lnTo>
-                    <a:pt x="4082483" y="635107"/>
-                  </a:lnTo>
-                  <a:lnTo>
-                    <a:pt x="4154106" y="643096"/>
-                  </a:lnTo>
-                  <a:lnTo>
-                    <a:pt x="4225729" y="650998"/>
-                  </a:lnTo>
-                  <a:lnTo>
-                    <a:pt x="4297351" y="658815"/>
-                  </a:lnTo>
-                  <a:lnTo>
-                    <a:pt x="4368974" y="666547"/>
-                  </a:lnTo>
-                  <a:lnTo>
-                    <a:pt x="4440596" y="674194"/>
-                  </a:lnTo>
-                  <a:lnTo>
-                    <a:pt x="4512219" y="681759"/>
-                  </a:lnTo>
-                  <a:lnTo>
-                    <a:pt x="4583841" y="689241"/>
-                  </a:lnTo>
-                  <a:lnTo>
-                    <a:pt x="4655464" y="696643"/>
-                  </a:lnTo>
-                  <a:lnTo>
-                    <a:pt x="4727086" y="703964"/>
-                  </a:lnTo>
-                  <a:lnTo>
-                    <a:pt x="4798709" y="711205"/>
-                  </a:lnTo>
-                  <a:lnTo>
-                    <a:pt x="4870331" y="718368"/>
-                  </a:lnTo>
-                  <a:lnTo>
-                    <a:pt x="4941954" y="725453"/>
-                  </a:lnTo>
-                  <a:lnTo>
-                    <a:pt x="5013576" y="732461"/>
-                  </a:lnTo>
-                  <a:lnTo>
-                    <a:pt x="5085199" y="739393"/>
-                  </a:lnTo>
-                  <a:lnTo>
-                    <a:pt x="5156821" y="746250"/>
-                  </a:lnTo>
-                  <a:lnTo>
-                    <a:pt x="5228444" y="753032"/>
-                  </a:lnTo>
-                  <a:lnTo>
-                    <a:pt x="5300066" y="759741"/>
-                  </a:lnTo>
-                  <a:lnTo>
-                    <a:pt x="5371689" y="766376"/>
-                  </a:lnTo>
-                  <a:lnTo>
-                    <a:pt x="5443311" y="772940"/>
-                  </a:lnTo>
-                  <a:lnTo>
-                    <a:pt x="5514934" y="779433"/>
-                  </a:lnTo>
-                  <a:lnTo>
-                    <a:pt x="5586557" y="785855"/>
-                  </a:lnTo>
-                  <a:lnTo>
-                    <a:pt x="5658179" y="792207"/>
-                  </a:lnTo>
-                  <a:lnTo>
-                    <a:pt x="5729802" y="798490"/>
-                  </a:lnTo>
-                  <a:lnTo>
-                    <a:pt x="5801424" y="804705"/>
-                  </a:lnTo>
-                  <a:lnTo>
-                    <a:pt x="5873047" y="810853"/>
-                  </a:lnTo>
-                  <a:lnTo>
-                    <a:pt x="5944669" y="816934"/>
-                  </a:lnTo>
-                  <a:lnTo>
-                    <a:pt x="6016292" y="822948"/>
-                  </a:lnTo>
-                  <a:lnTo>
-                    <a:pt x="6087914" y="828898"/>
-                  </a:lnTo>
-                  <a:lnTo>
-                    <a:pt x="6159537" y="834783"/>
-                  </a:lnTo>
-                  <a:lnTo>
-                    <a:pt x="6231159" y="840604"/>
-                  </a:lnTo>
-                  <a:lnTo>
-                    <a:pt x="6302782" y="846362"/>
-                  </a:lnTo>
-                  <a:lnTo>
-                    <a:pt x="6374404" y="852057"/>
-                  </a:lnTo>
-                  <a:lnTo>
-                    <a:pt x="6446027" y="857690"/>
-                  </a:lnTo>
-                  <a:lnTo>
-                    <a:pt x="6517649" y="863263"/>
-                  </a:lnTo>
-                  <a:lnTo>
-                    <a:pt x="6589272" y="868775"/>
-                  </a:lnTo>
-                  <a:lnTo>
-                    <a:pt x="6660894" y="874227"/>
-                  </a:lnTo>
-                  <a:lnTo>
-                    <a:pt x="6732517" y="879619"/>
-                  </a:lnTo>
-                  <a:lnTo>
-                    <a:pt x="6804139" y="884953"/>
-                  </a:lnTo>
-                  <a:lnTo>
-                    <a:pt x="6875762" y="890230"/>
-                  </a:lnTo>
-                  <a:lnTo>
-                    <a:pt x="6947385" y="895449"/>
-                  </a:lnTo>
-                  <a:lnTo>
-                    <a:pt x="7019007" y="900611"/>
-                  </a:lnTo>
-                  <a:lnTo>
-                    <a:pt x="7090630" y="905717"/>
+                    <a:pt x="70344" y="5371"/>
+                  </a:lnTo>
+                  <a:lnTo>
+                    <a:pt x="140688" y="10684"/>
+                  </a:lnTo>
+                  <a:lnTo>
+                    <a:pt x="211033" y="15940"/>
+                  </a:lnTo>
+                  <a:lnTo>
+                    <a:pt x="281377" y="21138"/>
+                  </a:lnTo>
+                  <a:lnTo>
+                    <a:pt x="351722" y="26281"/>
+                  </a:lnTo>
+                  <a:lnTo>
+                    <a:pt x="422066" y="31367"/>
+                  </a:lnTo>
+                  <a:lnTo>
+                    <a:pt x="492411" y="36398"/>
+                  </a:lnTo>
+                  <a:lnTo>
+                    <a:pt x="562755" y="41374"/>
+                  </a:lnTo>
+                  <a:lnTo>
+                    <a:pt x="633100" y="46297"/>
+                  </a:lnTo>
+                  <a:lnTo>
+                    <a:pt x="703444" y="51165"/>
+                  </a:lnTo>
+                  <a:lnTo>
+                    <a:pt x="773789" y="55981"/>
+                  </a:lnTo>
+                  <a:lnTo>
+                    <a:pt x="844133" y="60745"/>
+                  </a:lnTo>
+                  <a:lnTo>
+                    <a:pt x="914478" y="65457"/>
+                  </a:lnTo>
+                  <a:lnTo>
+                    <a:pt x="984822" y="70118"/>
+                  </a:lnTo>
+                  <a:lnTo>
+                    <a:pt x="1055167" y="74728"/>
+                  </a:lnTo>
+                  <a:lnTo>
+                    <a:pt x="1125511" y="79289"/>
+                  </a:lnTo>
+                  <a:lnTo>
+                    <a:pt x="1195856" y="83799"/>
+                  </a:lnTo>
+                  <a:lnTo>
+                    <a:pt x="1266200" y="88261"/>
+                  </a:lnTo>
+                  <a:lnTo>
+                    <a:pt x="1336545" y="92674"/>
+                  </a:lnTo>
+                  <a:lnTo>
+                    <a:pt x="1406889" y="97040"/>
+                  </a:lnTo>
+                  <a:lnTo>
+                    <a:pt x="1477234" y="101358"/>
+                  </a:lnTo>
+                  <a:lnTo>
+                    <a:pt x="1547578" y="105629"/>
+                  </a:lnTo>
+                  <a:lnTo>
+                    <a:pt x="1617923" y="109853"/>
+                  </a:lnTo>
+                  <a:lnTo>
+                    <a:pt x="1688267" y="114032"/>
+                  </a:lnTo>
+                  <a:lnTo>
+                    <a:pt x="1758612" y="118166"/>
+                  </a:lnTo>
+                  <a:lnTo>
+                    <a:pt x="1828956" y="122254"/>
+                  </a:lnTo>
+                  <a:lnTo>
+                    <a:pt x="1899301" y="126298"/>
+                  </a:lnTo>
+                  <a:lnTo>
+                    <a:pt x="1969645" y="130299"/>
+                  </a:lnTo>
+                  <a:lnTo>
+                    <a:pt x="2039990" y="134256"/>
+                  </a:lnTo>
+                  <a:lnTo>
+                    <a:pt x="2110334" y="138169"/>
+                  </a:lnTo>
+                  <a:lnTo>
+                    <a:pt x="2180679" y="142041"/>
+                  </a:lnTo>
+                  <a:lnTo>
+                    <a:pt x="2251023" y="145870"/>
+                  </a:lnTo>
+                  <a:lnTo>
+                    <a:pt x="2321368" y="149658"/>
+                  </a:lnTo>
+                  <a:lnTo>
+                    <a:pt x="2391712" y="153405"/>
+                  </a:lnTo>
+                  <a:lnTo>
+                    <a:pt x="2462057" y="157111"/>
+                  </a:lnTo>
+                  <a:lnTo>
+                    <a:pt x="2532401" y="160776"/>
+                  </a:lnTo>
+                  <a:lnTo>
+                    <a:pt x="2602746" y="164402"/>
+                  </a:lnTo>
+                  <a:lnTo>
+                    <a:pt x="2673090" y="167989"/>
+                  </a:lnTo>
+                  <a:lnTo>
+                    <a:pt x="2743435" y="171536"/>
+                  </a:lnTo>
+                  <a:lnTo>
+                    <a:pt x="2813779" y="175045"/>
+                  </a:lnTo>
+                  <a:lnTo>
+                    <a:pt x="2884124" y="178516"/>
+                  </a:lnTo>
+                  <a:lnTo>
+                    <a:pt x="2954468" y="181950"/>
+                  </a:lnTo>
+                  <a:lnTo>
+                    <a:pt x="3024813" y="185346"/>
+                  </a:lnTo>
+                  <a:lnTo>
+                    <a:pt x="3095157" y="188705"/>
+                  </a:lnTo>
+                  <a:lnTo>
+                    <a:pt x="3165502" y="192028"/>
+                  </a:lnTo>
+                  <a:lnTo>
+                    <a:pt x="3235846" y="195314"/>
+                  </a:lnTo>
+                  <a:lnTo>
+                    <a:pt x="3306191" y="198565"/>
+                  </a:lnTo>
+                  <a:lnTo>
+                    <a:pt x="3376535" y="201781"/>
+                  </a:lnTo>
+                  <a:lnTo>
+                    <a:pt x="3446880" y="204962"/>
+                  </a:lnTo>
+                  <a:lnTo>
+                    <a:pt x="3517224" y="208108"/>
+                  </a:lnTo>
+                  <a:lnTo>
+                    <a:pt x="3587569" y="211220"/>
+                  </a:lnTo>
+                  <a:lnTo>
+                    <a:pt x="3657913" y="214298"/>
+                  </a:lnTo>
+                  <a:lnTo>
+                    <a:pt x="3728257" y="217343"/>
+                  </a:lnTo>
+                  <a:lnTo>
+                    <a:pt x="3798602" y="220354"/>
+                  </a:lnTo>
+                  <a:lnTo>
+                    <a:pt x="3868946" y="223334"/>
+                  </a:lnTo>
+                  <a:lnTo>
+                    <a:pt x="3939291" y="226280"/>
+                  </a:lnTo>
+                  <a:lnTo>
+                    <a:pt x="4009635" y="229195"/>
+                  </a:lnTo>
+                  <a:lnTo>
+                    <a:pt x="4079980" y="232078"/>
+                  </a:lnTo>
+                  <a:lnTo>
+                    <a:pt x="4150324" y="234930"/>
+                  </a:lnTo>
+                  <a:lnTo>
+                    <a:pt x="4220669" y="237751"/>
+                  </a:lnTo>
+                  <a:lnTo>
+                    <a:pt x="4291013" y="240541"/>
+                  </a:lnTo>
+                  <a:lnTo>
+                    <a:pt x="4361358" y="243301"/>
+                  </a:lnTo>
+                  <a:lnTo>
+                    <a:pt x="4431702" y="246030"/>
+                  </a:lnTo>
+                  <a:lnTo>
+                    <a:pt x="4502047" y="248731"/>
+                  </a:lnTo>
+                  <a:lnTo>
+                    <a:pt x="4572391" y="251402"/>
+                  </a:lnTo>
+                  <a:lnTo>
+                    <a:pt x="4642736" y="254044"/>
+                  </a:lnTo>
+                  <a:lnTo>
+                    <a:pt x="4713080" y="256657"/>
+                  </a:lnTo>
+                  <a:lnTo>
+                    <a:pt x="4783425" y="259242"/>
+                  </a:lnTo>
+                  <a:lnTo>
+                    <a:pt x="4853769" y="261799"/>
+                  </a:lnTo>
+                  <a:lnTo>
+                    <a:pt x="4924114" y="264328"/>
+                  </a:lnTo>
+                  <a:lnTo>
+                    <a:pt x="4994458" y="266829"/>
+                  </a:lnTo>
+                  <a:lnTo>
+                    <a:pt x="5064803" y="269304"/>
+                  </a:lnTo>
+                  <a:lnTo>
+                    <a:pt x="5135147" y="271751"/>
+                  </a:lnTo>
+                  <a:lnTo>
+                    <a:pt x="5205492" y="274172"/>
+                  </a:lnTo>
+                  <a:lnTo>
+                    <a:pt x="5275836" y="276567"/>
+                  </a:lnTo>
+                  <a:lnTo>
+                    <a:pt x="5346181" y="278936"/>
+                  </a:lnTo>
+                  <a:lnTo>
+                    <a:pt x="5416525" y="281279"/>
+                  </a:lnTo>
+                  <a:lnTo>
+                    <a:pt x="5486870" y="283596"/>
+                  </a:lnTo>
+                  <a:lnTo>
+                    <a:pt x="5557214" y="285888"/>
+                  </a:lnTo>
+                  <a:lnTo>
+                    <a:pt x="5627559" y="288156"/>
+                  </a:lnTo>
+                  <a:lnTo>
+                    <a:pt x="5697903" y="290399"/>
+                  </a:lnTo>
+                  <a:lnTo>
+                    <a:pt x="5768248" y="292617"/>
+                  </a:lnTo>
+                  <a:lnTo>
+                    <a:pt x="5838592" y="294812"/>
+                  </a:lnTo>
+                  <a:lnTo>
+                    <a:pt x="5908937" y="296982"/>
+                  </a:lnTo>
+                  <a:lnTo>
+                    <a:pt x="5979281" y="299129"/>
+                  </a:lnTo>
+                  <a:lnTo>
+                    <a:pt x="6049626" y="301253"/>
+                  </a:lnTo>
+                  <a:lnTo>
+                    <a:pt x="6119970" y="303354"/>
+                  </a:lnTo>
+                  <a:lnTo>
+                    <a:pt x="6190315" y="305432"/>
+                  </a:lnTo>
+                  <a:lnTo>
+                    <a:pt x="6260659" y="307487"/>
+                  </a:lnTo>
+                  <a:lnTo>
+                    <a:pt x="6331004" y="309520"/>
+                  </a:lnTo>
+                  <a:lnTo>
+                    <a:pt x="6401348" y="311531"/>
+                  </a:lnTo>
+                  <a:lnTo>
+                    <a:pt x="6471693" y="313520"/>
+                  </a:lnTo>
+                  <a:lnTo>
+                    <a:pt x="6542037" y="315487"/>
+                  </a:lnTo>
+                  <a:lnTo>
+                    <a:pt x="6612382" y="317434"/>
+                  </a:lnTo>
+                  <a:lnTo>
+                    <a:pt x="6682726" y="319359"/>
+                  </a:lnTo>
+                  <a:lnTo>
+                    <a:pt x="6753071" y="321263"/>
+                  </a:lnTo>
+                  <a:lnTo>
+                    <a:pt x="6823415" y="323146"/>
+                  </a:lnTo>
+                  <a:lnTo>
+                    <a:pt x="6893760" y="325009"/>
+                  </a:lnTo>
+                  <a:lnTo>
+                    <a:pt x="6964104" y="326852"/>
                   </a:lnTo>
                 </a:path>
               </a:pathLst>
@@ -4568,27 +4603,27 @@
         </p:sp>
         <p:sp>
           <p:nvSpPr>
-            <p:cNvPr id="24" name="pl24"/>
+            <p:cNvPr id="25" name="pl25"/>
             <p:cNvSpPr/>
             <p:nvPr/>
           </p:nvSpPr>
           <p:spPr>
             <a:xfrm>
-              <a:off x="817517" y="4727786"/>
-              <a:ext cx="7799693" cy="0"/>
+              <a:off x="887106" y="3100960"/>
+              <a:ext cx="7660515" cy="0"/>
             </a:xfrm>
             <a:custGeom>
               <a:avLst/>
               <a:pathLst>
-                <a:path w="7799693" h="0">
+                <a:path w="7660515" h="0">
                   <a:moveTo>
                     <a:pt x="0" y="0"/>
                   </a:moveTo>
                   <a:lnTo>
-                    <a:pt x="7799693" y="0"/>
-                  </a:lnTo>
-                  <a:lnTo>
-                    <a:pt x="7799693" y="0"/>
+                    <a:pt x="7660515" y="0"/>
+                  </a:lnTo>
+                  <a:lnTo>
+                    <a:pt x="7660515" y="0"/>
                   </a:lnTo>
                 </a:path>
               </a:pathLst>
@@ -4611,21 +4646,21 @@
         </p:sp>
         <p:sp>
           <p:nvSpPr>
-            <p:cNvPr id="25" name="pl25"/>
+            <p:cNvPr id="26" name="pl26"/>
             <p:cNvSpPr/>
             <p:nvPr/>
           </p:nvSpPr>
           <p:spPr>
             <a:xfrm>
-              <a:off x="4468386" y="2073503"/>
-              <a:ext cx="0" cy="3649639"/>
+              <a:off x="4472829" y="2143092"/>
+              <a:ext cx="0" cy="1317069"/>
             </a:xfrm>
             <a:custGeom>
               <a:avLst/>
               <a:pathLst>
-                <a:path w="0" h="3649639">
+                <a:path w="0" h="1317069">
                   <a:moveTo>
-                    <a:pt x="0" y="3649639"/>
+                    <a:pt x="0" y="1317069"/>
                   </a:moveTo>
                   <a:lnTo>
                     <a:pt x="0" y="0"/>
@@ -4654,13 +4689,13 @@
         </p:sp>
         <p:sp>
           <p:nvSpPr>
-            <p:cNvPr id="26" name="tx26"/>
+            <p:cNvPr id="27" name="tx27"/>
             <p:cNvSpPr/>
             <p:nvPr/>
           </p:nvSpPr>
           <p:spPr>
             <a:xfrm>
-              <a:off x="692708" y="5517199"/>
+              <a:off x="762297" y="3360243"/>
               <a:ext cx="62179" cy="80101"/>
             </a:xfrm>
             <a:prstGeom prst="rect">
@@ -4700,13 +4735,13 @@
         </p:sp>
         <p:sp>
           <p:nvSpPr>
-            <p:cNvPr id="27" name="tx27"/>
+            <p:cNvPr id="28" name="tx28"/>
             <p:cNvSpPr/>
             <p:nvPr/>
           </p:nvSpPr>
           <p:spPr>
             <a:xfrm>
-              <a:off x="692708" y="4687735"/>
+              <a:off x="762297" y="3060909"/>
               <a:ext cx="62179" cy="80101"/>
             </a:xfrm>
             <a:prstGeom prst="rect">
@@ -4746,13 +4781,13 @@
         </p:sp>
         <p:sp>
           <p:nvSpPr>
-            <p:cNvPr id="28" name="tx28"/>
+            <p:cNvPr id="29" name="tx29"/>
             <p:cNvSpPr/>
             <p:nvPr/>
           </p:nvSpPr>
           <p:spPr>
             <a:xfrm>
-              <a:off x="692708" y="3858272"/>
+              <a:off x="762297" y="2761575"/>
               <a:ext cx="62179" cy="80101"/>
             </a:xfrm>
             <a:prstGeom prst="rect">
@@ -4792,13 +4827,13 @@
         </p:sp>
         <p:sp>
           <p:nvSpPr>
-            <p:cNvPr id="29" name="tx29"/>
+            <p:cNvPr id="30" name="tx30"/>
             <p:cNvSpPr/>
             <p:nvPr/>
           </p:nvSpPr>
           <p:spPr>
             <a:xfrm>
-              <a:off x="692708" y="3028808"/>
+              <a:off x="762297" y="2462242"/>
               <a:ext cx="62179" cy="80101"/>
             </a:xfrm>
             <a:prstGeom prst="rect">
@@ -4838,13 +4873,13 @@
         </p:sp>
         <p:sp>
           <p:nvSpPr>
-            <p:cNvPr id="30" name="tx30"/>
+            <p:cNvPr id="31" name="tx31"/>
             <p:cNvSpPr/>
             <p:nvPr/>
           </p:nvSpPr>
           <p:spPr>
             <a:xfrm>
-              <a:off x="692708" y="2199345"/>
+              <a:off x="762297" y="2162908"/>
               <a:ext cx="62179" cy="80101"/>
             </a:xfrm>
             <a:prstGeom prst="rect">
@@ -4884,13 +4919,13 @@
         </p:sp>
         <p:sp>
           <p:nvSpPr>
-            <p:cNvPr id="31" name="tx31"/>
+            <p:cNvPr id="32" name="tx32"/>
             <p:cNvSpPr/>
             <p:nvPr/>
           </p:nvSpPr>
           <p:spPr>
             <a:xfrm>
-              <a:off x="2478335" y="5785772"/>
+              <a:off x="2516846" y="3522791"/>
               <a:ext cx="161574" cy="80101"/>
             </a:xfrm>
             <a:prstGeom prst="rect">
@@ -4930,13 +4965,13 @@
         </p:sp>
         <p:sp>
           <p:nvSpPr>
-            <p:cNvPr id="32" name="tx32"/>
+            <p:cNvPr id="33" name="tx33"/>
             <p:cNvSpPr/>
             <p:nvPr/>
           </p:nvSpPr>
           <p:spPr>
             <a:xfrm>
-              <a:off x="4582608" y="5785772"/>
+              <a:off x="4584458" y="3522791"/>
               <a:ext cx="62179" cy="80101"/>
             </a:xfrm>
             <a:prstGeom prst="rect">
@@ -4976,13 +5011,13 @@
         </p:sp>
         <p:sp>
           <p:nvSpPr>
-            <p:cNvPr id="33" name="tx33"/>
+            <p:cNvPr id="34" name="tx34"/>
             <p:cNvSpPr/>
             <p:nvPr/>
           </p:nvSpPr>
           <p:spPr>
             <a:xfrm>
-              <a:off x="6606094" y="5785772"/>
+              <a:off x="6571282" y="3522791"/>
               <a:ext cx="124358" cy="80101"/>
             </a:xfrm>
             <a:prstGeom prst="rect">
@@ -5022,13 +5057,13 @@
         </p:sp>
         <p:sp>
           <p:nvSpPr>
-            <p:cNvPr id="34" name="tx34"/>
+            <p:cNvPr id="35" name="tx35"/>
             <p:cNvSpPr/>
             <p:nvPr/>
           </p:nvSpPr>
           <p:spPr>
             <a:xfrm>
-              <a:off x="2928340" y="5925448"/>
+              <a:off x="2928340" y="3662467"/>
               <a:ext cx="3578047" cy="100218"/>
             </a:xfrm>
             <a:prstGeom prst="rect">
@@ -5068,13 +5103,13 @@
         </p:sp>
         <p:sp>
           <p:nvSpPr>
-            <p:cNvPr id="35" name="tx35"/>
+            <p:cNvPr id="36" name="tx36"/>
             <p:cNvSpPr/>
             <p:nvPr/>
           </p:nvSpPr>
           <p:spPr>
             <a:xfrm rot="-5400000">
-              <a:off x="68446" y="3848213"/>
+              <a:off x="138035" y="2751517"/>
               <a:ext cx="1016904" cy="100218"/>
             </a:xfrm>
             <a:prstGeom prst="rect">
@@ -5114,13 +5149,13 @@
         </p:sp>
         <p:sp>
           <p:nvSpPr>
-            <p:cNvPr id="36" name="tx36"/>
+            <p:cNvPr id="37" name="tx37"/>
             <p:cNvSpPr/>
             <p:nvPr/>
           </p:nvSpPr>
           <p:spPr>
             <a:xfrm>
-              <a:off x="817517" y="1896563"/>
+              <a:off x="887106" y="1966152"/>
               <a:ext cx="6321612" cy="82021"/>
             </a:xfrm>
             <a:prstGeom prst="rect">
@@ -5160,13 +5195,3746 @@
         </p:sp>
         <p:sp>
           <p:nvSpPr>
-            <p:cNvPr id="37" name="tx37"/>
+            <p:cNvPr id="38" name="tx38"/>
             <p:cNvSpPr/>
             <p:nvPr/>
           </p:nvSpPr>
           <p:spPr>
             <a:xfrm>
-              <a:off x="817517" y="1669789"/>
+              <a:off x="887106" y="1739378"/>
+              <a:ext cx="3760287" cy="120152"/>
+            </a:xfrm>
+            <a:prstGeom prst="rect">
+              <a:avLst/>
+            </a:prstGeom>
+            <a:noFill/>
+          </p:spPr>
+          <p:txBody>
+            <a:bodyPr lIns="0" rIns="0" tIns="0" bIns="0" anchorCtr="1" anchor="ctr" wrap="none"/>
+            <a:lstStyle/>
+            <a:p>
+              <a:pPr algn="l" marL="0" marR="0" indent="0">
+                <a:lnSpc>
+                  <a:spcPts val="1320"/>
+                </a:lnSpc>
+                <a:spcBef>
+                  <a:spcPts val="0"/>
+                </a:spcBef>
+                <a:spcAft>
+                  <a:spcPts val="0"/>
+                </a:spcAft>
+              </a:pPr>
+              <a:r>
+                <a:rPr sz="1320">
+                  <a:solidFill>
+                    <a:srgbClr val="000000">
+                      <a:alpha val="100000"/>
+                    </a:srgbClr>
+                  </a:solidFill>
+                  <a:latin typeface="Helvetica"/>
+                  <a:cs typeface="Helvetica"/>
+                </a:rPr>
+                <a:t>Immune-related AE &amp; Other (Carboplatin AUC ≥ 3)</a:t>
+              </a:r>
+            </a:p>
+          </p:txBody>
+        </p:sp>
+        <p:sp>
+          <p:nvSpPr>
+            <p:cNvPr id="39" name="pl39"/>
+            <p:cNvSpPr/>
+            <p:nvPr/>
+          </p:nvSpPr>
+          <p:spPr>
+            <a:xfrm>
+              <a:off x="887106" y="5444019"/>
+              <a:ext cx="7660515" cy="0"/>
+            </a:xfrm>
+            <a:custGeom>
+              <a:avLst/>
+              <a:pathLst>
+                <a:path w="7660515" h="0">
+                  <a:moveTo>
+                    <a:pt x="0" y="0"/>
+                  </a:moveTo>
+                  <a:lnTo>
+                    <a:pt x="7660515" y="0"/>
+                  </a:lnTo>
+                  <a:lnTo>
+                    <a:pt x="7660515" y="0"/>
+                  </a:lnTo>
+                </a:path>
+              </a:pathLst>
+            </a:custGeom>
+            <a:ln w="6775" cap="flat">
+              <a:solidFill>
+                <a:srgbClr val="EBEBEB">
+                  <a:alpha val="100000"/>
+                </a:srgbClr>
+              </a:solidFill>
+              <a:prstDash val="solid"/>
+              <a:round/>
+            </a:ln>
+          </p:spPr>
+          <p:txBody>
+            <a:bodyPr/>
+            <a:lstStyle/>
+            <a:p/>
+          </p:txBody>
+        </p:sp>
+        <p:sp>
+          <p:nvSpPr>
+            <p:cNvPr id="40" name="pl40"/>
+            <p:cNvSpPr/>
+            <p:nvPr/>
+          </p:nvSpPr>
+          <p:spPr>
+            <a:xfrm>
+              <a:off x="887106" y="5144686"/>
+              <a:ext cx="7660515" cy="0"/>
+            </a:xfrm>
+            <a:custGeom>
+              <a:avLst/>
+              <a:pathLst>
+                <a:path w="7660515" h="0">
+                  <a:moveTo>
+                    <a:pt x="0" y="0"/>
+                  </a:moveTo>
+                  <a:lnTo>
+                    <a:pt x="7660515" y="0"/>
+                  </a:lnTo>
+                  <a:lnTo>
+                    <a:pt x="7660515" y="0"/>
+                  </a:lnTo>
+                </a:path>
+              </a:pathLst>
+            </a:custGeom>
+            <a:ln w="6775" cap="flat">
+              <a:solidFill>
+                <a:srgbClr val="EBEBEB">
+                  <a:alpha val="100000"/>
+                </a:srgbClr>
+              </a:solidFill>
+              <a:prstDash val="solid"/>
+              <a:round/>
+            </a:ln>
+          </p:spPr>
+          <p:txBody>
+            <a:bodyPr/>
+            <a:lstStyle/>
+            <a:p/>
+          </p:txBody>
+        </p:sp>
+        <p:sp>
+          <p:nvSpPr>
+            <p:cNvPr id="41" name="pl41"/>
+            <p:cNvSpPr/>
+            <p:nvPr/>
+          </p:nvSpPr>
+          <p:spPr>
+            <a:xfrm>
+              <a:off x="887106" y="4845352"/>
+              <a:ext cx="7660515" cy="0"/>
+            </a:xfrm>
+            <a:custGeom>
+              <a:avLst/>
+              <a:pathLst>
+                <a:path w="7660515" h="0">
+                  <a:moveTo>
+                    <a:pt x="0" y="0"/>
+                  </a:moveTo>
+                  <a:lnTo>
+                    <a:pt x="7660515" y="0"/>
+                  </a:lnTo>
+                  <a:lnTo>
+                    <a:pt x="7660515" y="0"/>
+                  </a:lnTo>
+                </a:path>
+              </a:pathLst>
+            </a:custGeom>
+            <a:ln w="6775" cap="flat">
+              <a:solidFill>
+                <a:srgbClr val="EBEBEB">
+                  <a:alpha val="100000"/>
+                </a:srgbClr>
+              </a:solidFill>
+              <a:prstDash val="solid"/>
+              <a:round/>
+            </a:ln>
+          </p:spPr>
+          <p:txBody>
+            <a:bodyPr/>
+            <a:lstStyle/>
+            <a:p/>
+          </p:txBody>
+        </p:sp>
+        <p:sp>
+          <p:nvSpPr>
+            <p:cNvPr id="42" name="pl42"/>
+            <p:cNvSpPr/>
+            <p:nvPr/>
+          </p:nvSpPr>
+          <p:spPr>
+            <a:xfrm>
+              <a:off x="887106" y="4546018"/>
+              <a:ext cx="7660515" cy="0"/>
+            </a:xfrm>
+            <a:custGeom>
+              <a:avLst/>
+              <a:pathLst>
+                <a:path w="7660515" h="0">
+                  <a:moveTo>
+                    <a:pt x="0" y="0"/>
+                  </a:moveTo>
+                  <a:lnTo>
+                    <a:pt x="7660515" y="0"/>
+                  </a:lnTo>
+                  <a:lnTo>
+                    <a:pt x="7660515" y="0"/>
+                  </a:lnTo>
+                </a:path>
+              </a:pathLst>
+            </a:custGeom>
+            <a:ln w="6775" cap="flat">
+              <a:solidFill>
+                <a:srgbClr val="EBEBEB">
+                  <a:alpha val="100000"/>
+                </a:srgbClr>
+              </a:solidFill>
+              <a:prstDash val="solid"/>
+              <a:round/>
+            </a:ln>
+          </p:spPr>
+          <p:txBody>
+            <a:bodyPr/>
+            <a:lstStyle/>
+            <a:p/>
+          </p:txBody>
+        </p:sp>
+        <p:sp>
+          <p:nvSpPr>
+            <p:cNvPr id="43" name="pl43"/>
+            <p:cNvSpPr/>
+            <p:nvPr/>
+          </p:nvSpPr>
+          <p:spPr>
+            <a:xfrm>
+              <a:off x="983303" y="4336484"/>
+              <a:ext cx="0" cy="1317069"/>
+            </a:xfrm>
+            <a:custGeom>
+              <a:avLst/>
+              <a:pathLst>
+                <a:path w="0" h="1317069">
+                  <a:moveTo>
+                    <a:pt x="0" y="1317069"/>
+                  </a:moveTo>
+                  <a:lnTo>
+                    <a:pt x="0" y="0"/>
+                  </a:lnTo>
+                  <a:lnTo>
+                    <a:pt x="0" y="0"/>
+                  </a:lnTo>
+                </a:path>
+              </a:pathLst>
+            </a:custGeom>
+            <a:ln w="6775" cap="flat">
+              <a:solidFill>
+                <a:srgbClr val="EBEBEB">
+                  <a:alpha val="100000"/>
+                </a:srgbClr>
+              </a:solidFill>
+              <a:prstDash val="solid"/>
+              <a:round/>
+            </a:ln>
+          </p:spPr>
+          <p:txBody>
+            <a:bodyPr/>
+            <a:lstStyle/>
+            <a:p/>
+          </p:txBody>
+        </p:sp>
+        <p:sp>
+          <p:nvSpPr>
+            <p:cNvPr id="44" name="pl44"/>
+            <p:cNvSpPr/>
+            <p:nvPr/>
+          </p:nvSpPr>
+          <p:spPr>
+            <a:xfrm>
+              <a:off x="1790468" y="4336484"/>
+              <a:ext cx="0" cy="1317069"/>
+            </a:xfrm>
+            <a:custGeom>
+              <a:avLst/>
+              <a:pathLst>
+                <a:path w="0" h="1317069">
+                  <a:moveTo>
+                    <a:pt x="0" y="1317069"/>
+                  </a:moveTo>
+                  <a:lnTo>
+                    <a:pt x="0" y="0"/>
+                  </a:lnTo>
+                  <a:lnTo>
+                    <a:pt x="0" y="0"/>
+                  </a:lnTo>
+                </a:path>
+              </a:pathLst>
+            </a:custGeom>
+            <a:ln w="6775" cap="flat">
+              <a:solidFill>
+                <a:srgbClr val="EBEBEB">
+                  <a:alpha val="100000"/>
+                </a:srgbClr>
+              </a:solidFill>
+              <a:prstDash val="solid"/>
+              <a:round/>
+            </a:ln>
+          </p:spPr>
+          <p:txBody>
+            <a:bodyPr/>
+            <a:lstStyle/>
+            <a:p/>
+          </p:txBody>
+        </p:sp>
+        <p:sp>
+          <p:nvSpPr>
+            <p:cNvPr id="45" name="pl45"/>
+            <p:cNvSpPr/>
+            <p:nvPr/>
+          </p:nvSpPr>
+          <p:spPr>
+            <a:xfrm>
+              <a:off x="2597634" y="4336484"/>
+              <a:ext cx="0" cy="1317069"/>
+            </a:xfrm>
+            <a:custGeom>
+              <a:avLst/>
+              <a:pathLst>
+                <a:path w="0" h="1317069">
+                  <a:moveTo>
+                    <a:pt x="0" y="1317069"/>
+                  </a:moveTo>
+                  <a:lnTo>
+                    <a:pt x="0" y="0"/>
+                  </a:lnTo>
+                  <a:lnTo>
+                    <a:pt x="0" y="0"/>
+                  </a:lnTo>
+                </a:path>
+              </a:pathLst>
+            </a:custGeom>
+            <a:ln w="6775" cap="flat">
+              <a:solidFill>
+                <a:srgbClr val="EBEBEB">
+                  <a:alpha val="100000"/>
+                </a:srgbClr>
+              </a:solidFill>
+              <a:prstDash val="solid"/>
+              <a:round/>
+            </a:ln>
+          </p:spPr>
+          <p:txBody>
+            <a:bodyPr/>
+            <a:lstStyle/>
+            <a:p/>
+          </p:txBody>
+        </p:sp>
+        <p:sp>
+          <p:nvSpPr>
+            <p:cNvPr id="46" name="pl46"/>
+            <p:cNvSpPr/>
+            <p:nvPr/>
+          </p:nvSpPr>
+          <p:spPr>
+            <a:xfrm>
+              <a:off x="3404799" y="4336484"/>
+              <a:ext cx="0" cy="1317069"/>
+            </a:xfrm>
+            <a:custGeom>
+              <a:avLst/>
+              <a:pathLst>
+                <a:path w="0" h="1317069">
+                  <a:moveTo>
+                    <a:pt x="0" y="1317069"/>
+                  </a:moveTo>
+                  <a:lnTo>
+                    <a:pt x="0" y="0"/>
+                  </a:lnTo>
+                  <a:lnTo>
+                    <a:pt x="0" y="0"/>
+                  </a:lnTo>
+                </a:path>
+              </a:pathLst>
+            </a:custGeom>
+            <a:ln w="6775" cap="flat">
+              <a:solidFill>
+                <a:srgbClr val="EBEBEB">
+                  <a:alpha val="100000"/>
+                </a:srgbClr>
+              </a:solidFill>
+              <a:prstDash val="solid"/>
+              <a:round/>
+            </a:ln>
+          </p:spPr>
+          <p:txBody>
+            <a:bodyPr/>
+            <a:lstStyle/>
+            <a:p/>
+          </p:txBody>
+        </p:sp>
+        <p:sp>
+          <p:nvSpPr>
+            <p:cNvPr id="47" name="pl47"/>
+            <p:cNvSpPr/>
+            <p:nvPr/>
+          </p:nvSpPr>
+          <p:spPr>
+            <a:xfrm>
+              <a:off x="4211965" y="4336484"/>
+              <a:ext cx="0" cy="1317069"/>
+            </a:xfrm>
+            <a:custGeom>
+              <a:avLst/>
+              <a:pathLst>
+                <a:path w="0" h="1317069">
+                  <a:moveTo>
+                    <a:pt x="0" y="1317069"/>
+                  </a:moveTo>
+                  <a:lnTo>
+                    <a:pt x="0" y="0"/>
+                  </a:lnTo>
+                  <a:lnTo>
+                    <a:pt x="0" y="0"/>
+                  </a:lnTo>
+                </a:path>
+              </a:pathLst>
+            </a:custGeom>
+            <a:ln w="6775" cap="flat">
+              <a:solidFill>
+                <a:srgbClr val="EBEBEB">
+                  <a:alpha val="100000"/>
+                </a:srgbClr>
+              </a:solidFill>
+              <a:prstDash val="solid"/>
+              <a:round/>
+            </a:ln>
+          </p:spPr>
+          <p:txBody>
+            <a:bodyPr/>
+            <a:lstStyle/>
+            <a:p/>
+          </p:txBody>
+        </p:sp>
+        <p:sp>
+          <p:nvSpPr>
+            <p:cNvPr id="48" name="pl48"/>
+            <p:cNvSpPr/>
+            <p:nvPr/>
+          </p:nvSpPr>
+          <p:spPr>
+            <a:xfrm>
+              <a:off x="5019130" y="4336484"/>
+              <a:ext cx="0" cy="1317069"/>
+            </a:xfrm>
+            <a:custGeom>
+              <a:avLst/>
+              <a:pathLst>
+                <a:path w="0" h="1317069">
+                  <a:moveTo>
+                    <a:pt x="0" y="1317069"/>
+                  </a:moveTo>
+                  <a:lnTo>
+                    <a:pt x="0" y="0"/>
+                  </a:lnTo>
+                  <a:lnTo>
+                    <a:pt x="0" y="0"/>
+                  </a:lnTo>
+                </a:path>
+              </a:pathLst>
+            </a:custGeom>
+            <a:ln w="6775" cap="flat">
+              <a:solidFill>
+                <a:srgbClr val="EBEBEB">
+                  <a:alpha val="100000"/>
+                </a:srgbClr>
+              </a:solidFill>
+              <a:prstDash val="solid"/>
+              <a:round/>
+            </a:ln>
+          </p:spPr>
+          <p:txBody>
+            <a:bodyPr/>
+            <a:lstStyle/>
+            <a:p/>
+          </p:txBody>
+        </p:sp>
+        <p:sp>
+          <p:nvSpPr>
+            <p:cNvPr id="49" name="pl49"/>
+            <p:cNvSpPr/>
+            <p:nvPr/>
+          </p:nvSpPr>
+          <p:spPr>
+            <a:xfrm>
+              <a:off x="5826296" y="4336484"/>
+              <a:ext cx="0" cy="1317069"/>
+            </a:xfrm>
+            <a:custGeom>
+              <a:avLst/>
+              <a:pathLst>
+                <a:path w="0" h="1317069">
+                  <a:moveTo>
+                    <a:pt x="0" y="1317069"/>
+                  </a:moveTo>
+                  <a:lnTo>
+                    <a:pt x="0" y="0"/>
+                  </a:lnTo>
+                  <a:lnTo>
+                    <a:pt x="0" y="0"/>
+                  </a:lnTo>
+                </a:path>
+              </a:pathLst>
+            </a:custGeom>
+            <a:ln w="6775" cap="flat">
+              <a:solidFill>
+                <a:srgbClr val="EBEBEB">
+                  <a:alpha val="100000"/>
+                </a:srgbClr>
+              </a:solidFill>
+              <a:prstDash val="solid"/>
+              <a:round/>
+            </a:ln>
+          </p:spPr>
+          <p:txBody>
+            <a:bodyPr/>
+            <a:lstStyle/>
+            <a:p/>
+          </p:txBody>
+        </p:sp>
+        <p:sp>
+          <p:nvSpPr>
+            <p:cNvPr id="50" name="pl50"/>
+            <p:cNvSpPr/>
+            <p:nvPr/>
+          </p:nvSpPr>
+          <p:spPr>
+            <a:xfrm>
+              <a:off x="6633461" y="4336484"/>
+              <a:ext cx="0" cy="1317069"/>
+            </a:xfrm>
+            <a:custGeom>
+              <a:avLst/>
+              <a:pathLst>
+                <a:path w="0" h="1317069">
+                  <a:moveTo>
+                    <a:pt x="0" y="1317069"/>
+                  </a:moveTo>
+                  <a:lnTo>
+                    <a:pt x="0" y="0"/>
+                  </a:lnTo>
+                  <a:lnTo>
+                    <a:pt x="0" y="0"/>
+                  </a:lnTo>
+                </a:path>
+              </a:pathLst>
+            </a:custGeom>
+            <a:ln w="6775" cap="flat">
+              <a:solidFill>
+                <a:srgbClr val="EBEBEB">
+                  <a:alpha val="100000"/>
+                </a:srgbClr>
+              </a:solidFill>
+              <a:prstDash val="solid"/>
+              <a:round/>
+            </a:ln>
+          </p:spPr>
+          <p:txBody>
+            <a:bodyPr/>
+            <a:lstStyle/>
+            <a:p/>
+          </p:txBody>
+        </p:sp>
+        <p:sp>
+          <p:nvSpPr>
+            <p:cNvPr id="51" name="pl51"/>
+            <p:cNvSpPr/>
+            <p:nvPr/>
+          </p:nvSpPr>
+          <p:spPr>
+            <a:xfrm>
+              <a:off x="7440627" y="4336484"/>
+              <a:ext cx="0" cy="1317069"/>
+            </a:xfrm>
+            <a:custGeom>
+              <a:avLst/>
+              <a:pathLst>
+                <a:path w="0" h="1317069">
+                  <a:moveTo>
+                    <a:pt x="0" y="1317069"/>
+                  </a:moveTo>
+                  <a:lnTo>
+                    <a:pt x="0" y="0"/>
+                  </a:lnTo>
+                  <a:lnTo>
+                    <a:pt x="0" y="0"/>
+                  </a:lnTo>
+                </a:path>
+              </a:pathLst>
+            </a:custGeom>
+            <a:ln w="6775" cap="flat">
+              <a:solidFill>
+                <a:srgbClr val="EBEBEB">
+                  <a:alpha val="100000"/>
+                </a:srgbClr>
+              </a:solidFill>
+              <a:prstDash val="solid"/>
+              <a:round/>
+            </a:ln>
+          </p:spPr>
+          <p:txBody>
+            <a:bodyPr/>
+            <a:lstStyle/>
+            <a:p/>
+          </p:txBody>
+        </p:sp>
+        <p:sp>
+          <p:nvSpPr>
+            <p:cNvPr id="52" name="pl52"/>
+            <p:cNvSpPr/>
+            <p:nvPr/>
+          </p:nvSpPr>
+          <p:spPr>
+            <a:xfrm>
+              <a:off x="8247792" y="4336484"/>
+              <a:ext cx="0" cy="1317069"/>
+            </a:xfrm>
+            <a:custGeom>
+              <a:avLst/>
+              <a:pathLst>
+                <a:path w="0" h="1317069">
+                  <a:moveTo>
+                    <a:pt x="0" y="1317069"/>
+                  </a:moveTo>
+                  <a:lnTo>
+                    <a:pt x="0" y="0"/>
+                  </a:lnTo>
+                  <a:lnTo>
+                    <a:pt x="0" y="0"/>
+                  </a:lnTo>
+                </a:path>
+              </a:pathLst>
+            </a:custGeom>
+            <a:ln w="6775" cap="flat">
+              <a:solidFill>
+                <a:srgbClr val="EBEBEB">
+                  <a:alpha val="100000"/>
+                </a:srgbClr>
+              </a:solidFill>
+              <a:prstDash val="solid"/>
+              <a:round/>
+            </a:ln>
+          </p:spPr>
+          <p:txBody>
+            <a:bodyPr/>
+            <a:lstStyle/>
+            <a:p/>
+          </p:txBody>
+        </p:sp>
+        <p:sp>
+          <p:nvSpPr>
+            <p:cNvPr id="53" name="pl53"/>
+            <p:cNvSpPr/>
+            <p:nvPr/>
+          </p:nvSpPr>
+          <p:spPr>
+            <a:xfrm>
+              <a:off x="887106" y="5593686"/>
+              <a:ext cx="7660515" cy="0"/>
+            </a:xfrm>
+            <a:custGeom>
+              <a:avLst/>
+              <a:pathLst>
+                <a:path w="7660515" h="0">
+                  <a:moveTo>
+                    <a:pt x="0" y="0"/>
+                  </a:moveTo>
+                  <a:lnTo>
+                    <a:pt x="7660515" y="0"/>
+                  </a:lnTo>
+                  <a:lnTo>
+                    <a:pt x="7660515" y="0"/>
+                  </a:lnTo>
+                </a:path>
+              </a:pathLst>
+            </a:custGeom>
+            <a:ln w="13550" cap="flat">
+              <a:solidFill>
+                <a:srgbClr val="EBEBEB">
+                  <a:alpha val="100000"/>
+                </a:srgbClr>
+              </a:solidFill>
+              <a:prstDash val="solid"/>
+              <a:round/>
+            </a:ln>
+          </p:spPr>
+          <p:txBody>
+            <a:bodyPr/>
+            <a:lstStyle/>
+            <a:p/>
+          </p:txBody>
+        </p:sp>
+        <p:sp>
+          <p:nvSpPr>
+            <p:cNvPr id="54" name="pl54"/>
+            <p:cNvSpPr/>
+            <p:nvPr/>
+          </p:nvSpPr>
+          <p:spPr>
+            <a:xfrm>
+              <a:off x="887106" y="5294352"/>
+              <a:ext cx="7660515" cy="0"/>
+            </a:xfrm>
+            <a:custGeom>
+              <a:avLst/>
+              <a:pathLst>
+                <a:path w="7660515" h="0">
+                  <a:moveTo>
+                    <a:pt x="0" y="0"/>
+                  </a:moveTo>
+                  <a:lnTo>
+                    <a:pt x="7660515" y="0"/>
+                  </a:lnTo>
+                  <a:lnTo>
+                    <a:pt x="7660515" y="0"/>
+                  </a:lnTo>
+                </a:path>
+              </a:pathLst>
+            </a:custGeom>
+            <a:ln w="13550" cap="flat">
+              <a:solidFill>
+                <a:srgbClr val="EBEBEB">
+                  <a:alpha val="100000"/>
+                </a:srgbClr>
+              </a:solidFill>
+              <a:prstDash val="solid"/>
+              <a:round/>
+            </a:ln>
+          </p:spPr>
+          <p:txBody>
+            <a:bodyPr/>
+            <a:lstStyle/>
+            <a:p/>
+          </p:txBody>
+        </p:sp>
+        <p:sp>
+          <p:nvSpPr>
+            <p:cNvPr id="55" name="pl55"/>
+            <p:cNvSpPr/>
+            <p:nvPr/>
+          </p:nvSpPr>
+          <p:spPr>
+            <a:xfrm>
+              <a:off x="887106" y="4995019"/>
+              <a:ext cx="7660515" cy="0"/>
+            </a:xfrm>
+            <a:custGeom>
+              <a:avLst/>
+              <a:pathLst>
+                <a:path w="7660515" h="0">
+                  <a:moveTo>
+                    <a:pt x="0" y="0"/>
+                  </a:moveTo>
+                  <a:lnTo>
+                    <a:pt x="7660515" y="0"/>
+                  </a:lnTo>
+                  <a:lnTo>
+                    <a:pt x="7660515" y="0"/>
+                  </a:lnTo>
+                </a:path>
+              </a:pathLst>
+            </a:custGeom>
+            <a:ln w="13550" cap="flat">
+              <a:solidFill>
+                <a:srgbClr val="EBEBEB">
+                  <a:alpha val="100000"/>
+                </a:srgbClr>
+              </a:solidFill>
+              <a:prstDash val="solid"/>
+              <a:round/>
+            </a:ln>
+          </p:spPr>
+          <p:txBody>
+            <a:bodyPr/>
+            <a:lstStyle/>
+            <a:p/>
+          </p:txBody>
+        </p:sp>
+        <p:sp>
+          <p:nvSpPr>
+            <p:cNvPr id="56" name="pl56"/>
+            <p:cNvSpPr/>
+            <p:nvPr/>
+          </p:nvSpPr>
+          <p:spPr>
+            <a:xfrm>
+              <a:off x="887106" y="4695685"/>
+              <a:ext cx="7660515" cy="0"/>
+            </a:xfrm>
+            <a:custGeom>
+              <a:avLst/>
+              <a:pathLst>
+                <a:path w="7660515" h="0">
+                  <a:moveTo>
+                    <a:pt x="0" y="0"/>
+                  </a:moveTo>
+                  <a:lnTo>
+                    <a:pt x="7660515" y="0"/>
+                  </a:lnTo>
+                  <a:lnTo>
+                    <a:pt x="7660515" y="0"/>
+                  </a:lnTo>
+                </a:path>
+              </a:pathLst>
+            </a:custGeom>
+            <a:ln w="13550" cap="flat">
+              <a:solidFill>
+                <a:srgbClr val="EBEBEB">
+                  <a:alpha val="100000"/>
+                </a:srgbClr>
+              </a:solidFill>
+              <a:prstDash val="solid"/>
+              <a:round/>
+            </a:ln>
+          </p:spPr>
+          <p:txBody>
+            <a:bodyPr/>
+            <a:lstStyle/>
+            <a:p/>
+          </p:txBody>
+        </p:sp>
+        <p:sp>
+          <p:nvSpPr>
+            <p:cNvPr id="57" name="pl57"/>
+            <p:cNvSpPr/>
+            <p:nvPr/>
+          </p:nvSpPr>
+          <p:spPr>
+            <a:xfrm>
+              <a:off x="887106" y="4396351"/>
+              <a:ext cx="7660515" cy="0"/>
+            </a:xfrm>
+            <a:custGeom>
+              <a:avLst/>
+              <a:pathLst>
+                <a:path w="7660515" h="0">
+                  <a:moveTo>
+                    <a:pt x="0" y="0"/>
+                  </a:moveTo>
+                  <a:lnTo>
+                    <a:pt x="7660515" y="0"/>
+                  </a:lnTo>
+                  <a:lnTo>
+                    <a:pt x="7660515" y="0"/>
+                  </a:lnTo>
+                </a:path>
+              </a:pathLst>
+            </a:custGeom>
+            <a:ln w="13550" cap="flat">
+              <a:solidFill>
+                <a:srgbClr val="EBEBEB">
+                  <a:alpha val="100000"/>
+                </a:srgbClr>
+              </a:solidFill>
+              <a:prstDash val="solid"/>
+              <a:round/>
+            </a:ln>
+          </p:spPr>
+          <p:txBody>
+            <a:bodyPr/>
+            <a:lstStyle/>
+            <a:p/>
+          </p:txBody>
+        </p:sp>
+        <p:sp>
+          <p:nvSpPr>
+            <p:cNvPr id="58" name="pl58"/>
+            <p:cNvSpPr/>
+            <p:nvPr/>
+          </p:nvSpPr>
+          <p:spPr>
+            <a:xfrm>
+              <a:off x="1386885" y="4336484"/>
+              <a:ext cx="0" cy="1317069"/>
+            </a:xfrm>
+            <a:custGeom>
+              <a:avLst/>
+              <a:pathLst>
+                <a:path w="0" h="1317069">
+                  <a:moveTo>
+                    <a:pt x="0" y="1317069"/>
+                  </a:moveTo>
+                  <a:lnTo>
+                    <a:pt x="0" y="0"/>
+                  </a:lnTo>
+                  <a:lnTo>
+                    <a:pt x="0" y="0"/>
+                  </a:lnTo>
+                </a:path>
+              </a:pathLst>
+            </a:custGeom>
+            <a:ln w="13550" cap="flat">
+              <a:solidFill>
+                <a:srgbClr val="EBEBEB">
+                  <a:alpha val="100000"/>
+                </a:srgbClr>
+              </a:solidFill>
+              <a:prstDash val="solid"/>
+              <a:round/>
+            </a:ln>
+          </p:spPr>
+          <p:txBody>
+            <a:bodyPr/>
+            <a:lstStyle/>
+            <a:p/>
+          </p:txBody>
+        </p:sp>
+        <p:sp>
+          <p:nvSpPr>
+            <p:cNvPr id="59" name="pl59"/>
+            <p:cNvSpPr/>
+            <p:nvPr/>
+          </p:nvSpPr>
+          <p:spPr>
+            <a:xfrm>
+              <a:off x="2194051" y="4336484"/>
+              <a:ext cx="0" cy="1317069"/>
+            </a:xfrm>
+            <a:custGeom>
+              <a:avLst/>
+              <a:pathLst>
+                <a:path w="0" h="1317069">
+                  <a:moveTo>
+                    <a:pt x="0" y="1317069"/>
+                  </a:moveTo>
+                  <a:lnTo>
+                    <a:pt x="0" y="0"/>
+                  </a:lnTo>
+                  <a:lnTo>
+                    <a:pt x="0" y="0"/>
+                  </a:lnTo>
+                </a:path>
+              </a:pathLst>
+            </a:custGeom>
+            <a:ln w="13550" cap="flat">
+              <a:solidFill>
+                <a:srgbClr val="EBEBEB">
+                  <a:alpha val="100000"/>
+                </a:srgbClr>
+              </a:solidFill>
+              <a:prstDash val="solid"/>
+              <a:round/>
+            </a:ln>
+          </p:spPr>
+          <p:txBody>
+            <a:bodyPr/>
+            <a:lstStyle/>
+            <a:p/>
+          </p:txBody>
+        </p:sp>
+        <p:sp>
+          <p:nvSpPr>
+            <p:cNvPr id="60" name="pl60"/>
+            <p:cNvSpPr/>
+            <p:nvPr/>
+          </p:nvSpPr>
+          <p:spPr>
+            <a:xfrm>
+              <a:off x="3001216" y="4336484"/>
+              <a:ext cx="0" cy="1317069"/>
+            </a:xfrm>
+            <a:custGeom>
+              <a:avLst/>
+              <a:pathLst>
+                <a:path w="0" h="1317069">
+                  <a:moveTo>
+                    <a:pt x="0" y="1317069"/>
+                  </a:moveTo>
+                  <a:lnTo>
+                    <a:pt x="0" y="0"/>
+                  </a:lnTo>
+                  <a:lnTo>
+                    <a:pt x="0" y="0"/>
+                  </a:lnTo>
+                </a:path>
+              </a:pathLst>
+            </a:custGeom>
+            <a:ln w="13550" cap="flat">
+              <a:solidFill>
+                <a:srgbClr val="EBEBEB">
+                  <a:alpha val="100000"/>
+                </a:srgbClr>
+              </a:solidFill>
+              <a:prstDash val="solid"/>
+              <a:round/>
+            </a:ln>
+          </p:spPr>
+          <p:txBody>
+            <a:bodyPr/>
+            <a:lstStyle/>
+            <a:p/>
+          </p:txBody>
+        </p:sp>
+        <p:sp>
+          <p:nvSpPr>
+            <p:cNvPr id="61" name="pl61"/>
+            <p:cNvSpPr/>
+            <p:nvPr/>
+          </p:nvSpPr>
+          <p:spPr>
+            <a:xfrm>
+              <a:off x="3808382" y="4336484"/>
+              <a:ext cx="0" cy="1317069"/>
+            </a:xfrm>
+            <a:custGeom>
+              <a:avLst/>
+              <a:pathLst>
+                <a:path w="0" h="1317069">
+                  <a:moveTo>
+                    <a:pt x="0" y="1317069"/>
+                  </a:moveTo>
+                  <a:lnTo>
+                    <a:pt x="0" y="0"/>
+                  </a:lnTo>
+                  <a:lnTo>
+                    <a:pt x="0" y="0"/>
+                  </a:lnTo>
+                </a:path>
+              </a:pathLst>
+            </a:custGeom>
+            <a:ln w="13550" cap="flat">
+              <a:solidFill>
+                <a:srgbClr val="EBEBEB">
+                  <a:alpha val="100000"/>
+                </a:srgbClr>
+              </a:solidFill>
+              <a:prstDash val="solid"/>
+              <a:round/>
+            </a:ln>
+          </p:spPr>
+          <p:txBody>
+            <a:bodyPr/>
+            <a:lstStyle/>
+            <a:p/>
+          </p:txBody>
+        </p:sp>
+        <p:sp>
+          <p:nvSpPr>
+            <p:cNvPr id="62" name="pl62"/>
+            <p:cNvSpPr/>
+            <p:nvPr/>
+          </p:nvSpPr>
+          <p:spPr>
+            <a:xfrm>
+              <a:off x="4615547" y="4336484"/>
+              <a:ext cx="0" cy="1317069"/>
+            </a:xfrm>
+            <a:custGeom>
+              <a:avLst/>
+              <a:pathLst>
+                <a:path w="0" h="1317069">
+                  <a:moveTo>
+                    <a:pt x="0" y="1317069"/>
+                  </a:moveTo>
+                  <a:lnTo>
+                    <a:pt x="0" y="0"/>
+                  </a:lnTo>
+                  <a:lnTo>
+                    <a:pt x="0" y="0"/>
+                  </a:lnTo>
+                </a:path>
+              </a:pathLst>
+            </a:custGeom>
+            <a:ln w="13550" cap="flat">
+              <a:solidFill>
+                <a:srgbClr val="EBEBEB">
+                  <a:alpha val="100000"/>
+                </a:srgbClr>
+              </a:solidFill>
+              <a:prstDash val="solid"/>
+              <a:round/>
+            </a:ln>
+          </p:spPr>
+          <p:txBody>
+            <a:bodyPr/>
+            <a:lstStyle/>
+            <a:p/>
+          </p:txBody>
+        </p:sp>
+        <p:sp>
+          <p:nvSpPr>
+            <p:cNvPr id="63" name="pl63"/>
+            <p:cNvSpPr/>
+            <p:nvPr/>
+          </p:nvSpPr>
+          <p:spPr>
+            <a:xfrm>
+              <a:off x="5422713" y="4336484"/>
+              <a:ext cx="0" cy="1317069"/>
+            </a:xfrm>
+            <a:custGeom>
+              <a:avLst/>
+              <a:pathLst>
+                <a:path w="0" h="1317069">
+                  <a:moveTo>
+                    <a:pt x="0" y="1317069"/>
+                  </a:moveTo>
+                  <a:lnTo>
+                    <a:pt x="0" y="0"/>
+                  </a:lnTo>
+                  <a:lnTo>
+                    <a:pt x="0" y="0"/>
+                  </a:lnTo>
+                </a:path>
+              </a:pathLst>
+            </a:custGeom>
+            <a:ln w="13550" cap="flat">
+              <a:solidFill>
+                <a:srgbClr val="EBEBEB">
+                  <a:alpha val="100000"/>
+                </a:srgbClr>
+              </a:solidFill>
+              <a:prstDash val="solid"/>
+              <a:round/>
+            </a:ln>
+          </p:spPr>
+          <p:txBody>
+            <a:bodyPr/>
+            <a:lstStyle/>
+            <a:p/>
+          </p:txBody>
+        </p:sp>
+        <p:sp>
+          <p:nvSpPr>
+            <p:cNvPr id="64" name="pl64"/>
+            <p:cNvSpPr/>
+            <p:nvPr/>
+          </p:nvSpPr>
+          <p:spPr>
+            <a:xfrm>
+              <a:off x="6229878" y="4336484"/>
+              <a:ext cx="0" cy="1317069"/>
+            </a:xfrm>
+            <a:custGeom>
+              <a:avLst/>
+              <a:pathLst>
+                <a:path w="0" h="1317069">
+                  <a:moveTo>
+                    <a:pt x="0" y="1317069"/>
+                  </a:moveTo>
+                  <a:lnTo>
+                    <a:pt x="0" y="0"/>
+                  </a:lnTo>
+                  <a:lnTo>
+                    <a:pt x="0" y="0"/>
+                  </a:lnTo>
+                </a:path>
+              </a:pathLst>
+            </a:custGeom>
+            <a:ln w="13550" cap="flat">
+              <a:solidFill>
+                <a:srgbClr val="EBEBEB">
+                  <a:alpha val="100000"/>
+                </a:srgbClr>
+              </a:solidFill>
+              <a:prstDash val="solid"/>
+              <a:round/>
+            </a:ln>
+          </p:spPr>
+          <p:txBody>
+            <a:bodyPr/>
+            <a:lstStyle/>
+            <a:p/>
+          </p:txBody>
+        </p:sp>
+        <p:sp>
+          <p:nvSpPr>
+            <p:cNvPr id="65" name="pl65"/>
+            <p:cNvSpPr/>
+            <p:nvPr/>
+          </p:nvSpPr>
+          <p:spPr>
+            <a:xfrm>
+              <a:off x="7037044" y="4336484"/>
+              <a:ext cx="0" cy="1317069"/>
+            </a:xfrm>
+            <a:custGeom>
+              <a:avLst/>
+              <a:pathLst>
+                <a:path w="0" h="1317069">
+                  <a:moveTo>
+                    <a:pt x="0" y="1317069"/>
+                  </a:moveTo>
+                  <a:lnTo>
+                    <a:pt x="0" y="0"/>
+                  </a:lnTo>
+                  <a:lnTo>
+                    <a:pt x="0" y="0"/>
+                  </a:lnTo>
+                </a:path>
+              </a:pathLst>
+            </a:custGeom>
+            <a:ln w="13550" cap="flat">
+              <a:solidFill>
+                <a:srgbClr val="EBEBEB">
+                  <a:alpha val="100000"/>
+                </a:srgbClr>
+              </a:solidFill>
+              <a:prstDash val="solid"/>
+              <a:round/>
+            </a:ln>
+          </p:spPr>
+          <p:txBody>
+            <a:bodyPr/>
+            <a:lstStyle/>
+            <a:p/>
+          </p:txBody>
+        </p:sp>
+        <p:sp>
+          <p:nvSpPr>
+            <p:cNvPr id="66" name="pl66"/>
+            <p:cNvSpPr/>
+            <p:nvPr/>
+          </p:nvSpPr>
+          <p:spPr>
+            <a:xfrm>
+              <a:off x="7844209" y="4336484"/>
+              <a:ext cx="0" cy="1317069"/>
+            </a:xfrm>
+            <a:custGeom>
+              <a:avLst/>
+              <a:pathLst>
+                <a:path w="0" h="1317069">
+                  <a:moveTo>
+                    <a:pt x="0" y="1317069"/>
+                  </a:moveTo>
+                  <a:lnTo>
+                    <a:pt x="0" y="0"/>
+                  </a:lnTo>
+                  <a:lnTo>
+                    <a:pt x="0" y="0"/>
+                  </a:lnTo>
+                </a:path>
+              </a:pathLst>
+            </a:custGeom>
+            <a:ln w="13550" cap="flat">
+              <a:solidFill>
+                <a:srgbClr val="EBEBEB">
+                  <a:alpha val="100000"/>
+                </a:srgbClr>
+              </a:solidFill>
+              <a:prstDash val="solid"/>
+              <a:round/>
+            </a:ln>
+          </p:spPr>
+          <p:txBody>
+            <a:bodyPr/>
+            <a:lstStyle/>
+            <a:p/>
+          </p:txBody>
+        </p:sp>
+        <p:sp>
+          <p:nvSpPr>
+            <p:cNvPr id="67" name="pg67"/>
+            <p:cNvSpPr/>
+            <p:nvPr/>
+          </p:nvSpPr>
+          <p:spPr>
+            <a:xfrm>
+              <a:off x="1235312" y="4336484"/>
+              <a:ext cx="6964104" cy="1201418"/>
+            </a:xfrm>
+            <a:custGeom>
+              <a:avLst/>
+              <a:pathLst>
+                <a:path w="6964104" h="1201418">
+                  <a:moveTo>
+                    <a:pt x="54527" y="0"/>
+                  </a:moveTo>
+                  <a:lnTo>
+                    <a:pt x="70344" y="9043"/>
+                  </a:lnTo>
+                  <a:lnTo>
+                    <a:pt x="140688" y="48005"/>
+                  </a:lnTo>
+                  <a:lnTo>
+                    <a:pt x="211033" y="85751"/>
+                  </a:lnTo>
+                  <a:lnTo>
+                    <a:pt x="281377" y="122319"/>
+                  </a:lnTo>
+                  <a:lnTo>
+                    <a:pt x="351722" y="157746"/>
+                  </a:lnTo>
+                  <a:lnTo>
+                    <a:pt x="422066" y="192067"/>
+                  </a:lnTo>
+                  <a:lnTo>
+                    <a:pt x="492411" y="225316"/>
+                  </a:lnTo>
+                  <a:lnTo>
+                    <a:pt x="562755" y="257527"/>
+                  </a:lnTo>
+                  <a:lnTo>
+                    <a:pt x="633100" y="288733"/>
+                  </a:lnTo>
+                  <a:lnTo>
+                    <a:pt x="703444" y="318965"/>
+                  </a:lnTo>
+                  <a:lnTo>
+                    <a:pt x="773789" y="348253"/>
+                  </a:lnTo>
+                  <a:lnTo>
+                    <a:pt x="844133" y="376627"/>
+                  </a:lnTo>
+                  <a:lnTo>
+                    <a:pt x="914478" y="404115"/>
+                  </a:lnTo>
+                  <a:lnTo>
+                    <a:pt x="984822" y="430745"/>
+                  </a:lnTo>
+                  <a:lnTo>
+                    <a:pt x="1055167" y="456543"/>
+                  </a:lnTo>
+                  <a:lnTo>
+                    <a:pt x="1125511" y="481537"/>
+                  </a:lnTo>
+                  <a:lnTo>
+                    <a:pt x="1195856" y="505750"/>
+                  </a:lnTo>
+                  <a:lnTo>
+                    <a:pt x="1266200" y="529207"/>
+                  </a:lnTo>
+                  <a:lnTo>
+                    <a:pt x="1336545" y="551932"/>
+                  </a:lnTo>
+                  <a:lnTo>
+                    <a:pt x="1406889" y="573948"/>
+                  </a:lnTo>
+                  <a:lnTo>
+                    <a:pt x="1477234" y="595276"/>
+                  </a:lnTo>
+                  <a:lnTo>
+                    <a:pt x="1547578" y="615939"/>
+                  </a:lnTo>
+                  <a:lnTo>
+                    <a:pt x="1617923" y="635957"/>
+                  </a:lnTo>
+                  <a:lnTo>
+                    <a:pt x="1688267" y="655349"/>
+                  </a:lnTo>
+                  <a:lnTo>
+                    <a:pt x="1758612" y="674137"/>
+                  </a:lnTo>
+                  <a:lnTo>
+                    <a:pt x="1828956" y="692338"/>
+                  </a:lnTo>
+                  <a:lnTo>
+                    <a:pt x="1899301" y="709971"/>
+                  </a:lnTo>
+                  <a:lnTo>
+                    <a:pt x="1969645" y="727053"/>
+                  </a:lnTo>
+                  <a:lnTo>
+                    <a:pt x="2039990" y="743602"/>
+                  </a:lnTo>
+                  <a:lnTo>
+                    <a:pt x="2110334" y="759635"/>
+                  </a:lnTo>
+                  <a:lnTo>
+                    <a:pt x="2180679" y="775167"/>
+                  </a:lnTo>
+                  <a:lnTo>
+                    <a:pt x="2251023" y="790214"/>
+                  </a:lnTo>
+                  <a:lnTo>
+                    <a:pt x="2321368" y="804791"/>
+                  </a:lnTo>
+                  <a:lnTo>
+                    <a:pt x="2391712" y="818914"/>
+                  </a:lnTo>
+                  <a:lnTo>
+                    <a:pt x="2462057" y="832595"/>
+                  </a:lnTo>
+                  <a:lnTo>
+                    <a:pt x="2532401" y="845850"/>
+                  </a:lnTo>
+                  <a:lnTo>
+                    <a:pt x="2602746" y="858691"/>
+                  </a:lnTo>
+                  <a:lnTo>
+                    <a:pt x="2673090" y="871131"/>
+                  </a:lnTo>
+                  <a:lnTo>
+                    <a:pt x="2743435" y="883182"/>
+                  </a:lnTo>
+                  <a:lnTo>
+                    <a:pt x="2813779" y="894858"/>
+                  </a:lnTo>
+                  <a:lnTo>
+                    <a:pt x="2884124" y="906169"/>
+                  </a:lnTo>
+                  <a:lnTo>
+                    <a:pt x="2954468" y="917126"/>
+                  </a:lnTo>
+                  <a:lnTo>
+                    <a:pt x="3024813" y="927742"/>
+                  </a:lnTo>
+                  <a:lnTo>
+                    <a:pt x="3095157" y="938027"/>
+                  </a:lnTo>
+                  <a:lnTo>
+                    <a:pt x="3165502" y="947990"/>
+                  </a:lnTo>
+                  <a:lnTo>
+                    <a:pt x="3235846" y="957642"/>
+                  </a:lnTo>
+                  <a:lnTo>
+                    <a:pt x="3306191" y="954967"/>
+                  </a:lnTo>
+                  <a:lnTo>
+                    <a:pt x="3376535" y="951966"/>
+                  </a:lnTo>
+                  <a:lnTo>
+                    <a:pt x="3446880" y="948936"/>
+                  </a:lnTo>
+                  <a:lnTo>
+                    <a:pt x="3517224" y="945875"/>
+                  </a:lnTo>
+                  <a:lnTo>
+                    <a:pt x="3587569" y="942784"/>
+                  </a:lnTo>
+                  <a:lnTo>
+                    <a:pt x="3657913" y="939662"/>
+                  </a:lnTo>
+                  <a:lnTo>
+                    <a:pt x="3728257" y="936510"/>
+                  </a:lnTo>
+                  <a:lnTo>
+                    <a:pt x="3798602" y="933326"/>
+                  </a:lnTo>
+                  <a:lnTo>
+                    <a:pt x="3868946" y="930110"/>
+                  </a:lnTo>
+                  <a:lnTo>
+                    <a:pt x="3939291" y="926863"/>
+                  </a:lnTo>
+                  <a:lnTo>
+                    <a:pt x="4009635" y="923583"/>
+                  </a:lnTo>
+                  <a:lnTo>
+                    <a:pt x="4079980" y="920271"/>
+                  </a:lnTo>
+                  <a:lnTo>
+                    <a:pt x="4150324" y="916926"/>
+                  </a:lnTo>
+                  <a:lnTo>
+                    <a:pt x="4220669" y="913547"/>
+                  </a:lnTo>
+                  <a:lnTo>
+                    <a:pt x="4291013" y="910135"/>
+                  </a:lnTo>
+                  <a:lnTo>
+                    <a:pt x="4361358" y="906689"/>
+                  </a:lnTo>
+                  <a:lnTo>
+                    <a:pt x="4431702" y="903209"/>
+                  </a:lnTo>
+                  <a:lnTo>
+                    <a:pt x="4502047" y="899695"/>
+                  </a:lnTo>
+                  <a:lnTo>
+                    <a:pt x="4572391" y="896145"/>
+                  </a:lnTo>
+                  <a:lnTo>
+                    <a:pt x="4642736" y="892561"/>
+                  </a:lnTo>
+                  <a:lnTo>
+                    <a:pt x="4713080" y="888940"/>
+                  </a:lnTo>
+                  <a:lnTo>
+                    <a:pt x="4783425" y="885284"/>
+                  </a:lnTo>
+                  <a:lnTo>
+                    <a:pt x="4853769" y="881592"/>
+                  </a:lnTo>
+                  <a:lnTo>
+                    <a:pt x="4924114" y="877862"/>
+                  </a:lnTo>
+                  <a:lnTo>
+                    <a:pt x="4994458" y="874096"/>
+                  </a:lnTo>
+                  <a:lnTo>
+                    <a:pt x="5064803" y="870292"/>
+                  </a:lnTo>
+                  <a:lnTo>
+                    <a:pt x="5135147" y="866451"/>
+                  </a:lnTo>
+                  <a:lnTo>
+                    <a:pt x="5205492" y="862571"/>
+                  </a:lnTo>
+                  <a:lnTo>
+                    <a:pt x="5275836" y="858653"/>
+                  </a:lnTo>
+                  <a:lnTo>
+                    <a:pt x="5346181" y="854696"/>
+                  </a:lnTo>
+                  <a:lnTo>
+                    <a:pt x="5416525" y="850700"/>
+                  </a:lnTo>
+                  <a:lnTo>
+                    <a:pt x="5486870" y="846664"/>
+                  </a:lnTo>
+                  <a:lnTo>
+                    <a:pt x="5557214" y="842588"/>
+                  </a:lnTo>
+                  <a:lnTo>
+                    <a:pt x="5627559" y="838472"/>
+                  </a:lnTo>
+                  <a:lnTo>
+                    <a:pt x="5697903" y="834315"/>
+                  </a:lnTo>
+                  <a:lnTo>
+                    <a:pt x="5768248" y="830116"/>
+                  </a:lnTo>
+                  <a:lnTo>
+                    <a:pt x="5838592" y="825876"/>
+                  </a:lnTo>
+                  <a:lnTo>
+                    <a:pt x="5908937" y="821593"/>
+                  </a:lnTo>
+                  <a:lnTo>
+                    <a:pt x="5979281" y="817268"/>
+                  </a:lnTo>
+                  <a:lnTo>
+                    <a:pt x="6049626" y="812901"/>
+                  </a:lnTo>
+                  <a:lnTo>
+                    <a:pt x="6119970" y="808489"/>
+                  </a:lnTo>
+                  <a:lnTo>
+                    <a:pt x="6190315" y="804034"/>
+                  </a:lnTo>
+                  <a:lnTo>
+                    <a:pt x="6260659" y="799535"/>
+                  </a:lnTo>
+                  <a:lnTo>
+                    <a:pt x="6331004" y="794991"/>
+                  </a:lnTo>
+                  <a:lnTo>
+                    <a:pt x="6401348" y="790402"/>
+                  </a:lnTo>
+                  <a:lnTo>
+                    <a:pt x="6471693" y="785768"/>
+                  </a:lnTo>
+                  <a:lnTo>
+                    <a:pt x="6542037" y="781087"/>
+                  </a:lnTo>
+                  <a:lnTo>
+                    <a:pt x="6612382" y="776360"/>
+                  </a:lnTo>
+                  <a:lnTo>
+                    <a:pt x="6682726" y="771586"/>
+                  </a:lnTo>
+                  <a:lnTo>
+                    <a:pt x="6753071" y="766765"/>
+                  </a:lnTo>
+                  <a:lnTo>
+                    <a:pt x="6823415" y="761895"/>
+                  </a:lnTo>
+                  <a:lnTo>
+                    <a:pt x="6893760" y="756978"/>
+                  </a:lnTo>
+                  <a:lnTo>
+                    <a:pt x="6964104" y="752011"/>
+                  </a:lnTo>
+                  <a:lnTo>
+                    <a:pt x="6964104" y="1201418"/>
+                  </a:lnTo>
+                  <a:lnTo>
+                    <a:pt x="6893760" y="1199620"/>
+                  </a:lnTo>
+                  <a:lnTo>
+                    <a:pt x="6823415" y="1197765"/>
+                  </a:lnTo>
+                  <a:lnTo>
+                    <a:pt x="6753071" y="1195850"/>
+                  </a:lnTo>
+                  <a:lnTo>
+                    <a:pt x="6682726" y="1193873"/>
+                  </a:lnTo>
+                  <a:lnTo>
+                    <a:pt x="6612382" y="1191832"/>
+                  </a:lnTo>
+                  <a:lnTo>
+                    <a:pt x="6542037" y="1189726"/>
+                  </a:lnTo>
+                  <a:lnTo>
+                    <a:pt x="6471693" y="1187551"/>
+                  </a:lnTo>
+                  <a:lnTo>
+                    <a:pt x="6401348" y="1185307"/>
+                  </a:lnTo>
+                  <a:lnTo>
+                    <a:pt x="6331004" y="1182991"/>
+                  </a:lnTo>
+                  <a:lnTo>
+                    <a:pt x="6260659" y="1180599"/>
+                  </a:lnTo>
+                  <a:lnTo>
+                    <a:pt x="6190315" y="1178131"/>
+                  </a:lnTo>
+                  <a:lnTo>
+                    <a:pt x="6119970" y="1175583"/>
+                  </a:lnTo>
+                  <a:lnTo>
+                    <a:pt x="6049626" y="1172953"/>
+                  </a:lnTo>
+                  <a:lnTo>
+                    <a:pt x="5979281" y="1170239"/>
+                  </a:lnTo>
+                  <a:lnTo>
+                    <a:pt x="5908937" y="1167437"/>
+                  </a:lnTo>
+                  <a:lnTo>
+                    <a:pt x="5838592" y="1164544"/>
+                  </a:lnTo>
+                  <a:lnTo>
+                    <a:pt x="5768248" y="1161559"/>
+                  </a:lnTo>
+                  <a:lnTo>
+                    <a:pt x="5697903" y="1158477"/>
+                  </a:lnTo>
+                  <a:lnTo>
+                    <a:pt x="5627559" y="1155296"/>
+                  </a:lnTo>
+                  <a:lnTo>
+                    <a:pt x="5557214" y="1152012"/>
+                  </a:lnTo>
+                  <a:lnTo>
+                    <a:pt x="5486870" y="1148623"/>
+                  </a:lnTo>
+                  <a:lnTo>
+                    <a:pt x="5416525" y="1145124"/>
+                  </a:lnTo>
+                  <a:lnTo>
+                    <a:pt x="5346181" y="1141513"/>
+                  </a:lnTo>
+                  <a:lnTo>
+                    <a:pt x="5275836" y="1137785"/>
+                  </a:lnTo>
+                  <a:lnTo>
+                    <a:pt x="5205492" y="1133937"/>
+                  </a:lnTo>
+                  <a:lnTo>
+                    <a:pt x="5135147" y="1129966"/>
+                  </a:lnTo>
+                  <a:lnTo>
+                    <a:pt x="5064803" y="1125866"/>
+                  </a:lnTo>
+                  <a:lnTo>
+                    <a:pt x="4994458" y="1121634"/>
+                  </a:lnTo>
+                  <a:lnTo>
+                    <a:pt x="4924114" y="1117266"/>
+                  </a:lnTo>
+                  <a:lnTo>
+                    <a:pt x="4853769" y="1112757"/>
+                  </a:lnTo>
+                  <a:lnTo>
+                    <a:pt x="4783425" y="1108102"/>
+                  </a:lnTo>
+                  <a:lnTo>
+                    <a:pt x="4713080" y="1103298"/>
+                  </a:lnTo>
+                  <a:lnTo>
+                    <a:pt x="4642736" y="1098339"/>
+                  </a:lnTo>
+                  <a:lnTo>
+                    <a:pt x="4572391" y="1093220"/>
+                  </a:lnTo>
+                  <a:lnTo>
+                    <a:pt x="4502047" y="1087936"/>
+                  </a:lnTo>
+                  <a:lnTo>
+                    <a:pt x="4431702" y="1082482"/>
+                  </a:lnTo>
+                  <a:lnTo>
+                    <a:pt x="4361358" y="1076853"/>
+                  </a:lnTo>
+                  <a:lnTo>
+                    <a:pt x="4291013" y="1071041"/>
+                  </a:lnTo>
+                  <a:lnTo>
+                    <a:pt x="4220669" y="1065043"/>
+                  </a:lnTo>
+                  <a:lnTo>
+                    <a:pt x="4150324" y="1058851"/>
+                  </a:lnTo>
+                  <a:lnTo>
+                    <a:pt x="4079980" y="1052460"/>
+                  </a:lnTo>
+                  <a:lnTo>
+                    <a:pt x="4009635" y="1045863"/>
+                  </a:lnTo>
+                  <a:lnTo>
+                    <a:pt x="3939291" y="1039053"/>
+                  </a:lnTo>
+                  <a:lnTo>
+                    <a:pt x="3868946" y="1032024"/>
+                  </a:lnTo>
+                  <a:lnTo>
+                    <a:pt x="3798602" y="1024768"/>
+                  </a:lnTo>
+                  <a:lnTo>
+                    <a:pt x="3728257" y="1017279"/>
+                  </a:lnTo>
+                  <a:lnTo>
+                    <a:pt x="3657913" y="1009548"/>
+                  </a:lnTo>
+                  <a:lnTo>
+                    <a:pt x="3587569" y="1001568"/>
+                  </a:lnTo>
+                  <a:lnTo>
+                    <a:pt x="3517224" y="993331"/>
+                  </a:lnTo>
+                  <a:lnTo>
+                    <a:pt x="3446880" y="984829"/>
+                  </a:lnTo>
+                  <a:lnTo>
+                    <a:pt x="3376535" y="976053"/>
+                  </a:lnTo>
+                  <a:lnTo>
+                    <a:pt x="3306191" y="966993"/>
+                  </a:lnTo>
+                  <a:lnTo>
+                    <a:pt x="3235846" y="957938"/>
+                  </a:lnTo>
+                  <a:lnTo>
+                    <a:pt x="3165502" y="960880"/>
+                  </a:lnTo>
+                  <a:lnTo>
+                    <a:pt x="3095157" y="963793"/>
+                  </a:lnTo>
+                  <a:lnTo>
+                    <a:pt x="3024813" y="966678"/>
+                  </a:lnTo>
+                  <a:lnTo>
+                    <a:pt x="2954468" y="969534"/>
+                  </a:lnTo>
+                  <a:lnTo>
+                    <a:pt x="2884124" y="972362"/>
+                  </a:lnTo>
+                  <a:lnTo>
+                    <a:pt x="2813779" y="975162"/>
+                  </a:lnTo>
+                  <a:lnTo>
+                    <a:pt x="2743435" y="977935"/>
+                  </a:lnTo>
+                  <a:lnTo>
+                    <a:pt x="2673090" y="980680"/>
+                  </a:lnTo>
+                  <a:lnTo>
+                    <a:pt x="2602746" y="983399"/>
+                  </a:lnTo>
+                  <a:lnTo>
+                    <a:pt x="2532401" y="986090"/>
+                  </a:lnTo>
+                  <a:lnTo>
+                    <a:pt x="2462057" y="988755"/>
+                  </a:lnTo>
+                  <a:lnTo>
+                    <a:pt x="2391712" y="991394"/>
+                  </a:lnTo>
+                  <a:lnTo>
+                    <a:pt x="2321368" y="994008"/>
+                  </a:lnTo>
+                  <a:lnTo>
+                    <a:pt x="2251023" y="996595"/>
+                  </a:lnTo>
+                  <a:lnTo>
+                    <a:pt x="2180679" y="999157"/>
+                  </a:lnTo>
+                  <a:lnTo>
+                    <a:pt x="2110334" y="1001694"/>
+                  </a:lnTo>
+                  <a:lnTo>
+                    <a:pt x="2039990" y="1004206"/>
+                  </a:lnTo>
+                  <a:lnTo>
+                    <a:pt x="1969645" y="1006693"/>
+                  </a:lnTo>
+                  <a:lnTo>
+                    <a:pt x="1899301" y="1009155"/>
+                  </a:lnTo>
+                  <a:lnTo>
+                    <a:pt x="1828956" y="1011594"/>
+                  </a:lnTo>
+                  <a:lnTo>
+                    <a:pt x="1758612" y="1014008"/>
+                  </a:lnTo>
+                  <a:lnTo>
+                    <a:pt x="1688267" y="1016399"/>
+                  </a:lnTo>
+                  <a:lnTo>
+                    <a:pt x="1617923" y="1018767"/>
+                  </a:lnTo>
+                  <a:lnTo>
+                    <a:pt x="1547578" y="1021111"/>
+                  </a:lnTo>
+                  <a:lnTo>
+                    <a:pt x="1477234" y="1023432"/>
+                  </a:lnTo>
+                  <a:lnTo>
+                    <a:pt x="1406889" y="1025730"/>
+                  </a:lnTo>
+                  <a:lnTo>
+                    <a:pt x="1336545" y="1028005"/>
+                  </a:lnTo>
+                  <a:lnTo>
+                    <a:pt x="1266200" y="1030258"/>
+                  </a:lnTo>
+                  <a:lnTo>
+                    <a:pt x="1195856" y="1032489"/>
+                  </a:lnTo>
+                  <a:lnTo>
+                    <a:pt x="1125511" y="1034699"/>
+                  </a:lnTo>
+                  <a:lnTo>
+                    <a:pt x="1055167" y="1036886"/>
+                  </a:lnTo>
+                  <a:lnTo>
+                    <a:pt x="984822" y="1039052"/>
+                  </a:lnTo>
+                  <a:lnTo>
+                    <a:pt x="914478" y="1041196"/>
+                  </a:lnTo>
+                  <a:lnTo>
+                    <a:pt x="844133" y="1043320"/>
+                  </a:lnTo>
+                  <a:lnTo>
+                    <a:pt x="773789" y="1045423"/>
+                  </a:lnTo>
+                  <a:lnTo>
+                    <a:pt x="703444" y="1047505"/>
+                  </a:lnTo>
+                  <a:lnTo>
+                    <a:pt x="633100" y="1049566"/>
+                  </a:lnTo>
+                  <a:lnTo>
+                    <a:pt x="562755" y="1051607"/>
+                  </a:lnTo>
+                  <a:lnTo>
+                    <a:pt x="492411" y="1053628"/>
+                  </a:lnTo>
+                  <a:lnTo>
+                    <a:pt x="422066" y="1055630"/>
+                  </a:lnTo>
+                  <a:lnTo>
+                    <a:pt x="351722" y="1057611"/>
+                  </a:lnTo>
+                  <a:lnTo>
+                    <a:pt x="281377" y="1059573"/>
+                  </a:lnTo>
+                  <a:lnTo>
+                    <a:pt x="211033" y="1061516"/>
+                  </a:lnTo>
+                  <a:lnTo>
+                    <a:pt x="140688" y="1063440"/>
+                  </a:lnTo>
+                  <a:lnTo>
+                    <a:pt x="70344" y="1065345"/>
+                  </a:lnTo>
+                  <a:lnTo>
+                    <a:pt x="0" y="1067231"/>
+                  </a:lnTo>
+                  <a:close/>
+                </a:path>
+              </a:pathLst>
+            </a:custGeom>
+            <a:solidFill>
+              <a:srgbClr val="FF8C00">
+                <a:alpha val="20000"/>
+              </a:srgbClr>
+            </a:solidFill>
+          </p:spPr>
+          <p:txBody>
+            <a:bodyPr/>
+            <a:lstStyle/>
+            <a:p/>
+          </p:txBody>
+        </p:sp>
+        <p:sp>
+          <p:nvSpPr>
+            <p:cNvPr id="68" name="pl68"/>
+            <p:cNvSpPr/>
+            <p:nvPr/>
+          </p:nvSpPr>
+          <p:spPr>
+            <a:xfrm>
+              <a:off x="1289839" y="4336484"/>
+              <a:ext cx="6909577" cy="957642"/>
+            </a:xfrm>
+            <a:custGeom>
+              <a:avLst/>
+              <a:pathLst>
+                <a:path w="6909577" h="957642">
+                  <a:moveTo>
+                    <a:pt x="0" y="0"/>
+                  </a:moveTo>
+                  <a:lnTo>
+                    <a:pt x="15817" y="9043"/>
+                  </a:lnTo>
+                  <a:lnTo>
+                    <a:pt x="86161" y="48005"/>
+                  </a:lnTo>
+                  <a:lnTo>
+                    <a:pt x="156506" y="85751"/>
+                  </a:lnTo>
+                  <a:lnTo>
+                    <a:pt x="226850" y="122319"/>
+                  </a:lnTo>
+                  <a:lnTo>
+                    <a:pt x="297195" y="157746"/>
+                  </a:lnTo>
+                  <a:lnTo>
+                    <a:pt x="367539" y="192067"/>
+                  </a:lnTo>
+                  <a:lnTo>
+                    <a:pt x="437884" y="225316"/>
+                  </a:lnTo>
+                  <a:lnTo>
+                    <a:pt x="508228" y="257527"/>
+                  </a:lnTo>
+                  <a:lnTo>
+                    <a:pt x="578573" y="288733"/>
+                  </a:lnTo>
+                  <a:lnTo>
+                    <a:pt x="648917" y="318965"/>
+                  </a:lnTo>
+                  <a:lnTo>
+                    <a:pt x="719262" y="348253"/>
+                  </a:lnTo>
+                  <a:lnTo>
+                    <a:pt x="789606" y="376627"/>
+                  </a:lnTo>
+                  <a:lnTo>
+                    <a:pt x="859951" y="404115"/>
+                  </a:lnTo>
+                  <a:lnTo>
+                    <a:pt x="930295" y="430745"/>
+                  </a:lnTo>
+                  <a:lnTo>
+                    <a:pt x="1000640" y="456543"/>
+                  </a:lnTo>
+                  <a:lnTo>
+                    <a:pt x="1070984" y="481537"/>
+                  </a:lnTo>
+                  <a:lnTo>
+                    <a:pt x="1141329" y="505750"/>
+                  </a:lnTo>
+                  <a:lnTo>
+                    <a:pt x="1211673" y="529207"/>
+                  </a:lnTo>
+                  <a:lnTo>
+                    <a:pt x="1282018" y="551932"/>
+                  </a:lnTo>
+                  <a:lnTo>
+                    <a:pt x="1352362" y="573948"/>
+                  </a:lnTo>
+                  <a:lnTo>
+                    <a:pt x="1422707" y="595276"/>
+                  </a:lnTo>
+                  <a:lnTo>
+                    <a:pt x="1493051" y="615939"/>
+                  </a:lnTo>
+                  <a:lnTo>
+                    <a:pt x="1563395" y="635957"/>
+                  </a:lnTo>
+                  <a:lnTo>
+                    <a:pt x="1633740" y="655349"/>
+                  </a:lnTo>
+                  <a:lnTo>
+                    <a:pt x="1704084" y="674137"/>
+                  </a:lnTo>
+                  <a:lnTo>
+                    <a:pt x="1774429" y="692338"/>
+                  </a:lnTo>
+                  <a:lnTo>
+                    <a:pt x="1844773" y="709971"/>
+                  </a:lnTo>
+                  <a:lnTo>
+                    <a:pt x="1915118" y="727053"/>
+                  </a:lnTo>
+                  <a:lnTo>
+                    <a:pt x="1985462" y="743602"/>
+                  </a:lnTo>
+                  <a:lnTo>
+                    <a:pt x="2055807" y="759635"/>
+                  </a:lnTo>
+                  <a:lnTo>
+                    <a:pt x="2126151" y="775167"/>
+                  </a:lnTo>
+                  <a:lnTo>
+                    <a:pt x="2196496" y="790214"/>
+                  </a:lnTo>
+                  <a:lnTo>
+                    <a:pt x="2266840" y="804791"/>
+                  </a:lnTo>
+                  <a:lnTo>
+                    <a:pt x="2337185" y="818914"/>
+                  </a:lnTo>
+                  <a:lnTo>
+                    <a:pt x="2407529" y="832595"/>
+                  </a:lnTo>
+                  <a:lnTo>
+                    <a:pt x="2477874" y="845850"/>
+                  </a:lnTo>
+                  <a:lnTo>
+                    <a:pt x="2548218" y="858691"/>
+                  </a:lnTo>
+                  <a:lnTo>
+                    <a:pt x="2618563" y="871131"/>
+                  </a:lnTo>
+                  <a:lnTo>
+                    <a:pt x="2688907" y="883182"/>
+                  </a:lnTo>
+                  <a:lnTo>
+                    <a:pt x="2759252" y="894858"/>
+                  </a:lnTo>
+                  <a:lnTo>
+                    <a:pt x="2829596" y="906169"/>
+                  </a:lnTo>
+                  <a:lnTo>
+                    <a:pt x="2899941" y="917126"/>
+                  </a:lnTo>
+                  <a:lnTo>
+                    <a:pt x="2970285" y="927742"/>
+                  </a:lnTo>
+                  <a:lnTo>
+                    <a:pt x="3040630" y="938027"/>
+                  </a:lnTo>
+                  <a:lnTo>
+                    <a:pt x="3110974" y="947990"/>
+                  </a:lnTo>
+                  <a:lnTo>
+                    <a:pt x="3181319" y="957642"/>
+                  </a:lnTo>
+                  <a:lnTo>
+                    <a:pt x="3251663" y="954967"/>
+                  </a:lnTo>
+                  <a:lnTo>
+                    <a:pt x="3322008" y="951966"/>
+                  </a:lnTo>
+                  <a:lnTo>
+                    <a:pt x="3392352" y="948936"/>
+                  </a:lnTo>
+                  <a:lnTo>
+                    <a:pt x="3462697" y="945875"/>
+                  </a:lnTo>
+                  <a:lnTo>
+                    <a:pt x="3533041" y="942784"/>
+                  </a:lnTo>
+                  <a:lnTo>
+                    <a:pt x="3603386" y="939662"/>
+                  </a:lnTo>
+                  <a:lnTo>
+                    <a:pt x="3673730" y="936510"/>
+                  </a:lnTo>
+                  <a:lnTo>
+                    <a:pt x="3744075" y="933326"/>
+                  </a:lnTo>
+                  <a:lnTo>
+                    <a:pt x="3814419" y="930110"/>
+                  </a:lnTo>
+                  <a:lnTo>
+                    <a:pt x="3884764" y="926863"/>
+                  </a:lnTo>
+                  <a:lnTo>
+                    <a:pt x="3955108" y="923583"/>
+                  </a:lnTo>
+                  <a:lnTo>
+                    <a:pt x="4025453" y="920271"/>
+                  </a:lnTo>
+                  <a:lnTo>
+                    <a:pt x="4095797" y="916926"/>
+                  </a:lnTo>
+                  <a:lnTo>
+                    <a:pt x="4166142" y="913547"/>
+                  </a:lnTo>
+                  <a:lnTo>
+                    <a:pt x="4236486" y="910135"/>
+                  </a:lnTo>
+                  <a:lnTo>
+                    <a:pt x="4306831" y="906689"/>
+                  </a:lnTo>
+                  <a:lnTo>
+                    <a:pt x="4377175" y="903209"/>
+                  </a:lnTo>
+                  <a:lnTo>
+                    <a:pt x="4447520" y="899695"/>
+                  </a:lnTo>
+                  <a:lnTo>
+                    <a:pt x="4517864" y="896145"/>
+                  </a:lnTo>
+                  <a:lnTo>
+                    <a:pt x="4588209" y="892561"/>
+                  </a:lnTo>
+                  <a:lnTo>
+                    <a:pt x="4658553" y="888940"/>
+                  </a:lnTo>
+                  <a:lnTo>
+                    <a:pt x="4728898" y="885284"/>
+                  </a:lnTo>
+                  <a:lnTo>
+                    <a:pt x="4799242" y="881592"/>
+                  </a:lnTo>
+                  <a:lnTo>
+                    <a:pt x="4869587" y="877862"/>
+                  </a:lnTo>
+                  <a:lnTo>
+                    <a:pt x="4939931" y="874096"/>
+                  </a:lnTo>
+                  <a:lnTo>
+                    <a:pt x="5010276" y="870292"/>
+                  </a:lnTo>
+                  <a:lnTo>
+                    <a:pt x="5080620" y="866451"/>
+                  </a:lnTo>
+                  <a:lnTo>
+                    <a:pt x="5150965" y="862571"/>
+                  </a:lnTo>
+                  <a:lnTo>
+                    <a:pt x="5221309" y="858653"/>
+                  </a:lnTo>
+                  <a:lnTo>
+                    <a:pt x="5291653" y="854696"/>
+                  </a:lnTo>
+                  <a:lnTo>
+                    <a:pt x="5361998" y="850700"/>
+                  </a:lnTo>
+                  <a:lnTo>
+                    <a:pt x="5432342" y="846664"/>
+                  </a:lnTo>
+                  <a:lnTo>
+                    <a:pt x="5502687" y="842588"/>
+                  </a:lnTo>
+                  <a:lnTo>
+                    <a:pt x="5573031" y="838472"/>
+                  </a:lnTo>
+                  <a:lnTo>
+                    <a:pt x="5643376" y="834315"/>
+                  </a:lnTo>
+                  <a:lnTo>
+                    <a:pt x="5713720" y="830116"/>
+                  </a:lnTo>
+                  <a:lnTo>
+                    <a:pt x="5784065" y="825876"/>
+                  </a:lnTo>
+                  <a:lnTo>
+                    <a:pt x="5854409" y="821593"/>
+                  </a:lnTo>
+                  <a:lnTo>
+                    <a:pt x="5924754" y="817268"/>
+                  </a:lnTo>
+                  <a:lnTo>
+                    <a:pt x="5995098" y="812901"/>
+                  </a:lnTo>
+                  <a:lnTo>
+                    <a:pt x="6065443" y="808489"/>
+                  </a:lnTo>
+                  <a:lnTo>
+                    <a:pt x="6135787" y="804034"/>
+                  </a:lnTo>
+                  <a:lnTo>
+                    <a:pt x="6206132" y="799535"/>
+                  </a:lnTo>
+                  <a:lnTo>
+                    <a:pt x="6276476" y="794991"/>
+                  </a:lnTo>
+                  <a:lnTo>
+                    <a:pt x="6346821" y="790402"/>
+                  </a:lnTo>
+                  <a:lnTo>
+                    <a:pt x="6417165" y="785768"/>
+                  </a:lnTo>
+                  <a:lnTo>
+                    <a:pt x="6487510" y="781087"/>
+                  </a:lnTo>
+                  <a:lnTo>
+                    <a:pt x="6557854" y="776360"/>
+                  </a:lnTo>
+                  <a:lnTo>
+                    <a:pt x="6628199" y="771586"/>
+                  </a:lnTo>
+                  <a:lnTo>
+                    <a:pt x="6698543" y="766765"/>
+                  </a:lnTo>
+                  <a:lnTo>
+                    <a:pt x="6768888" y="761895"/>
+                  </a:lnTo>
+                  <a:lnTo>
+                    <a:pt x="6839232" y="756978"/>
+                  </a:lnTo>
+                  <a:lnTo>
+                    <a:pt x="6909577" y="752011"/>
+                  </a:lnTo>
+                </a:path>
+              </a:pathLst>
+            </a:custGeom>
+          </p:spPr>
+          <p:txBody>
+            <a:bodyPr/>
+            <a:lstStyle/>
+            <a:p/>
+          </p:txBody>
+        </p:sp>
+        <p:sp>
+          <p:nvSpPr>
+            <p:cNvPr id="69" name="pl69"/>
+            <p:cNvSpPr/>
+            <p:nvPr/>
+          </p:nvSpPr>
+          <p:spPr>
+            <a:xfrm>
+              <a:off x="1235312" y="5294423"/>
+              <a:ext cx="6964104" cy="243479"/>
+            </a:xfrm>
+            <a:custGeom>
+              <a:avLst/>
+              <a:pathLst>
+                <a:path w="6964104" h="243479">
+                  <a:moveTo>
+                    <a:pt x="6964104" y="243479"/>
+                  </a:moveTo>
+                  <a:lnTo>
+                    <a:pt x="6893760" y="241681"/>
+                  </a:lnTo>
+                  <a:lnTo>
+                    <a:pt x="6823415" y="239826"/>
+                  </a:lnTo>
+                  <a:lnTo>
+                    <a:pt x="6753071" y="237911"/>
+                  </a:lnTo>
+                  <a:lnTo>
+                    <a:pt x="6682726" y="235934"/>
+                  </a:lnTo>
+                  <a:lnTo>
+                    <a:pt x="6612382" y="233893"/>
+                  </a:lnTo>
+                  <a:lnTo>
+                    <a:pt x="6542037" y="231787"/>
+                  </a:lnTo>
+                  <a:lnTo>
+                    <a:pt x="6471693" y="229613"/>
+                  </a:lnTo>
+                  <a:lnTo>
+                    <a:pt x="6401348" y="227369"/>
+                  </a:lnTo>
+                  <a:lnTo>
+                    <a:pt x="6331004" y="225052"/>
+                  </a:lnTo>
+                  <a:lnTo>
+                    <a:pt x="6260659" y="222661"/>
+                  </a:lnTo>
+                  <a:lnTo>
+                    <a:pt x="6190315" y="220193"/>
+                  </a:lnTo>
+                  <a:lnTo>
+                    <a:pt x="6119970" y="217645"/>
+                  </a:lnTo>
+                  <a:lnTo>
+                    <a:pt x="6049626" y="215015"/>
+                  </a:lnTo>
+                  <a:lnTo>
+                    <a:pt x="5979281" y="212300"/>
+                  </a:lnTo>
+                  <a:lnTo>
+                    <a:pt x="5908937" y="209498"/>
+                  </a:lnTo>
+                  <a:lnTo>
+                    <a:pt x="5838592" y="206606"/>
+                  </a:lnTo>
+                  <a:lnTo>
+                    <a:pt x="5768248" y="203620"/>
+                  </a:lnTo>
+                  <a:lnTo>
+                    <a:pt x="5697903" y="200538"/>
+                  </a:lnTo>
+                  <a:lnTo>
+                    <a:pt x="5627559" y="197357"/>
+                  </a:lnTo>
+                  <a:lnTo>
+                    <a:pt x="5557214" y="194074"/>
+                  </a:lnTo>
+                  <a:lnTo>
+                    <a:pt x="5486870" y="190684"/>
+                  </a:lnTo>
+                  <a:lnTo>
+                    <a:pt x="5416525" y="187186"/>
+                  </a:lnTo>
+                  <a:lnTo>
+                    <a:pt x="5346181" y="183574"/>
+                  </a:lnTo>
+                  <a:lnTo>
+                    <a:pt x="5275836" y="179847"/>
+                  </a:lnTo>
+                  <a:lnTo>
+                    <a:pt x="5205492" y="175999"/>
+                  </a:lnTo>
+                  <a:lnTo>
+                    <a:pt x="5135147" y="172027"/>
+                  </a:lnTo>
+                  <a:lnTo>
+                    <a:pt x="5064803" y="167927"/>
+                  </a:lnTo>
+                  <a:lnTo>
+                    <a:pt x="4994458" y="163695"/>
+                  </a:lnTo>
+                  <a:lnTo>
+                    <a:pt x="4924114" y="159327"/>
+                  </a:lnTo>
+                  <a:lnTo>
+                    <a:pt x="4853769" y="154818"/>
+                  </a:lnTo>
+                  <a:lnTo>
+                    <a:pt x="4783425" y="150164"/>
+                  </a:lnTo>
+                  <a:lnTo>
+                    <a:pt x="4713080" y="145359"/>
+                  </a:lnTo>
+                  <a:lnTo>
+                    <a:pt x="4642736" y="140400"/>
+                  </a:lnTo>
+                  <a:lnTo>
+                    <a:pt x="4572391" y="135282"/>
+                  </a:lnTo>
+                  <a:lnTo>
+                    <a:pt x="4502047" y="129998"/>
+                  </a:lnTo>
+                  <a:lnTo>
+                    <a:pt x="4431702" y="124544"/>
+                  </a:lnTo>
+                  <a:lnTo>
+                    <a:pt x="4361358" y="118914"/>
+                  </a:lnTo>
+                  <a:lnTo>
+                    <a:pt x="4291013" y="113103"/>
+                  </a:lnTo>
+                  <a:lnTo>
+                    <a:pt x="4220669" y="107104"/>
+                  </a:lnTo>
+                  <a:lnTo>
+                    <a:pt x="4150324" y="100913"/>
+                  </a:lnTo>
+                  <a:lnTo>
+                    <a:pt x="4079980" y="94521"/>
+                  </a:lnTo>
+                  <a:lnTo>
+                    <a:pt x="4009635" y="87924"/>
+                  </a:lnTo>
+                  <a:lnTo>
+                    <a:pt x="3939291" y="81114"/>
+                  </a:lnTo>
+                  <a:lnTo>
+                    <a:pt x="3868946" y="74085"/>
+                  </a:lnTo>
+                  <a:lnTo>
+                    <a:pt x="3798602" y="66830"/>
+                  </a:lnTo>
+                  <a:lnTo>
+                    <a:pt x="3728257" y="59340"/>
+                  </a:lnTo>
+                  <a:lnTo>
+                    <a:pt x="3657913" y="51609"/>
+                  </a:lnTo>
+                  <a:lnTo>
+                    <a:pt x="3587569" y="43630"/>
+                  </a:lnTo>
+                  <a:lnTo>
+                    <a:pt x="3517224" y="35393"/>
+                  </a:lnTo>
+                  <a:lnTo>
+                    <a:pt x="3446880" y="26890"/>
+                  </a:lnTo>
+                  <a:lnTo>
+                    <a:pt x="3376535" y="18114"/>
+                  </a:lnTo>
+                  <a:lnTo>
+                    <a:pt x="3306191" y="9055"/>
+                  </a:lnTo>
+                  <a:lnTo>
+                    <a:pt x="3235846" y="0"/>
+                  </a:lnTo>
+                  <a:lnTo>
+                    <a:pt x="3165502" y="2942"/>
+                  </a:lnTo>
+                  <a:lnTo>
+                    <a:pt x="3095157" y="5855"/>
+                  </a:lnTo>
+                  <a:lnTo>
+                    <a:pt x="3024813" y="8739"/>
+                  </a:lnTo>
+                  <a:lnTo>
+                    <a:pt x="2954468" y="11595"/>
+                  </a:lnTo>
+                  <a:lnTo>
+                    <a:pt x="2884124" y="14423"/>
+                  </a:lnTo>
+                  <a:lnTo>
+                    <a:pt x="2813779" y="17223"/>
+                  </a:lnTo>
+                  <a:lnTo>
+                    <a:pt x="2743435" y="19996"/>
+                  </a:lnTo>
+                  <a:lnTo>
+                    <a:pt x="2673090" y="22741"/>
+                  </a:lnTo>
+                  <a:lnTo>
+                    <a:pt x="2602746" y="25460"/>
+                  </a:lnTo>
+                  <a:lnTo>
+                    <a:pt x="2532401" y="28152"/>
+                  </a:lnTo>
+                  <a:lnTo>
+                    <a:pt x="2462057" y="30817"/>
+                  </a:lnTo>
+                  <a:lnTo>
+                    <a:pt x="2391712" y="33456"/>
+                  </a:lnTo>
+                  <a:lnTo>
+                    <a:pt x="2321368" y="36069"/>
+                  </a:lnTo>
+                  <a:lnTo>
+                    <a:pt x="2251023" y="38656"/>
+                  </a:lnTo>
+                  <a:lnTo>
+                    <a:pt x="2180679" y="41218"/>
+                  </a:lnTo>
+                  <a:lnTo>
+                    <a:pt x="2110334" y="43755"/>
+                  </a:lnTo>
+                  <a:lnTo>
+                    <a:pt x="2039990" y="46267"/>
+                  </a:lnTo>
+                  <a:lnTo>
+                    <a:pt x="1969645" y="48754"/>
+                  </a:lnTo>
+                  <a:lnTo>
+                    <a:pt x="1899301" y="51217"/>
+                  </a:lnTo>
+                  <a:lnTo>
+                    <a:pt x="1828956" y="53655"/>
+                  </a:lnTo>
+                  <a:lnTo>
+                    <a:pt x="1758612" y="56070"/>
+                  </a:lnTo>
+                  <a:lnTo>
+                    <a:pt x="1688267" y="58461"/>
+                  </a:lnTo>
+                  <a:lnTo>
+                    <a:pt x="1617923" y="60828"/>
+                  </a:lnTo>
+                  <a:lnTo>
+                    <a:pt x="1547578" y="63172"/>
+                  </a:lnTo>
+                  <a:lnTo>
+                    <a:pt x="1477234" y="65493"/>
+                  </a:lnTo>
+                  <a:lnTo>
+                    <a:pt x="1406889" y="67791"/>
+                  </a:lnTo>
+                  <a:lnTo>
+                    <a:pt x="1336545" y="70067"/>
+                  </a:lnTo>
+                  <a:lnTo>
+                    <a:pt x="1266200" y="72320"/>
+                  </a:lnTo>
+                  <a:lnTo>
+                    <a:pt x="1195856" y="74551"/>
+                  </a:lnTo>
+                  <a:lnTo>
+                    <a:pt x="1125511" y="76760"/>
+                  </a:lnTo>
+                  <a:lnTo>
+                    <a:pt x="1055167" y="78947"/>
+                  </a:lnTo>
+                  <a:lnTo>
+                    <a:pt x="984822" y="81113"/>
+                  </a:lnTo>
+                  <a:lnTo>
+                    <a:pt x="914478" y="83258"/>
+                  </a:lnTo>
+                  <a:lnTo>
+                    <a:pt x="844133" y="85381"/>
+                  </a:lnTo>
+                  <a:lnTo>
+                    <a:pt x="773789" y="87484"/>
+                  </a:lnTo>
+                  <a:lnTo>
+                    <a:pt x="703444" y="89566"/>
+                  </a:lnTo>
+                  <a:lnTo>
+                    <a:pt x="633100" y="91627"/>
+                  </a:lnTo>
+                  <a:lnTo>
+                    <a:pt x="562755" y="93669"/>
+                  </a:lnTo>
+                  <a:lnTo>
+                    <a:pt x="492411" y="95690"/>
+                  </a:lnTo>
+                  <a:lnTo>
+                    <a:pt x="422066" y="97691"/>
+                  </a:lnTo>
+                  <a:lnTo>
+                    <a:pt x="351722" y="99673"/>
+                  </a:lnTo>
+                  <a:lnTo>
+                    <a:pt x="281377" y="101635"/>
+                  </a:lnTo>
+                  <a:lnTo>
+                    <a:pt x="211033" y="103578"/>
+                  </a:lnTo>
+                  <a:lnTo>
+                    <a:pt x="140688" y="105501"/>
+                  </a:lnTo>
+                  <a:lnTo>
+                    <a:pt x="70344" y="107406"/>
+                  </a:lnTo>
+                  <a:lnTo>
+                    <a:pt x="0" y="109292"/>
+                  </a:lnTo>
+                </a:path>
+              </a:pathLst>
+            </a:custGeom>
+          </p:spPr>
+          <p:txBody>
+            <a:bodyPr/>
+            <a:lstStyle/>
+            <a:p/>
+          </p:txBody>
+        </p:sp>
+        <p:sp>
+          <p:nvSpPr>
+            <p:cNvPr id="70" name="pl70"/>
+            <p:cNvSpPr/>
+            <p:nvPr/>
+          </p:nvSpPr>
+          <p:spPr>
+            <a:xfrm>
+              <a:off x="1235312" y="5098960"/>
+              <a:ext cx="6964104" cy="326852"/>
+            </a:xfrm>
+            <a:custGeom>
+              <a:avLst/>
+              <a:pathLst>
+                <a:path w="6964104" h="326852">
+                  <a:moveTo>
+                    <a:pt x="0" y="0"/>
+                  </a:moveTo>
+                  <a:lnTo>
+                    <a:pt x="70344" y="5371"/>
+                  </a:lnTo>
+                  <a:lnTo>
+                    <a:pt x="140688" y="10684"/>
+                  </a:lnTo>
+                  <a:lnTo>
+                    <a:pt x="211033" y="15940"/>
+                  </a:lnTo>
+                  <a:lnTo>
+                    <a:pt x="281377" y="21138"/>
+                  </a:lnTo>
+                  <a:lnTo>
+                    <a:pt x="351722" y="26281"/>
+                  </a:lnTo>
+                  <a:lnTo>
+                    <a:pt x="422066" y="31367"/>
+                  </a:lnTo>
+                  <a:lnTo>
+                    <a:pt x="492411" y="36398"/>
+                  </a:lnTo>
+                  <a:lnTo>
+                    <a:pt x="562755" y="41374"/>
+                  </a:lnTo>
+                  <a:lnTo>
+                    <a:pt x="633100" y="46297"/>
+                  </a:lnTo>
+                  <a:lnTo>
+                    <a:pt x="703444" y="51165"/>
+                  </a:lnTo>
+                  <a:lnTo>
+                    <a:pt x="773789" y="55981"/>
+                  </a:lnTo>
+                  <a:lnTo>
+                    <a:pt x="844133" y="60745"/>
+                  </a:lnTo>
+                  <a:lnTo>
+                    <a:pt x="914478" y="65457"/>
+                  </a:lnTo>
+                  <a:lnTo>
+                    <a:pt x="984822" y="70118"/>
+                  </a:lnTo>
+                  <a:lnTo>
+                    <a:pt x="1055167" y="74728"/>
+                  </a:lnTo>
+                  <a:lnTo>
+                    <a:pt x="1125511" y="79289"/>
+                  </a:lnTo>
+                  <a:lnTo>
+                    <a:pt x="1195856" y="83799"/>
+                  </a:lnTo>
+                  <a:lnTo>
+                    <a:pt x="1266200" y="88261"/>
+                  </a:lnTo>
+                  <a:lnTo>
+                    <a:pt x="1336545" y="92674"/>
+                  </a:lnTo>
+                  <a:lnTo>
+                    <a:pt x="1406889" y="97040"/>
+                  </a:lnTo>
+                  <a:lnTo>
+                    <a:pt x="1477234" y="101358"/>
+                  </a:lnTo>
+                  <a:lnTo>
+                    <a:pt x="1547578" y="105629"/>
+                  </a:lnTo>
+                  <a:lnTo>
+                    <a:pt x="1617923" y="109853"/>
+                  </a:lnTo>
+                  <a:lnTo>
+                    <a:pt x="1688267" y="114032"/>
+                  </a:lnTo>
+                  <a:lnTo>
+                    <a:pt x="1758612" y="118166"/>
+                  </a:lnTo>
+                  <a:lnTo>
+                    <a:pt x="1828956" y="122254"/>
+                  </a:lnTo>
+                  <a:lnTo>
+                    <a:pt x="1899301" y="126298"/>
+                  </a:lnTo>
+                  <a:lnTo>
+                    <a:pt x="1969645" y="130299"/>
+                  </a:lnTo>
+                  <a:lnTo>
+                    <a:pt x="2039990" y="134256"/>
+                  </a:lnTo>
+                  <a:lnTo>
+                    <a:pt x="2110334" y="138169"/>
+                  </a:lnTo>
+                  <a:lnTo>
+                    <a:pt x="2180679" y="142041"/>
+                  </a:lnTo>
+                  <a:lnTo>
+                    <a:pt x="2251023" y="145870"/>
+                  </a:lnTo>
+                  <a:lnTo>
+                    <a:pt x="2321368" y="149658"/>
+                  </a:lnTo>
+                  <a:lnTo>
+                    <a:pt x="2391712" y="153405"/>
+                  </a:lnTo>
+                  <a:lnTo>
+                    <a:pt x="2462057" y="157111"/>
+                  </a:lnTo>
+                  <a:lnTo>
+                    <a:pt x="2532401" y="160776"/>
+                  </a:lnTo>
+                  <a:lnTo>
+                    <a:pt x="2602746" y="164402"/>
+                  </a:lnTo>
+                  <a:lnTo>
+                    <a:pt x="2673090" y="167989"/>
+                  </a:lnTo>
+                  <a:lnTo>
+                    <a:pt x="2743435" y="171536"/>
+                  </a:lnTo>
+                  <a:lnTo>
+                    <a:pt x="2813779" y="175045"/>
+                  </a:lnTo>
+                  <a:lnTo>
+                    <a:pt x="2884124" y="178516"/>
+                  </a:lnTo>
+                  <a:lnTo>
+                    <a:pt x="2954468" y="181950"/>
+                  </a:lnTo>
+                  <a:lnTo>
+                    <a:pt x="3024813" y="185346"/>
+                  </a:lnTo>
+                  <a:lnTo>
+                    <a:pt x="3095157" y="188705"/>
+                  </a:lnTo>
+                  <a:lnTo>
+                    <a:pt x="3165502" y="192028"/>
+                  </a:lnTo>
+                  <a:lnTo>
+                    <a:pt x="3235846" y="195314"/>
+                  </a:lnTo>
+                  <a:lnTo>
+                    <a:pt x="3306191" y="198565"/>
+                  </a:lnTo>
+                  <a:lnTo>
+                    <a:pt x="3376535" y="201781"/>
+                  </a:lnTo>
+                  <a:lnTo>
+                    <a:pt x="3446880" y="204962"/>
+                  </a:lnTo>
+                  <a:lnTo>
+                    <a:pt x="3517224" y="208108"/>
+                  </a:lnTo>
+                  <a:lnTo>
+                    <a:pt x="3587569" y="211220"/>
+                  </a:lnTo>
+                  <a:lnTo>
+                    <a:pt x="3657913" y="214298"/>
+                  </a:lnTo>
+                  <a:lnTo>
+                    <a:pt x="3728257" y="217343"/>
+                  </a:lnTo>
+                  <a:lnTo>
+                    <a:pt x="3798602" y="220354"/>
+                  </a:lnTo>
+                  <a:lnTo>
+                    <a:pt x="3868946" y="223334"/>
+                  </a:lnTo>
+                  <a:lnTo>
+                    <a:pt x="3939291" y="226280"/>
+                  </a:lnTo>
+                  <a:lnTo>
+                    <a:pt x="4009635" y="229195"/>
+                  </a:lnTo>
+                  <a:lnTo>
+                    <a:pt x="4079980" y="232078"/>
+                  </a:lnTo>
+                  <a:lnTo>
+                    <a:pt x="4150324" y="234930"/>
+                  </a:lnTo>
+                  <a:lnTo>
+                    <a:pt x="4220669" y="237751"/>
+                  </a:lnTo>
+                  <a:lnTo>
+                    <a:pt x="4291013" y="240541"/>
+                  </a:lnTo>
+                  <a:lnTo>
+                    <a:pt x="4361358" y="243301"/>
+                  </a:lnTo>
+                  <a:lnTo>
+                    <a:pt x="4431702" y="246030"/>
+                  </a:lnTo>
+                  <a:lnTo>
+                    <a:pt x="4502047" y="248731"/>
+                  </a:lnTo>
+                  <a:lnTo>
+                    <a:pt x="4572391" y="251402"/>
+                  </a:lnTo>
+                  <a:lnTo>
+                    <a:pt x="4642736" y="254044"/>
+                  </a:lnTo>
+                  <a:lnTo>
+                    <a:pt x="4713080" y="256657"/>
+                  </a:lnTo>
+                  <a:lnTo>
+                    <a:pt x="4783425" y="259242"/>
+                  </a:lnTo>
+                  <a:lnTo>
+                    <a:pt x="4853769" y="261799"/>
+                  </a:lnTo>
+                  <a:lnTo>
+                    <a:pt x="4924114" y="264328"/>
+                  </a:lnTo>
+                  <a:lnTo>
+                    <a:pt x="4994458" y="266829"/>
+                  </a:lnTo>
+                  <a:lnTo>
+                    <a:pt x="5064803" y="269304"/>
+                  </a:lnTo>
+                  <a:lnTo>
+                    <a:pt x="5135147" y="271751"/>
+                  </a:lnTo>
+                  <a:lnTo>
+                    <a:pt x="5205492" y="274172"/>
+                  </a:lnTo>
+                  <a:lnTo>
+                    <a:pt x="5275836" y="276567"/>
+                  </a:lnTo>
+                  <a:lnTo>
+                    <a:pt x="5346181" y="278936"/>
+                  </a:lnTo>
+                  <a:lnTo>
+                    <a:pt x="5416525" y="281279"/>
+                  </a:lnTo>
+                  <a:lnTo>
+                    <a:pt x="5486870" y="283596"/>
+                  </a:lnTo>
+                  <a:lnTo>
+                    <a:pt x="5557214" y="285888"/>
+                  </a:lnTo>
+                  <a:lnTo>
+                    <a:pt x="5627559" y="288156"/>
+                  </a:lnTo>
+                  <a:lnTo>
+                    <a:pt x="5697903" y="290399"/>
+                  </a:lnTo>
+                  <a:lnTo>
+                    <a:pt x="5768248" y="292617"/>
+                  </a:lnTo>
+                  <a:lnTo>
+                    <a:pt x="5838592" y="294812"/>
+                  </a:lnTo>
+                  <a:lnTo>
+                    <a:pt x="5908937" y="296982"/>
+                  </a:lnTo>
+                  <a:lnTo>
+                    <a:pt x="5979281" y="299129"/>
+                  </a:lnTo>
+                  <a:lnTo>
+                    <a:pt x="6049626" y="301253"/>
+                  </a:lnTo>
+                  <a:lnTo>
+                    <a:pt x="6119970" y="303354"/>
+                  </a:lnTo>
+                  <a:lnTo>
+                    <a:pt x="6190315" y="305432"/>
+                  </a:lnTo>
+                  <a:lnTo>
+                    <a:pt x="6260659" y="307487"/>
+                  </a:lnTo>
+                  <a:lnTo>
+                    <a:pt x="6331004" y="309520"/>
+                  </a:lnTo>
+                  <a:lnTo>
+                    <a:pt x="6401348" y="311531"/>
+                  </a:lnTo>
+                  <a:lnTo>
+                    <a:pt x="6471693" y="313520"/>
+                  </a:lnTo>
+                  <a:lnTo>
+                    <a:pt x="6542037" y="315487"/>
+                  </a:lnTo>
+                  <a:lnTo>
+                    <a:pt x="6612382" y="317434"/>
+                  </a:lnTo>
+                  <a:lnTo>
+                    <a:pt x="6682726" y="319359"/>
+                  </a:lnTo>
+                  <a:lnTo>
+                    <a:pt x="6753071" y="321263"/>
+                  </a:lnTo>
+                  <a:lnTo>
+                    <a:pt x="6823415" y="323146"/>
+                  </a:lnTo>
+                  <a:lnTo>
+                    <a:pt x="6893760" y="325009"/>
+                  </a:lnTo>
+                  <a:lnTo>
+                    <a:pt x="6964104" y="326852"/>
+                  </a:lnTo>
+                </a:path>
+              </a:pathLst>
+            </a:custGeom>
+            <a:ln w="27101" cap="flat">
+              <a:solidFill>
+                <a:srgbClr val="FF8C00">
+                  <a:alpha val="100000"/>
+                </a:srgbClr>
+              </a:solidFill>
+              <a:prstDash val="solid"/>
+              <a:round/>
+            </a:ln>
+          </p:spPr>
+          <p:txBody>
+            <a:bodyPr/>
+            <a:lstStyle/>
+            <a:p/>
+          </p:txBody>
+        </p:sp>
+        <p:sp>
+          <p:nvSpPr>
+            <p:cNvPr id="71" name="pl71"/>
+            <p:cNvSpPr/>
+            <p:nvPr/>
+          </p:nvSpPr>
+          <p:spPr>
+            <a:xfrm>
+              <a:off x="887106" y="5294352"/>
+              <a:ext cx="7660515" cy="0"/>
+            </a:xfrm>
+            <a:custGeom>
+              <a:avLst/>
+              <a:pathLst>
+                <a:path w="7660515" h="0">
+                  <a:moveTo>
+                    <a:pt x="0" y="0"/>
+                  </a:moveTo>
+                  <a:lnTo>
+                    <a:pt x="7660515" y="0"/>
+                  </a:lnTo>
+                  <a:lnTo>
+                    <a:pt x="7660515" y="0"/>
+                  </a:lnTo>
+                </a:path>
+              </a:pathLst>
+            </a:custGeom>
+            <a:ln w="13550" cap="flat">
+              <a:solidFill>
+                <a:srgbClr val="7F7F7F">
+                  <a:alpha val="100000"/>
+                </a:srgbClr>
+              </a:solidFill>
+              <a:prstDash val="dash"/>
+              <a:round/>
+            </a:ln>
+          </p:spPr>
+          <p:txBody>
+            <a:bodyPr/>
+            <a:lstStyle/>
+            <a:p/>
+          </p:txBody>
+        </p:sp>
+        <p:sp>
+          <p:nvSpPr>
+            <p:cNvPr id="72" name="pl72"/>
+            <p:cNvSpPr/>
+            <p:nvPr/>
+          </p:nvSpPr>
+          <p:spPr>
+            <a:xfrm>
+              <a:off x="4472829" y="4336484"/>
+              <a:ext cx="0" cy="1317069"/>
+            </a:xfrm>
+            <a:custGeom>
+              <a:avLst/>
+              <a:pathLst>
+                <a:path w="0" h="1317069">
+                  <a:moveTo>
+                    <a:pt x="0" y="1317069"/>
+                  </a:moveTo>
+                  <a:lnTo>
+                    <a:pt x="0" y="0"/>
+                  </a:lnTo>
+                  <a:lnTo>
+                    <a:pt x="0" y="0"/>
+                  </a:lnTo>
+                </a:path>
+              </a:pathLst>
+            </a:custGeom>
+            <a:ln w="13550" cap="flat">
+              <a:solidFill>
+                <a:srgbClr val="666666">
+                  <a:alpha val="100000"/>
+                </a:srgbClr>
+              </a:solidFill>
+              <a:prstDash val="dot"/>
+              <a:round/>
+            </a:ln>
+          </p:spPr>
+          <p:txBody>
+            <a:bodyPr/>
+            <a:lstStyle/>
+            <a:p/>
+          </p:txBody>
+        </p:sp>
+        <p:sp>
+          <p:nvSpPr>
+            <p:cNvPr id="73" name="tx73"/>
+            <p:cNvSpPr/>
+            <p:nvPr/>
+          </p:nvSpPr>
+          <p:spPr>
+            <a:xfrm>
+              <a:off x="762297" y="5553636"/>
+              <a:ext cx="62179" cy="80101"/>
+            </a:xfrm>
+            <a:prstGeom prst="rect">
+              <a:avLst/>
+            </a:prstGeom>
+            <a:noFill/>
+          </p:spPr>
+          <p:txBody>
+            <a:bodyPr lIns="0" rIns="0" tIns="0" bIns="0" anchorCtr="1" anchor="ctr" wrap="none"/>
+            <a:lstStyle/>
+            <a:p>
+              <a:pPr algn="l" marL="0" marR="0" indent="0">
+                <a:lnSpc>
+                  <a:spcPts val="880"/>
+                </a:lnSpc>
+                <a:spcBef>
+                  <a:spcPts val="0"/>
+                </a:spcBef>
+                <a:spcAft>
+                  <a:spcPts val="0"/>
+                </a:spcAft>
+              </a:pPr>
+              <a:r>
+                <a:rPr sz="880">
+                  <a:solidFill>
+                    <a:srgbClr val="4D4D4D">
+                      <a:alpha val="100000"/>
+                    </a:srgbClr>
+                  </a:solidFill>
+                  <a:latin typeface="Helvetica"/>
+                  <a:cs typeface="Helvetica"/>
+                </a:rPr>
+                <a:t>0</a:t>
+              </a:r>
+            </a:p>
+          </p:txBody>
+        </p:sp>
+        <p:sp>
+          <p:nvSpPr>
+            <p:cNvPr id="74" name="tx74"/>
+            <p:cNvSpPr/>
+            <p:nvPr/>
+          </p:nvSpPr>
+          <p:spPr>
+            <a:xfrm>
+              <a:off x="762297" y="5254302"/>
+              <a:ext cx="62179" cy="80101"/>
+            </a:xfrm>
+            <a:prstGeom prst="rect">
+              <a:avLst/>
+            </a:prstGeom>
+            <a:noFill/>
+          </p:spPr>
+          <p:txBody>
+            <a:bodyPr lIns="0" rIns="0" tIns="0" bIns="0" anchorCtr="1" anchor="ctr" wrap="none"/>
+            <a:lstStyle/>
+            <a:p>
+              <a:pPr algn="l" marL="0" marR="0" indent="0">
+                <a:lnSpc>
+                  <a:spcPts val="880"/>
+                </a:lnSpc>
+                <a:spcBef>
+                  <a:spcPts val="0"/>
+                </a:spcBef>
+                <a:spcAft>
+                  <a:spcPts val="0"/>
+                </a:spcAft>
+              </a:pPr>
+              <a:r>
+                <a:rPr sz="880">
+                  <a:solidFill>
+                    <a:srgbClr val="4D4D4D">
+                      <a:alpha val="100000"/>
+                    </a:srgbClr>
+                  </a:solidFill>
+                  <a:latin typeface="Helvetica"/>
+                  <a:cs typeface="Helvetica"/>
+                </a:rPr>
+                <a:t>1</a:t>
+              </a:r>
+            </a:p>
+          </p:txBody>
+        </p:sp>
+        <p:sp>
+          <p:nvSpPr>
+            <p:cNvPr id="75" name="tx75"/>
+            <p:cNvSpPr/>
+            <p:nvPr/>
+          </p:nvSpPr>
+          <p:spPr>
+            <a:xfrm>
+              <a:off x="762297" y="4954968"/>
+              <a:ext cx="62179" cy="80101"/>
+            </a:xfrm>
+            <a:prstGeom prst="rect">
+              <a:avLst/>
+            </a:prstGeom>
+            <a:noFill/>
+          </p:spPr>
+          <p:txBody>
+            <a:bodyPr lIns="0" rIns="0" tIns="0" bIns="0" anchorCtr="1" anchor="ctr" wrap="none"/>
+            <a:lstStyle/>
+            <a:p>
+              <a:pPr algn="l" marL="0" marR="0" indent="0">
+                <a:lnSpc>
+                  <a:spcPts val="880"/>
+                </a:lnSpc>
+                <a:spcBef>
+                  <a:spcPts val="0"/>
+                </a:spcBef>
+                <a:spcAft>
+                  <a:spcPts val="0"/>
+                </a:spcAft>
+              </a:pPr>
+              <a:r>
+                <a:rPr sz="880">
+                  <a:solidFill>
+                    <a:srgbClr val="4D4D4D">
+                      <a:alpha val="100000"/>
+                    </a:srgbClr>
+                  </a:solidFill>
+                  <a:latin typeface="Helvetica"/>
+                  <a:cs typeface="Helvetica"/>
+                </a:rPr>
+                <a:t>2</a:t>
+              </a:r>
+            </a:p>
+          </p:txBody>
+        </p:sp>
+        <p:sp>
+          <p:nvSpPr>
+            <p:cNvPr id="76" name="tx76"/>
+            <p:cNvSpPr/>
+            <p:nvPr/>
+          </p:nvSpPr>
+          <p:spPr>
+            <a:xfrm>
+              <a:off x="762297" y="4655634"/>
+              <a:ext cx="62179" cy="80101"/>
+            </a:xfrm>
+            <a:prstGeom prst="rect">
+              <a:avLst/>
+            </a:prstGeom>
+            <a:noFill/>
+          </p:spPr>
+          <p:txBody>
+            <a:bodyPr lIns="0" rIns="0" tIns="0" bIns="0" anchorCtr="1" anchor="ctr" wrap="none"/>
+            <a:lstStyle/>
+            <a:p>
+              <a:pPr algn="l" marL="0" marR="0" indent="0">
+                <a:lnSpc>
+                  <a:spcPts val="880"/>
+                </a:lnSpc>
+                <a:spcBef>
+                  <a:spcPts val="0"/>
+                </a:spcBef>
+                <a:spcAft>
+                  <a:spcPts val="0"/>
+                </a:spcAft>
+              </a:pPr>
+              <a:r>
+                <a:rPr sz="880">
+                  <a:solidFill>
+                    <a:srgbClr val="4D4D4D">
+                      <a:alpha val="100000"/>
+                    </a:srgbClr>
+                  </a:solidFill>
+                  <a:latin typeface="Helvetica"/>
+                  <a:cs typeface="Helvetica"/>
+                </a:rPr>
+                <a:t>3</a:t>
+              </a:r>
+            </a:p>
+          </p:txBody>
+        </p:sp>
+        <p:sp>
+          <p:nvSpPr>
+            <p:cNvPr id="77" name="tx77"/>
+            <p:cNvSpPr/>
+            <p:nvPr/>
+          </p:nvSpPr>
+          <p:spPr>
+            <a:xfrm>
+              <a:off x="762297" y="4356300"/>
+              <a:ext cx="62179" cy="80101"/>
+            </a:xfrm>
+            <a:prstGeom prst="rect">
+              <a:avLst/>
+            </a:prstGeom>
+            <a:noFill/>
+          </p:spPr>
+          <p:txBody>
+            <a:bodyPr lIns="0" rIns="0" tIns="0" bIns="0" anchorCtr="1" anchor="ctr" wrap="none"/>
+            <a:lstStyle/>
+            <a:p>
+              <a:pPr algn="l" marL="0" marR="0" indent="0">
+                <a:lnSpc>
+                  <a:spcPts val="880"/>
+                </a:lnSpc>
+                <a:spcBef>
+                  <a:spcPts val="0"/>
+                </a:spcBef>
+                <a:spcAft>
+                  <a:spcPts val="0"/>
+                </a:spcAft>
+              </a:pPr>
+              <a:r>
+                <a:rPr sz="880">
+                  <a:solidFill>
+                    <a:srgbClr val="4D4D4D">
+                      <a:alpha val="100000"/>
+                    </a:srgbClr>
+                  </a:solidFill>
+                  <a:latin typeface="Helvetica"/>
+                  <a:cs typeface="Helvetica"/>
+                </a:rPr>
+                <a:t>4</a:t>
+              </a:r>
+            </a:p>
+          </p:txBody>
+        </p:sp>
+        <p:sp>
+          <p:nvSpPr>
+            <p:cNvPr id="78" name="tx78"/>
+            <p:cNvSpPr/>
+            <p:nvPr/>
+          </p:nvSpPr>
+          <p:spPr>
+            <a:xfrm>
+              <a:off x="1306098" y="5716183"/>
+              <a:ext cx="161574" cy="80101"/>
+            </a:xfrm>
+            <a:prstGeom prst="rect">
+              <a:avLst/>
+            </a:prstGeom>
+            <a:noFill/>
+          </p:spPr>
+          <p:txBody>
+            <a:bodyPr lIns="0" rIns="0" tIns="0" bIns="0" anchorCtr="1" anchor="ctr" wrap="none"/>
+            <a:lstStyle/>
+            <a:p>
+              <a:pPr algn="l" marL="0" marR="0" indent="0">
+                <a:lnSpc>
+                  <a:spcPts val="880"/>
+                </a:lnSpc>
+                <a:spcBef>
+                  <a:spcPts val="0"/>
+                </a:spcBef>
+                <a:spcAft>
+                  <a:spcPts val="0"/>
+                </a:spcAft>
+              </a:pPr>
+              <a:r>
+                <a:rPr sz="880">
+                  <a:solidFill>
+                    <a:srgbClr val="4D4D4D">
+                      <a:alpha val="100000"/>
+                    </a:srgbClr>
+                  </a:solidFill>
+                  <a:latin typeface="Helvetica"/>
+                  <a:cs typeface="Helvetica"/>
+                </a:rPr>
+                <a:t>-40</a:t>
+              </a:r>
+            </a:p>
+          </p:txBody>
+        </p:sp>
+        <p:sp>
+          <p:nvSpPr>
+            <p:cNvPr id="79" name="tx79"/>
+            <p:cNvSpPr/>
+            <p:nvPr/>
+          </p:nvSpPr>
+          <p:spPr>
+            <a:xfrm>
+              <a:off x="2113264" y="5716183"/>
+              <a:ext cx="161574" cy="80101"/>
+            </a:xfrm>
+            <a:prstGeom prst="rect">
+              <a:avLst/>
+            </a:prstGeom>
+            <a:noFill/>
+          </p:spPr>
+          <p:txBody>
+            <a:bodyPr lIns="0" rIns="0" tIns="0" bIns="0" anchorCtr="1" anchor="ctr" wrap="none"/>
+            <a:lstStyle/>
+            <a:p>
+              <a:pPr algn="l" marL="0" marR="0" indent="0">
+                <a:lnSpc>
+                  <a:spcPts val="880"/>
+                </a:lnSpc>
+                <a:spcBef>
+                  <a:spcPts val="0"/>
+                </a:spcBef>
+                <a:spcAft>
+                  <a:spcPts val="0"/>
+                </a:spcAft>
+              </a:pPr>
+              <a:r>
+                <a:rPr sz="880">
+                  <a:solidFill>
+                    <a:srgbClr val="4D4D4D">
+                      <a:alpha val="100000"/>
+                    </a:srgbClr>
+                  </a:solidFill>
+                  <a:latin typeface="Helvetica"/>
+                  <a:cs typeface="Helvetica"/>
+                </a:rPr>
+                <a:t>-30</a:t>
+              </a:r>
+            </a:p>
+          </p:txBody>
+        </p:sp>
+        <p:sp>
+          <p:nvSpPr>
+            <p:cNvPr id="80" name="tx80"/>
+            <p:cNvSpPr/>
+            <p:nvPr/>
+          </p:nvSpPr>
+          <p:spPr>
+            <a:xfrm>
+              <a:off x="2920429" y="5716183"/>
+              <a:ext cx="161574" cy="80101"/>
+            </a:xfrm>
+            <a:prstGeom prst="rect">
+              <a:avLst/>
+            </a:prstGeom>
+            <a:noFill/>
+          </p:spPr>
+          <p:txBody>
+            <a:bodyPr lIns="0" rIns="0" tIns="0" bIns="0" anchorCtr="1" anchor="ctr" wrap="none"/>
+            <a:lstStyle/>
+            <a:p>
+              <a:pPr algn="l" marL="0" marR="0" indent="0">
+                <a:lnSpc>
+                  <a:spcPts val="880"/>
+                </a:lnSpc>
+                <a:spcBef>
+                  <a:spcPts val="0"/>
+                </a:spcBef>
+                <a:spcAft>
+                  <a:spcPts val="0"/>
+                </a:spcAft>
+              </a:pPr>
+              <a:r>
+                <a:rPr sz="880">
+                  <a:solidFill>
+                    <a:srgbClr val="4D4D4D">
+                      <a:alpha val="100000"/>
+                    </a:srgbClr>
+                  </a:solidFill>
+                  <a:latin typeface="Helvetica"/>
+                  <a:cs typeface="Helvetica"/>
+                </a:rPr>
+                <a:t>-20</a:t>
+              </a:r>
+            </a:p>
+          </p:txBody>
+        </p:sp>
+        <p:sp>
+          <p:nvSpPr>
+            <p:cNvPr id="81" name="tx81"/>
+            <p:cNvSpPr/>
+            <p:nvPr/>
+          </p:nvSpPr>
+          <p:spPr>
+            <a:xfrm>
+              <a:off x="3727595" y="5716183"/>
+              <a:ext cx="161574" cy="80101"/>
+            </a:xfrm>
+            <a:prstGeom prst="rect">
+              <a:avLst/>
+            </a:prstGeom>
+            <a:noFill/>
+          </p:spPr>
+          <p:txBody>
+            <a:bodyPr lIns="0" rIns="0" tIns="0" bIns="0" anchorCtr="1" anchor="ctr" wrap="none"/>
+            <a:lstStyle/>
+            <a:p>
+              <a:pPr algn="l" marL="0" marR="0" indent="0">
+                <a:lnSpc>
+                  <a:spcPts val="880"/>
+                </a:lnSpc>
+                <a:spcBef>
+                  <a:spcPts val="0"/>
+                </a:spcBef>
+                <a:spcAft>
+                  <a:spcPts val="0"/>
+                </a:spcAft>
+              </a:pPr>
+              <a:r>
+                <a:rPr sz="880">
+                  <a:solidFill>
+                    <a:srgbClr val="4D4D4D">
+                      <a:alpha val="100000"/>
+                    </a:srgbClr>
+                  </a:solidFill>
+                  <a:latin typeface="Helvetica"/>
+                  <a:cs typeface="Helvetica"/>
+                </a:rPr>
+                <a:t>-10</a:t>
+              </a:r>
+            </a:p>
+          </p:txBody>
+        </p:sp>
+        <p:sp>
+          <p:nvSpPr>
+            <p:cNvPr id="82" name="tx82"/>
+            <p:cNvSpPr/>
+            <p:nvPr/>
+          </p:nvSpPr>
+          <p:spPr>
+            <a:xfrm>
+              <a:off x="4584458" y="5716183"/>
+              <a:ext cx="62179" cy="80101"/>
+            </a:xfrm>
+            <a:prstGeom prst="rect">
+              <a:avLst/>
+            </a:prstGeom>
+            <a:noFill/>
+          </p:spPr>
+          <p:txBody>
+            <a:bodyPr lIns="0" rIns="0" tIns="0" bIns="0" anchorCtr="1" anchor="ctr" wrap="none"/>
+            <a:lstStyle/>
+            <a:p>
+              <a:pPr algn="l" marL="0" marR="0" indent="0">
+                <a:lnSpc>
+                  <a:spcPts val="880"/>
+                </a:lnSpc>
+                <a:spcBef>
+                  <a:spcPts val="0"/>
+                </a:spcBef>
+                <a:spcAft>
+                  <a:spcPts val="0"/>
+                </a:spcAft>
+              </a:pPr>
+              <a:r>
+                <a:rPr sz="880">
+                  <a:solidFill>
+                    <a:srgbClr val="4D4D4D">
+                      <a:alpha val="100000"/>
+                    </a:srgbClr>
+                  </a:solidFill>
+                  <a:latin typeface="Helvetica"/>
+                  <a:cs typeface="Helvetica"/>
+                </a:rPr>
+                <a:t>0</a:t>
+              </a:r>
+            </a:p>
+          </p:txBody>
+        </p:sp>
+        <p:sp>
+          <p:nvSpPr>
+            <p:cNvPr id="83" name="tx83"/>
+            <p:cNvSpPr/>
+            <p:nvPr/>
+          </p:nvSpPr>
+          <p:spPr>
+            <a:xfrm>
+              <a:off x="5360534" y="5716183"/>
+              <a:ext cx="124358" cy="80101"/>
+            </a:xfrm>
+            <a:prstGeom prst="rect">
+              <a:avLst/>
+            </a:prstGeom>
+            <a:noFill/>
+          </p:spPr>
+          <p:txBody>
+            <a:bodyPr lIns="0" rIns="0" tIns="0" bIns="0" anchorCtr="1" anchor="ctr" wrap="none"/>
+            <a:lstStyle/>
+            <a:p>
+              <a:pPr algn="l" marL="0" marR="0" indent="0">
+                <a:lnSpc>
+                  <a:spcPts val="880"/>
+                </a:lnSpc>
+                <a:spcBef>
+                  <a:spcPts val="0"/>
+                </a:spcBef>
+                <a:spcAft>
+                  <a:spcPts val="0"/>
+                </a:spcAft>
+              </a:pPr>
+              <a:r>
+                <a:rPr sz="880">
+                  <a:solidFill>
+                    <a:srgbClr val="4D4D4D">
+                      <a:alpha val="100000"/>
+                    </a:srgbClr>
+                  </a:solidFill>
+                  <a:latin typeface="Helvetica"/>
+                  <a:cs typeface="Helvetica"/>
+                </a:rPr>
+                <a:t>10</a:t>
+              </a:r>
+            </a:p>
+          </p:txBody>
+        </p:sp>
+        <p:sp>
+          <p:nvSpPr>
+            <p:cNvPr id="84" name="tx84"/>
+            <p:cNvSpPr/>
+            <p:nvPr/>
+          </p:nvSpPr>
+          <p:spPr>
+            <a:xfrm>
+              <a:off x="6167699" y="5716183"/>
+              <a:ext cx="124358" cy="80101"/>
+            </a:xfrm>
+            <a:prstGeom prst="rect">
+              <a:avLst/>
+            </a:prstGeom>
+            <a:noFill/>
+          </p:spPr>
+          <p:txBody>
+            <a:bodyPr lIns="0" rIns="0" tIns="0" bIns="0" anchorCtr="1" anchor="ctr" wrap="none"/>
+            <a:lstStyle/>
+            <a:p>
+              <a:pPr algn="l" marL="0" marR="0" indent="0">
+                <a:lnSpc>
+                  <a:spcPts val="880"/>
+                </a:lnSpc>
+                <a:spcBef>
+                  <a:spcPts val="0"/>
+                </a:spcBef>
+                <a:spcAft>
+                  <a:spcPts val="0"/>
+                </a:spcAft>
+              </a:pPr>
+              <a:r>
+                <a:rPr sz="880">
+                  <a:solidFill>
+                    <a:srgbClr val="4D4D4D">
+                      <a:alpha val="100000"/>
+                    </a:srgbClr>
+                  </a:solidFill>
+                  <a:latin typeface="Helvetica"/>
+                  <a:cs typeface="Helvetica"/>
+                </a:rPr>
+                <a:t>20</a:t>
+              </a:r>
+            </a:p>
+          </p:txBody>
+        </p:sp>
+        <p:sp>
+          <p:nvSpPr>
+            <p:cNvPr id="85" name="tx85"/>
+            <p:cNvSpPr/>
+            <p:nvPr/>
+          </p:nvSpPr>
+          <p:spPr>
+            <a:xfrm>
+              <a:off x="6974865" y="5716183"/>
+              <a:ext cx="124358" cy="80101"/>
+            </a:xfrm>
+            <a:prstGeom prst="rect">
+              <a:avLst/>
+            </a:prstGeom>
+            <a:noFill/>
+          </p:spPr>
+          <p:txBody>
+            <a:bodyPr lIns="0" rIns="0" tIns="0" bIns="0" anchorCtr="1" anchor="ctr" wrap="none"/>
+            <a:lstStyle/>
+            <a:p>
+              <a:pPr algn="l" marL="0" marR="0" indent="0">
+                <a:lnSpc>
+                  <a:spcPts val="880"/>
+                </a:lnSpc>
+                <a:spcBef>
+                  <a:spcPts val="0"/>
+                </a:spcBef>
+                <a:spcAft>
+                  <a:spcPts val="0"/>
+                </a:spcAft>
+              </a:pPr>
+              <a:r>
+                <a:rPr sz="880">
+                  <a:solidFill>
+                    <a:srgbClr val="4D4D4D">
+                      <a:alpha val="100000"/>
+                    </a:srgbClr>
+                  </a:solidFill>
+                  <a:latin typeface="Helvetica"/>
+                  <a:cs typeface="Helvetica"/>
+                </a:rPr>
+                <a:t>30</a:t>
+              </a:r>
+            </a:p>
+          </p:txBody>
+        </p:sp>
+        <p:sp>
+          <p:nvSpPr>
+            <p:cNvPr id="86" name="tx86"/>
+            <p:cNvSpPr/>
+            <p:nvPr/>
+          </p:nvSpPr>
+          <p:spPr>
+            <a:xfrm>
+              <a:off x="7782030" y="5716183"/>
+              <a:ext cx="124358" cy="80101"/>
+            </a:xfrm>
+            <a:prstGeom prst="rect">
+              <a:avLst/>
+            </a:prstGeom>
+            <a:noFill/>
+          </p:spPr>
+          <p:txBody>
+            <a:bodyPr lIns="0" rIns="0" tIns="0" bIns="0" anchorCtr="1" anchor="ctr" wrap="none"/>
+            <a:lstStyle/>
+            <a:p>
+              <a:pPr algn="l" marL="0" marR="0" indent="0">
+                <a:lnSpc>
+                  <a:spcPts val="880"/>
+                </a:lnSpc>
+                <a:spcBef>
+                  <a:spcPts val="0"/>
+                </a:spcBef>
+                <a:spcAft>
+                  <a:spcPts val="0"/>
+                </a:spcAft>
+              </a:pPr>
+              <a:r>
+                <a:rPr sz="880">
+                  <a:solidFill>
+                    <a:srgbClr val="4D4D4D">
+                      <a:alpha val="100000"/>
+                    </a:srgbClr>
+                  </a:solidFill>
+                  <a:latin typeface="Helvetica"/>
+                  <a:cs typeface="Helvetica"/>
+                </a:rPr>
+                <a:t>40</a:t>
+              </a:r>
+            </a:p>
+          </p:txBody>
+        </p:sp>
+        <p:sp>
+          <p:nvSpPr>
+            <p:cNvPr id="87" name="tx87"/>
+            <p:cNvSpPr/>
+            <p:nvPr/>
+          </p:nvSpPr>
+          <p:spPr>
+            <a:xfrm>
+              <a:off x="2928340" y="5855859"/>
+              <a:ext cx="3578047" cy="100218"/>
+            </a:xfrm>
+            <a:prstGeom prst="rect">
+              <a:avLst/>
+            </a:prstGeom>
+            <a:noFill/>
+          </p:spPr>
+          <p:txBody>
+            <a:bodyPr lIns="0" rIns="0" tIns="0" bIns="0" anchorCtr="1" anchor="ctr" wrap="none"/>
+            <a:lstStyle/>
+            <a:p>
+              <a:pPr algn="l" marL="0" marR="0" indent="0">
+                <a:lnSpc>
+                  <a:spcPts val="1100"/>
+                </a:lnSpc>
+                <a:spcBef>
+                  <a:spcPts val="0"/>
+                </a:spcBef>
+                <a:spcAft>
+                  <a:spcPts val="0"/>
+                </a:spcAft>
+              </a:pPr>
+              <a:r>
+                <a:rPr sz="1100">
+                  <a:solidFill>
+                    <a:srgbClr val="000000">
+                      <a:alpha val="100000"/>
+                    </a:srgbClr>
+                  </a:solidFill>
+                  <a:latin typeface="Helvetica"/>
+                  <a:cs typeface="Helvetica"/>
+                </a:rPr>
+                <a:t>eGFR difference (%): 100 × (CKD-EPI Cr-Cys − CG) / CG</a:t>
+              </a:r>
+            </a:p>
+          </p:txBody>
+        </p:sp>
+        <p:sp>
+          <p:nvSpPr>
+            <p:cNvPr id="88" name="tx88"/>
+            <p:cNvSpPr/>
+            <p:nvPr/>
+          </p:nvSpPr>
+          <p:spPr>
+            <a:xfrm rot="-5400000">
+              <a:off x="138035" y="4944909"/>
+              <a:ext cx="1016904" cy="100218"/>
+            </a:xfrm>
+            <a:prstGeom prst="rect">
+              <a:avLst/>
+            </a:prstGeom>
+            <a:noFill/>
+          </p:spPr>
+          <p:txBody>
+            <a:bodyPr lIns="0" rIns="0" tIns="0" bIns="0" anchorCtr="1" anchor="ctr" wrap="none"/>
+            <a:lstStyle/>
+            <a:p>
+              <a:pPr algn="l" marL="0" marR="0" indent="0">
+                <a:lnSpc>
+                  <a:spcPts val="1100"/>
+                </a:lnSpc>
+                <a:spcBef>
+                  <a:spcPts val="0"/>
+                </a:spcBef>
+                <a:spcAft>
+                  <a:spcPts val="0"/>
+                </a:spcAft>
+              </a:pPr>
+              <a:r>
+                <a:rPr sz="1100">
+                  <a:solidFill>
+                    <a:srgbClr val="000000">
+                      <a:alpha val="100000"/>
+                    </a:srgbClr>
+                  </a:solidFill>
+                  <a:latin typeface="Helvetica"/>
+                  <a:cs typeface="Helvetica"/>
+                </a:rPr>
+                <a:t>subHR (95% CI)</a:t>
+              </a:r>
+            </a:p>
+          </p:txBody>
+        </p:sp>
+        <p:sp>
+          <p:nvSpPr>
+            <p:cNvPr id="89" name="tx89"/>
+            <p:cNvSpPr/>
+            <p:nvPr/>
+          </p:nvSpPr>
+          <p:spPr>
+            <a:xfrm>
+              <a:off x="887106" y="4159544"/>
+              <a:ext cx="6321612" cy="82021"/>
+            </a:xfrm>
+            <a:prstGeom prst="rect">
+              <a:avLst/>
+            </a:prstGeom>
+            <a:noFill/>
+          </p:spPr>
+          <p:txBody>
+            <a:bodyPr lIns="0" rIns="0" tIns="0" bIns="0" anchorCtr="1" anchor="ctr" wrap="none"/>
+            <a:lstStyle/>
+            <a:p>
+              <a:pPr algn="l" marL="0" marR="0" indent="0">
+                <a:lnSpc>
+                  <a:spcPts val="900"/>
+                </a:lnSpc>
+                <a:spcBef>
+                  <a:spcPts val="0"/>
+                </a:spcBef>
+                <a:spcAft>
+                  <a:spcPts val="0"/>
+                </a:spcAft>
+              </a:pPr>
+              <a:r>
+                <a:rPr sz="900">
+                  <a:solidFill>
+                    <a:srgbClr val="404040">
+                      <a:alpha val="100000"/>
+                    </a:srgbClr>
+                  </a:solidFill>
+                  <a:latin typeface="Helvetica"/>
+                  <a:cs typeface="Helvetica"/>
+                </a:rPr>
+                <a:t>subHR per 10 % decline: 1.13 (0.89-1.44), p = 0.304  |  per IQR decline (Δ = 29.5 %): 1.45 (0.72-2.93)  |  IQR: [-15.6, 13.9] %</a:t>
+              </a:r>
+            </a:p>
+          </p:txBody>
+        </p:sp>
+        <p:sp>
+          <p:nvSpPr>
+            <p:cNvPr id="90" name="tx90"/>
+            <p:cNvSpPr/>
+            <p:nvPr/>
+          </p:nvSpPr>
+          <p:spPr>
+            <a:xfrm>
+              <a:off x="887106" y="3932770"/>
               <a:ext cx="3760287" cy="120152"/>
             </a:xfrm>
             <a:prstGeom prst="rect">
